--- a/unidad-01-python-moderno/semana-02-tipado-pydantic/00_pep_tipado_pydantic.pptx
+++ b/unidad-01-python-moderno/semana-02-tipado-pydantic/00_pep_tipado_pydantic.pptx
@@ -1,41 +1,136 @@
 
 <file path=ppt/presentation.xml><?xml version="1.0" encoding="utf-8"?>
-<p:presentation xmlns:p="http://schemas.openxmlformats.org/presentationml/2006/main">
+<p:presentation xmlns:a="http://schemas.openxmlformats.org/drawingml/2006/main" xmlns:r="http://schemas.openxmlformats.org/officeDocument/2006/relationships" xmlns:p="http://schemas.openxmlformats.org/presentationml/2006/main">
   <p:sldMasterIdLst>
-    <p:sldMasterId xmlns:r="http://schemas.openxmlformats.org/officeDocument/2006/relationships" id="2147483648" r:id="R8ca7cf31a3664f22"/>
+    <p:sldMasterId id="2147483648" r:id="rId1"/>
   </p:sldMasterIdLst>
   <p:notesMasterIdLst>
-    <p:notesMasterId xmlns:r="http://schemas.openxmlformats.org/officeDocument/2006/relationships" r:id="R859dd1666f504f14"/>
+    <p:notesMasterId r:id="rId18"/>
   </p:notesMasterIdLst>
   <p:sldIdLst>
-    <p:sldId xmlns:r="http://schemas.openxmlformats.org/officeDocument/2006/relationships" id="256" r:id="Ra7e450567d834828"/>
-    <p:sldId xmlns:r="http://schemas.openxmlformats.org/officeDocument/2006/relationships" id="257" r:id="Rb1b0c7928b3b4f98"/>
-    <p:sldId xmlns:r="http://schemas.openxmlformats.org/officeDocument/2006/relationships" id="258" r:id="Raf9c0d4a276c4ebb"/>
-    <p:sldId xmlns:r="http://schemas.openxmlformats.org/officeDocument/2006/relationships" id="259" r:id="Reb5a04e8bd8748ac"/>
-    <p:sldId xmlns:r="http://schemas.openxmlformats.org/officeDocument/2006/relationships" id="260" r:id="R4186a4a0aeca465f"/>
-    <p:sldId xmlns:r="http://schemas.openxmlformats.org/officeDocument/2006/relationships" id="261" r:id="Re525d645a1064a5c"/>
-    <p:sldId xmlns:r="http://schemas.openxmlformats.org/officeDocument/2006/relationships" id="262" r:id="Rf86c82c7a80249f1"/>
-    <p:sldId xmlns:r="http://schemas.openxmlformats.org/officeDocument/2006/relationships" id="263" r:id="Rc1f13bdccb904e64"/>
-    <p:sldId xmlns:r="http://schemas.openxmlformats.org/officeDocument/2006/relationships" id="264" r:id="R795a06fbba564327"/>
-    <p:sldId xmlns:r="http://schemas.openxmlformats.org/officeDocument/2006/relationships" id="265" r:id="R61818a9f67dd4e51"/>
-    <p:sldId xmlns:r="http://schemas.openxmlformats.org/officeDocument/2006/relationships" id="266" r:id="Rae7067fe70574697"/>
-    <p:sldId xmlns:r="http://schemas.openxmlformats.org/officeDocument/2006/relationships" id="267" r:id="R2e0ee65af80048ac"/>
-    <p:sldId xmlns:r="http://schemas.openxmlformats.org/officeDocument/2006/relationships" id="268" r:id="R26981316f4644f47"/>
-    <p:sldId xmlns:r="http://schemas.openxmlformats.org/officeDocument/2006/relationships" id="269" r:id="R2b0eaaf0c5704813"/>
-    <p:sldId xmlns:r="http://schemas.openxmlformats.org/officeDocument/2006/relationships" id="270" r:id="R1a31112dcbab4af7"/>
-    <p:sldId xmlns:r="http://schemas.openxmlformats.org/officeDocument/2006/relationships" id="271" r:id="R45bca5f860a243de"/>
+    <p:sldId id="256" r:id="rId2"/>
+    <p:sldId id="257" r:id="rId3"/>
+    <p:sldId id="258" r:id="rId4"/>
+    <p:sldId id="259" r:id="rId5"/>
+    <p:sldId id="260" r:id="rId6"/>
+    <p:sldId id="261" r:id="rId7"/>
+    <p:sldId id="262" r:id="rId8"/>
+    <p:sldId id="263" r:id="rId9"/>
+    <p:sldId id="264" r:id="rId10"/>
+    <p:sldId id="265" r:id="rId11"/>
+    <p:sldId id="266" r:id="rId12"/>
+    <p:sldId id="267" r:id="rId13"/>
+    <p:sldId id="268" r:id="rId14"/>
+    <p:sldId id="269" r:id="rId15"/>
+    <p:sldId id="270" r:id="rId16"/>
+    <p:sldId id="271" r:id="rId17"/>
   </p:sldIdLst>
   <p:sldSz cx="12192000" cy="6858000"/>
   <p:notesSz cx="6858000" cy="9144000"/>
+  <p:defaultTextStyle>
+    <a:defPPr>
+      <a:defRPr lang="en-MX"/>
+    </a:defPPr>
+    <a:lvl1pPr marL="0" algn="l" defTabSz="914400" rtl="0" eaLnBrk="1" latinLnBrk="0" hangingPunct="1">
+      <a:defRPr sz="1800" kern="1200">
+        <a:solidFill>
+          <a:schemeClr val="tx1"/>
+        </a:solidFill>
+        <a:latin typeface="+mn-lt"/>
+        <a:ea typeface="+mn-ea"/>
+        <a:cs typeface="+mn-cs"/>
+      </a:defRPr>
+    </a:lvl1pPr>
+    <a:lvl2pPr marL="457200" algn="l" defTabSz="914400" rtl="0" eaLnBrk="1" latinLnBrk="0" hangingPunct="1">
+      <a:defRPr sz="1800" kern="1200">
+        <a:solidFill>
+          <a:schemeClr val="tx1"/>
+        </a:solidFill>
+        <a:latin typeface="+mn-lt"/>
+        <a:ea typeface="+mn-ea"/>
+        <a:cs typeface="+mn-cs"/>
+      </a:defRPr>
+    </a:lvl2pPr>
+    <a:lvl3pPr marL="914400" algn="l" defTabSz="914400" rtl="0" eaLnBrk="1" latinLnBrk="0" hangingPunct="1">
+      <a:defRPr sz="1800" kern="1200">
+        <a:solidFill>
+          <a:schemeClr val="tx1"/>
+        </a:solidFill>
+        <a:latin typeface="+mn-lt"/>
+        <a:ea typeface="+mn-ea"/>
+        <a:cs typeface="+mn-cs"/>
+      </a:defRPr>
+    </a:lvl3pPr>
+    <a:lvl4pPr marL="1371600" algn="l" defTabSz="914400" rtl="0" eaLnBrk="1" latinLnBrk="0" hangingPunct="1">
+      <a:defRPr sz="1800" kern="1200">
+        <a:solidFill>
+          <a:schemeClr val="tx1"/>
+        </a:solidFill>
+        <a:latin typeface="+mn-lt"/>
+        <a:ea typeface="+mn-ea"/>
+        <a:cs typeface="+mn-cs"/>
+      </a:defRPr>
+    </a:lvl4pPr>
+    <a:lvl5pPr marL="1828800" algn="l" defTabSz="914400" rtl="0" eaLnBrk="1" latinLnBrk="0" hangingPunct="1">
+      <a:defRPr sz="1800" kern="1200">
+        <a:solidFill>
+          <a:schemeClr val="tx1"/>
+        </a:solidFill>
+        <a:latin typeface="+mn-lt"/>
+        <a:ea typeface="+mn-ea"/>
+        <a:cs typeface="+mn-cs"/>
+      </a:defRPr>
+    </a:lvl5pPr>
+    <a:lvl6pPr marL="2286000" algn="l" defTabSz="914400" rtl="0" eaLnBrk="1" latinLnBrk="0" hangingPunct="1">
+      <a:defRPr sz="1800" kern="1200">
+        <a:solidFill>
+          <a:schemeClr val="tx1"/>
+        </a:solidFill>
+        <a:latin typeface="+mn-lt"/>
+        <a:ea typeface="+mn-ea"/>
+        <a:cs typeface="+mn-cs"/>
+      </a:defRPr>
+    </a:lvl6pPr>
+    <a:lvl7pPr marL="2743200" algn="l" defTabSz="914400" rtl="0" eaLnBrk="1" latinLnBrk="0" hangingPunct="1">
+      <a:defRPr sz="1800" kern="1200">
+        <a:solidFill>
+          <a:schemeClr val="tx1"/>
+        </a:solidFill>
+        <a:latin typeface="+mn-lt"/>
+        <a:ea typeface="+mn-ea"/>
+        <a:cs typeface="+mn-cs"/>
+      </a:defRPr>
+    </a:lvl7pPr>
+    <a:lvl8pPr marL="3200400" algn="l" defTabSz="914400" rtl="0" eaLnBrk="1" latinLnBrk="0" hangingPunct="1">
+      <a:defRPr sz="1800" kern="1200">
+        <a:solidFill>
+          <a:schemeClr val="tx1"/>
+        </a:solidFill>
+        <a:latin typeface="+mn-lt"/>
+        <a:ea typeface="+mn-ea"/>
+        <a:cs typeface="+mn-cs"/>
+      </a:defRPr>
+    </a:lvl8pPr>
+    <a:lvl9pPr marL="3657600" algn="l" defTabSz="914400" rtl="0" eaLnBrk="1" latinLnBrk="0" hangingPunct="1">
+      <a:defRPr sz="1800" kern="1200">
+        <a:solidFill>
+          <a:schemeClr val="tx1"/>
+        </a:solidFill>
+        <a:latin typeface="+mn-lt"/>
+        <a:ea typeface="+mn-ea"/>
+        <a:cs typeface="+mn-cs"/>
+      </a:defRPr>
+    </a:lvl9pPr>
+  </p:defaultTextStyle>
 </p:presentation>
 </file>
 
 <file path=ppt/notesMasters/notesMaster1.xml><?xml version="1.0" encoding="utf-8"?>
-<p:notesMaster xmlns:p="http://schemas.openxmlformats.org/presentationml/2006/main">
+<p:notesMaster xmlns:a="http://schemas.openxmlformats.org/drawingml/2006/main" xmlns:r="http://schemas.openxmlformats.org/officeDocument/2006/relationships" xmlns:p="http://schemas.openxmlformats.org/presentationml/2006/main">
   <p:cSld>
     <p:bg>
       <p:bgRef idx="1001">
-        <a:schemeClr xmlns:a="http://schemas.openxmlformats.org/drawingml/2006/main" val="bg1"/>
+        <a:schemeClr val="bg1"/>
       </p:bgRef>
     </p:bg>
     <p:spTree>
@@ -45,380 +140,164 @@
         <p:nvPr/>
       </p:nvGrpSpPr>
       <p:grpSpPr>
-        <a:xfrm xmlns:a="http://schemas.openxmlformats.org/drawingml/2006/main"/>
+        <a:xfrm>
+          <a:off x="0" y="0"/>
+          <a:ext cx="0" cy="0"/>
+          <a:chOff x="0" y="0"/>
+          <a:chExt cx="0" cy="0"/>
+        </a:xfrm>
       </p:grpSpPr>
       <p:sp>
         <p:nvSpPr>
           <p:cNvPr id="2" name="Header Placeholder"/>
-          <p:cNvSpPr/>
+          <p:cNvSpPr>
+            <a:spLocks noGrp="1"/>
+          </p:cNvSpPr>
           <p:nvPr>
             <p:ph type="hdr" sz="quarter"/>
           </p:nvPr>
         </p:nvSpPr>
         <p:spPr>
-          <a:prstGeom xmlns:a="http://schemas.openxmlformats.org/drawingml/2006/main" prst="rect">
+          <a:prstGeom prst="rect">
             <a:avLst/>
           </a:prstGeom>
         </p:spPr>
         <p:txBody>
-          <a:bodyPr xmlns:a="http://schemas.openxmlformats.org/drawingml/2006/main"/>
-          <a:lstStyle xmlns:a="http://schemas.openxmlformats.org/drawingml/2006/main"/>
-          <a:p xmlns:a="http://schemas.openxmlformats.org/drawingml/2006/main"/>
+          <a:bodyPr/>
+          <a:lstStyle/>
+          <a:p>
+            <a:endParaRPr/>
+          </a:p>
         </p:txBody>
       </p:sp>
       <p:sp>
         <p:nvSpPr>
           <p:cNvPr id="3" name="Date Placeholder"/>
-          <p:cNvSpPr/>
+          <p:cNvSpPr>
+            <a:spLocks noGrp="1"/>
+          </p:cNvSpPr>
           <p:nvPr>
             <p:ph type="dt" sz="quarter" idx="1"/>
           </p:nvPr>
         </p:nvSpPr>
         <p:spPr>
-          <a:prstGeom xmlns:a="http://schemas.openxmlformats.org/drawingml/2006/main" prst="rect">
+          <a:prstGeom prst="rect">
             <a:avLst/>
           </a:prstGeom>
         </p:spPr>
         <p:txBody>
-          <a:bodyPr xmlns:a="http://schemas.openxmlformats.org/drawingml/2006/main"/>
-          <a:lstStyle xmlns:a="http://schemas.openxmlformats.org/drawingml/2006/main"/>
-          <a:p xmlns:a="http://schemas.openxmlformats.org/drawingml/2006/main"/>
+          <a:bodyPr/>
+          <a:lstStyle/>
+          <a:p>
+            <a:endParaRPr/>
+          </a:p>
         </p:txBody>
       </p:sp>
       <p:sp>
         <p:nvSpPr>
           <p:cNvPr id="4" name="Slide Image Placeholder"/>
-          <p:cNvSpPr/>
+          <p:cNvSpPr>
+            <a:spLocks noGrp="1" noRot="1" noChangeAspect="1"/>
+          </p:cNvSpPr>
           <p:nvPr>
             <p:ph type="sldImg" idx="2"/>
           </p:nvPr>
         </p:nvSpPr>
         <p:spPr>
-          <a:prstGeom xmlns:a="http://schemas.openxmlformats.org/drawingml/2006/main" prst="rect">
+          <a:prstGeom prst="rect">
             <a:avLst/>
           </a:prstGeom>
         </p:spPr>
         <p:txBody>
-          <a:bodyPr xmlns:a="http://schemas.openxmlformats.org/drawingml/2006/main"/>
-          <a:lstStyle xmlns:a="http://schemas.openxmlformats.org/drawingml/2006/main"/>
-          <a:p xmlns:a="http://schemas.openxmlformats.org/drawingml/2006/main"/>
+          <a:bodyPr/>
+          <a:lstStyle/>
+          <a:p>
+            <a:endParaRPr/>
+          </a:p>
         </p:txBody>
       </p:sp>
       <p:sp>
         <p:nvSpPr>
           <p:cNvPr id="5" name="Notes Placeholder"/>
-          <p:cNvSpPr/>
+          <p:cNvSpPr>
+            <a:spLocks noGrp="1"/>
+          </p:cNvSpPr>
           <p:nvPr>
             <p:ph type="body" sz="quarter" idx="3"/>
           </p:nvPr>
         </p:nvSpPr>
         <p:spPr>
-          <a:prstGeom xmlns:a="http://schemas.openxmlformats.org/drawingml/2006/main" prst="rect">
+          <a:prstGeom prst="rect">
             <a:avLst/>
           </a:prstGeom>
         </p:spPr>
         <p:txBody>
-          <a:bodyPr xmlns:a="http://schemas.openxmlformats.org/drawingml/2006/main"/>
-          <a:lstStyle xmlns:a="http://schemas.openxmlformats.org/drawingml/2006/main"/>
-          <a:p xmlns:a="http://schemas.openxmlformats.org/drawingml/2006/main"/>
+          <a:bodyPr/>
+          <a:lstStyle/>
+          <a:p>
+            <a:endParaRPr/>
+          </a:p>
         </p:txBody>
       </p:sp>
       <p:sp>
         <p:nvSpPr>
           <p:cNvPr id="6" name="Footer Placeholder"/>
-          <p:cNvSpPr/>
+          <p:cNvSpPr>
+            <a:spLocks noGrp="1"/>
+          </p:cNvSpPr>
           <p:nvPr>
             <p:ph type="ftr" sz="quarter" idx="4"/>
           </p:nvPr>
         </p:nvSpPr>
         <p:spPr>
-          <a:prstGeom xmlns:a="http://schemas.openxmlformats.org/drawingml/2006/main" prst="rect">
+          <a:prstGeom prst="rect">
             <a:avLst/>
           </a:prstGeom>
         </p:spPr>
         <p:txBody>
-          <a:bodyPr xmlns:a="http://schemas.openxmlformats.org/drawingml/2006/main"/>
-          <a:lstStyle xmlns:a="http://schemas.openxmlformats.org/drawingml/2006/main"/>
-          <a:p xmlns:a="http://schemas.openxmlformats.org/drawingml/2006/main"/>
+          <a:bodyPr/>
+          <a:lstStyle/>
+          <a:p>
+            <a:endParaRPr/>
+          </a:p>
         </p:txBody>
       </p:sp>
       <p:sp>
         <p:nvSpPr>
           <p:cNvPr id="7" name="Slide Number Placeholder"/>
-          <p:cNvSpPr/>
+          <p:cNvSpPr>
+            <a:spLocks noGrp="1"/>
+          </p:cNvSpPr>
           <p:nvPr>
             <p:ph type="sldNum" sz="quarter" idx="5"/>
           </p:nvPr>
         </p:nvSpPr>
         <p:spPr>
-          <a:prstGeom xmlns:a="http://schemas.openxmlformats.org/drawingml/2006/main" prst="rect">
+          <a:prstGeom prst="rect">
             <a:avLst/>
           </a:prstGeom>
         </p:spPr>
         <p:txBody>
-          <a:bodyPr xmlns:a="http://schemas.openxmlformats.org/drawingml/2006/main"/>
-          <a:lstStyle xmlns:a="http://schemas.openxmlformats.org/drawingml/2006/main"/>
-          <a:p xmlns:a="http://schemas.openxmlformats.org/drawingml/2006/main"/>
+          <a:bodyPr/>
+          <a:lstStyle/>
+          <a:p>
+            <a:endParaRPr/>
+          </a:p>
         </p:txBody>
       </p:sp>
     </p:spTree>
   </p:cSld>
   <p:clrMap bg1="lt1" tx1="dk1" bg2="lt2" tx2="dk2" accent1="accent1" accent2="accent2" accent3="accent3" accent4="accent4" accent5="accent5" accent6="accent6" hlink="hlink" folHlink="folHlink"/>
   <p:notesStyle>
-    <a:lvl1pPr xmlns:a="http://schemas.openxmlformats.org/drawingml/2006/main" marL="0" algn="l" defTabSz="914400" rtl="0" eaLnBrk="1" latinLnBrk="0" hangingPunct="1">
+    <a:lvl1pPr marL="0" algn="l" defTabSz="914400" rtl="0" eaLnBrk="1" latinLnBrk="0" hangingPunct="1">
       <a:defRPr sz="1200" kern="1200"/>
     </a:lvl1pPr>
   </p:notesStyle>
 </p:notesMaster>
 </file>
 
-<file path=ppt/notesMasters/theme/theme3.xml><?xml version="1.0" encoding="utf-8"?>
-<a:theme xmlns:a="http://schemas.openxmlformats.org/drawingml/2006/main" name="ChatGPT">
-  <a:themeElements>
-    <a:clrScheme name="ChatGPT">
-      <a:dk1>
-        <a:srgbClr val="000000"/>
-      </a:dk1>
-      <a:lt1>
-        <a:srgbClr val="FFFFFF"/>
-      </a:lt1>
-      <a:dk2>
-        <a:srgbClr val="0E2841"/>
-      </a:dk2>
-      <a:lt2>
-        <a:srgbClr val="E8E8E8"/>
-      </a:lt2>
-      <a:accent1>
-        <a:srgbClr val="156082"/>
-      </a:accent1>
-      <a:accent2>
-        <a:srgbClr val="E97132"/>
-      </a:accent2>
-      <a:accent3>
-        <a:srgbClr val="196B24"/>
-      </a:accent3>
-      <a:accent4>
-        <a:srgbClr val="0F9ED5"/>
-      </a:accent4>
-      <a:accent5>
-        <a:srgbClr val="A02B93"/>
-      </a:accent5>
-      <a:accent6>
-        <a:srgbClr val="4EA72E"/>
-      </a:accent6>
-      <a:hlink>
-        <a:srgbClr val="467886"/>
-      </a:hlink>
-      <a:folHlink>
-        <a:srgbClr val="96607D"/>
-      </a:folHlink>
-    </a:clrScheme>
-    <a:fontScheme name="Office">
-      <a:majorFont>
-        <a:latin typeface="Calibri Light"/>
-        <a:ea typeface="Calibri Light"/>
-        <a:cs typeface="Calibri Light"/>
-      </a:majorFont>
-      <a:minorFont>
-        <a:latin typeface="Calibri"/>
-        <a:ea typeface="Calibri"/>
-        <a:cs typeface="Calibri"/>
-      </a:minorFont>
-    </a:fontScheme>
-    <a:fmtScheme name="ChatGPT">
-      <a:fillStyleLst>
-        <a:solidFill>
-          <a:schemeClr val="phClr"/>
-        </a:solidFill>
-        <a:gradFill>
-          <a:gsLst>
-            <a:gs pos="0">
-              <a:schemeClr val="phClr">
-                <a:tint val="67000"/>
-                <a:lumMod val="110000"/>
-                <a:satMod val="105000"/>
-              </a:schemeClr>
-            </a:gs>
-            <a:gs pos="50000">
-              <a:schemeClr val="phClr">
-                <a:tint val="73000"/>
-                <a:lumMod val="105000"/>
-                <a:satMod val="103000"/>
-              </a:schemeClr>
-            </a:gs>
-            <a:gs pos="100000">
-              <a:schemeClr val="phClr">
-                <a:tint val="81000"/>
-                <a:lumMod val="105000"/>
-                <a:satMod val="109000"/>
-              </a:schemeClr>
-            </a:gs>
-          </a:gsLst>
-          <a:lin ang="5400000" scaled="0"/>
-        </a:gradFill>
-        <a:gradFill>
-          <a:gsLst>
-            <a:gs pos="0">
-              <a:schemeClr val="phClr">
-                <a:tint val="94000"/>
-                <a:lumMod val="102000"/>
-                <a:satMod val="103000"/>
-              </a:schemeClr>
-            </a:gs>
-            <a:gs pos="50000">
-              <a:schemeClr val="phClr">
-                <a:shade val="100000"/>
-                <a:lumMod val="100000"/>
-                <a:satMod val="110000"/>
-              </a:schemeClr>
-            </a:gs>
-            <a:gs pos="100000">
-              <a:schemeClr val="phClr">
-                <a:shade val="78000"/>
-                <a:lumMod val="99000"/>
-                <a:satMod val="120000"/>
-              </a:schemeClr>
-            </a:gs>
-          </a:gsLst>
-          <a:lin ang="5400000" scaled="0"/>
-        </a:gradFill>
-      </a:fillStyleLst>
-      <a:lnStyleLst>
-        <a:ln w="12700">
-          <a:solidFill>
-            <a:schemeClr val="phClr"/>
-          </a:solidFill>
-          <a:prstDash val="solid"/>
-        </a:ln>
-        <a:ln w="19050">
-          <a:solidFill>
-            <a:schemeClr val="phClr"/>
-          </a:solidFill>
-          <a:prstDash val="solid"/>
-        </a:ln>
-        <a:ln w="25400">
-          <a:solidFill>
-            <a:schemeClr val="phClr"/>
-          </a:solidFill>
-          <a:prstDash val="solid"/>
-        </a:ln>
-      </a:lnStyleLst>
-      <a:effectStyleLst>
-        <a:effectStyle>
-          <a:effectLst/>
-        </a:effectStyle>
-        <a:effectStyle>
-          <a:effectLst/>
-        </a:effectStyle>
-        <a:effectStyle>
-          <a:effectLst>
-            <a:outerShdw blurRad="57150" dist="19050" dir="5400000">
-              <a:srgbClr val="000000">
-                <a:alpha val="16000"/>
-              </a:srgbClr>
-            </a:outerShdw>
-          </a:effectLst>
-        </a:effectStyle>
-        <a:effectStyle>
-          <a:effectLst>
-            <a:outerShdw blurRad="19050" dist="9525" dir="5400000">
-              <a:srgbClr val="000000">
-                <a:alpha val="6000"/>
-              </a:srgbClr>
-            </a:outerShdw>
-          </a:effectLst>
-        </a:effectStyle>
-        <a:effectStyle>
-          <a:effectLst>
-            <a:outerShdw blurRad="28575" dist="9525" dir="5400000">
-              <a:srgbClr val="000000">
-                <a:alpha val="8000"/>
-              </a:srgbClr>
-            </a:outerShdw>
-          </a:effectLst>
-        </a:effectStyle>
-        <a:effectStyle>
-          <a:effectLst>
-            <a:outerShdw blurRad="57150" dist="19050" dir="5400000">
-              <a:srgbClr val="000000">
-                <a:alpha val="10000"/>
-              </a:srgbClr>
-            </a:outerShdw>
-          </a:effectLst>
-        </a:effectStyle>
-        <a:effectStyle>
-          <a:effectLst>
-            <a:outerShdw blurRad="114300" dist="38100" dir="5400000">
-              <a:srgbClr val="000000">
-                <a:alpha val="12000"/>
-              </a:srgbClr>
-            </a:outerShdw>
-          </a:effectLst>
-        </a:effectStyle>
-        <a:effectStyle>
-          <a:effectLst>
-            <a:outerShdw blurRad="171450" dist="57150" dir="5400000">
-              <a:srgbClr val="000000">
-                <a:alpha val="16000"/>
-              </a:srgbClr>
-            </a:outerShdw>
-          </a:effectLst>
-        </a:effectStyle>
-        <a:effectStyle>
-          <a:effectLst>
-            <a:outerShdw blurRad="266700" dist="95250" dir="5400000">
-              <a:srgbClr val="000000">
-                <a:alpha val="24000"/>
-              </a:srgbClr>
-            </a:outerShdw>
-          </a:effectLst>
-        </a:effectStyle>
-      </a:effectStyleLst>
-      <a:bgFillStyleLst>
-        <a:solidFill>
-          <a:schemeClr val="phClr"/>
-        </a:solidFill>
-        <a:solidFill>
-          <a:schemeClr val="phClr">
-            <a:tint val="95000"/>
-            <a:satMod val="170000"/>
-          </a:schemeClr>
-        </a:solidFill>
-        <a:gradFill>
-          <a:gsLst>
-            <a:gs pos="0">
-              <a:schemeClr val="phClr">
-                <a:tint val="93000"/>
-                <a:shade val="98000"/>
-                <a:lumMod val="102000"/>
-                <a:satMod val="150000"/>
-              </a:schemeClr>
-            </a:gs>
-            <a:gs pos="50000">
-              <a:schemeClr val="phClr">
-                <a:tint val="98000"/>
-                <a:shade val="90000"/>
-                <a:lumMod val="103000"/>
-                <a:satMod val="130000"/>
-              </a:schemeClr>
-            </a:gs>
-            <a:gs pos="100000">
-              <a:schemeClr val="phClr">
-                <a:shade val="63000"/>
-                <a:satMod val="120000"/>
-              </a:schemeClr>
-            </a:gs>
-          </a:gsLst>
-          <a:lin ang="5400000" scaled="0"/>
-        </a:gradFill>
-      </a:bgFillStyleLst>
-    </a:fmtScheme>
-  </a:themeElements>
-</a:theme>
-</file>
-
 <file path=ppt/notesSlides/notesSlide1.xml><?xml version="1.0" encoding="utf-8"?>
-<p:notes xmlns:p="http://schemas.openxmlformats.org/presentationml/2006/main">
+<p:notes xmlns:a="http://schemas.openxmlformats.org/drawingml/2006/main" xmlns:r="http://schemas.openxmlformats.org/officeDocument/2006/relationships" xmlns:p="http://schemas.openxmlformats.org/presentationml/2006/main">
   <p:cSld>
     <p:spTree>
       <p:nvGrpSpPr>
@@ -427,16 +306,21 @@
         <p:nvPr/>
       </p:nvGrpSpPr>
       <p:grpSpPr>
-        <a:xfrm xmlns:a="http://schemas.openxmlformats.org/drawingml/2006/main"/>
+        <a:xfrm>
+          <a:off x="0" y="0"/>
+          <a:ext cx="0" cy="0"/>
+          <a:chOff x="0" y="0"/>
+          <a:chExt cx="0" cy="0"/>
+        </a:xfrm>
       </p:grpSpPr>
       <p:sp>
         <p:nvSpPr>
           <p:cNvPr id="2" name="Slide Image Placeholder 1"/>
           <p:cNvSpPr>
-            <a:spLocks xmlns:a="http://schemas.openxmlformats.org/drawingml/2006/main" noGrp="1"/>
+            <a:spLocks noGrp="1" noRot="1" noChangeAspect="1"/>
           </p:cNvSpPr>
           <p:nvPr>
-            <p:ph type="sldImg" idx="0"/>
+            <p:ph type="sldImg"/>
           </p:nvPr>
         </p:nvSpPr>
         <p:spPr/>
@@ -445,7 +329,7 @@
         <p:nvSpPr>
           <p:cNvPr id="3" name="Notes Placeholder 2"/>
           <p:cNvSpPr>
-            <a:spLocks xmlns:a="http://schemas.openxmlformats.org/drawingml/2006/main" noGrp="1"/>
+            <a:spLocks noGrp="1"/>
           </p:cNvSpPr>
           <p:nvPr>
             <p:ph type="body" idx="1"/>
@@ -453,19 +337,19 @@
         </p:nvSpPr>
         <p:spPr/>
         <p:txBody>
-          <a:bodyPr xmlns:a="http://schemas.openxmlformats.org/drawingml/2006/main"/>
-          <a:lstStyle xmlns:a="http://schemas.openxmlformats.org/drawingml/2006/main"/>
-          <a:p xmlns:a="http://schemas.openxmlformats.org/drawingml/2006/main">
+          <a:bodyPr/>
+          <a:lstStyle/>
+          <a:p>
             <a:r>
               <a:t>https://peps.python.org/pep-0484/</a:t>
             </a:r>
           </a:p>
-          <a:p xmlns:a="http://schemas.openxmlformats.org/drawingml/2006/main">
+          <a:p>
             <a:r>
               <a:t>https://pydantic.dev/docs/validation/latest/get-started/</a:t>
             </a:r>
           </a:p>
-          <a:p xmlns:a="http://schemas.openxmlformats.org/drawingml/2006/main">
+          <a:p>
             <a:r>
               <a:t>Imagen: https://www.python.org/community/logos/</a:t>
             </a:r>
@@ -476,7 +360,7 @@
         <p:nvSpPr>
           <p:cNvPr id="4" name="Slide Number Placeholder 3"/>
           <p:cNvSpPr>
-            <a:spLocks xmlns:a="http://schemas.openxmlformats.org/drawingml/2006/main" noGrp="1"/>
+            <a:spLocks noGrp="1"/>
           </p:cNvSpPr>
           <p:nvPr>
             <p:ph type="sldNum" idx="5"/>
@@ -484,21 +368,23 @@
         </p:nvSpPr>
         <p:spPr/>
         <p:txBody>
-          <a:bodyPr xmlns:a="http://schemas.openxmlformats.org/drawingml/2006/main"/>
-          <a:lstStyle xmlns:a="http://schemas.openxmlformats.org/drawingml/2006/main"/>
-          <a:p xmlns:a="http://schemas.openxmlformats.org/drawingml/2006/main"/>
+          <a:bodyPr/>
+          <a:lstStyle/>
+          <a:p>
+            <a:endParaRPr/>
+          </a:p>
         </p:txBody>
       </p:sp>
     </p:spTree>
   </p:cSld>
   <p:clrMapOvr>
-    <a:masterClrMapping xmlns:a="http://schemas.openxmlformats.org/drawingml/2006/main"/>
+    <a:masterClrMapping/>
   </p:clrMapOvr>
 </p:notes>
 </file>
 
 <file path=ppt/notesSlides/notesSlide10.xml><?xml version="1.0" encoding="utf-8"?>
-<p:notes xmlns:p="http://schemas.openxmlformats.org/presentationml/2006/main">
+<p:notes xmlns:a="http://schemas.openxmlformats.org/drawingml/2006/main" xmlns:r="http://schemas.openxmlformats.org/officeDocument/2006/relationships" xmlns:p="http://schemas.openxmlformats.org/presentationml/2006/main">
   <p:cSld>
     <p:spTree>
       <p:nvGrpSpPr>
@@ -507,16 +393,21 @@
         <p:nvPr/>
       </p:nvGrpSpPr>
       <p:grpSpPr>
-        <a:xfrm xmlns:a="http://schemas.openxmlformats.org/drawingml/2006/main"/>
+        <a:xfrm>
+          <a:off x="0" y="0"/>
+          <a:ext cx="0" cy="0"/>
+          <a:chOff x="0" y="0"/>
+          <a:chExt cx="0" cy="0"/>
+        </a:xfrm>
       </p:grpSpPr>
       <p:sp>
         <p:nvSpPr>
           <p:cNvPr id="2" name="Slide Image Placeholder 1"/>
           <p:cNvSpPr>
-            <a:spLocks xmlns:a="http://schemas.openxmlformats.org/drawingml/2006/main" noGrp="1"/>
+            <a:spLocks noGrp="1" noRot="1" noChangeAspect="1"/>
           </p:cNvSpPr>
           <p:nvPr>
-            <p:ph type="sldImg" idx="0"/>
+            <p:ph type="sldImg"/>
           </p:nvPr>
         </p:nvSpPr>
         <p:spPr/>
@@ -525,7 +416,7 @@
         <p:nvSpPr>
           <p:cNvPr id="3" name="Notes Placeholder 2"/>
           <p:cNvSpPr>
-            <a:spLocks xmlns:a="http://schemas.openxmlformats.org/drawingml/2006/main" noGrp="1"/>
+            <a:spLocks noGrp="1"/>
           </p:cNvSpPr>
           <p:nvPr>
             <p:ph type="body" idx="1"/>
@@ -533,14 +424,14 @@
         </p:nvSpPr>
         <p:spPr/>
         <p:txBody>
-          <a:bodyPr xmlns:a="http://schemas.openxmlformats.org/drawingml/2006/main"/>
-          <a:lstStyle xmlns:a="http://schemas.openxmlformats.org/drawingml/2006/main"/>
-          <a:p xmlns:a="http://schemas.openxmlformats.org/drawingml/2006/main">
+          <a:bodyPr/>
+          <a:lstStyle/>
+          <a:p>
             <a:r>
               <a:t>https://pydantic.dev/docs/validation/latest/get-started/</a:t>
             </a:r>
           </a:p>
-          <a:p xmlns:a="http://schemas.openxmlformats.org/drawingml/2006/main">
+          <a:p>
             <a:r>
               <a:t>Captura: https://pydantic.dev/docs/validation/latest/get-started/</a:t>
             </a:r>
@@ -551,7 +442,7 @@
         <p:nvSpPr>
           <p:cNvPr id="4" name="Slide Number Placeholder 3"/>
           <p:cNvSpPr>
-            <a:spLocks xmlns:a="http://schemas.openxmlformats.org/drawingml/2006/main" noGrp="1"/>
+            <a:spLocks noGrp="1"/>
           </p:cNvSpPr>
           <p:nvPr>
             <p:ph type="sldNum" idx="5"/>
@@ -559,21 +450,23 @@
         </p:nvSpPr>
         <p:spPr/>
         <p:txBody>
-          <a:bodyPr xmlns:a="http://schemas.openxmlformats.org/drawingml/2006/main"/>
-          <a:lstStyle xmlns:a="http://schemas.openxmlformats.org/drawingml/2006/main"/>
-          <a:p xmlns:a="http://schemas.openxmlformats.org/drawingml/2006/main"/>
+          <a:bodyPr/>
+          <a:lstStyle/>
+          <a:p>
+            <a:endParaRPr/>
+          </a:p>
         </p:txBody>
       </p:sp>
     </p:spTree>
   </p:cSld>
   <p:clrMapOvr>
-    <a:masterClrMapping xmlns:a="http://schemas.openxmlformats.org/drawingml/2006/main"/>
+    <a:masterClrMapping/>
   </p:clrMapOvr>
 </p:notes>
 </file>
 
 <file path=ppt/notesSlides/notesSlide11.xml><?xml version="1.0" encoding="utf-8"?>
-<p:notes xmlns:p="http://schemas.openxmlformats.org/presentationml/2006/main">
+<p:notes xmlns:a="http://schemas.openxmlformats.org/drawingml/2006/main" xmlns:r="http://schemas.openxmlformats.org/officeDocument/2006/relationships" xmlns:p="http://schemas.openxmlformats.org/presentationml/2006/main">
   <p:cSld>
     <p:spTree>
       <p:nvGrpSpPr>
@@ -582,16 +475,21 @@
         <p:nvPr/>
       </p:nvGrpSpPr>
       <p:grpSpPr>
-        <a:xfrm xmlns:a="http://schemas.openxmlformats.org/drawingml/2006/main"/>
+        <a:xfrm>
+          <a:off x="0" y="0"/>
+          <a:ext cx="0" cy="0"/>
+          <a:chOff x="0" y="0"/>
+          <a:chExt cx="0" cy="0"/>
+        </a:xfrm>
       </p:grpSpPr>
       <p:sp>
         <p:nvSpPr>
           <p:cNvPr id="2" name="Slide Image Placeholder 1"/>
           <p:cNvSpPr>
-            <a:spLocks xmlns:a="http://schemas.openxmlformats.org/drawingml/2006/main" noGrp="1"/>
+            <a:spLocks noGrp="1" noRot="1" noChangeAspect="1"/>
           </p:cNvSpPr>
           <p:nvPr>
-            <p:ph type="sldImg" idx="0"/>
+            <p:ph type="sldImg"/>
           </p:nvPr>
         </p:nvSpPr>
         <p:spPr/>
@@ -600,7 +498,7 @@
         <p:nvSpPr>
           <p:cNvPr id="3" name="Notes Placeholder 2"/>
           <p:cNvSpPr>
-            <a:spLocks xmlns:a="http://schemas.openxmlformats.org/drawingml/2006/main" noGrp="1"/>
+            <a:spLocks noGrp="1"/>
           </p:cNvSpPr>
           <p:nvPr>
             <p:ph type="body" idx="1"/>
@@ -608,14 +506,14 @@
         </p:nvSpPr>
         <p:spPr/>
         <p:txBody>
-          <a:bodyPr xmlns:a="http://schemas.openxmlformats.org/drawingml/2006/main"/>
-          <a:lstStyle xmlns:a="http://schemas.openxmlformats.org/drawingml/2006/main"/>
-          <a:p xmlns:a="http://schemas.openxmlformats.org/drawingml/2006/main">
+          <a:bodyPr/>
+          <a:lstStyle/>
+          <a:p>
             <a:r>
               <a:t>https://docs.pydantic.dev/latest/concepts/models/</a:t>
             </a:r>
           </a:p>
-          <a:p xmlns:a="http://schemas.openxmlformats.org/drawingml/2006/main">
+          <a:p>
             <a:r>
               <a:t>https://pydantic.dev/docs/validation/latest/get-started/</a:t>
             </a:r>
@@ -626,7 +524,7 @@
         <p:nvSpPr>
           <p:cNvPr id="4" name="Slide Number Placeholder 3"/>
           <p:cNvSpPr>
-            <a:spLocks xmlns:a="http://schemas.openxmlformats.org/drawingml/2006/main" noGrp="1"/>
+            <a:spLocks noGrp="1"/>
           </p:cNvSpPr>
           <p:nvPr>
             <p:ph type="sldNum" idx="5"/>
@@ -634,21 +532,23 @@
         </p:nvSpPr>
         <p:spPr/>
         <p:txBody>
-          <a:bodyPr xmlns:a="http://schemas.openxmlformats.org/drawingml/2006/main"/>
-          <a:lstStyle xmlns:a="http://schemas.openxmlformats.org/drawingml/2006/main"/>
-          <a:p xmlns:a="http://schemas.openxmlformats.org/drawingml/2006/main"/>
+          <a:bodyPr/>
+          <a:lstStyle/>
+          <a:p>
+            <a:endParaRPr/>
+          </a:p>
         </p:txBody>
       </p:sp>
     </p:spTree>
   </p:cSld>
   <p:clrMapOvr>
-    <a:masterClrMapping xmlns:a="http://schemas.openxmlformats.org/drawingml/2006/main"/>
+    <a:masterClrMapping/>
   </p:clrMapOvr>
 </p:notes>
 </file>
 
 <file path=ppt/notesSlides/notesSlide12.xml><?xml version="1.0" encoding="utf-8"?>
-<p:notes xmlns:p="http://schemas.openxmlformats.org/presentationml/2006/main">
+<p:notes xmlns:a="http://schemas.openxmlformats.org/drawingml/2006/main" xmlns:r="http://schemas.openxmlformats.org/officeDocument/2006/relationships" xmlns:p="http://schemas.openxmlformats.org/presentationml/2006/main">
   <p:cSld>
     <p:spTree>
       <p:nvGrpSpPr>
@@ -657,16 +557,21 @@
         <p:nvPr/>
       </p:nvGrpSpPr>
       <p:grpSpPr>
-        <a:xfrm xmlns:a="http://schemas.openxmlformats.org/drawingml/2006/main"/>
+        <a:xfrm>
+          <a:off x="0" y="0"/>
+          <a:ext cx="0" cy="0"/>
+          <a:chOff x="0" y="0"/>
+          <a:chExt cx="0" cy="0"/>
+        </a:xfrm>
       </p:grpSpPr>
       <p:sp>
         <p:nvSpPr>
           <p:cNvPr id="2" name="Slide Image Placeholder 1"/>
           <p:cNvSpPr>
-            <a:spLocks xmlns:a="http://schemas.openxmlformats.org/drawingml/2006/main" noGrp="1"/>
+            <a:spLocks noGrp="1" noRot="1" noChangeAspect="1"/>
           </p:cNvSpPr>
           <p:nvPr>
-            <p:ph type="sldImg" idx="0"/>
+            <p:ph type="sldImg"/>
           </p:nvPr>
         </p:nvSpPr>
         <p:spPr/>
@@ -675,7 +580,7 @@
         <p:nvSpPr>
           <p:cNvPr id="3" name="Notes Placeholder 2"/>
           <p:cNvSpPr>
-            <a:spLocks xmlns:a="http://schemas.openxmlformats.org/drawingml/2006/main" noGrp="1"/>
+            <a:spLocks noGrp="1"/>
           </p:cNvSpPr>
           <p:nvPr>
             <p:ph type="body" idx="1"/>
@@ -683,14 +588,14 @@
         </p:nvSpPr>
         <p:spPr/>
         <p:txBody>
-          <a:bodyPr xmlns:a="http://schemas.openxmlformats.org/drawingml/2006/main"/>
-          <a:lstStyle xmlns:a="http://schemas.openxmlformats.org/drawingml/2006/main"/>
-          <a:p xmlns:a="http://schemas.openxmlformats.org/drawingml/2006/main">
+          <a:bodyPr/>
+          <a:lstStyle/>
+          <a:p>
             <a:r>
               <a:t>https://docs.pydantic.dev/latest/concepts/fields/</a:t>
             </a:r>
           </a:p>
-          <a:p xmlns:a="http://schemas.openxmlformats.org/drawingml/2006/main">
+          <a:p>
             <a:r>
               <a:t>https://docs.pydantic.dev/latest/concepts/models/</a:t>
             </a:r>
@@ -701,7 +606,7 @@
         <p:nvSpPr>
           <p:cNvPr id="4" name="Slide Number Placeholder 3"/>
           <p:cNvSpPr>
-            <a:spLocks xmlns:a="http://schemas.openxmlformats.org/drawingml/2006/main" noGrp="1"/>
+            <a:spLocks noGrp="1"/>
           </p:cNvSpPr>
           <p:nvPr>
             <p:ph type="sldNum" idx="5"/>
@@ -709,21 +614,23 @@
         </p:nvSpPr>
         <p:spPr/>
         <p:txBody>
-          <a:bodyPr xmlns:a="http://schemas.openxmlformats.org/drawingml/2006/main"/>
-          <a:lstStyle xmlns:a="http://schemas.openxmlformats.org/drawingml/2006/main"/>
-          <a:p xmlns:a="http://schemas.openxmlformats.org/drawingml/2006/main"/>
+          <a:bodyPr/>
+          <a:lstStyle/>
+          <a:p>
+            <a:endParaRPr/>
+          </a:p>
         </p:txBody>
       </p:sp>
     </p:spTree>
   </p:cSld>
   <p:clrMapOvr>
-    <a:masterClrMapping xmlns:a="http://schemas.openxmlformats.org/drawingml/2006/main"/>
+    <a:masterClrMapping/>
   </p:clrMapOvr>
 </p:notes>
 </file>
 
 <file path=ppt/notesSlides/notesSlide13.xml><?xml version="1.0" encoding="utf-8"?>
-<p:notes xmlns:p="http://schemas.openxmlformats.org/presentationml/2006/main">
+<p:notes xmlns:a="http://schemas.openxmlformats.org/drawingml/2006/main" xmlns:r="http://schemas.openxmlformats.org/officeDocument/2006/relationships" xmlns:p="http://schemas.openxmlformats.org/presentationml/2006/main">
   <p:cSld>
     <p:spTree>
       <p:nvGrpSpPr>
@@ -732,16 +639,21 @@
         <p:nvPr/>
       </p:nvGrpSpPr>
       <p:grpSpPr>
-        <a:xfrm xmlns:a="http://schemas.openxmlformats.org/drawingml/2006/main"/>
+        <a:xfrm>
+          <a:off x="0" y="0"/>
+          <a:ext cx="0" cy="0"/>
+          <a:chOff x="0" y="0"/>
+          <a:chExt cx="0" cy="0"/>
+        </a:xfrm>
       </p:grpSpPr>
       <p:sp>
         <p:nvSpPr>
           <p:cNvPr id="2" name="Slide Image Placeholder 1"/>
           <p:cNvSpPr>
-            <a:spLocks xmlns:a="http://schemas.openxmlformats.org/drawingml/2006/main" noGrp="1"/>
+            <a:spLocks noGrp="1" noRot="1" noChangeAspect="1"/>
           </p:cNvSpPr>
           <p:nvPr>
-            <p:ph type="sldImg" idx="0"/>
+            <p:ph type="sldImg"/>
           </p:nvPr>
         </p:nvSpPr>
         <p:spPr/>
@@ -750,7 +662,7 @@
         <p:nvSpPr>
           <p:cNvPr id="3" name="Notes Placeholder 2"/>
           <p:cNvSpPr>
-            <a:spLocks xmlns:a="http://schemas.openxmlformats.org/drawingml/2006/main" noGrp="1"/>
+            <a:spLocks noGrp="1"/>
           </p:cNvSpPr>
           <p:nvPr>
             <p:ph type="body" idx="1"/>
@@ -758,142 +670,130 @@
         </p:nvSpPr>
         <p:spPr/>
         <p:txBody>
-          <a:bodyPr xmlns:a="http://schemas.openxmlformats.org/drawingml/2006/main"/>
-          <a:lstStyle xmlns:a="http://schemas.openxmlformats.org/drawingml/2006/main"/>
-          <a:p xmlns:a="http://schemas.openxmlformats.org/drawingml/2006/main">
+          <a:bodyPr/>
+          <a:lstStyle/>
+          <a:p>
             <a:r>
               <a:t>https://github.com/ArjanCodes/examples/blob/main/2024/pydantic_refresh/example.py</a:t>
             </a:r>
           </a:p>
-          <a:p xmlns:a="http://schemas.openxmlformats.org/drawingml/2006/main">
+          <a:p>
             <a:r>
               <a:t>Video de referencia: https://www.youtube.com/watch?v=502XOB0u8OY</a:t>
             </a:r>
           </a:p>
-          <a:p xmlns:a="http://schemas.openxmlformats.org/drawingml/2006/main">
+          <a:p>
             <a:r>
               <a:t>Miniatura: https://i.ytimg.com/vi/502XOB0u8OY/hqdefault.jpg</a:t>
             </a:r>
           </a:p>
-          <a:p xmlns:a="http://schemas.openxmlformats.org/drawingml/2006/main">
+          <a:p>
             <a:r>
               <a:t>Adaptación simplificada, licencia MIT. Véase ARJANCODES_LICENSE.txt.</a:t>
             </a:r>
           </a:p>
-          <a:p xmlns:a="http://schemas.openxmlformats.org/drawingml/2006/main">
-            <a:r>
-              <a:t/>
-            </a:r>
-          </a:p>
-          <a:p xmlns:a="http://schemas.openxmlformats.org/drawingml/2006/main">
+          <a:p>
+            <a:endParaRPr/>
+          </a:p>
+          <a:p>
             <a:r>
               <a:t>MIT License</a:t>
             </a:r>
           </a:p>
-          <a:p xmlns:a="http://schemas.openxmlformats.org/drawingml/2006/main">
-            <a:r>
-              <a:t/>
-            </a:r>
-          </a:p>
-          <a:p xmlns:a="http://schemas.openxmlformats.org/drawingml/2006/main">
+          <a:p>
+            <a:endParaRPr/>
+          </a:p>
+          <a:p>
             <a:r>
               <a:t>Copyright (c) 2023 ArjanCodes</a:t>
             </a:r>
           </a:p>
-          <a:p xmlns:a="http://schemas.openxmlformats.org/drawingml/2006/main">
-            <a:r>
-              <a:t/>
-            </a:r>
-          </a:p>
-          <a:p xmlns:a="http://schemas.openxmlformats.org/drawingml/2006/main">
+          <a:p>
+            <a:endParaRPr/>
+          </a:p>
+          <a:p>
             <a:r>
               <a:t>Permission is hereby granted, free of charge, to any person obtaining a copy</a:t>
             </a:r>
           </a:p>
-          <a:p xmlns:a="http://schemas.openxmlformats.org/drawingml/2006/main">
+          <a:p>
             <a:r>
               <a:t>of this software and associated documentation files (the "Software"), to deal</a:t>
             </a:r>
           </a:p>
-          <a:p xmlns:a="http://schemas.openxmlformats.org/drawingml/2006/main">
+          <a:p>
             <a:r>
               <a:t>in the Software without restriction, including without limitation the rights</a:t>
             </a:r>
           </a:p>
-          <a:p xmlns:a="http://schemas.openxmlformats.org/drawingml/2006/main">
+          <a:p>
             <a:r>
               <a:t>to use, copy, modify, merge, publish, distribute, sublicense, and/or sell</a:t>
             </a:r>
           </a:p>
-          <a:p xmlns:a="http://schemas.openxmlformats.org/drawingml/2006/main">
+          <a:p>
             <a:r>
               <a:t>copies of the Software, and to permit persons to whom the Software is</a:t>
             </a:r>
           </a:p>
-          <a:p xmlns:a="http://schemas.openxmlformats.org/drawingml/2006/main">
+          <a:p>
             <a:r>
               <a:t>furnished to do so, subject to the following conditions:</a:t>
             </a:r>
           </a:p>
-          <a:p xmlns:a="http://schemas.openxmlformats.org/drawingml/2006/main">
-            <a:r>
-              <a:t/>
-            </a:r>
-          </a:p>
-          <a:p xmlns:a="http://schemas.openxmlformats.org/drawingml/2006/main">
+          <a:p>
+            <a:endParaRPr/>
+          </a:p>
+          <a:p>
             <a:r>
               <a:t>The above copyright notice and this permission notice shall be included in all</a:t>
             </a:r>
           </a:p>
-          <a:p xmlns:a="http://schemas.openxmlformats.org/drawingml/2006/main">
+          <a:p>
             <a:r>
               <a:t>copies or substantial portions of the Software.</a:t>
             </a:r>
           </a:p>
-          <a:p xmlns:a="http://schemas.openxmlformats.org/drawingml/2006/main">
-            <a:r>
-              <a:t/>
-            </a:r>
-          </a:p>
-          <a:p xmlns:a="http://schemas.openxmlformats.org/drawingml/2006/main">
+          <a:p>
+            <a:endParaRPr/>
+          </a:p>
+          <a:p>
             <a:r>
               <a:t>THE SOFTWARE IS PROVIDED "AS IS", WITHOUT WARRANTY OF ANY KIND, EXPRESS OR</a:t>
             </a:r>
           </a:p>
-          <a:p xmlns:a="http://schemas.openxmlformats.org/drawingml/2006/main">
+          <a:p>
             <a:r>
               <a:t>IMPLIED, INCLUDING BUT NOT LIMITED TO THE WARRANTIES OF MERCHANTABILITY,</a:t>
             </a:r>
           </a:p>
-          <a:p xmlns:a="http://schemas.openxmlformats.org/drawingml/2006/main">
+          <a:p>
             <a:r>
               <a:t>FITNESS FOR A PARTICULAR PURPOSE AND NONINFRINGEMENT. IN NO EVENT SHALL THE</a:t>
             </a:r>
           </a:p>
-          <a:p xmlns:a="http://schemas.openxmlformats.org/drawingml/2006/main">
+          <a:p>
             <a:r>
               <a:t>AUTHORS OR COPYRIGHT HOLDERS BE LIABLE FOR ANY CLAIM, DAMAGES OR OTHER</a:t>
             </a:r>
           </a:p>
-          <a:p xmlns:a="http://schemas.openxmlformats.org/drawingml/2006/main">
+          <a:p>
             <a:r>
               <a:t>LIABILITY, WHETHER IN AN ACTION OF CONTRACT, TORT OR OTHERWISE, ARISING FROM,</a:t>
             </a:r>
           </a:p>
-          <a:p xmlns:a="http://schemas.openxmlformats.org/drawingml/2006/main">
+          <a:p>
             <a:r>
               <a:t>OUT OF OR IN CONNECTION WITH THE SOFTWARE OR THE USE OR OTHER DEALINGS IN THE</a:t>
             </a:r>
           </a:p>
-          <a:p xmlns:a="http://schemas.openxmlformats.org/drawingml/2006/main">
+          <a:p>
             <a:r>
               <a:t>SOFTWARE.</a:t>
             </a:r>
           </a:p>
-          <a:p xmlns:a="http://schemas.openxmlformats.org/drawingml/2006/main">
-            <a:r>
-              <a:t/>
-            </a:r>
+          <a:p>
+            <a:endParaRPr/>
           </a:p>
         </p:txBody>
       </p:sp>
@@ -901,7 +801,7 @@
         <p:nvSpPr>
           <p:cNvPr id="4" name="Slide Number Placeholder 3"/>
           <p:cNvSpPr>
-            <a:spLocks xmlns:a="http://schemas.openxmlformats.org/drawingml/2006/main" noGrp="1"/>
+            <a:spLocks noGrp="1"/>
           </p:cNvSpPr>
           <p:nvPr>
             <p:ph type="sldNum" idx="5"/>
@@ -909,21 +809,23 @@
         </p:nvSpPr>
         <p:spPr/>
         <p:txBody>
-          <a:bodyPr xmlns:a="http://schemas.openxmlformats.org/drawingml/2006/main"/>
-          <a:lstStyle xmlns:a="http://schemas.openxmlformats.org/drawingml/2006/main"/>
-          <a:p xmlns:a="http://schemas.openxmlformats.org/drawingml/2006/main"/>
+          <a:bodyPr/>
+          <a:lstStyle/>
+          <a:p>
+            <a:endParaRPr/>
+          </a:p>
         </p:txBody>
       </p:sp>
     </p:spTree>
   </p:cSld>
   <p:clrMapOvr>
-    <a:masterClrMapping xmlns:a="http://schemas.openxmlformats.org/drawingml/2006/main"/>
+    <a:masterClrMapping/>
   </p:clrMapOvr>
 </p:notes>
 </file>
 
 <file path=ppt/notesSlides/notesSlide14.xml><?xml version="1.0" encoding="utf-8"?>
-<p:notes xmlns:p="http://schemas.openxmlformats.org/presentationml/2006/main">
+<p:notes xmlns:a="http://schemas.openxmlformats.org/drawingml/2006/main" xmlns:r="http://schemas.openxmlformats.org/officeDocument/2006/relationships" xmlns:p="http://schemas.openxmlformats.org/presentationml/2006/main">
   <p:cSld>
     <p:spTree>
       <p:nvGrpSpPr>
@@ -932,16 +834,21 @@
         <p:nvPr/>
       </p:nvGrpSpPr>
       <p:grpSpPr>
-        <a:xfrm xmlns:a="http://schemas.openxmlformats.org/drawingml/2006/main"/>
+        <a:xfrm>
+          <a:off x="0" y="0"/>
+          <a:ext cx="0" cy="0"/>
+          <a:chOff x="0" y="0"/>
+          <a:chExt cx="0" cy="0"/>
+        </a:xfrm>
       </p:grpSpPr>
       <p:sp>
         <p:nvSpPr>
           <p:cNvPr id="2" name="Slide Image Placeholder 1"/>
           <p:cNvSpPr>
-            <a:spLocks xmlns:a="http://schemas.openxmlformats.org/drawingml/2006/main" noGrp="1"/>
+            <a:spLocks noGrp="1" noRot="1" noChangeAspect="1"/>
           </p:cNvSpPr>
           <p:nvPr>
-            <p:ph type="sldImg" idx="0"/>
+            <p:ph type="sldImg"/>
           </p:nvPr>
         </p:nvSpPr>
         <p:spPr/>
@@ -950,7 +857,7 @@
         <p:nvSpPr>
           <p:cNvPr id="3" name="Notes Placeholder 2"/>
           <p:cNvSpPr>
-            <a:spLocks xmlns:a="http://schemas.openxmlformats.org/drawingml/2006/main" noGrp="1"/>
+            <a:spLocks noGrp="1"/>
           </p:cNvSpPr>
           <p:nvPr>
             <p:ph type="body" idx="1"/>
@@ -958,137 +865,125 @@
         </p:nvSpPr>
         <p:spPr/>
         <p:txBody>
-          <a:bodyPr xmlns:a="http://schemas.openxmlformats.org/drawingml/2006/main"/>
-          <a:lstStyle xmlns:a="http://schemas.openxmlformats.org/drawingml/2006/main"/>
-          <a:p xmlns:a="http://schemas.openxmlformats.org/drawingml/2006/main">
+          <a:bodyPr/>
+          <a:lstStyle/>
+          <a:p>
             <a:r>
               <a:t>https://github.com/ArjanCodes/examples/blob/main/2024/pydantic_refresh/example.py</a:t>
             </a:r>
           </a:p>
-          <a:p xmlns:a="http://schemas.openxmlformats.org/drawingml/2006/main">
+          <a:p>
             <a:r>
               <a:t>https://docs.pydantic.dev/latest/api/types/#pydantic.types.SecretStr</a:t>
             </a:r>
           </a:p>
-          <a:p xmlns:a="http://schemas.openxmlformats.org/drawingml/2006/main">
+          <a:p>
             <a:r>
               <a:t>Adaptación de ArjanCodes, licencia MIT. Véase ARJANCODES_LICENSE.txt.</a:t>
             </a:r>
           </a:p>
-          <a:p xmlns:a="http://schemas.openxmlformats.org/drawingml/2006/main">
-            <a:r>
-              <a:t/>
-            </a:r>
-          </a:p>
-          <a:p xmlns:a="http://schemas.openxmlformats.org/drawingml/2006/main">
+          <a:p>
+            <a:endParaRPr/>
+          </a:p>
+          <a:p>
             <a:r>
               <a:t>MIT License</a:t>
             </a:r>
           </a:p>
-          <a:p xmlns:a="http://schemas.openxmlformats.org/drawingml/2006/main">
-            <a:r>
-              <a:t/>
-            </a:r>
-          </a:p>
-          <a:p xmlns:a="http://schemas.openxmlformats.org/drawingml/2006/main">
+          <a:p>
+            <a:endParaRPr/>
+          </a:p>
+          <a:p>
             <a:r>
               <a:t>Copyright (c) 2023 ArjanCodes</a:t>
             </a:r>
           </a:p>
-          <a:p xmlns:a="http://schemas.openxmlformats.org/drawingml/2006/main">
-            <a:r>
-              <a:t/>
-            </a:r>
-          </a:p>
-          <a:p xmlns:a="http://schemas.openxmlformats.org/drawingml/2006/main">
+          <a:p>
+            <a:endParaRPr/>
+          </a:p>
+          <a:p>
             <a:r>
               <a:t>Permission is hereby granted, free of charge, to any person obtaining a copy</a:t>
             </a:r>
           </a:p>
-          <a:p xmlns:a="http://schemas.openxmlformats.org/drawingml/2006/main">
+          <a:p>
             <a:r>
               <a:t>of this software and associated documentation files (the "Software"), to deal</a:t>
             </a:r>
           </a:p>
-          <a:p xmlns:a="http://schemas.openxmlformats.org/drawingml/2006/main">
+          <a:p>
             <a:r>
               <a:t>in the Software without restriction, including without limitation the rights</a:t>
             </a:r>
           </a:p>
-          <a:p xmlns:a="http://schemas.openxmlformats.org/drawingml/2006/main">
+          <a:p>
             <a:r>
               <a:t>to use, copy, modify, merge, publish, distribute, sublicense, and/or sell</a:t>
             </a:r>
           </a:p>
-          <a:p xmlns:a="http://schemas.openxmlformats.org/drawingml/2006/main">
+          <a:p>
             <a:r>
               <a:t>copies of the Software, and to permit persons to whom the Software is</a:t>
             </a:r>
           </a:p>
-          <a:p xmlns:a="http://schemas.openxmlformats.org/drawingml/2006/main">
+          <a:p>
             <a:r>
               <a:t>furnished to do so, subject to the following conditions:</a:t>
             </a:r>
           </a:p>
-          <a:p xmlns:a="http://schemas.openxmlformats.org/drawingml/2006/main">
-            <a:r>
-              <a:t/>
-            </a:r>
-          </a:p>
-          <a:p xmlns:a="http://schemas.openxmlformats.org/drawingml/2006/main">
+          <a:p>
+            <a:endParaRPr/>
+          </a:p>
+          <a:p>
             <a:r>
               <a:t>The above copyright notice and this permission notice shall be included in all</a:t>
             </a:r>
           </a:p>
-          <a:p xmlns:a="http://schemas.openxmlformats.org/drawingml/2006/main">
+          <a:p>
             <a:r>
               <a:t>copies or substantial portions of the Software.</a:t>
             </a:r>
           </a:p>
-          <a:p xmlns:a="http://schemas.openxmlformats.org/drawingml/2006/main">
-            <a:r>
-              <a:t/>
-            </a:r>
-          </a:p>
-          <a:p xmlns:a="http://schemas.openxmlformats.org/drawingml/2006/main">
+          <a:p>
+            <a:endParaRPr/>
+          </a:p>
+          <a:p>
             <a:r>
               <a:t>THE SOFTWARE IS PROVIDED "AS IS", WITHOUT WARRANTY OF ANY KIND, EXPRESS OR</a:t>
             </a:r>
           </a:p>
-          <a:p xmlns:a="http://schemas.openxmlformats.org/drawingml/2006/main">
+          <a:p>
             <a:r>
               <a:t>IMPLIED, INCLUDING BUT NOT LIMITED TO THE WARRANTIES OF MERCHANTABILITY,</a:t>
             </a:r>
           </a:p>
-          <a:p xmlns:a="http://schemas.openxmlformats.org/drawingml/2006/main">
+          <a:p>
             <a:r>
               <a:t>FITNESS FOR A PARTICULAR PURPOSE AND NONINFRINGEMENT. IN NO EVENT SHALL THE</a:t>
             </a:r>
           </a:p>
-          <a:p xmlns:a="http://schemas.openxmlformats.org/drawingml/2006/main">
+          <a:p>
             <a:r>
               <a:t>AUTHORS OR COPYRIGHT HOLDERS BE LIABLE FOR ANY CLAIM, DAMAGES OR OTHER</a:t>
             </a:r>
           </a:p>
-          <a:p xmlns:a="http://schemas.openxmlformats.org/drawingml/2006/main">
+          <a:p>
             <a:r>
               <a:t>LIABILITY, WHETHER IN AN ACTION OF CONTRACT, TORT OR OTHERWISE, ARISING FROM,</a:t>
             </a:r>
           </a:p>
-          <a:p xmlns:a="http://schemas.openxmlformats.org/drawingml/2006/main">
+          <a:p>
             <a:r>
               <a:t>OUT OF OR IN CONNECTION WITH THE SOFTWARE OR THE USE OR OTHER DEALINGS IN THE</a:t>
             </a:r>
           </a:p>
-          <a:p xmlns:a="http://schemas.openxmlformats.org/drawingml/2006/main">
+          <a:p>
             <a:r>
               <a:t>SOFTWARE.</a:t>
             </a:r>
           </a:p>
-          <a:p xmlns:a="http://schemas.openxmlformats.org/drawingml/2006/main">
-            <a:r>
-              <a:t/>
-            </a:r>
+          <a:p>
+            <a:endParaRPr/>
           </a:p>
         </p:txBody>
       </p:sp>
@@ -1096,7 +991,7 @@
         <p:nvSpPr>
           <p:cNvPr id="4" name="Slide Number Placeholder 3"/>
           <p:cNvSpPr>
-            <a:spLocks xmlns:a="http://schemas.openxmlformats.org/drawingml/2006/main" noGrp="1"/>
+            <a:spLocks noGrp="1"/>
           </p:cNvSpPr>
           <p:nvPr>
             <p:ph type="sldNum" idx="5"/>
@@ -1104,21 +999,23 @@
         </p:nvSpPr>
         <p:spPr/>
         <p:txBody>
-          <a:bodyPr xmlns:a="http://schemas.openxmlformats.org/drawingml/2006/main"/>
-          <a:lstStyle xmlns:a="http://schemas.openxmlformats.org/drawingml/2006/main"/>
-          <a:p xmlns:a="http://schemas.openxmlformats.org/drawingml/2006/main"/>
+          <a:bodyPr/>
+          <a:lstStyle/>
+          <a:p>
+            <a:endParaRPr/>
+          </a:p>
         </p:txBody>
       </p:sp>
     </p:spTree>
   </p:cSld>
   <p:clrMapOvr>
-    <a:masterClrMapping xmlns:a="http://schemas.openxmlformats.org/drawingml/2006/main"/>
+    <a:masterClrMapping/>
   </p:clrMapOvr>
 </p:notes>
 </file>
 
 <file path=ppt/notesSlides/notesSlide15.xml><?xml version="1.0" encoding="utf-8"?>
-<p:notes xmlns:p="http://schemas.openxmlformats.org/presentationml/2006/main">
+<p:notes xmlns:a="http://schemas.openxmlformats.org/drawingml/2006/main" xmlns:r="http://schemas.openxmlformats.org/officeDocument/2006/relationships" xmlns:p="http://schemas.openxmlformats.org/presentationml/2006/main">
   <p:cSld>
     <p:spTree>
       <p:nvGrpSpPr>
@@ -1127,16 +1024,21 @@
         <p:nvPr/>
       </p:nvGrpSpPr>
       <p:grpSpPr>
-        <a:xfrm xmlns:a="http://schemas.openxmlformats.org/drawingml/2006/main"/>
+        <a:xfrm>
+          <a:off x="0" y="0"/>
+          <a:ext cx="0" cy="0"/>
+          <a:chOff x="0" y="0"/>
+          <a:chExt cx="0" cy="0"/>
+        </a:xfrm>
       </p:grpSpPr>
       <p:sp>
         <p:nvSpPr>
           <p:cNvPr id="2" name="Slide Image Placeholder 1"/>
           <p:cNvSpPr>
-            <a:spLocks xmlns:a="http://schemas.openxmlformats.org/drawingml/2006/main" noGrp="1"/>
+            <a:spLocks noGrp="1" noRot="1" noChangeAspect="1"/>
           </p:cNvSpPr>
           <p:nvPr>
-            <p:ph type="sldImg" idx="0"/>
+            <p:ph type="sldImg"/>
           </p:nvPr>
         </p:nvSpPr>
         <p:spPr/>
@@ -1145,7 +1047,7 @@
         <p:nvSpPr>
           <p:cNvPr id="3" name="Notes Placeholder 2"/>
           <p:cNvSpPr>
-            <a:spLocks xmlns:a="http://schemas.openxmlformats.org/drawingml/2006/main" noGrp="1"/>
+            <a:spLocks noGrp="1"/>
           </p:cNvSpPr>
           <p:nvPr>
             <p:ph type="body" idx="1"/>
@@ -1153,9 +1055,9 @@
         </p:nvSpPr>
         <p:spPr/>
         <p:txBody>
-          <a:bodyPr xmlns:a="http://schemas.openxmlformats.org/drawingml/2006/main"/>
-          <a:lstStyle xmlns:a="http://schemas.openxmlformats.org/drawingml/2006/main"/>
-          <a:p xmlns:a="http://schemas.openxmlformats.org/drawingml/2006/main">
+          <a:bodyPr/>
+          <a:lstStyle/>
+          <a:p>
             <a:r>
               <a:t>https://docs.pydantic.dev/latest/concepts/models/</a:t>
             </a:r>
@@ -1166,7 +1068,7 @@
         <p:nvSpPr>
           <p:cNvPr id="4" name="Slide Number Placeholder 3"/>
           <p:cNvSpPr>
-            <a:spLocks xmlns:a="http://schemas.openxmlformats.org/drawingml/2006/main" noGrp="1"/>
+            <a:spLocks noGrp="1"/>
           </p:cNvSpPr>
           <p:nvPr>
             <p:ph type="sldNum" idx="5"/>
@@ -1174,21 +1076,23 @@
         </p:nvSpPr>
         <p:spPr/>
         <p:txBody>
-          <a:bodyPr xmlns:a="http://schemas.openxmlformats.org/drawingml/2006/main"/>
-          <a:lstStyle xmlns:a="http://schemas.openxmlformats.org/drawingml/2006/main"/>
-          <a:p xmlns:a="http://schemas.openxmlformats.org/drawingml/2006/main"/>
+          <a:bodyPr/>
+          <a:lstStyle/>
+          <a:p>
+            <a:endParaRPr/>
+          </a:p>
         </p:txBody>
       </p:sp>
     </p:spTree>
   </p:cSld>
   <p:clrMapOvr>
-    <a:masterClrMapping xmlns:a="http://schemas.openxmlformats.org/drawingml/2006/main"/>
+    <a:masterClrMapping/>
   </p:clrMapOvr>
 </p:notes>
 </file>
 
 <file path=ppt/notesSlides/notesSlide16.xml><?xml version="1.0" encoding="utf-8"?>
-<p:notes xmlns:p="http://schemas.openxmlformats.org/presentationml/2006/main">
+<p:notes xmlns:a="http://schemas.openxmlformats.org/drawingml/2006/main" xmlns:r="http://schemas.openxmlformats.org/officeDocument/2006/relationships" xmlns:p="http://schemas.openxmlformats.org/presentationml/2006/main">
   <p:cSld>
     <p:spTree>
       <p:nvGrpSpPr>
@@ -1197,16 +1101,21 @@
         <p:nvPr/>
       </p:nvGrpSpPr>
       <p:grpSpPr>
-        <a:xfrm xmlns:a="http://schemas.openxmlformats.org/drawingml/2006/main"/>
+        <a:xfrm>
+          <a:off x="0" y="0"/>
+          <a:ext cx="0" cy="0"/>
+          <a:chOff x="0" y="0"/>
+          <a:chExt cx="0" cy="0"/>
+        </a:xfrm>
       </p:grpSpPr>
       <p:sp>
         <p:nvSpPr>
           <p:cNvPr id="2" name="Slide Image Placeholder 1"/>
           <p:cNvSpPr>
-            <a:spLocks xmlns:a="http://schemas.openxmlformats.org/drawingml/2006/main" noGrp="1"/>
+            <a:spLocks noGrp="1" noRot="1" noChangeAspect="1"/>
           </p:cNvSpPr>
           <p:nvPr>
-            <p:ph type="sldImg" idx="0"/>
+            <p:ph type="sldImg"/>
           </p:nvPr>
         </p:nvSpPr>
         <p:spPr/>
@@ -1215,7 +1124,7 @@
         <p:nvSpPr>
           <p:cNvPr id="3" name="Notes Placeholder 2"/>
           <p:cNvSpPr>
-            <a:spLocks xmlns:a="http://schemas.openxmlformats.org/drawingml/2006/main" noGrp="1"/>
+            <a:spLocks noGrp="1"/>
           </p:cNvSpPr>
           <p:nvPr>
             <p:ph type="body" idx="1"/>
@@ -1223,137 +1132,125 @@
         </p:nvSpPr>
         <p:spPr/>
         <p:txBody>
-          <a:bodyPr xmlns:a="http://schemas.openxmlformats.org/drawingml/2006/main"/>
-          <a:lstStyle xmlns:a="http://schemas.openxmlformats.org/drawingml/2006/main"/>
-          <a:p xmlns:a="http://schemas.openxmlformats.org/drawingml/2006/main">
+          <a:bodyPr/>
+          <a:lstStyle/>
+          <a:p>
             <a:r>
               <a:t>https://github.com/ArjanCodes/examples/blob/main/2025/typehints/generic_return.py</a:t>
             </a:r>
           </a:p>
-          <a:p xmlns:a="http://schemas.openxmlformats.org/drawingml/2006/main">
+          <a:p>
             <a:r>
               <a:t>https://github.com/ArjanCodes/examples/blob/main/2024/pydantic_refresh/example.py</a:t>
             </a:r>
           </a:p>
-          <a:p xmlns:a="http://schemas.openxmlformats.org/drawingml/2006/main">
+          <a:p>
             <a:r>
               <a:t>https://pydantic.dev/docs/validation/latest/get-started/</a:t>
             </a:r>
           </a:p>
-          <a:p xmlns:a="http://schemas.openxmlformats.org/drawingml/2006/main">
-            <a:r>
-              <a:t/>
-            </a:r>
-          </a:p>
-          <a:p xmlns:a="http://schemas.openxmlformats.org/drawingml/2006/main">
+          <a:p>
+            <a:endParaRPr/>
+          </a:p>
+          <a:p>
             <a:r>
               <a:t>MIT License</a:t>
             </a:r>
           </a:p>
-          <a:p xmlns:a="http://schemas.openxmlformats.org/drawingml/2006/main">
-            <a:r>
-              <a:t/>
-            </a:r>
-          </a:p>
-          <a:p xmlns:a="http://schemas.openxmlformats.org/drawingml/2006/main">
+          <a:p>
+            <a:endParaRPr/>
+          </a:p>
+          <a:p>
             <a:r>
               <a:t>Copyright (c) 2023 ArjanCodes</a:t>
             </a:r>
           </a:p>
-          <a:p xmlns:a="http://schemas.openxmlformats.org/drawingml/2006/main">
-            <a:r>
-              <a:t/>
-            </a:r>
-          </a:p>
-          <a:p xmlns:a="http://schemas.openxmlformats.org/drawingml/2006/main">
+          <a:p>
+            <a:endParaRPr/>
+          </a:p>
+          <a:p>
             <a:r>
               <a:t>Permission is hereby granted, free of charge, to any person obtaining a copy</a:t>
             </a:r>
           </a:p>
-          <a:p xmlns:a="http://schemas.openxmlformats.org/drawingml/2006/main">
+          <a:p>
             <a:r>
               <a:t>of this software and associated documentation files (the "Software"), to deal</a:t>
             </a:r>
           </a:p>
-          <a:p xmlns:a="http://schemas.openxmlformats.org/drawingml/2006/main">
+          <a:p>
             <a:r>
               <a:t>in the Software without restriction, including without limitation the rights</a:t>
             </a:r>
           </a:p>
-          <a:p xmlns:a="http://schemas.openxmlformats.org/drawingml/2006/main">
+          <a:p>
             <a:r>
               <a:t>to use, copy, modify, merge, publish, distribute, sublicense, and/or sell</a:t>
             </a:r>
           </a:p>
-          <a:p xmlns:a="http://schemas.openxmlformats.org/drawingml/2006/main">
+          <a:p>
             <a:r>
               <a:t>copies of the Software, and to permit persons to whom the Software is</a:t>
             </a:r>
           </a:p>
-          <a:p xmlns:a="http://schemas.openxmlformats.org/drawingml/2006/main">
+          <a:p>
             <a:r>
               <a:t>furnished to do so, subject to the following conditions:</a:t>
             </a:r>
           </a:p>
-          <a:p xmlns:a="http://schemas.openxmlformats.org/drawingml/2006/main">
-            <a:r>
-              <a:t/>
-            </a:r>
-          </a:p>
-          <a:p xmlns:a="http://schemas.openxmlformats.org/drawingml/2006/main">
+          <a:p>
+            <a:endParaRPr/>
+          </a:p>
+          <a:p>
             <a:r>
               <a:t>The above copyright notice and this permission notice shall be included in all</a:t>
             </a:r>
           </a:p>
-          <a:p xmlns:a="http://schemas.openxmlformats.org/drawingml/2006/main">
+          <a:p>
             <a:r>
               <a:t>copies or substantial portions of the Software.</a:t>
             </a:r>
           </a:p>
-          <a:p xmlns:a="http://schemas.openxmlformats.org/drawingml/2006/main">
-            <a:r>
-              <a:t/>
-            </a:r>
-          </a:p>
-          <a:p xmlns:a="http://schemas.openxmlformats.org/drawingml/2006/main">
+          <a:p>
+            <a:endParaRPr/>
+          </a:p>
+          <a:p>
             <a:r>
               <a:t>THE SOFTWARE IS PROVIDED "AS IS", WITHOUT WARRANTY OF ANY KIND, EXPRESS OR</a:t>
             </a:r>
           </a:p>
-          <a:p xmlns:a="http://schemas.openxmlformats.org/drawingml/2006/main">
+          <a:p>
             <a:r>
               <a:t>IMPLIED, INCLUDING BUT NOT LIMITED TO THE WARRANTIES OF MERCHANTABILITY,</a:t>
             </a:r>
           </a:p>
-          <a:p xmlns:a="http://schemas.openxmlformats.org/drawingml/2006/main">
+          <a:p>
             <a:r>
               <a:t>FITNESS FOR A PARTICULAR PURPOSE AND NONINFRINGEMENT. IN NO EVENT SHALL THE</a:t>
             </a:r>
           </a:p>
-          <a:p xmlns:a="http://schemas.openxmlformats.org/drawingml/2006/main">
+          <a:p>
             <a:r>
               <a:t>AUTHORS OR COPYRIGHT HOLDERS BE LIABLE FOR ANY CLAIM, DAMAGES OR OTHER</a:t>
             </a:r>
           </a:p>
-          <a:p xmlns:a="http://schemas.openxmlformats.org/drawingml/2006/main">
+          <a:p>
             <a:r>
               <a:t>LIABILITY, WHETHER IN AN ACTION OF CONTRACT, TORT OR OTHERWISE, ARISING FROM,</a:t>
             </a:r>
           </a:p>
-          <a:p xmlns:a="http://schemas.openxmlformats.org/drawingml/2006/main">
+          <a:p>
             <a:r>
               <a:t>OUT OF OR IN CONNECTION WITH THE SOFTWARE OR THE USE OR OTHER DEALINGS IN THE</a:t>
             </a:r>
           </a:p>
-          <a:p xmlns:a="http://schemas.openxmlformats.org/drawingml/2006/main">
+          <a:p>
             <a:r>
               <a:t>SOFTWARE.</a:t>
             </a:r>
           </a:p>
-          <a:p xmlns:a="http://schemas.openxmlformats.org/drawingml/2006/main">
-            <a:r>
-              <a:t/>
-            </a:r>
+          <a:p>
+            <a:endParaRPr/>
           </a:p>
         </p:txBody>
       </p:sp>
@@ -1361,7 +1258,7 @@
         <p:nvSpPr>
           <p:cNvPr id="4" name="Slide Number Placeholder 3"/>
           <p:cNvSpPr>
-            <a:spLocks xmlns:a="http://schemas.openxmlformats.org/drawingml/2006/main" noGrp="1"/>
+            <a:spLocks noGrp="1"/>
           </p:cNvSpPr>
           <p:nvPr>
             <p:ph type="sldNum" idx="5"/>
@@ -1369,21 +1266,23 @@
         </p:nvSpPr>
         <p:spPr/>
         <p:txBody>
-          <a:bodyPr xmlns:a="http://schemas.openxmlformats.org/drawingml/2006/main"/>
-          <a:lstStyle xmlns:a="http://schemas.openxmlformats.org/drawingml/2006/main"/>
-          <a:p xmlns:a="http://schemas.openxmlformats.org/drawingml/2006/main"/>
+          <a:bodyPr/>
+          <a:lstStyle/>
+          <a:p>
+            <a:endParaRPr/>
+          </a:p>
         </p:txBody>
       </p:sp>
     </p:spTree>
   </p:cSld>
   <p:clrMapOvr>
-    <a:masterClrMapping xmlns:a="http://schemas.openxmlformats.org/drawingml/2006/main"/>
+    <a:masterClrMapping/>
   </p:clrMapOvr>
 </p:notes>
 </file>
 
 <file path=ppt/notesSlides/notesSlide2.xml><?xml version="1.0" encoding="utf-8"?>
-<p:notes xmlns:p="http://schemas.openxmlformats.org/presentationml/2006/main">
+<p:notes xmlns:a="http://schemas.openxmlformats.org/drawingml/2006/main" xmlns:r="http://schemas.openxmlformats.org/officeDocument/2006/relationships" xmlns:p="http://schemas.openxmlformats.org/presentationml/2006/main">
   <p:cSld>
     <p:spTree>
       <p:nvGrpSpPr>
@@ -1392,16 +1291,21 @@
         <p:nvPr/>
       </p:nvGrpSpPr>
       <p:grpSpPr>
-        <a:xfrm xmlns:a="http://schemas.openxmlformats.org/drawingml/2006/main"/>
+        <a:xfrm>
+          <a:off x="0" y="0"/>
+          <a:ext cx="0" cy="0"/>
+          <a:chOff x="0" y="0"/>
+          <a:chExt cx="0" cy="0"/>
+        </a:xfrm>
       </p:grpSpPr>
       <p:sp>
         <p:nvSpPr>
           <p:cNvPr id="2" name="Slide Image Placeholder 1"/>
           <p:cNvSpPr>
-            <a:spLocks xmlns:a="http://schemas.openxmlformats.org/drawingml/2006/main" noGrp="1"/>
+            <a:spLocks noGrp="1" noRot="1" noChangeAspect="1"/>
           </p:cNvSpPr>
           <p:nvPr>
-            <p:ph type="sldImg" idx="0"/>
+            <p:ph type="sldImg"/>
           </p:nvPr>
         </p:nvSpPr>
         <p:spPr/>
@@ -1410,7 +1314,7 @@
         <p:nvSpPr>
           <p:cNvPr id="3" name="Notes Placeholder 2"/>
           <p:cNvSpPr>
-            <a:spLocks xmlns:a="http://schemas.openxmlformats.org/drawingml/2006/main" noGrp="1"/>
+            <a:spLocks noGrp="1"/>
           </p:cNvSpPr>
           <p:nvPr>
             <p:ph type="body" idx="1"/>
@@ -1418,14 +1322,14 @@
         </p:nvSpPr>
         <p:spPr/>
         <p:txBody>
-          <a:bodyPr xmlns:a="http://schemas.openxmlformats.org/drawingml/2006/main"/>
-          <a:lstStyle xmlns:a="http://schemas.openxmlformats.org/drawingml/2006/main"/>
-          <a:p xmlns:a="http://schemas.openxmlformats.org/drawingml/2006/main">
+          <a:bodyPr/>
+          <a:lstStyle/>
+          <a:p>
             <a:r>
               <a:t>https://peps.python.org/pep-0001/</a:t>
             </a:r>
           </a:p>
-          <a:p xmlns:a="http://schemas.openxmlformats.org/drawingml/2006/main">
+          <a:p>
             <a:r>
               <a:t>Captura de PEP 484: https://peps.python.org/pep-0484/</a:t>
             </a:r>
@@ -1436,7 +1340,7 @@
         <p:nvSpPr>
           <p:cNvPr id="4" name="Slide Number Placeholder 3"/>
           <p:cNvSpPr>
-            <a:spLocks xmlns:a="http://schemas.openxmlformats.org/drawingml/2006/main" noGrp="1"/>
+            <a:spLocks noGrp="1"/>
           </p:cNvSpPr>
           <p:nvPr>
             <p:ph type="sldNum" idx="5"/>
@@ -1444,21 +1348,23 @@
         </p:nvSpPr>
         <p:spPr/>
         <p:txBody>
-          <a:bodyPr xmlns:a="http://schemas.openxmlformats.org/drawingml/2006/main"/>
-          <a:lstStyle xmlns:a="http://schemas.openxmlformats.org/drawingml/2006/main"/>
-          <a:p xmlns:a="http://schemas.openxmlformats.org/drawingml/2006/main"/>
+          <a:bodyPr/>
+          <a:lstStyle/>
+          <a:p>
+            <a:endParaRPr/>
+          </a:p>
         </p:txBody>
       </p:sp>
     </p:spTree>
   </p:cSld>
   <p:clrMapOvr>
-    <a:masterClrMapping xmlns:a="http://schemas.openxmlformats.org/drawingml/2006/main"/>
+    <a:masterClrMapping/>
   </p:clrMapOvr>
 </p:notes>
 </file>
 
 <file path=ppt/notesSlides/notesSlide3.xml><?xml version="1.0" encoding="utf-8"?>
-<p:notes xmlns:p="http://schemas.openxmlformats.org/presentationml/2006/main">
+<p:notes xmlns:a="http://schemas.openxmlformats.org/drawingml/2006/main" xmlns:r="http://schemas.openxmlformats.org/officeDocument/2006/relationships" xmlns:p="http://schemas.openxmlformats.org/presentationml/2006/main">
   <p:cSld>
     <p:spTree>
       <p:nvGrpSpPr>
@@ -1467,16 +1373,21 @@
         <p:nvPr/>
       </p:nvGrpSpPr>
       <p:grpSpPr>
-        <a:xfrm xmlns:a="http://schemas.openxmlformats.org/drawingml/2006/main"/>
+        <a:xfrm>
+          <a:off x="0" y="0"/>
+          <a:ext cx="0" cy="0"/>
+          <a:chOff x="0" y="0"/>
+          <a:chExt cx="0" cy="0"/>
+        </a:xfrm>
       </p:grpSpPr>
       <p:sp>
         <p:nvSpPr>
           <p:cNvPr id="2" name="Slide Image Placeholder 1"/>
           <p:cNvSpPr>
-            <a:spLocks xmlns:a="http://schemas.openxmlformats.org/drawingml/2006/main" noGrp="1"/>
+            <a:spLocks noGrp="1" noRot="1" noChangeAspect="1"/>
           </p:cNvSpPr>
           <p:nvPr>
-            <p:ph type="sldImg" idx="0"/>
+            <p:ph type="sldImg"/>
           </p:nvPr>
         </p:nvSpPr>
         <p:spPr/>
@@ -1485,7 +1396,7 @@
         <p:nvSpPr>
           <p:cNvPr id="3" name="Notes Placeholder 2"/>
           <p:cNvSpPr>
-            <a:spLocks xmlns:a="http://schemas.openxmlformats.org/drawingml/2006/main" noGrp="1"/>
+            <a:spLocks noGrp="1"/>
           </p:cNvSpPr>
           <p:nvPr>
             <p:ph type="body" idx="1"/>
@@ -1493,19 +1404,19 @@
         </p:nvSpPr>
         <p:spPr/>
         <p:txBody>
-          <a:bodyPr xmlns:a="http://schemas.openxmlformats.org/drawingml/2006/main"/>
-          <a:lstStyle xmlns:a="http://schemas.openxmlformats.org/drawingml/2006/main"/>
-          <a:p xmlns:a="http://schemas.openxmlformats.org/drawingml/2006/main">
+          <a:bodyPr/>
+          <a:lstStyle/>
+          <a:p>
             <a:r>
               <a:t>https://peps.python.org/pep-3107/</a:t>
             </a:r>
           </a:p>
-          <a:p xmlns:a="http://schemas.openxmlformats.org/drawingml/2006/main">
+          <a:p>
             <a:r>
               <a:t>https://peps.python.org/pep-0484/</a:t>
             </a:r>
           </a:p>
-          <a:p xmlns:a="http://schemas.openxmlformats.org/drawingml/2006/main">
+          <a:p>
             <a:r>
               <a:t>https://peps.python.org/pep-0526/</a:t>
             </a:r>
@@ -1516,7 +1427,7 @@
         <p:nvSpPr>
           <p:cNvPr id="4" name="Slide Number Placeholder 3"/>
           <p:cNvSpPr>
-            <a:spLocks xmlns:a="http://schemas.openxmlformats.org/drawingml/2006/main" noGrp="1"/>
+            <a:spLocks noGrp="1"/>
           </p:cNvSpPr>
           <p:nvPr>
             <p:ph type="sldNum" idx="5"/>
@@ -1524,21 +1435,23 @@
         </p:nvSpPr>
         <p:spPr/>
         <p:txBody>
-          <a:bodyPr xmlns:a="http://schemas.openxmlformats.org/drawingml/2006/main"/>
-          <a:lstStyle xmlns:a="http://schemas.openxmlformats.org/drawingml/2006/main"/>
-          <a:p xmlns:a="http://schemas.openxmlformats.org/drawingml/2006/main"/>
+          <a:bodyPr/>
+          <a:lstStyle/>
+          <a:p>
+            <a:endParaRPr/>
+          </a:p>
         </p:txBody>
       </p:sp>
     </p:spTree>
   </p:cSld>
   <p:clrMapOvr>
-    <a:masterClrMapping xmlns:a="http://schemas.openxmlformats.org/drawingml/2006/main"/>
+    <a:masterClrMapping/>
   </p:clrMapOvr>
 </p:notes>
 </file>
 
 <file path=ppt/notesSlides/notesSlide4.xml><?xml version="1.0" encoding="utf-8"?>
-<p:notes xmlns:p="http://schemas.openxmlformats.org/presentationml/2006/main">
+<p:notes xmlns:a="http://schemas.openxmlformats.org/drawingml/2006/main" xmlns:r="http://schemas.openxmlformats.org/officeDocument/2006/relationships" xmlns:p="http://schemas.openxmlformats.org/presentationml/2006/main">
   <p:cSld>
     <p:spTree>
       <p:nvGrpSpPr>
@@ -1547,16 +1460,21 @@
         <p:nvPr/>
       </p:nvGrpSpPr>
       <p:grpSpPr>
-        <a:xfrm xmlns:a="http://schemas.openxmlformats.org/drawingml/2006/main"/>
+        <a:xfrm>
+          <a:off x="0" y="0"/>
+          <a:ext cx="0" cy="0"/>
+          <a:chOff x="0" y="0"/>
+          <a:chExt cx="0" cy="0"/>
+        </a:xfrm>
       </p:grpSpPr>
       <p:sp>
         <p:nvSpPr>
           <p:cNvPr id="2" name="Slide Image Placeholder 1"/>
           <p:cNvSpPr>
-            <a:spLocks xmlns:a="http://schemas.openxmlformats.org/drawingml/2006/main" noGrp="1"/>
+            <a:spLocks noGrp="1" noRot="1" noChangeAspect="1"/>
           </p:cNvSpPr>
           <p:nvPr>
-            <p:ph type="sldImg" idx="0"/>
+            <p:ph type="sldImg"/>
           </p:nvPr>
         </p:nvSpPr>
         <p:spPr/>
@@ -1565,7 +1483,7 @@
         <p:nvSpPr>
           <p:cNvPr id="3" name="Notes Placeholder 2"/>
           <p:cNvSpPr>
-            <a:spLocks xmlns:a="http://schemas.openxmlformats.org/drawingml/2006/main" noGrp="1"/>
+            <a:spLocks noGrp="1"/>
           </p:cNvSpPr>
           <p:nvPr>
             <p:ph type="body" idx="1"/>
@@ -1573,14 +1491,14 @@
         </p:nvSpPr>
         <p:spPr/>
         <p:txBody>
-          <a:bodyPr xmlns:a="http://schemas.openxmlformats.org/drawingml/2006/main"/>
-          <a:lstStyle xmlns:a="http://schemas.openxmlformats.org/drawingml/2006/main"/>
-          <a:p xmlns:a="http://schemas.openxmlformats.org/drawingml/2006/main">
+          <a:bodyPr/>
+          <a:lstStyle/>
+          <a:p>
             <a:r>
               <a:t>https://peps.python.org/pep-0585/</a:t>
             </a:r>
           </a:p>
-          <a:p xmlns:a="http://schemas.openxmlformats.org/drawingml/2006/main">
+          <a:p>
             <a:r>
               <a:t>https://peps.python.org/pep-0604/</a:t>
             </a:r>
@@ -1591,7 +1509,7 @@
         <p:nvSpPr>
           <p:cNvPr id="4" name="Slide Number Placeholder 3"/>
           <p:cNvSpPr>
-            <a:spLocks xmlns:a="http://schemas.openxmlformats.org/drawingml/2006/main" noGrp="1"/>
+            <a:spLocks noGrp="1"/>
           </p:cNvSpPr>
           <p:nvPr>
             <p:ph type="sldNum" idx="5"/>
@@ -1599,21 +1517,23 @@
         </p:nvSpPr>
         <p:spPr/>
         <p:txBody>
-          <a:bodyPr xmlns:a="http://schemas.openxmlformats.org/drawingml/2006/main"/>
-          <a:lstStyle xmlns:a="http://schemas.openxmlformats.org/drawingml/2006/main"/>
-          <a:p xmlns:a="http://schemas.openxmlformats.org/drawingml/2006/main"/>
+          <a:bodyPr/>
+          <a:lstStyle/>
+          <a:p>
+            <a:endParaRPr/>
+          </a:p>
         </p:txBody>
       </p:sp>
     </p:spTree>
   </p:cSld>
   <p:clrMapOvr>
-    <a:masterClrMapping xmlns:a="http://schemas.openxmlformats.org/drawingml/2006/main"/>
+    <a:masterClrMapping/>
   </p:clrMapOvr>
 </p:notes>
 </file>
 
 <file path=ppt/notesSlides/notesSlide5.xml><?xml version="1.0" encoding="utf-8"?>
-<p:notes xmlns:p="http://schemas.openxmlformats.org/presentationml/2006/main">
+<p:notes xmlns:a="http://schemas.openxmlformats.org/drawingml/2006/main" xmlns:r="http://schemas.openxmlformats.org/officeDocument/2006/relationships" xmlns:p="http://schemas.openxmlformats.org/presentationml/2006/main">
   <p:cSld>
     <p:spTree>
       <p:nvGrpSpPr>
@@ -1622,16 +1542,21 @@
         <p:nvPr/>
       </p:nvGrpSpPr>
       <p:grpSpPr>
-        <a:xfrm xmlns:a="http://schemas.openxmlformats.org/drawingml/2006/main"/>
+        <a:xfrm>
+          <a:off x="0" y="0"/>
+          <a:ext cx="0" cy="0"/>
+          <a:chOff x="0" y="0"/>
+          <a:chExt cx="0" cy="0"/>
+        </a:xfrm>
       </p:grpSpPr>
       <p:sp>
         <p:nvSpPr>
           <p:cNvPr id="2" name="Slide Image Placeholder 1"/>
           <p:cNvSpPr>
-            <a:spLocks xmlns:a="http://schemas.openxmlformats.org/drawingml/2006/main" noGrp="1"/>
+            <a:spLocks noGrp="1" noRot="1" noChangeAspect="1"/>
           </p:cNvSpPr>
           <p:nvPr>
-            <p:ph type="sldImg" idx="0"/>
+            <p:ph type="sldImg"/>
           </p:nvPr>
         </p:nvSpPr>
         <p:spPr/>
@@ -1640,7 +1565,7 @@
         <p:nvSpPr>
           <p:cNvPr id="3" name="Notes Placeholder 2"/>
           <p:cNvSpPr>
-            <a:spLocks xmlns:a="http://schemas.openxmlformats.org/drawingml/2006/main" noGrp="1"/>
+            <a:spLocks noGrp="1"/>
           </p:cNvSpPr>
           <p:nvPr>
             <p:ph type="body" idx="1"/>
@@ -1648,14 +1573,14 @@
         </p:nvSpPr>
         <p:spPr/>
         <p:txBody>
-          <a:bodyPr xmlns:a="http://schemas.openxmlformats.org/drawingml/2006/main"/>
-          <a:lstStyle xmlns:a="http://schemas.openxmlformats.org/drawingml/2006/main"/>
-          <a:p xmlns:a="http://schemas.openxmlformats.org/drawingml/2006/main">
+          <a:bodyPr/>
+          <a:lstStyle/>
+          <a:p>
             <a:r>
               <a:t>https://peps.python.org/pep-0484/</a:t>
             </a:r>
           </a:p>
-          <a:p xmlns:a="http://schemas.openxmlformats.org/drawingml/2006/main">
+          <a:p>
             <a:r>
               <a:t>https://peps.python.org/pep-0526/</a:t>
             </a:r>
@@ -1666,7 +1591,7 @@
         <p:nvSpPr>
           <p:cNvPr id="4" name="Slide Number Placeholder 3"/>
           <p:cNvSpPr>
-            <a:spLocks xmlns:a="http://schemas.openxmlformats.org/drawingml/2006/main" noGrp="1"/>
+            <a:spLocks noGrp="1"/>
           </p:cNvSpPr>
           <p:nvPr>
             <p:ph type="sldNum" idx="5"/>
@@ -1674,21 +1599,23 @@
         </p:nvSpPr>
         <p:spPr/>
         <p:txBody>
-          <a:bodyPr xmlns:a="http://schemas.openxmlformats.org/drawingml/2006/main"/>
-          <a:lstStyle xmlns:a="http://schemas.openxmlformats.org/drawingml/2006/main"/>
-          <a:p xmlns:a="http://schemas.openxmlformats.org/drawingml/2006/main"/>
+          <a:bodyPr/>
+          <a:lstStyle/>
+          <a:p>
+            <a:endParaRPr/>
+          </a:p>
         </p:txBody>
       </p:sp>
     </p:spTree>
   </p:cSld>
   <p:clrMapOvr>
-    <a:masterClrMapping xmlns:a="http://schemas.openxmlformats.org/drawingml/2006/main"/>
+    <a:masterClrMapping/>
   </p:clrMapOvr>
 </p:notes>
 </file>
 
 <file path=ppt/notesSlides/notesSlide6.xml><?xml version="1.0" encoding="utf-8"?>
-<p:notes xmlns:p="http://schemas.openxmlformats.org/presentationml/2006/main">
+<p:notes xmlns:a="http://schemas.openxmlformats.org/drawingml/2006/main" xmlns:r="http://schemas.openxmlformats.org/officeDocument/2006/relationships" xmlns:p="http://schemas.openxmlformats.org/presentationml/2006/main">
   <p:cSld>
     <p:spTree>
       <p:nvGrpSpPr>
@@ -1697,16 +1624,21 @@
         <p:nvPr/>
       </p:nvGrpSpPr>
       <p:grpSpPr>
-        <a:xfrm xmlns:a="http://schemas.openxmlformats.org/drawingml/2006/main"/>
+        <a:xfrm>
+          <a:off x="0" y="0"/>
+          <a:ext cx="0" cy="0"/>
+          <a:chOff x="0" y="0"/>
+          <a:chExt cx="0" cy="0"/>
+        </a:xfrm>
       </p:grpSpPr>
       <p:sp>
         <p:nvSpPr>
           <p:cNvPr id="2" name="Slide Image Placeholder 1"/>
           <p:cNvSpPr>
-            <a:spLocks xmlns:a="http://schemas.openxmlformats.org/drawingml/2006/main" noGrp="1"/>
+            <a:spLocks noGrp="1" noRot="1" noChangeAspect="1"/>
           </p:cNvSpPr>
           <p:nvPr>
-            <p:ph type="sldImg" idx="0"/>
+            <p:ph type="sldImg"/>
           </p:nvPr>
         </p:nvSpPr>
         <p:spPr/>
@@ -1715,7 +1647,7 @@
         <p:nvSpPr>
           <p:cNvPr id="3" name="Notes Placeholder 2"/>
           <p:cNvSpPr>
-            <a:spLocks xmlns:a="http://schemas.openxmlformats.org/drawingml/2006/main" noGrp="1"/>
+            <a:spLocks noGrp="1"/>
           </p:cNvSpPr>
           <p:nvPr>
             <p:ph type="body" idx="1"/>
@@ -1723,9 +1655,9 @@
         </p:nvSpPr>
         <p:spPr/>
         <p:txBody>
-          <a:bodyPr xmlns:a="http://schemas.openxmlformats.org/drawingml/2006/main"/>
-          <a:lstStyle xmlns:a="http://schemas.openxmlformats.org/drawingml/2006/main"/>
-          <a:p xmlns:a="http://schemas.openxmlformats.org/drawingml/2006/main">
+          <a:bodyPr/>
+          <a:lstStyle/>
+          <a:p>
             <a:r>
               <a:t>https://peps.python.org/pep-0484/</a:t>
             </a:r>
@@ -1736,7 +1668,7 @@
         <p:nvSpPr>
           <p:cNvPr id="4" name="Slide Number Placeholder 3"/>
           <p:cNvSpPr>
-            <a:spLocks xmlns:a="http://schemas.openxmlformats.org/drawingml/2006/main" noGrp="1"/>
+            <a:spLocks noGrp="1"/>
           </p:cNvSpPr>
           <p:nvPr>
             <p:ph type="sldNum" idx="5"/>
@@ -1744,21 +1676,23 @@
         </p:nvSpPr>
         <p:spPr/>
         <p:txBody>
-          <a:bodyPr xmlns:a="http://schemas.openxmlformats.org/drawingml/2006/main"/>
-          <a:lstStyle xmlns:a="http://schemas.openxmlformats.org/drawingml/2006/main"/>
-          <a:p xmlns:a="http://schemas.openxmlformats.org/drawingml/2006/main"/>
+          <a:bodyPr/>
+          <a:lstStyle/>
+          <a:p>
+            <a:endParaRPr/>
+          </a:p>
         </p:txBody>
       </p:sp>
     </p:spTree>
   </p:cSld>
   <p:clrMapOvr>
-    <a:masterClrMapping xmlns:a="http://schemas.openxmlformats.org/drawingml/2006/main"/>
+    <a:masterClrMapping/>
   </p:clrMapOvr>
 </p:notes>
 </file>
 
 <file path=ppt/notesSlides/notesSlide7.xml><?xml version="1.0" encoding="utf-8"?>
-<p:notes xmlns:p="http://schemas.openxmlformats.org/presentationml/2006/main">
+<p:notes xmlns:a="http://schemas.openxmlformats.org/drawingml/2006/main" xmlns:r="http://schemas.openxmlformats.org/officeDocument/2006/relationships" xmlns:p="http://schemas.openxmlformats.org/presentationml/2006/main">
   <p:cSld>
     <p:spTree>
       <p:nvGrpSpPr>
@@ -1767,16 +1701,21 @@
         <p:nvPr/>
       </p:nvGrpSpPr>
       <p:grpSpPr>
-        <a:xfrm xmlns:a="http://schemas.openxmlformats.org/drawingml/2006/main"/>
+        <a:xfrm>
+          <a:off x="0" y="0"/>
+          <a:ext cx="0" cy="0"/>
+          <a:chOff x="0" y="0"/>
+          <a:chExt cx="0" cy="0"/>
+        </a:xfrm>
       </p:grpSpPr>
       <p:sp>
         <p:nvSpPr>
           <p:cNvPr id="2" name="Slide Image Placeholder 1"/>
           <p:cNvSpPr>
-            <a:spLocks xmlns:a="http://schemas.openxmlformats.org/drawingml/2006/main" noGrp="1"/>
+            <a:spLocks noGrp="1" noRot="1" noChangeAspect="1"/>
           </p:cNvSpPr>
           <p:nvPr>
-            <p:ph type="sldImg" idx="0"/>
+            <p:ph type="sldImg"/>
           </p:nvPr>
         </p:nvSpPr>
         <p:spPr/>
@@ -1785,7 +1724,7 @@
         <p:nvSpPr>
           <p:cNvPr id="3" name="Notes Placeholder 2"/>
           <p:cNvSpPr>
-            <a:spLocks xmlns:a="http://schemas.openxmlformats.org/drawingml/2006/main" noGrp="1"/>
+            <a:spLocks noGrp="1"/>
           </p:cNvSpPr>
           <p:nvPr>
             <p:ph type="body" idx="1"/>
@@ -1793,14 +1732,14 @@
         </p:nvSpPr>
         <p:spPr/>
         <p:txBody>
-          <a:bodyPr xmlns:a="http://schemas.openxmlformats.org/drawingml/2006/main"/>
-          <a:lstStyle xmlns:a="http://schemas.openxmlformats.org/drawingml/2006/main"/>
-          <a:p xmlns:a="http://schemas.openxmlformats.org/drawingml/2006/main">
+          <a:bodyPr/>
+          <a:lstStyle/>
+          <a:p>
             <a:r>
               <a:t>https://mypy.readthedocs.io/en/stable/</a:t>
             </a:r>
           </a:p>
-          <a:p xmlns:a="http://schemas.openxmlformats.org/drawingml/2006/main">
+          <a:p>
             <a:r>
               <a:t>https://peps.python.org/pep-0484/</a:t>
             </a:r>
@@ -1811,7 +1750,7 @@
         <p:nvSpPr>
           <p:cNvPr id="4" name="Slide Number Placeholder 3"/>
           <p:cNvSpPr>
-            <a:spLocks xmlns:a="http://schemas.openxmlformats.org/drawingml/2006/main" noGrp="1"/>
+            <a:spLocks noGrp="1"/>
           </p:cNvSpPr>
           <p:nvPr>
             <p:ph type="sldNum" idx="5"/>
@@ -1819,21 +1758,23 @@
         </p:nvSpPr>
         <p:spPr/>
         <p:txBody>
-          <a:bodyPr xmlns:a="http://schemas.openxmlformats.org/drawingml/2006/main"/>
-          <a:lstStyle xmlns:a="http://schemas.openxmlformats.org/drawingml/2006/main"/>
-          <a:p xmlns:a="http://schemas.openxmlformats.org/drawingml/2006/main"/>
+          <a:bodyPr/>
+          <a:lstStyle/>
+          <a:p>
+            <a:endParaRPr/>
+          </a:p>
         </p:txBody>
       </p:sp>
     </p:spTree>
   </p:cSld>
   <p:clrMapOvr>
-    <a:masterClrMapping xmlns:a="http://schemas.openxmlformats.org/drawingml/2006/main"/>
+    <a:masterClrMapping/>
   </p:clrMapOvr>
 </p:notes>
 </file>
 
 <file path=ppt/notesSlides/notesSlide8.xml><?xml version="1.0" encoding="utf-8"?>
-<p:notes xmlns:p="http://schemas.openxmlformats.org/presentationml/2006/main">
+<p:notes xmlns:a="http://schemas.openxmlformats.org/drawingml/2006/main" xmlns:r="http://schemas.openxmlformats.org/officeDocument/2006/relationships" xmlns:p="http://schemas.openxmlformats.org/presentationml/2006/main">
   <p:cSld>
     <p:spTree>
       <p:nvGrpSpPr>
@@ -1842,16 +1783,21 @@
         <p:nvPr/>
       </p:nvGrpSpPr>
       <p:grpSpPr>
-        <a:xfrm xmlns:a="http://schemas.openxmlformats.org/drawingml/2006/main"/>
+        <a:xfrm>
+          <a:off x="0" y="0"/>
+          <a:ext cx="0" cy="0"/>
+          <a:chOff x="0" y="0"/>
+          <a:chExt cx="0" cy="0"/>
+        </a:xfrm>
       </p:grpSpPr>
       <p:sp>
         <p:nvSpPr>
           <p:cNvPr id="2" name="Slide Image Placeholder 1"/>
           <p:cNvSpPr>
-            <a:spLocks xmlns:a="http://schemas.openxmlformats.org/drawingml/2006/main" noGrp="1"/>
+            <a:spLocks noGrp="1" noRot="1" noChangeAspect="1"/>
           </p:cNvSpPr>
           <p:nvPr>
-            <p:ph type="sldImg" idx="0"/>
+            <p:ph type="sldImg"/>
           </p:nvPr>
         </p:nvSpPr>
         <p:spPr/>
@@ -1860,7 +1806,7 @@
         <p:nvSpPr>
           <p:cNvPr id="3" name="Notes Placeholder 2"/>
           <p:cNvSpPr>
-            <a:spLocks xmlns:a="http://schemas.openxmlformats.org/drawingml/2006/main" noGrp="1"/>
+            <a:spLocks noGrp="1"/>
           </p:cNvSpPr>
           <p:nvPr>
             <p:ph type="body" idx="1"/>
@@ -1868,142 +1814,130 @@
         </p:nvSpPr>
         <p:spPr/>
         <p:txBody>
-          <a:bodyPr xmlns:a="http://schemas.openxmlformats.org/drawingml/2006/main"/>
-          <a:lstStyle xmlns:a="http://schemas.openxmlformats.org/drawingml/2006/main"/>
-          <a:p xmlns:a="http://schemas.openxmlformats.org/drawingml/2006/main">
+          <a:bodyPr/>
+          <a:lstStyle/>
+          <a:p>
             <a:r>
               <a:t>https://github.com/ArjanCodes/examples/blob/main/2025/typehints/generic_return.py</a:t>
             </a:r>
           </a:p>
-          <a:p xmlns:a="http://schemas.openxmlformats.org/drawingml/2006/main">
+          <a:p>
             <a:r>
               <a:t>Video de referencia: https://www.youtube.com/watch?v=0oBLMwHdZ2Y</a:t>
             </a:r>
           </a:p>
-          <a:p xmlns:a="http://schemas.openxmlformats.org/drawingml/2006/main">
+          <a:p>
             <a:r>
               <a:t>Miniatura: https://i.ytimg.com/vi/0oBLMwHdZ2Y/hqdefault.jpg</a:t>
             </a:r>
           </a:p>
-          <a:p xmlns:a="http://schemas.openxmlformats.org/drawingml/2006/main">
+          <a:p>
             <a:r>
               <a:t>Código adaptado de ArjanCodes. Copyright (c) 2023 ArjanCodes. MIT. Véase ARJANCODES_LICENSE.txt.</a:t>
             </a:r>
           </a:p>
-          <a:p xmlns:a="http://schemas.openxmlformats.org/drawingml/2006/main">
-            <a:r>
-              <a:t/>
-            </a:r>
-          </a:p>
-          <a:p xmlns:a="http://schemas.openxmlformats.org/drawingml/2006/main">
+          <a:p>
+            <a:endParaRPr/>
+          </a:p>
+          <a:p>
             <a:r>
               <a:t>MIT License</a:t>
             </a:r>
           </a:p>
-          <a:p xmlns:a="http://schemas.openxmlformats.org/drawingml/2006/main">
-            <a:r>
-              <a:t/>
-            </a:r>
-          </a:p>
-          <a:p xmlns:a="http://schemas.openxmlformats.org/drawingml/2006/main">
+          <a:p>
+            <a:endParaRPr/>
+          </a:p>
+          <a:p>
             <a:r>
               <a:t>Copyright (c) 2023 ArjanCodes</a:t>
             </a:r>
           </a:p>
-          <a:p xmlns:a="http://schemas.openxmlformats.org/drawingml/2006/main">
-            <a:r>
-              <a:t/>
-            </a:r>
-          </a:p>
-          <a:p xmlns:a="http://schemas.openxmlformats.org/drawingml/2006/main">
+          <a:p>
+            <a:endParaRPr/>
+          </a:p>
+          <a:p>
             <a:r>
               <a:t>Permission is hereby granted, free of charge, to any person obtaining a copy</a:t>
             </a:r>
           </a:p>
-          <a:p xmlns:a="http://schemas.openxmlformats.org/drawingml/2006/main">
+          <a:p>
             <a:r>
               <a:t>of this software and associated documentation files (the "Software"), to deal</a:t>
             </a:r>
           </a:p>
-          <a:p xmlns:a="http://schemas.openxmlformats.org/drawingml/2006/main">
+          <a:p>
             <a:r>
               <a:t>in the Software without restriction, including without limitation the rights</a:t>
             </a:r>
           </a:p>
-          <a:p xmlns:a="http://schemas.openxmlformats.org/drawingml/2006/main">
+          <a:p>
             <a:r>
               <a:t>to use, copy, modify, merge, publish, distribute, sublicense, and/or sell</a:t>
             </a:r>
           </a:p>
-          <a:p xmlns:a="http://schemas.openxmlformats.org/drawingml/2006/main">
+          <a:p>
             <a:r>
               <a:t>copies of the Software, and to permit persons to whom the Software is</a:t>
             </a:r>
           </a:p>
-          <a:p xmlns:a="http://schemas.openxmlformats.org/drawingml/2006/main">
+          <a:p>
             <a:r>
               <a:t>furnished to do so, subject to the following conditions:</a:t>
             </a:r>
           </a:p>
-          <a:p xmlns:a="http://schemas.openxmlformats.org/drawingml/2006/main">
-            <a:r>
-              <a:t/>
-            </a:r>
-          </a:p>
-          <a:p xmlns:a="http://schemas.openxmlformats.org/drawingml/2006/main">
+          <a:p>
+            <a:endParaRPr/>
+          </a:p>
+          <a:p>
             <a:r>
               <a:t>The above copyright notice and this permission notice shall be included in all</a:t>
             </a:r>
           </a:p>
-          <a:p xmlns:a="http://schemas.openxmlformats.org/drawingml/2006/main">
+          <a:p>
             <a:r>
               <a:t>copies or substantial portions of the Software.</a:t>
             </a:r>
           </a:p>
-          <a:p xmlns:a="http://schemas.openxmlformats.org/drawingml/2006/main">
-            <a:r>
-              <a:t/>
-            </a:r>
-          </a:p>
-          <a:p xmlns:a="http://schemas.openxmlformats.org/drawingml/2006/main">
+          <a:p>
+            <a:endParaRPr/>
+          </a:p>
+          <a:p>
             <a:r>
               <a:t>THE SOFTWARE IS PROVIDED "AS IS", WITHOUT WARRANTY OF ANY KIND, EXPRESS OR</a:t>
             </a:r>
           </a:p>
-          <a:p xmlns:a="http://schemas.openxmlformats.org/drawingml/2006/main">
+          <a:p>
             <a:r>
               <a:t>IMPLIED, INCLUDING BUT NOT LIMITED TO THE WARRANTIES OF MERCHANTABILITY,</a:t>
             </a:r>
           </a:p>
-          <a:p xmlns:a="http://schemas.openxmlformats.org/drawingml/2006/main">
+          <a:p>
             <a:r>
               <a:t>FITNESS FOR A PARTICULAR PURPOSE AND NONINFRINGEMENT. IN NO EVENT SHALL THE</a:t>
             </a:r>
           </a:p>
-          <a:p xmlns:a="http://schemas.openxmlformats.org/drawingml/2006/main">
+          <a:p>
             <a:r>
               <a:t>AUTHORS OR COPYRIGHT HOLDERS BE LIABLE FOR ANY CLAIM, DAMAGES OR OTHER</a:t>
             </a:r>
           </a:p>
-          <a:p xmlns:a="http://schemas.openxmlformats.org/drawingml/2006/main">
+          <a:p>
             <a:r>
               <a:t>LIABILITY, WHETHER IN AN ACTION OF CONTRACT, TORT OR OTHERWISE, ARISING FROM,</a:t>
             </a:r>
           </a:p>
-          <a:p xmlns:a="http://schemas.openxmlformats.org/drawingml/2006/main">
+          <a:p>
             <a:r>
               <a:t>OUT OF OR IN CONNECTION WITH THE SOFTWARE OR THE USE OR OTHER DEALINGS IN THE</a:t>
             </a:r>
           </a:p>
-          <a:p xmlns:a="http://schemas.openxmlformats.org/drawingml/2006/main">
+          <a:p>
             <a:r>
               <a:t>SOFTWARE.</a:t>
             </a:r>
           </a:p>
-          <a:p xmlns:a="http://schemas.openxmlformats.org/drawingml/2006/main">
-            <a:r>
-              <a:t/>
-            </a:r>
+          <a:p>
+            <a:endParaRPr/>
           </a:p>
         </p:txBody>
       </p:sp>
@@ -2011,7 +1945,7 @@
         <p:nvSpPr>
           <p:cNvPr id="4" name="Slide Number Placeholder 3"/>
           <p:cNvSpPr>
-            <a:spLocks xmlns:a="http://schemas.openxmlformats.org/drawingml/2006/main" noGrp="1"/>
+            <a:spLocks noGrp="1"/>
           </p:cNvSpPr>
           <p:nvPr>
             <p:ph type="sldNum" idx="5"/>
@@ -2019,21 +1953,23 @@
         </p:nvSpPr>
         <p:spPr/>
         <p:txBody>
-          <a:bodyPr xmlns:a="http://schemas.openxmlformats.org/drawingml/2006/main"/>
-          <a:lstStyle xmlns:a="http://schemas.openxmlformats.org/drawingml/2006/main"/>
-          <a:p xmlns:a="http://schemas.openxmlformats.org/drawingml/2006/main"/>
+          <a:bodyPr/>
+          <a:lstStyle/>
+          <a:p>
+            <a:endParaRPr/>
+          </a:p>
         </p:txBody>
       </p:sp>
     </p:spTree>
   </p:cSld>
   <p:clrMapOvr>
-    <a:masterClrMapping xmlns:a="http://schemas.openxmlformats.org/drawingml/2006/main"/>
+    <a:masterClrMapping/>
   </p:clrMapOvr>
 </p:notes>
 </file>
 
 <file path=ppt/notesSlides/notesSlide9.xml><?xml version="1.0" encoding="utf-8"?>
-<p:notes xmlns:p="http://schemas.openxmlformats.org/presentationml/2006/main">
+<p:notes xmlns:a="http://schemas.openxmlformats.org/drawingml/2006/main" xmlns:r="http://schemas.openxmlformats.org/officeDocument/2006/relationships" xmlns:p="http://schemas.openxmlformats.org/presentationml/2006/main">
   <p:cSld>
     <p:spTree>
       <p:nvGrpSpPr>
@@ -2042,16 +1978,21 @@
         <p:nvPr/>
       </p:nvGrpSpPr>
       <p:grpSpPr>
-        <a:xfrm xmlns:a="http://schemas.openxmlformats.org/drawingml/2006/main"/>
+        <a:xfrm>
+          <a:off x="0" y="0"/>
+          <a:ext cx="0" cy="0"/>
+          <a:chOff x="0" y="0"/>
+          <a:chExt cx="0" cy="0"/>
+        </a:xfrm>
       </p:grpSpPr>
       <p:sp>
         <p:nvSpPr>
           <p:cNvPr id="2" name="Slide Image Placeholder 1"/>
           <p:cNvSpPr>
-            <a:spLocks xmlns:a="http://schemas.openxmlformats.org/drawingml/2006/main" noGrp="1"/>
+            <a:spLocks noGrp="1" noRot="1" noChangeAspect="1"/>
           </p:cNvSpPr>
           <p:nvPr>
-            <p:ph type="sldImg" idx="0"/>
+            <p:ph type="sldImg"/>
           </p:nvPr>
         </p:nvSpPr>
         <p:spPr/>
@@ -2060,7 +2001,7 @@
         <p:nvSpPr>
           <p:cNvPr id="3" name="Notes Placeholder 2"/>
           <p:cNvSpPr>
-            <a:spLocks xmlns:a="http://schemas.openxmlformats.org/drawingml/2006/main" noGrp="1"/>
+            <a:spLocks noGrp="1"/>
           </p:cNvSpPr>
           <p:nvPr>
             <p:ph type="body" idx="1"/>
@@ -2068,132 +2009,120 @@
         </p:nvSpPr>
         <p:spPr/>
         <p:txBody>
-          <a:bodyPr xmlns:a="http://schemas.openxmlformats.org/drawingml/2006/main"/>
-          <a:lstStyle xmlns:a="http://schemas.openxmlformats.org/drawingml/2006/main"/>
-          <a:p xmlns:a="http://schemas.openxmlformats.org/drawingml/2006/main">
+          <a:bodyPr/>
+          <a:lstStyle/>
+          <a:p>
             <a:r>
               <a:t>https://github.com/ArjanCodes/examples/blob/main/2025/typehints/generic_return.py</a:t>
             </a:r>
           </a:p>
-          <a:p xmlns:a="http://schemas.openxmlformats.org/drawingml/2006/main">
+          <a:p>
             <a:r>
               <a:t>Código adaptado de ArjanCodes, MIT. Véase ARJANCODES_LICENSE.txt.</a:t>
             </a:r>
           </a:p>
-          <a:p xmlns:a="http://schemas.openxmlformats.org/drawingml/2006/main">
-            <a:r>
-              <a:t/>
-            </a:r>
-          </a:p>
-          <a:p xmlns:a="http://schemas.openxmlformats.org/drawingml/2006/main">
+          <a:p>
+            <a:endParaRPr/>
+          </a:p>
+          <a:p>
             <a:r>
               <a:t>MIT License</a:t>
             </a:r>
           </a:p>
-          <a:p xmlns:a="http://schemas.openxmlformats.org/drawingml/2006/main">
-            <a:r>
-              <a:t/>
-            </a:r>
-          </a:p>
-          <a:p xmlns:a="http://schemas.openxmlformats.org/drawingml/2006/main">
+          <a:p>
+            <a:endParaRPr/>
+          </a:p>
+          <a:p>
             <a:r>
               <a:t>Copyright (c) 2023 ArjanCodes</a:t>
             </a:r>
           </a:p>
-          <a:p xmlns:a="http://schemas.openxmlformats.org/drawingml/2006/main">
-            <a:r>
-              <a:t/>
-            </a:r>
-          </a:p>
-          <a:p xmlns:a="http://schemas.openxmlformats.org/drawingml/2006/main">
+          <a:p>
+            <a:endParaRPr/>
+          </a:p>
+          <a:p>
             <a:r>
               <a:t>Permission is hereby granted, free of charge, to any person obtaining a copy</a:t>
             </a:r>
           </a:p>
-          <a:p xmlns:a="http://schemas.openxmlformats.org/drawingml/2006/main">
+          <a:p>
             <a:r>
               <a:t>of this software and associated documentation files (the "Software"), to deal</a:t>
             </a:r>
           </a:p>
-          <a:p xmlns:a="http://schemas.openxmlformats.org/drawingml/2006/main">
+          <a:p>
             <a:r>
               <a:t>in the Software without restriction, including without limitation the rights</a:t>
             </a:r>
           </a:p>
-          <a:p xmlns:a="http://schemas.openxmlformats.org/drawingml/2006/main">
+          <a:p>
             <a:r>
               <a:t>to use, copy, modify, merge, publish, distribute, sublicense, and/or sell</a:t>
             </a:r>
           </a:p>
-          <a:p xmlns:a="http://schemas.openxmlformats.org/drawingml/2006/main">
+          <a:p>
             <a:r>
               <a:t>copies of the Software, and to permit persons to whom the Software is</a:t>
             </a:r>
           </a:p>
-          <a:p xmlns:a="http://schemas.openxmlformats.org/drawingml/2006/main">
+          <a:p>
             <a:r>
               <a:t>furnished to do so, subject to the following conditions:</a:t>
             </a:r>
           </a:p>
-          <a:p xmlns:a="http://schemas.openxmlformats.org/drawingml/2006/main">
-            <a:r>
-              <a:t/>
-            </a:r>
-          </a:p>
-          <a:p xmlns:a="http://schemas.openxmlformats.org/drawingml/2006/main">
+          <a:p>
+            <a:endParaRPr/>
+          </a:p>
+          <a:p>
             <a:r>
               <a:t>The above copyright notice and this permission notice shall be included in all</a:t>
             </a:r>
           </a:p>
-          <a:p xmlns:a="http://schemas.openxmlformats.org/drawingml/2006/main">
+          <a:p>
             <a:r>
               <a:t>copies or substantial portions of the Software.</a:t>
             </a:r>
           </a:p>
-          <a:p xmlns:a="http://schemas.openxmlformats.org/drawingml/2006/main">
-            <a:r>
-              <a:t/>
-            </a:r>
-          </a:p>
-          <a:p xmlns:a="http://schemas.openxmlformats.org/drawingml/2006/main">
+          <a:p>
+            <a:endParaRPr/>
+          </a:p>
+          <a:p>
             <a:r>
               <a:t>THE SOFTWARE IS PROVIDED "AS IS", WITHOUT WARRANTY OF ANY KIND, EXPRESS OR</a:t>
             </a:r>
           </a:p>
-          <a:p xmlns:a="http://schemas.openxmlformats.org/drawingml/2006/main">
+          <a:p>
             <a:r>
               <a:t>IMPLIED, INCLUDING BUT NOT LIMITED TO THE WARRANTIES OF MERCHANTABILITY,</a:t>
             </a:r>
           </a:p>
-          <a:p xmlns:a="http://schemas.openxmlformats.org/drawingml/2006/main">
+          <a:p>
             <a:r>
               <a:t>FITNESS FOR A PARTICULAR PURPOSE AND NONINFRINGEMENT. IN NO EVENT SHALL THE</a:t>
             </a:r>
           </a:p>
-          <a:p xmlns:a="http://schemas.openxmlformats.org/drawingml/2006/main">
+          <a:p>
             <a:r>
               <a:t>AUTHORS OR COPYRIGHT HOLDERS BE LIABLE FOR ANY CLAIM, DAMAGES OR OTHER</a:t>
             </a:r>
           </a:p>
-          <a:p xmlns:a="http://schemas.openxmlformats.org/drawingml/2006/main">
+          <a:p>
             <a:r>
               <a:t>LIABILITY, WHETHER IN AN ACTION OF CONTRACT, TORT OR OTHERWISE, ARISING FROM,</a:t>
             </a:r>
           </a:p>
-          <a:p xmlns:a="http://schemas.openxmlformats.org/drawingml/2006/main">
+          <a:p>
             <a:r>
               <a:t>OUT OF OR IN CONNECTION WITH THE SOFTWARE OR THE USE OR OTHER DEALINGS IN THE</a:t>
             </a:r>
           </a:p>
-          <a:p xmlns:a="http://schemas.openxmlformats.org/drawingml/2006/main">
+          <a:p>
             <a:r>
               <a:t>SOFTWARE.</a:t>
             </a:r>
           </a:p>
-          <a:p xmlns:a="http://schemas.openxmlformats.org/drawingml/2006/main">
-            <a:r>
-              <a:t/>
-            </a:r>
+          <a:p>
+            <a:endParaRPr/>
           </a:p>
         </p:txBody>
       </p:sp>
@@ -2201,7 +2130,7 @@
         <p:nvSpPr>
           <p:cNvPr id="4" name="Slide Number Placeholder 3"/>
           <p:cNvSpPr>
-            <a:spLocks xmlns:a="http://schemas.openxmlformats.org/drawingml/2006/main" noGrp="1"/>
+            <a:spLocks noGrp="1"/>
           </p:cNvSpPr>
           <p:nvPr>
             <p:ph type="sldNum" idx="5"/>
@@ -2209,21 +2138,23 @@
         </p:nvSpPr>
         <p:spPr/>
         <p:txBody>
-          <a:bodyPr xmlns:a="http://schemas.openxmlformats.org/drawingml/2006/main"/>
-          <a:lstStyle xmlns:a="http://schemas.openxmlformats.org/drawingml/2006/main"/>
-          <a:p xmlns:a="http://schemas.openxmlformats.org/drawingml/2006/main"/>
+          <a:bodyPr/>
+          <a:lstStyle/>
+          <a:p>
+            <a:endParaRPr/>
+          </a:p>
         </p:txBody>
       </p:sp>
     </p:spTree>
   </p:cSld>
   <p:clrMapOvr>
-    <a:masterClrMapping xmlns:a="http://schemas.openxmlformats.org/drawingml/2006/main"/>
+    <a:masterClrMapping/>
   </p:clrMapOvr>
 </p:notes>
 </file>
 
 <file path=ppt/slideLayouts/slideLayout1.xml><?xml version="1.0" encoding="utf-8"?>
-<p:sldLayout xmlns:p="http://schemas.openxmlformats.org/presentationml/2006/main" type="title">
+<p:sldLayout xmlns:a="http://schemas.openxmlformats.org/drawingml/2006/main" xmlns:r="http://schemas.openxmlformats.org/officeDocument/2006/relationships" xmlns:p="http://schemas.openxmlformats.org/presentationml/2006/main" type="title">
   <p:cSld name="Title Slide">
     <p:spTree>
       <p:nvGrpSpPr>
@@ -2232,19 +2163,27 @@
         <p:nvPr/>
       </p:nvGrpSpPr>
       <p:grpSpPr>
-        <a:xfrm xmlns:a="http://schemas.openxmlformats.org/drawingml/2006/main"/>
+        <a:xfrm>
+          <a:off x="0" y="0"/>
+          <a:ext cx="0" cy="0"/>
+          <a:chOff x="0" y="0"/>
+          <a:chExt cx="0" cy="0"/>
+        </a:xfrm>
       </p:grpSpPr>
     </p:spTree>
   </p:cSld>
+  <p:clrMapOvr>
+    <a:masterClrMapping/>
+  </p:clrMapOvr>
 </p:sldLayout>
 </file>
 
 <file path=ppt/slideMasters/slideMaster1.xml><?xml version="1.0" encoding="utf-8"?>
-<p:sldMaster xmlns:p="http://schemas.openxmlformats.org/presentationml/2006/main">
+<p:sldMaster xmlns:a="http://schemas.openxmlformats.org/drawingml/2006/main" xmlns:r="http://schemas.openxmlformats.org/officeDocument/2006/relationships" xmlns:p="http://schemas.openxmlformats.org/presentationml/2006/main">
   <p:cSld name="Master">
     <p:bg>
       <p:bgRef idx="1001">
-        <a:schemeClr xmlns:a="http://schemas.openxmlformats.org/drawingml/2006/main" val="bg1"/>
+        <a:schemeClr val="bg1"/>
       </p:bgRef>
     </p:bg>
     <p:spTree>
@@ -2254,17 +2193,22 @@
         <p:nvPr/>
       </p:nvGrpSpPr>
       <p:grpSpPr>
-        <a:xfrm xmlns:a="http://schemas.openxmlformats.org/drawingml/2006/main"/>
+        <a:xfrm>
+          <a:off x="0" y="0"/>
+          <a:ext cx="0" cy="0"/>
+          <a:chOff x="0" y="0"/>
+          <a:chExt cx="0" cy="0"/>
+        </a:xfrm>
       </p:grpSpPr>
     </p:spTree>
   </p:cSld>
   <p:clrMap bg1="lt1" tx1="dk1" bg2="lt2" tx2="dk2" accent1="accent1" accent2="accent2" accent3="accent3" accent4="accent4" accent5="accent5" accent6="accent6" hlink="hlink" folHlink="folHlink"/>
   <p:sldLayoutIdLst>
-    <p:sldLayoutId xmlns:r="http://schemas.openxmlformats.org/officeDocument/2006/relationships" id="2147483649" r:id="Rced73bc5e01b4880"/>
+    <p:sldLayoutId id="2147483649" r:id="rId1"/>
   </p:sldLayoutIdLst>
   <p:txStyles>
     <p:titleStyle>
-      <a:lvl1pPr xmlns:a="http://schemas.openxmlformats.org/drawingml/2006/main" algn="l">
+      <a:lvl1pPr algn="l">
         <a:lnSpc>
           <a:spcPct val="90000"/>
         </a:lnSpc>
@@ -2283,7 +2227,7 @@
       </a:lvl1pPr>
     </p:titleStyle>
     <p:bodyStyle>
-      <a:lvl1pPr xmlns:a="http://schemas.openxmlformats.org/drawingml/2006/main" marL="228600" indent="-228600" algn="l">
+      <a:lvl1pPr marL="228600" indent="-228600" algn="l">
         <a:lnSpc>
           <a:spcPct val="90000"/>
         </a:lnSpc>
@@ -2300,7 +2244,7 @@
           <a:cs typeface="+mn-lt"/>
         </a:defRPr>
       </a:lvl1pPr>
-      <a:lvl2pPr xmlns:a="http://schemas.openxmlformats.org/drawingml/2006/main" marL="685800" indent="-228600" algn="l">
+      <a:lvl2pPr marL="685800" indent="-228600" algn="l">
         <a:lnSpc>
           <a:spcPct val="90000"/>
         </a:lnSpc>
@@ -2317,7 +2261,7 @@
           <a:cs typeface="+mn-lt"/>
         </a:defRPr>
       </a:lvl2pPr>
-      <a:lvl3pPr xmlns:a="http://schemas.openxmlformats.org/drawingml/2006/main" marL="1143000" indent="-228600" algn="l">
+      <a:lvl3pPr marL="1143000" indent="-228600" algn="l">
         <a:lnSpc>
           <a:spcPct val="90000"/>
         </a:lnSpc>
@@ -2334,7 +2278,7 @@
           <a:cs typeface="+mn-lt"/>
         </a:defRPr>
       </a:lvl3pPr>
-      <a:lvl4pPr xmlns:a="http://schemas.openxmlformats.org/drawingml/2006/main" marL="1600200" indent="-228600" algn="l">
+      <a:lvl4pPr marL="1600200" indent="-228600" algn="l">
         <a:lnSpc>
           <a:spcPct val="90000"/>
         </a:lnSpc>
@@ -2351,7 +2295,7 @@
           <a:cs typeface="+mn-lt"/>
         </a:defRPr>
       </a:lvl4pPr>
-      <a:lvl5pPr xmlns:a="http://schemas.openxmlformats.org/drawingml/2006/main" marL="2057400" indent="-228600" algn="l">
+      <a:lvl5pPr marL="2057400" indent="-228600" algn="l">
         <a:lnSpc>
           <a:spcPct val="90000"/>
         </a:lnSpc>
@@ -2368,7 +2312,7 @@
           <a:cs typeface="+mn-lt"/>
         </a:defRPr>
       </a:lvl5pPr>
-      <a:lvl6pPr xmlns:a="http://schemas.openxmlformats.org/drawingml/2006/main" marL="2514600" indent="-228600" algn="l">
+      <a:lvl6pPr marL="2514600" indent="-228600" algn="l">
         <a:lnSpc>
           <a:spcPct val="90000"/>
         </a:lnSpc>
@@ -2385,7 +2329,7 @@
           <a:cs typeface="+mn-lt"/>
         </a:defRPr>
       </a:lvl6pPr>
-      <a:lvl7pPr xmlns:a="http://schemas.openxmlformats.org/drawingml/2006/main" marL="2971800" indent="-228600" algn="l">
+      <a:lvl7pPr marL="2971800" indent="-228600" algn="l">
         <a:lnSpc>
           <a:spcPct val="90000"/>
         </a:lnSpc>
@@ -2402,7 +2346,7 @@
           <a:cs typeface="+mn-lt"/>
         </a:defRPr>
       </a:lvl7pPr>
-      <a:lvl8pPr xmlns:a="http://schemas.openxmlformats.org/drawingml/2006/main" marL="3429000" indent="-228600" algn="l">
+      <a:lvl8pPr marL="3429000" indent="-228600" algn="l">
         <a:lnSpc>
           <a:spcPct val="90000"/>
         </a:lnSpc>
@@ -2419,7 +2363,7 @@
           <a:cs typeface="+mn-lt"/>
         </a:defRPr>
       </a:lvl8pPr>
-      <a:lvl9pPr xmlns:a="http://schemas.openxmlformats.org/drawingml/2006/main" marL="3886200" indent="-228600" algn="l">
+      <a:lvl9pPr marL="3886200" indent="-228600" algn="l">
         <a:lnSpc>
           <a:spcPct val="90000"/>
         </a:lnSpc>
@@ -2438,7 +2382,7 @@
       </a:lvl9pPr>
     </p:bodyStyle>
     <p:otherStyle>
-      <a:lvl1pPr xmlns:a="http://schemas.openxmlformats.org/drawingml/2006/main" marL="0" algn="l">
+      <a:lvl1pPr marL="0" algn="l">
         <a:buNone/>
         <a:defRPr sz="1800">
           <a:solidFill>
@@ -2449,7 +2393,7 @@
           <a:cs typeface="+mn-lt"/>
         </a:defRPr>
       </a:lvl1pPr>
-      <a:lvl2pPr xmlns:a="http://schemas.openxmlformats.org/drawingml/2006/main" marL="457200" algn="l">
+      <a:lvl2pPr marL="457200" algn="l">
         <a:buNone/>
         <a:defRPr sz="1800">
           <a:solidFill>
@@ -2460,7 +2404,7 @@
           <a:cs typeface="+mn-lt"/>
         </a:defRPr>
       </a:lvl2pPr>
-      <a:lvl3pPr xmlns:a="http://schemas.openxmlformats.org/drawingml/2006/main" marL="914400" algn="l">
+      <a:lvl3pPr marL="914400" algn="l">
         <a:buNone/>
         <a:defRPr sz="1800">
           <a:solidFill>
@@ -2471,7 +2415,7 @@
           <a:cs typeface="+mn-lt"/>
         </a:defRPr>
       </a:lvl3pPr>
-      <a:lvl4pPr xmlns:a="http://schemas.openxmlformats.org/drawingml/2006/main" marL="1371600" algn="l">
+      <a:lvl4pPr marL="1371600" algn="l">
         <a:buNone/>
         <a:defRPr sz="1800">
           <a:solidFill>
@@ -2482,7 +2426,7 @@
           <a:cs typeface="+mn-lt"/>
         </a:defRPr>
       </a:lvl4pPr>
-      <a:lvl5pPr xmlns:a="http://schemas.openxmlformats.org/drawingml/2006/main" marL="1828800" algn="l">
+      <a:lvl5pPr marL="1828800" algn="l">
         <a:buNone/>
         <a:defRPr sz="1800">
           <a:solidFill>
@@ -2493,7 +2437,7 @@
           <a:cs typeface="+mn-lt"/>
         </a:defRPr>
       </a:lvl5pPr>
-      <a:lvl6pPr xmlns:a="http://schemas.openxmlformats.org/drawingml/2006/main" marL="2286000" algn="l">
+      <a:lvl6pPr marL="2286000" algn="l">
         <a:buNone/>
         <a:defRPr sz="1800">
           <a:solidFill>
@@ -2504,7 +2448,7 @@
           <a:cs typeface="+mn-lt"/>
         </a:defRPr>
       </a:lvl6pPr>
-      <a:lvl7pPr xmlns:a="http://schemas.openxmlformats.org/drawingml/2006/main" marL="2743200" algn="l">
+      <a:lvl7pPr marL="2743200" algn="l">
         <a:buNone/>
         <a:defRPr sz="1800">
           <a:solidFill>
@@ -2515,7 +2459,7 @@
           <a:cs typeface="+mn-lt"/>
         </a:defRPr>
       </a:lvl7pPr>
-      <a:lvl8pPr xmlns:a="http://schemas.openxmlformats.org/drawingml/2006/main" marL="3200400" algn="l">
+      <a:lvl8pPr marL="3200400" algn="l">
         <a:buNone/>
         <a:defRPr sz="1800">
           <a:solidFill>
@@ -2526,7 +2470,7 @@
           <a:cs typeface="+mn-lt"/>
         </a:defRPr>
       </a:lvl8pPr>
-      <a:lvl9pPr xmlns:a="http://schemas.openxmlformats.org/drawingml/2006/main" marL="3657600" algn="l">
+      <a:lvl9pPr marL="3657600" algn="l">
         <a:buNone/>
         <a:defRPr sz="1800">
           <a:solidFill>
@@ -2542,259 +2486,15 @@
 </p:sldMaster>
 </file>
 
-<file path=ppt/slideMasters/theme/theme2.xml><?xml version="1.0" encoding="utf-8"?>
-<a:theme xmlns:a="http://schemas.openxmlformats.org/drawingml/2006/main" name="ChatGPT">
-  <a:themeElements>
-    <a:clrScheme name="ChatGPT">
-      <a:dk1>
-        <a:srgbClr val="000000"/>
-      </a:dk1>
-      <a:lt1>
-        <a:srgbClr val="FFFFFF"/>
-      </a:lt1>
-      <a:dk2>
-        <a:srgbClr val="0E2841"/>
-      </a:dk2>
-      <a:lt2>
-        <a:srgbClr val="E8E8E8"/>
-      </a:lt2>
-      <a:accent1>
-        <a:srgbClr val="156082"/>
-      </a:accent1>
-      <a:accent2>
-        <a:srgbClr val="E97132"/>
-      </a:accent2>
-      <a:accent3>
-        <a:srgbClr val="196B24"/>
-      </a:accent3>
-      <a:accent4>
-        <a:srgbClr val="0F9ED5"/>
-      </a:accent4>
-      <a:accent5>
-        <a:srgbClr val="A02B93"/>
-      </a:accent5>
-      <a:accent6>
-        <a:srgbClr val="4EA72E"/>
-      </a:accent6>
-      <a:hlink>
-        <a:srgbClr val="467886"/>
-      </a:hlink>
-      <a:folHlink>
-        <a:srgbClr val="96607D"/>
-      </a:folHlink>
-    </a:clrScheme>
-    <a:fontScheme name="Office">
-      <a:majorFont>
-        <a:latin typeface="Calibri Light"/>
-        <a:ea typeface="Calibri Light"/>
-        <a:cs typeface="Calibri Light"/>
-      </a:majorFont>
-      <a:minorFont>
-        <a:latin typeface="Calibri"/>
-        <a:ea typeface="Calibri"/>
-        <a:cs typeface="Calibri"/>
-      </a:minorFont>
-    </a:fontScheme>
-    <a:fmtScheme name="ChatGPT">
-      <a:fillStyleLst>
-        <a:solidFill>
-          <a:schemeClr val="phClr"/>
-        </a:solidFill>
-        <a:gradFill>
-          <a:gsLst>
-            <a:gs pos="0">
-              <a:schemeClr val="phClr">
-                <a:tint val="67000"/>
-                <a:lumMod val="110000"/>
-                <a:satMod val="105000"/>
-              </a:schemeClr>
-            </a:gs>
-            <a:gs pos="50000">
-              <a:schemeClr val="phClr">
-                <a:tint val="73000"/>
-                <a:lumMod val="105000"/>
-                <a:satMod val="103000"/>
-              </a:schemeClr>
-            </a:gs>
-            <a:gs pos="100000">
-              <a:schemeClr val="phClr">
-                <a:tint val="81000"/>
-                <a:lumMod val="105000"/>
-                <a:satMod val="109000"/>
-              </a:schemeClr>
-            </a:gs>
-          </a:gsLst>
-          <a:lin ang="5400000" scaled="0"/>
-        </a:gradFill>
-        <a:gradFill>
-          <a:gsLst>
-            <a:gs pos="0">
-              <a:schemeClr val="phClr">
-                <a:tint val="94000"/>
-                <a:lumMod val="102000"/>
-                <a:satMod val="103000"/>
-              </a:schemeClr>
-            </a:gs>
-            <a:gs pos="50000">
-              <a:schemeClr val="phClr">
-                <a:shade val="100000"/>
-                <a:lumMod val="100000"/>
-                <a:satMod val="110000"/>
-              </a:schemeClr>
-            </a:gs>
-            <a:gs pos="100000">
-              <a:schemeClr val="phClr">
-                <a:shade val="78000"/>
-                <a:lumMod val="99000"/>
-                <a:satMod val="120000"/>
-              </a:schemeClr>
-            </a:gs>
-          </a:gsLst>
-          <a:lin ang="5400000" scaled="0"/>
-        </a:gradFill>
-      </a:fillStyleLst>
-      <a:lnStyleLst>
-        <a:ln w="12700">
-          <a:solidFill>
-            <a:schemeClr val="phClr"/>
-          </a:solidFill>
-          <a:prstDash val="solid"/>
-        </a:ln>
-        <a:ln w="19050">
-          <a:solidFill>
-            <a:schemeClr val="phClr"/>
-          </a:solidFill>
-          <a:prstDash val="solid"/>
-        </a:ln>
-        <a:ln w="25400">
-          <a:solidFill>
-            <a:schemeClr val="phClr"/>
-          </a:solidFill>
-          <a:prstDash val="solid"/>
-        </a:ln>
-      </a:lnStyleLst>
-      <a:effectStyleLst>
-        <a:effectStyle>
-          <a:effectLst/>
-        </a:effectStyle>
-        <a:effectStyle>
-          <a:effectLst/>
-        </a:effectStyle>
-        <a:effectStyle>
-          <a:effectLst>
-            <a:outerShdw blurRad="57150" dist="19050" dir="5400000">
-              <a:srgbClr val="000000">
-                <a:alpha val="16000"/>
-              </a:srgbClr>
-            </a:outerShdw>
-          </a:effectLst>
-        </a:effectStyle>
-        <a:effectStyle>
-          <a:effectLst>
-            <a:outerShdw blurRad="19050" dist="9525" dir="5400000">
-              <a:srgbClr val="000000">
-                <a:alpha val="6000"/>
-              </a:srgbClr>
-            </a:outerShdw>
-          </a:effectLst>
-        </a:effectStyle>
-        <a:effectStyle>
-          <a:effectLst>
-            <a:outerShdw blurRad="28575" dist="9525" dir="5400000">
-              <a:srgbClr val="000000">
-                <a:alpha val="8000"/>
-              </a:srgbClr>
-            </a:outerShdw>
-          </a:effectLst>
-        </a:effectStyle>
-        <a:effectStyle>
-          <a:effectLst>
-            <a:outerShdw blurRad="57150" dist="19050" dir="5400000">
-              <a:srgbClr val="000000">
-                <a:alpha val="10000"/>
-              </a:srgbClr>
-            </a:outerShdw>
-          </a:effectLst>
-        </a:effectStyle>
-        <a:effectStyle>
-          <a:effectLst>
-            <a:outerShdw blurRad="114300" dist="38100" dir="5400000">
-              <a:srgbClr val="000000">
-                <a:alpha val="12000"/>
-              </a:srgbClr>
-            </a:outerShdw>
-          </a:effectLst>
-        </a:effectStyle>
-        <a:effectStyle>
-          <a:effectLst>
-            <a:outerShdw blurRad="171450" dist="57150" dir="5400000">
-              <a:srgbClr val="000000">
-                <a:alpha val="16000"/>
-              </a:srgbClr>
-            </a:outerShdw>
-          </a:effectLst>
-        </a:effectStyle>
-        <a:effectStyle>
-          <a:effectLst>
-            <a:outerShdw blurRad="266700" dist="95250" dir="5400000">
-              <a:srgbClr val="000000">
-                <a:alpha val="24000"/>
-              </a:srgbClr>
-            </a:outerShdw>
-          </a:effectLst>
-        </a:effectStyle>
-      </a:effectStyleLst>
-      <a:bgFillStyleLst>
-        <a:solidFill>
-          <a:schemeClr val="phClr"/>
-        </a:solidFill>
-        <a:solidFill>
-          <a:schemeClr val="phClr">
-            <a:tint val="95000"/>
-            <a:satMod val="170000"/>
-          </a:schemeClr>
-        </a:solidFill>
-        <a:gradFill>
-          <a:gsLst>
-            <a:gs pos="0">
-              <a:schemeClr val="phClr">
-                <a:tint val="93000"/>
-                <a:shade val="98000"/>
-                <a:lumMod val="102000"/>
-                <a:satMod val="150000"/>
-              </a:schemeClr>
-            </a:gs>
-            <a:gs pos="50000">
-              <a:schemeClr val="phClr">
-                <a:tint val="98000"/>
-                <a:shade val="90000"/>
-                <a:lumMod val="103000"/>
-                <a:satMod val="130000"/>
-              </a:schemeClr>
-            </a:gs>
-            <a:gs pos="100000">
-              <a:schemeClr val="phClr">
-                <a:shade val="63000"/>
-                <a:satMod val="120000"/>
-              </a:schemeClr>
-            </a:gs>
-          </a:gsLst>
-          <a:lin ang="5400000" scaled="0"/>
-        </a:gradFill>
-      </a:bgFillStyleLst>
-    </a:fmtScheme>
-  </a:themeElements>
-</a:theme>
-</file>
-
 <file path=ppt/slides/slide1.xml><?xml version="1.0" encoding="utf-8"?>
-<p:sld xmlns:p="http://schemas.openxmlformats.org/presentationml/2006/main">
+<p:sld xmlns:a="http://schemas.openxmlformats.org/drawingml/2006/main" xmlns:r="http://schemas.openxmlformats.org/officeDocument/2006/relationships" xmlns:p="http://schemas.openxmlformats.org/presentationml/2006/main">
   <p:cSld>
     <p:bg>
       <p:bgPr>
-        <a:solidFill xmlns:a="http://schemas.openxmlformats.org/drawingml/2006/main">
+        <a:solidFill>
           <a:srgbClr val="F7F5EF"/>
         </a:solidFill>
+        <a:effectLst/>
       </p:bgPr>
     </p:bg>
     <p:spTree>
@@ -2804,41 +2504,46 @@
         <p:nvPr/>
       </p:nvGrpSpPr>
       <p:grpSpPr>
-        <a:xfrm xmlns:a="http://schemas.openxmlformats.org/drawingml/2006/main"/>
+        <a:xfrm>
+          <a:off x="0" y="0"/>
+          <a:ext cx="0" cy="0"/>
+          <a:chOff x="0" y="0"/>
+          <a:chExt cx="0" cy="0"/>
+        </a:xfrm>
       </p:grpSpPr>
       <p:sp>
         <p:nvSpPr>
-          <p:cNvPr id="6" name="">
-            <a:extLst xmlns:a="http://schemas.openxmlformats.org/drawingml/2006/main">
+          <p:cNvPr id="6" name="Rectangle 5">
+            <a:extLst>
               <a:ext uri="{FF2B5EF4-FFF2-40B4-BE49-F238E27FC236}">
                 <a16:creationId xmlns:a16="http://schemas.microsoft.com/office/drawing/2014/main" id="{165FCC21-3E9C-4361-9D9A-5541CB2577BD}"/>
               </a:ext>
             </a:extLst>
           </p:cNvPr>
           <p:cNvSpPr>
-            <a:spLocks xmlns:a="http://schemas.openxmlformats.org/drawingml/2006/main" noGrp="1"/>
+            <a:spLocks noGrp="1"/>
           </p:cNvSpPr>
           <p:nvPr/>
         </p:nvSpPr>
         <p:spPr>
-          <a:xfrm xmlns:a="http://schemas.openxmlformats.org/drawingml/2006/main">
+          <a:xfrm>
             <a:off x="609600" y="438150"/>
             <a:ext cx="10934700" cy="952500"/>
           </a:xfrm>
-          <a:prstGeom xmlns:a="http://schemas.openxmlformats.org/drawingml/2006/main" prst="rect">
+          <a:prstGeom prst="rect">
             <a:avLst/>
           </a:prstGeom>
-          <a:noFill xmlns:a="http://schemas.openxmlformats.org/drawingml/2006/main"/>
-          <a:ln xmlns:a="http://schemas.openxmlformats.org/drawingml/2006/main" w="0">
+          <a:noFill/>
+          <a:ln w="0">
             <a:noFill/>
           </a:ln>
         </p:spPr>
         <p:txBody>
-          <a:bodyPr xmlns:a="http://schemas.openxmlformats.org/drawingml/2006/main">
+          <a:bodyPr>
             <a:noAutofit/>
           </a:bodyPr>
-          <a:lstStyle xmlns:a="http://schemas.openxmlformats.org/drawingml/2006/main"/>
-          <a:p xmlns:a="http://schemas.openxmlformats.org/drawingml/2006/main">
+          <a:lstStyle/>
+          <a:p>
             <a:pPr>
               <a:defRPr sz="3450" b="1">
                 <a:solidFill>
@@ -2850,18 +2555,48 @@
               </a:defRPr>
             </a:pPr>
             <a:r>
-              <a:rPr sz="3450" b="1">
-                <a:solidFill>
-                  <a:srgbClr val="172B3A"/>
-                </a:solidFill>
-                <a:latin typeface="Helvetica Neue"/>
-                <a:ea typeface="Helvetica Neue"/>
-                <a:cs typeface="Helvetica Neue"/>
-              </a:rPr>
-              <a:t>Anotaciones de tipo</a:t>
-            </a:r>
-          </a:p>
-          <a:p xmlns:a="http://schemas.openxmlformats.org/drawingml/2006/main">
+              <a:rPr sz="3450" b="1" dirty="0" err="1">
+                <a:solidFill>
+                  <a:srgbClr val="172B3A"/>
+                </a:solidFill>
+                <a:latin typeface="Helvetica Neue"/>
+                <a:ea typeface="Helvetica Neue"/>
+                <a:cs typeface="Helvetica Neue"/>
+              </a:rPr>
+              <a:t>Anotaciones</a:t>
+            </a:r>
+            <a:r>
+              <a:rPr sz="3450" b="1" dirty="0">
+                <a:solidFill>
+                  <a:srgbClr val="172B3A"/>
+                </a:solidFill>
+                <a:latin typeface="Helvetica Neue"/>
+                <a:ea typeface="Helvetica Neue"/>
+                <a:cs typeface="Helvetica Neue"/>
+              </a:rPr>
+              <a:t> de </a:t>
+            </a:r>
+            <a:r>
+              <a:rPr sz="3450" b="1" dirty="0" err="1">
+                <a:solidFill>
+                  <a:srgbClr val="172B3A"/>
+                </a:solidFill>
+                <a:latin typeface="Helvetica Neue"/>
+                <a:ea typeface="Helvetica Neue"/>
+                <a:cs typeface="Helvetica Neue"/>
+              </a:rPr>
+              <a:t>tipo</a:t>
+            </a:r>
+            <a:endParaRPr sz="3450" b="1" dirty="0">
+              <a:solidFill>
+                <a:srgbClr val="172B3A"/>
+              </a:solidFill>
+              <a:latin typeface="Helvetica Neue"/>
+              <a:ea typeface="Helvetica Neue"/>
+              <a:cs typeface="Helvetica Neue"/>
+            </a:endParaRPr>
+          </a:p>
+          <a:p>
             <a:pPr>
               <a:defRPr sz="3450" b="1">
                 <a:solidFill>
@@ -2873,52 +2608,93 @@
               </a:defRPr>
             </a:pPr>
             <a:r>
-              <a:rPr sz="3450" b="1">
-                <a:solidFill>
-                  <a:srgbClr val="172B3A"/>
-                </a:solidFill>
-                <a:latin typeface="Helvetica Neue"/>
-                <a:ea typeface="Helvetica Neue"/>
-                <a:cs typeface="Helvetica Neue"/>
-              </a:rPr>
-              <a:t>y validación de datos</a:t>
-            </a:r>
-          </a:p>
-        </p:txBody>
-      </p:sp>
-      <p:sp>
-        <p:nvSpPr>
-          <p:cNvPr id="2" name="">
-            <a:extLst xmlns:a="http://schemas.openxmlformats.org/drawingml/2006/main">
+              <a:rPr sz="3450" b="1" dirty="0">
+                <a:solidFill>
+                  <a:srgbClr val="172B3A"/>
+                </a:solidFill>
+                <a:latin typeface="Helvetica Neue"/>
+                <a:ea typeface="Helvetica Neue"/>
+                <a:cs typeface="Helvetica Neue"/>
+              </a:rPr>
+              <a:t>y </a:t>
+            </a:r>
+            <a:r>
+              <a:rPr sz="3450" b="1" dirty="0" err="1">
+                <a:solidFill>
+                  <a:srgbClr val="172B3A"/>
+                </a:solidFill>
+                <a:latin typeface="Helvetica Neue"/>
+                <a:ea typeface="Helvetica Neue"/>
+                <a:cs typeface="Helvetica Neue"/>
+              </a:rPr>
+              <a:t>validación</a:t>
+            </a:r>
+            <a:r>
+              <a:rPr sz="3450" b="1" dirty="0">
+                <a:solidFill>
+                  <a:srgbClr val="172B3A"/>
+                </a:solidFill>
+                <a:latin typeface="Helvetica Neue"/>
+                <a:ea typeface="Helvetica Neue"/>
+                <a:cs typeface="Helvetica Neue"/>
+              </a:rPr>
+              <a:t> de </a:t>
+            </a:r>
+            <a:r>
+              <a:rPr sz="3450" b="1" dirty="0" err="1">
+                <a:solidFill>
+                  <a:srgbClr val="172B3A"/>
+                </a:solidFill>
+                <a:latin typeface="Helvetica Neue"/>
+                <a:ea typeface="Helvetica Neue"/>
+                <a:cs typeface="Helvetica Neue"/>
+              </a:rPr>
+              <a:t>datos</a:t>
+            </a:r>
+            <a:endParaRPr sz="3450" b="1" dirty="0">
+              <a:solidFill>
+                <a:srgbClr val="172B3A"/>
+              </a:solidFill>
+              <a:latin typeface="Helvetica Neue"/>
+              <a:ea typeface="Helvetica Neue"/>
+              <a:cs typeface="Helvetica Neue"/>
+            </a:endParaRPr>
+          </a:p>
+        </p:txBody>
+      </p:sp>
+      <p:sp>
+        <p:nvSpPr>
+          <p:cNvPr id="2" name="Rectangle 1">
+            <a:extLst>
               <a:ext uri="{FF2B5EF4-FFF2-40B4-BE49-F238E27FC236}">
                 <a16:creationId xmlns:a16="http://schemas.microsoft.com/office/drawing/2014/main" id="{37D52715-53DF-4B86-B840-60DCCE3F13DB}"/>
               </a:ext>
             </a:extLst>
           </p:cNvPr>
           <p:cNvSpPr>
-            <a:spLocks xmlns:a="http://schemas.openxmlformats.org/drawingml/2006/main" noGrp="1"/>
+            <a:spLocks noGrp="1"/>
           </p:cNvSpPr>
           <p:nvPr/>
         </p:nvSpPr>
         <p:spPr>
-          <a:xfrm xmlns:a="http://schemas.openxmlformats.org/drawingml/2006/main">
+          <a:xfrm>
             <a:off x="11144250" y="6343650"/>
             <a:ext cx="476250" cy="266700"/>
           </a:xfrm>
-          <a:prstGeom xmlns:a="http://schemas.openxmlformats.org/drawingml/2006/main" prst="rect">
+          <a:prstGeom prst="rect">
             <a:avLst/>
           </a:prstGeom>
-          <a:noFill xmlns:a="http://schemas.openxmlformats.org/drawingml/2006/main"/>
-          <a:ln xmlns:a="http://schemas.openxmlformats.org/drawingml/2006/main" w="0">
+          <a:noFill/>
+          <a:ln w="0">
             <a:noFill/>
           </a:ln>
         </p:spPr>
         <p:txBody>
-          <a:bodyPr xmlns:a="http://schemas.openxmlformats.org/drawingml/2006/main">
+          <a:bodyPr>
             <a:noAutofit/>
           </a:bodyPr>
-          <a:lstStyle xmlns:a="http://schemas.openxmlformats.org/drawingml/2006/main"/>
-          <a:p xmlns:a="http://schemas.openxmlformats.org/drawingml/2006/main">
+          <a:lstStyle/>
+          <a:p>
             <a:pPr>
               <a:defRPr sz="1350" b="0">
                 <a:solidFill>
@@ -2943,61 +2719,39 @@
           </a:p>
         </p:txBody>
       </p:sp>
-      <p:pic>
-        <p:nvPicPr>
-          <p:cNvPr id="8" name=""/>
-          <p:cNvPicPr>
-            <a:picLocks xmlns:a="http://schemas.openxmlformats.org/drawingml/2006/main" noChangeAspect="1"/>
-          </p:cNvPicPr>
-          <p:nvPr/>
-        </p:nvPicPr>
-        <p:blipFill>
-          <a:blip xmlns:r="http://schemas.openxmlformats.org/officeDocument/2006/relationships" xmlns:a="http://schemas.openxmlformats.org/drawingml/2006/main" r:embed="Ref7592bf5eae4bcc"/>
-          <a:stretch xmlns:a="http://schemas.openxmlformats.org/drawingml/2006/main"/>
-        </p:blipFill>
-        <p:spPr>
-          <a:xfrm xmlns:a="http://schemas.openxmlformats.org/drawingml/2006/main">
-            <a:off x="628650" y="4493768"/>
-            <a:ext cx="3429000" cy="1013715"/>
-          </a:xfrm>
-          <a:prstGeom xmlns:a="http://schemas.openxmlformats.org/drawingml/2006/main" prst="rect">
-            <a:avLst/>
-          </a:prstGeom>
-        </p:spPr>
-      </p:pic>
-      <p:sp>
-        <p:nvSpPr>
-          <p:cNvPr id="4" name="">
-            <a:extLst xmlns:a="http://schemas.openxmlformats.org/drawingml/2006/main">
+      <p:sp>
+        <p:nvSpPr>
+          <p:cNvPr id="4" name="Rectangle 3">
+            <a:extLst>
               <a:ext uri="{FF2B5EF4-FFF2-40B4-BE49-F238E27FC236}">
                 <a16:creationId xmlns:a16="http://schemas.microsoft.com/office/drawing/2014/main" id="{E8BDAD36-5B86-455B-BF69-BF5C24A5F4BD}"/>
               </a:ext>
             </a:extLst>
           </p:cNvPr>
           <p:cNvSpPr>
-            <a:spLocks xmlns:a="http://schemas.openxmlformats.org/drawingml/2006/main" noGrp="1"/>
+            <a:spLocks noGrp="1"/>
           </p:cNvSpPr>
           <p:nvPr/>
         </p:nvSpPr>
         <p:spPr>
-          <a:xfrm xmlns:a="http://schemas.openxmlformats.org/drawingml/2006/main">
+          <a:xfrm>
             <a:off x="647700" y="2571750"/>
             <a:ext cx="8096250" cy="619125"/>
           </a:xfrm>
-          <a:prstGeom xmlns:a="http://schemas.openxmlformats.org/drawingml/2006/main" prst="rect">
+          <a:prstGeom prst="rect">
             <a:avLst/>
           </a:prstGeom>
-          <a:noFill xmlns:a="http://schemas.openxmlformats.org/drawingml/2006/main"/>
-          <a:ln xmlns:a="http://schemas.openxmlformats.org/drawingml/2006/main" w="0">
+          <a:noFill/>
+          <a:ln w="0">
             <a:noFill/>
           </a:ln>
         </p:spPr>
         <p:txBody>
-          <a:bodyPr xmlns:a="http://schemas.openxmlformats.org/drawingml/2006/main">
+          <a:bodyPr>
             <a:noAutofit/>
           </a:bodyPr>
-          <a:lstStyle xmlns:a="http://schemas.openxmlformats.org/drawingml/2006/main"/>
-          <a:p xmlns:a="http://schemas.openxmlformats.org/drawingml/2006/main">
+          <a:lstStyle/>
+          <a:p>
             <a:pPr>
               <a:defRPr sz="2550" b="0">
                 <a:solidFill>
@@ -3009,52 +2763,93 @@
               </a:defRPr>
             </a:pPr>
             <a:r>
-              <a:rPr sz="2550" b="0">
-                <a:solidFill>
-                  <a:srgbClr val="172B3A"/>
-                </a:solidFill>
-                <a:latin typeface="Helvetica Neue"/>
-                <a:ea typeface="Helvetica Neue"/>
-                <a:cs typeface="Helvetica Neue"/>
-              </a:rPr>
-              <a:t>PEP, mypy y Pydantic</a:t>
-            </a:r>
-          </a:p>
-        </p:txBody>
-      </p:sp>
-      <p:sp>
-        <p:nvSpPr>
-          <p:cNvPr id="5" name="">
-            <a:extLst xmlns:a="http://schemas.openxmlformats.org/drawingml/2006/main">
+              <a:rPr sz="2550" b="0" dirty="0">
+                <a:solidFill>
+                  <a:srgbClr val="172B3A"/>
+                </a:solidFill>
+                <a:latin typeface="Helvetica Neue"/>
+                <a:ea typeface="Helvetica Neue"/>
+                <a:cs typeface="Helvetica Neue"/>
+              </a:rPr>
+              <a:t>PEP, </a:t>
+            </a:r>
+            <a:r>
+              <a:rPr sz="2550" b="0" dirty="0" err="1">
+                <a:solidFill>
+                  <a:srgbClr val="172B3A"/>
+                </a:solidFill>
+                <a:latin typeface="Helvetica Neue"/>
+                <a:ea typeface="Helvetica Neue"/>
+                <a:cs typeface="Helvetica Neue"/>
+              </a:rPr>
+              <a:t>mypy</a:t>
+            </a:r>
+            <a:r>
+              <a:rPr sz="2550" b="0" dirty="0">
+                <a:solidFill>
+                  <a:srgbClr val="172B3A"/>
+                </a:solidFill>
+                <a:latin typeface="Helvetica Neue"/>
+                <a:ea typeface="Helvetica Neue"/>
+                <a:cs typeface="Helvetica Neue"/>
+              </a:rPr>
+              <a:t> y </a:t>
+            </a:r>
+            <a:r>
+              <a:rPr sz="2550" b="0" dirty="0" err="1">
+                <a:solidFill>
+                  <a:srgbClr val="172B3A"/>
+                </a:solidFill>
+                <a:latin typeface="Helvetica Neue"/>
+                <a:ea typeface="Helvetica Neue"/>
+                <a:cs typeface="Helvetica Neue"/>
+              </a:rPr>
+              <a:t>Pydantic</a:t>
+            </a:r>
+            <a:endParaRPr sz="2550" b="0" dirty="0">
+              <a:solidFill>
+                <a:srgbClr val="172B3A"/>
+              </a:solidFill>
+              <a:latin typeface="Helvetica Neue"/>
+              <a:ea typeface="Helvetica Neue"/>
+              <a:cs typeface="Helvetica Neue"/>
+            </a:endParaRPr>
+          </a:p>
+        </p:txBody>
+      </p:sp>
+      <p:sp>
+        <p:nvSpPr>
+          <p:cNvPr id="5" name="Rectangle 4">
+            <a:extLst>
               <a:ext uri="{FF2B5EF4-FFF2-40B4-BE49-F238E27FC236}">
                 <a16:creationId xmlns:a16="http://schemas.microsoft.com/office/drawing/2014/main" id="{9535B371-3FF8-4E02-81E4-861EAAAD1277}"/>
               </a:ext>
             </a:extLst>
           </p:cNvPr>
           <p:cNvSpPr>
-            <a:spLocks xmlns:a="http://schemas.openxmlformats.org/drawingml/2006/main" noGrp="1"/>
+            <a:spLocks noGrp="1"/>
           </p:cNvSpPr>
           <p:nvPr/>
         </p:nvSpPr>
         <p:spPr>
-          <a:xfrm xmlns:a="http://schemas.openxmlformats.org/drawingml/2006/main">
+          <a:xfrm>
             <a:off x="647700" y="3381375"/>
             <a:ext cx="9906000" cy="523875"/>
           </a:xfrm>
-          <a:prstGeom xmlns:a="http://schemas.openxmlformats.org/drawingml/2006/main" prst="rect">
+          <a:prstGeom prst="rect">
             <a:avLst/>
           </a:prstGeom>
-          <a:noFill xmlns:a="http://schemas.openxmlformats.org/drawingml/2006/main"/>
-          <a:ln xmlns:a="http://schemas.openxmlformats.org/drawingml/2006/main" w="0">
+          <a:noFill/>
+          <a:ln w="0">
             <a:noFill/>
           </a:ln>
         </p:spPr>
         <p:txBody>
-          <a:bodyPr xmlns:a="http://schemas.openxmlformats.org/drawingml/2006/main">
+          <a:bodyPr>
             <a:noAutofit/>
           </a:bodyPr>
-          <a:lstStyle xmlns:a="http://schemas.openxmlformats.org/drawingml/2006/main"/>
-          <a:p xmlns:a="http://schemas.openxmlformats.org/drawingml/2006/main">
+          <a:lstStyle/>
+          <a:p>
             <a:pPr>
               <a:defRPr sz="1875" b="0">
                 <a:solidFill>
@@ -3066,19 +2861,99 @@
               </a:defRPr>
             </a:pPr>
             <a:r>
-              <a:rPr sz="1875" b="0">
-                <a:solidFill>
-                  <a:srgbClr val="172B3A"/>
-                </a:solidFill>
-                <a:latin typeface="Helvetica Neue"/>
-                <a:ea typeface="Helvetica Neue"/>
-                <a:cs typeface="Helvetica Neue"/>
-              </a:rPr>
-              <a:t>Programación para Inteligencia Artificial</a:t>
-            </a:r>
-          </a:p>
-        </p:txBody>
-      </p:sp>
+              <a:rPr sz="1875" b="1" dirty="0" err="1">
+                <a:solidFill>
+                  <a:srgbClr val="172B3A"/>
+                </a:solidFill>
+                <a:latin typeface="Helvetica Neue"/>
+                <a:ea typeface="Helvetica Neue"/>
+                <a:cs typeface="Helvetica Neue"/>
+              </a:rPr>
+              <a:t>Programación</a:t>
+            </a:r>
+            <a:r>
+              <a:rPr sz="1875" b="1" dirty="0">
+                <a:solidFill>
+                  <a:srgbClr val="172B3A"/>
+                </a:solidFill>
+                <a:latin typeface="Helvetica Neue"/>
+                <a:ea typeface="Helvetica Neue"/>
+                <a:cs typeface="Helvetica Neue"/>
+              </a:rPr>
+              <a:t> para </a:t>
+            </a:r>
+            <a:r>
+              <a:rPr sz="1875" b="1" dirty="0" err="1">
+                <a:solidFill>
+                  <a:srgbClr val="172B3A"/>
+                </a:solidFill>
+                <a:latin typeface="Helvetica Neue"/>
+                <a:ea typeface="Helvetica Neue"/>
+                <a:cs typeface="Helvetica Neue"/>
+              </a:rPr>
+              <a:t>Inteligencia</a:t>
+            </a:r>
+            <a:r>
+              <a:rPr sz="1875" b="1" dirty="0">
+                <a:solidFill>
+                  <a:srgbClr val="172B3A"/>
+                </a:solidFill>
+                <a:latin typeface="Helvetica Neue"/>
+                <a:ea typeface="Helvetica Neue"/>
+                <a:cs typeface="Helvetica Neue"/>
+              </a:rPr>
+              <a:t> Artificial</a:t>
+            </a:r>
+          </a:p>
+        </p:txBody>
+      </p:sp>
+      <p:pic>
+        <p:nvPicPr>
+          <p:cNvPr id="1026" name="Picture 2" descr="Python Logo">
+            <a:extLst>
+              <a:ext uri="{FF2B5EF4-FFF2-40B4-BE49-F238E27FC236}">
+                <a16:creationId xmlns:a16="http://schemas.microsoft.com/office/drawing/2014/main" id="{7C8CD3DD-B7B1-15AD-CE50-76935E9ECBDD}"/>
+              </a:ext>
+            </a:extLst>
+          </p:cNvPr>
+          <p:cNvPicPr>
+            <a:picLocks noChangeAspect="1" noChangeArrowheads="1"/>
+          </p:cNvPicPr>
+          <p:nvPr/>
+        </p:nvPicPr>
+        <p:blipFill>
+          <a:blip r:embed="rId3">
+            <a:extLst>
+              <a:ext uri="{28A0092B-C50C-407E-A947-70E740481C1C}">
+                <a14:useLocalDpi xmlns:a14="http://schemas.microsoft.com/office/drawing/2010/main" val="0"/>
+              </a:ext>
+            </a:extLst>
+          </a:blip>
+          <a:srcRect/>
+          <a:stretch>
+            <a:fillRect/>
+          </a:stretch>
+        </p:blipFill>
+        <p:spPr bwMode="auto">
+          <a:xfrm>
+            <a:off x="647700" y="3905250"/>
+            <a:ext cx="4207466" cy="2803247"/>
+          </a:xfrm>
+          <a:prstGeom prst="rect">
+            <a:avLst/>
+          </a:prstGeom>
+          <a:noFill/>
+          <a:extLst>
+            <a:ext uri="{909E8E84-426E-40DD-AFC4-6F175D3DCCD1}">
+              <a14:hiddenFill xmlns:a14="http://schemas.microsoft.com/office/drawing/2010/main">
+                <a:solidFill>
+                  <a:srgbClr val="FFFFFF"/>
+                </a:solidFill>
+              </a14:hiddenFill>
+            </a:ext>
+          </a:extLst>
+        </p:spPr>
+      </p:pic>
     </p:spTree>
     <p:extLst>
       <p:ext uri="{BB962C8B-B14F-4D97-AF65-F5344CB8AC3E}">
@@ -3086,17 +2961,21 @@
       </p:ext>
     </p:extLst>
   </p:cSld>
+  <p:clrMapOvr>
+    <a:masterClrMapping/>
+  </p:clrMapOvr>
 </p:sld>
 </file>
 
 <file path=ppt/slides/slide10.xml><?xml version="1.0" encoding="utf-8"?>
-<p:sld xmlns:p="http://schemas.openxmlformats.org/presentationml/2006/main">
+<p:sld xmlns:a="http://schemas.openxmlformats.org/drawingml/2006/main" xmlns:r="http://schemas.openxmlformats.org/officeDocument/2006/relationships" xmlns:p="http://schemas.openxmlformats.org/presentationml/2006/main">
   <p:cSld>
     <p:bg>
       <p:bgPr>
-        <a:solidFill xmlns:a="http://schemas.openxmlformats.org/drawingml/2006/main">
+        <a:solidFill>
           <a:srgbClr val="F7F5EF"/>
         </a:solidFill>
+        <a:effectLst/>
       </p:bgPr>
     </p:bg>
     <p:spTree>
@@ -3106,41 +2985,46 @@
         <p:nvPr/>
       </p:nvGrpSpPr>
       <p:grpSpPr>
-        <a:xfrm xmlns:a="http://schemas.openxmlformats.org/drawingml/2006/main"/>
+        <a:xfrm>
+          <a:off x="0" y="0"/>
+          <a:ext cx="0" cy="0"/>
+          <a:chOff x="0" y="0"/>
+          <a:chExt cx="0" cy="0"/>
+        </a:xfrm>
       </p:grpSpPr>
       <p:sp>
         <p:nvSpPr>
-          <p:cNvPr id="6" name="">
-            <a:extLst xmlns:a="http://schemas.openxmlformats.org/drawingml/2006/main">
+          <p:cNvPr id="6" name="Rectangle 5">
+            <a:extLst>
               <a:ext uri="{FF2B5EF4-FFF2-40B4-BE49-F238E27FC236}">
                 <a16:creationId xmlns:a16="http://schemas.microsoft.com/office/drawing/2014/main" id="{25617959-C689-4C83-8A50-E22493CC1920}"/>
               </a:ext>
             </a:extLst>
           </p:cNvPr>
           <p:cNvSpPr>
-            <a:spLocks xmlns:a="http://schemas.openxmlformats.org/drawingml/2006/main" noGrp="1"/>
+            <a:spLocks noGrp="1"/>
           </p:cNvSpPr>
           <p:nvPr/>
         </p:nvSpPr>
         <p:spPr>
-          <a:xfrm xmlns:a="http://schemas.openxmlformats.org/drawingml/2006/main">
+          <a:xfrm>
             <a:off x="609600" y="438150"/>
             <a:ext cx="10934700" cy="952500"/>
           </a:xfrm>
-          <a:prstGeom xmlns:a="http://schemas.openxmlformats.org/drawingml/2006/main" prst="rect">
+          <a:prstGeom prst="rect">
             <a:avLst/>
           </a:prstGeom>
-          <a:noFill xmlns:a="http://schemas.openxmlformats.org/drawingml/2006/main"/>
-          <a:ln xmlns:a="http://schemas.openxmlformats.org/drawingml/2006/main" w="0">
+          <a:noFill/>
+          <a:ln w="0">
             <a:noFill/>
           </a:ln>
         </p:spPr>
         <p:txBody>
-          <a:bodyPr xmlns:a="http://schemas.openxmlformats.org/drawingml/2006/main">
+          <a:bodyPr>
             <a:noAutofit/>
           </a:bodyPr>
-          <a:lstStyle xmlns:a="http://schemas.openxmlformats.org/drawingml/2006/main"/>
-          <a:p xmlns:a="http://schemas.openxmlformats.org/drawingml/2006/main">
+          <a:lstStyle/>
+          <a:p>
             <a:pPr>
               <a:defRPr sz="3450" b="1">
                 <a:solidFill>
@@ -3167,37 +3051,37 @@
       </p:sp>
       <p:sp>
         <p:nvSpPr>
-          <p:cNvPr id="2" name="">
-            <a:extLst xmlns:a="http://schemas.openxmlformats.org/drawingml/2006/main">
+          <p:cNvPr id="2" name="Rectangle 1">
+            <a:extLst>
               <a:ext uri="{FF2B5EF4-FFF2-40B4-BE49-F238E27FC236}">
                 <a16:creationId xmlns:a16="http://schemas.microsoft.com/office/drawing/2014/main" id="{27E579C7-C981-480C-871E-5C71D536F055}"/>
               </a:ext>
             </a:extLst>
           </p:cNvPr>
           <p:cNvSpPr>
-            <a:spLocks xmlns:a="http://schemas.openxmlformats.org/drawingml/2006/main" noGrp="1"/>
+            <a:spLocks noGrp="1"/>
           </p:cNvSpPr>
           <p:nvPr/>
         </p:nvSpPr>
         <p:spPr>
-          <a:xfrm xmlns:a="http://schemas.openxmlformats.org/drawingml/2006/main">
+          <a:xfrm>
             <a:off x="11144250" y="6343650"/>
             <a:ext cx="476250" cy="266700"/>
           </a:xfrm>
-          <a:prstGeom xmlns:a="http://schemas.openxmlformats.org/drawingml/2006/main" prst="rect">
+          <a:prstGeom prst="rect">
             <a:avLst/>
           </a:prstGeom>
-          <a:noFill xmlns:a="http://schemas.openxmlformats.org/drawingml/2006/main"/>
-          <a:ln xmlns:a="http://schemas.openxmlformats.org/drawingml/2006/main" w="0">
+          <a:noFill/>
+          <a:ln w="0">
             <a:noFill/>
           </a:ln>
         </p:spPr>
         <p:txBody>
-          <a:bodyPr xmlns:a="http://schemas.openxmlformats.org/drawingml/2006/main">
+          <a:bodyPr>
             <a:noAutofit/>
           </a:bodyPr>
-          <a:lstStyle xmlns:a="http://schemas.openxmlformats.org/drawingml/2006/main"/>
-          <a:p xmlns:a="http://schemas.openxmlformats.org/drawingml/2006/main">
+          <a:lstStyle/>
+          <a:p>
             <a:pPr>
               <a:defRPr sz="1350" b="0">
                 <a:solidFill>
@@ -3224,37 +3108,37 @@
       </p:sp>
       <p:sp>
         <p:nvSpPr>
-          <p:cNvPr id="3" name="">
-            <a:extLst xmlns:a="http://schemas.openxmlformats.org/drawingml/2006/main">
+          <p:cNvPr id="3" name="Rectangle 2">
+            <a:extLst>
               <a:ext uri="{FF2B5EF4-FFF2-40B4-BE49-F238E27FC236}">
                 <a16:creationId xmlns:a16="http://schemas.microsoft.com/office/drawing/2014/main" id="{D81FB2E3-40DA-4EFC-B5E7-813255B98882}"/>
               </a:ext>
             </a:extLst>
           </p:cNvPr>
           <p:cNvSpPr>
-            <a:spLocks xmlns:a="http://schemas.openxmlformats.org/drawingml/2006/main" noGrp="1"/>
+            <a:spLocks noGrp="1"/>
           </p:cNvSpPr>
           <p:nvPr/>
         </p:nvSpPr>
         <p:spPr>
-          <a:xfrm xmlns:a="http://schemas.openxmlformats.org/drawingml/2006/main">
+          <a:xfrm>
             <a:off x="609600" y="1838325"/>
             <a:ext cx="4476750" cy="1333500"/>
           </a:xfrm>
-          <a:prstGeom xmlns:a="http://schemas.openxmlformats.org/drawingml/2006/main" prst="rect">
+          <a:prstGeom prst="rect">
             <a:avLst/>
           </a:prstGeom>
-          <a:noFill xmlns:a="http://schemas.openxmlformats.org/drawingml/2006/main"/>
-          <a:ln xmlns:a="http://schemas.openxmlformats.org/drawingml/2006/main" w="0">
+          <a:noFill/>
+          <a:ln w="0">
             <a:noFill/>
           </a:ln>
         </p:spPr>
         <p:txBody>
-          <a:bodyPr xmlns:a="http://schemas.openxmlformats.org/drawingml/2006/main">
+          <a:bodyPr>
             <a:noAutofit/>
           </a:bodyPr>
-          <a:lstStyle xmlns:a="http://schemas.openxmlformats.org/drawingml/2006/main"/>
-          <a:p xmlns:a="http://schemas.openxmlformats.org/drawingml/2006/main">
+          <a:lstStyle/>
+          <a:p>
             <a:pPr>
               <a:defRPr sz="2550" b="0">
                 <a:solidFill>
@@ -3281,37 +3165,37 @@
       </p:sp>
       <p:sp>
         <p:nvSpPr>
-          <p:cNvPr id="4" name="">
-            <a:extLst xmlns:a="http://schemas.openxmlformats.org/drawingml/2006/main">
+          <p:cNvPr id="4" name="Rectangle 3">
+            <a:extLst>
               <a:ext uri="{FF2B5EF4-FFF2-40B4-BE49-F238E27FC236}">
                 <a16:creationId xmlns:a16="http://schemas.microsoft.com/office/drawing/2014/main" id="{47256481-AD05-4306-ABFD-84C84674D02D}"/>
               </a:ext>
             </a:extLst>
           </p:cNvPr>
           <p:cNvSpPr>
-            <a:spLocks xmlns:a="http://schemas.openxmlformats.org/drawingml/2006/main" noGrp="1"/>
+            <a:spLocks noGrp="1"/>
           </p:cNvSpPr>
           <p:nvPr/>
         </p:nvSpPr>
         <p:spPr>
-          <a:xfrm xmlns:a="http://schemas.openxmlformats.org/drawingml/2006/main">
+          <a:xfrm>
             <a:off x="609600" y="3657600"/>
             <a:ext cx="4476750" cy="2000250"/>
           </a:xfrm>
-          <a:prstGeom xmlns:a="http://schemas.openxmlformats.org/drawingml/2006/main" prst="rect">
+          <a:prstGeom prst="rect">
             <a:avLst/>
           </a:prstGeom>
-          <a:noFill xmlns:a="http://schemas.openxmlformats.org/drawingml/2006/main"/>
-          <a:ln xmlns:a="http://schemas.openxmlformats.org/drawingml/2006/main" w="0">
+          <a:noFill/>
+          <a:ln w="0">
             <a:noFill/>
           </a:ln>
         </p:spPr>
         <p:txBody>
-          <a:bodyPr xmlns:a="http://schemas.openxmlformats.org/drawingml/2006/main">
+          <a:bodyPr>
             <a:noAutofit/>
           </a:bodyPr>
-          <a:lstStyle xmlns:a="http://schemas.openxmlformats.org/drawingml/2006/main"/>
-          <a:p xmlns:a="http://schemas.openxmlformats.org/drawingml/2006/main">
+          <a:lstStyle/>
+          <a:p>
             <a:pPr>
               <a:defRPr sz="2100" b="0">
                 <a:solidFill>
@@ -3338,22 +3222,22 @@
       </p:sp>
       <p:pic>
         <p:nvPicPr>
-          <p:cNvPr id="10" name=""/>
+          <p:cNvPr id="10" name="Picture 9"/>
           <p:cNvPicPr>
-            <a:picLocks xmlns:a="http://schemas.openxmlformats.org/drawingml/2006/main" noChangeAspect="1"/>
+            <a:picLocks noChangeAspect="1"/>
           </p:cNvPicPr>
           <p:nvPr/>
         </p:nvPicPr>
         <p:blipFill>
-          <a:blip xmlns:r="http://schemas.openxmlformats.org/officeDocument/2006/relationships" xmlns:a="http://schemas.openxmlformats.org/drawingml/2006/main" r:embed="R7d9f478317f84f1b"/>
-          <a:stretch xmlns:a="http://schemas.openxmlformats.org/drawingml/2006/main"/>
+          <a:blip r:embed="rId3"/>
+          <a:stretch/>
         </p:blipFill>
         <p:spPr>
-          <a:xfrm xmlns:a="http://schemas.openxmlformats.org/drawingml/2006/main">
+          <a:xfrm>
             <a:off x="5619750" y="1743508"/>
             <a:ext cx="5905500" cy="4294909"/>
           </a:xfrm>
-          <a:prstGeom xmlns:a="http://schemas.openxmlformats.org/drawingml/2006/main" prst="rect">
+          <a:prstGeom prst="rect">
             <a:avLst/>
           </a:prstGeom>
         </p:spPr>
@@ -3365,17 +3249,21 @@
       </p:ext>
     </p:extLst>
   </p:cSld>
+  <p:clrMapOvr>
+    <a:masterClrMapping/>
+  </p:clrMapOvr>
 </p:sld>
 </file>
 
 <file path=ppt/slides/slide11.xml><?xml version="1.0" encoding="utf-8"?>
-<p:sld xmlns:p="http://schemas.openxmlformats.org/presentationml/2006/main">
+<p:sld xmlns:a="http://schemas.openxmlformats.org/drawingml/2006/main" xmlns:r="http://schemas.openxmlformats.org/officeDocument/2006/relationships" xmlns:p="http://schemas.openxmlformats.org/presentationml/2006/main">
   <p:cSld>
     <p:bg>
       <p:bgPr>
-        <a:solidFill xmlns:a="http://schemas.openxmlformats.org/drawingml/2006/main">
+        <a:solidFill>
           <a:srgbClr val="F7F5EF"/>
         </a:solidFill>
+        <a:effectLst/>
       </p:bgPr>
     </p:bg>
     <p:spTree>
@@ -3385,41 +3273,46 @@
         <p:nvPr/>
       </p:nvGrpSpPr>
       <p:grpSpPr>
-        <a:xfrm xmlns:a="http://schemas.openxmlformats.org/drawingml/2006/main"/>
+        <a:xfrm>
+          <a:off x="0" y="0"/>
+          <a:ext cx="0" cy="0"/>
+          <a:chOff x="0" y="0"/>
+          <a:chExt cx="0" cy="0"/>
+        </a:xfrm>
       </p:grpSpPr>
       <p:sp>
         <p:nvSpPr>
-          <p:cNvPr id="5" name="">
-            <a:extLst xmlns:a="http://schemas.openxmlformats.org/drawingml/2006/main">
+          <p:cNvPr id="5" name="Rectangle 4">
+            <a:extLst>
               <a:ext uri="{FF2B5EF4-FFF2-40B4-BE49-F238E27FC236}">
                 <a16:creationId xmlns:a16="http://schemas.microsoft.com/office/drawing/2014/main" id="{EE90EAD3-700C-42D2-ACC2-C20660982F9C}"/>
               </a:ext>
             </a:extLst>
           </p:cNvPr>
           <p:cNvSpPr>
-            <a:spLocks xmlns:a="http://schemas.openxmlformats.org/drawingml/2006/main" noGrp="1"/>
+            <a:spLocks noGrp="1"/>
           </p:cNvSpPr>
           <p:nvPr/>
         </p:nvSpPr>
         <p:spPr>
-          <a:xfrm xmlns:a="http://schemas.openxmlformats.org/drawingml/2006/main">
+          <a:xfrm>
             <a:off x="609600" y="438150"/>
             <a:ext cx="10934700" cy="952500"/>
           </a:xfrm>
-          <a:prstGeom xmlns:a="http://schemas.openxmlformats.org/drawingml/2006/main" prst="rect">
+          <a:prstGeom prst="rect">
             <a:avLst/>
           </a:prstGeom>
-          <a:noFill xmlns:a="http://schemas.openxmlformats.org/drawingml/2006/main"/>
-          <a:ln xmlns:a="http://schemas.openxmlformats.org/drawingml/2006/main" w="0">
+          <a:noFill/>
+          <a:ln w="0">
             <a:noFill/>
           </a:ln>
         </p:spPr>
         <p:txBody>
-          <a:bodyPr xmlns:a="http://schemas.openxmlformats.org/drawingml/2006/main">
+          <a:bodyPr>
             <a:noAutofit/>
           </a:bodyPr>
-          <a:lstStyle xmlns:a="http://schemas.openxmlformats.org/drawingml/2006/main"/>
-          <a:p xmlns:a="http://schemas.openxmlformats.org/drawingml/2006/main">
+          <a:lstStyle/>
+          <a:p>
             <a:pPr>
               <a:defRPr sz="3450" b="1">
                 <a:solidFill>
@@ -3446,37 +3339,37 @@
       </p:sp>
       <p:sp>
         <p:nvSpPr>
-          <p:cNvPr id="2" name="">
-            <a:extLst xmlns:a="http://schemas.openxmlformats.org/drawingml/2006/main">
+          <p:cNvPr id="2" name="Rectangle 1">
+            <a:extLst>
               <a:ext uri="{FF2B5EF4-FFF2-40B4-BE49-F238E27FC236}">
                 <a16:creationId xmlns:a16="http://schemas.microsoft.com/office/drawing/2014/main" id="{7BF9223A-E161-4654-AB62-5D7059BBDCD0}"/>
               </a:ext>
             </a:extLst>
           </p:cNvPr>
           <p:cNvSpPr>
-            <a:spLocks xmlns:a="http://schemas.openxmlformats.org/drawingml/2006/main" noGrp="1"/>
+            <a:spLocks noGrp="1"/>
           </p:cNvSpPr>
           <p:nvPr/>
         </p:nvSpPr>
         <p:spPr>
-          <a:xfrm xmlns:a="http://schemas.openxmlformats.org/drawingml/2006/main">
+          <a:xfrm>
             <a:off x="11144250" y="6343650"/>
             <a:ext cx="476250" cy="266700"/>
           </a:xfrm>
-          <a:prstGeom xmlns:a="http://schemas.openxmlformats.org/drawingml/2006/main" prst="rect">
+          <a:prstGeom prst="rect">
             <a:avLst/>
           </a:prstGeom>
-          <a:noFill xmlns:a="http://schemas.openxmlformats.org/drawingml/2006/main"/>
-          <a:ln xmlns:a="http://schemas.openxmlformats.org/drawingml/2006/main" w="0">
+          <a:noFill/>
+          <a:ln w="0">
             <a:noFill/>
           </a:ln>
         </p:spPr>
         <p:txBody>
-          <a:bodyPr xmlns:a="http://schemas.openxmlformats.org/drawingml/2006/main">
+          <a:bodyPr>
             <a:noAutofit/>
           </a:bodyPr>
-          <a:lstStyle xmlns:a="http://schemas.openxmlformats.org/drawingml/2006/main"/>
-          <a:p xmlns:a="http://schemas.openxmlformats.org/drawingml/2006/main">
+          <a:lstStyle/>
+          <a:p>
             <a:pPr>
               <a:defRPr sz="1350" b="0">
                 <a:solidFill>
@@ -3503,37 +3396,37 @@
       </p:sp>
       <p:sp>
         <p:nvSpPr>
-          <p:cNvPr id="3" name="">
-            <a:extLst xmlns:a="http://schemas.openxmlformats.org/drawingml/2006/main">
+          <p:cNvPr id="3" name="Rectangle 2">
+            <a:extLst>
               <a:ext uri="{FF2B5EF4-FFF2-40B4-BE49-F238E27FC236}">
                 <a16:creationId xmlns:a16="http://schemas.microsoft.com/office/drawing/2014/main" id="{100CCAC4-D264-4C96-A568-66D37338DC94}"/>
               </a:ext>
             </a:extLst>
           </p:cNvPr>
           <p:cNvSpPr>
-            <a:spLocks xmlns:a="http://schemas.openxmlformats.org/drawingml/2006/main" noGrp="1"/>
+            <a:spLocks noGrp="1"/>
           </p:cNvSpPr>
           <p:nvPr/>
         </p:nvSpPr>
         <p:spPr>
-          <a:xfrm xmlns:a="http://schemas.openxmlformats.org/drawingml/2006/main">
+          <a:xfrm>
             <a:off x="609600" y="1657350"/>
             <a:ext cx="10858500" cy="3429000"/>
           </a:xfrm>
-          <a:prstGeom xmlns:a="http://schemas.openxmlformats.org/drawingml/2006/main" prst="rect">
+          <a:prstGeom prst="rect">
             <a:avLst/>
           </a:prstGeom>
-          <a:noFill xmlns:a="http://schemas.openxmlformats.org/drawingml/2006/main"/>
-          <a:ln xmlns:a="http://schemas.openxmlformats.org/drawingml/2006/main" w="0">
+          <a:noFill/>
+          <a:ln w="0">
             <a:noFill/>
           </a:ln>
         </p:spPr>
         <p:txBody>
-          <a:bodyPr xmlns:a="http://schemas.openxmlformats.org/drawingml/2006/main">
+          <a:bodyPr>
             <a:noAutofit/>
           </a:bodyPr>
-          <a:lstStyle xmlns:a="http://schemas.openxmlformats.org/drawingml/2006/main"/>
-          <a:p xmlns:a="http://schemas.openxmlformats.org/drawingml/2006/main">
+          <a:lstStyle/>
+          <a:p>
             <a:pPr>
               <a:defRPr sz="2175" b="0">
                 <a:solidFill>
@@ -3556,12 +3449,17 @@
               <a:t>from pydantic import BaseModel</a:t>
             </a:r>
           </a:p>
-          <a:p xmlns:a="http://schemas.openxmlformats.org/drawingml/2006/main">
-            <a:r>
-              <a:t/>
-            </a:r>
-          </a:p>
-          <a:p xmlns:a="http://schemas.openxmlformats.org/drawingml/2006/main">
+          <a:p>
+            <a:endParaRPr sz="2175" b="0">
+              <a:solidFill>
+                <a:srgbClr val="245E87"/>
+              </a:solidFill>
+              <a:latin typeface="Helvetica Neue"/>
+              <a:ea typeface="Helvetica Neue"/>
+              <a:cs typeface="Helvetica Neue"/>
+            </a:endParaRPr>
+          </a:p>
+          <a:p>
             <a:pPr>
               <a:defRPr sz="2175" b="0">
                 <a:solidFill>
@@ -3584,7 +3482,7 @@
               <a:t>class Product(BaseModel):</a:t>
             </a:r>
           </a:p>
-          <a:p xmlns:a="http://schemas.openxmlformats.org/drawingml/2006/main">
+          <a:p>
             <a:pPr>
               <a:defRPr sz="2175" b="0">
                 <a:solidFill>
@@ -3607,7 +3505,7 @@
               <a:t>    name: str</a:t>
             </a:r>
           </a:p>
-          <a:p xmlns:a="http://schemas.openxmlformats.org/drawingml/2006/main">
+          <a:p>
             <a:pPr>
               <a:defRPr sz="2175" b="0">
                 <a:solidFill>
@@ -3630,12 +3528,17 @@
               <a:t>    price: float</a:t>
             </a:r>
           </a:p>
-          <a:p xmlns:a="http://schemas.openxmlformats.org/drawingml/2006/main">
-            <a:r>
-              <a:t/>
-            </a:r>
-          </a:p>
-          <a:p xmlns:a="http://schemas.openxmlformats.org/drawingml/2006/main">
+          <a:p>
+            <a:endParaRPr sz="2175" b="0">
+              <a:solidFill>
+                <a:srgbClr val="245E87"/>
+              </a:solidFill>
+              <a:latin typeface="Helvetica Neue"/>
+              <a:ea typeface="Helvetica Neue"/>
+              <a:cs typeface="Helvetica Neue"/>
+            </a:endParaRPr>
+          </a:p>
+          <a:p>
             <a:pPr>
               <a:defRPr sz="2175" b="0">
                 <a:solidFill>
@@ -3658,7 +3561,7 @@
               <a:t>product = Product(name="Notebook", price="19.5")</a:t>
             </a:r>
           </a:p>
-          <a:p xmlns:a="http://schemas.openxmlformats.org/drawingml/2006/main">
+          <a:p>
             <a:pPr>
               <a:defRPr sz="2175" b="0">
                 <a:solidFill>
@@ -3685,37 +3588,37 @@
       </p:sp>
       <p:sp>
         <p:nvSpPr>
-          <p:cNvPr id="4" name="">
-            <a:extLst xmlns:a="http://schemas.openxmlformats.org/drawingml/2006/main">
+          <p:cNvPr id="4" name="Rectangle 3">
+            <a:extLst>
               <a:ext uri="{FF2B5EF4-FFF2-40B4-BE49-F238E27FC236}">
                 <a16:creationId xmlns:a16="http://schemas.microsoft.com/office/drawing/2014/main" id="{9F7A94CB-4318-4F3A-A174-B1959C39C1CF}"/>
               </a:ext>
             </a:extLst>
           </p:cNvPr>
           <p:cNvSpPr>
-            <a:spLocks xmlns:a="http://schemas.openxmlformats.org/drawingml/2006/main" noGrp="1"/>
+            <a:spLocks noGrp="1"/>
           </p:cNvSpPr>
           <p:nvPr/>
         </p:nvSpPr>
         <p:spPr>
-          <a:xfrm xmlns:a="http://schemas.openxmlformats.org/drawingml/2006/main">
+          <a:xfrm>
             <a:off x="609600" y="5286375"/>
             <a:ext cx="10763250" cy="790575"/>
           </a:xfrm>
-          <a:prstGeom xmlns:a="http://schemas.openxmlformats.org/drawingml/2006/main" prst="rect">
+          <a:prstGeom prst="rect">
             <a:avLst/>
           </a:prstGeom>
-          <a:noFill xmlns:a="http://schemas.openxmlformats.org/drawingml/2006/main"/>
-          <a:ln xmlns:a="http://schemas.openxmlformats.org/drawingml/2006/main" w="0">
+          <a:noFill/>
+          <a:ln w="0">
             <a:noFill/>
           </a:ln>
         </p:spPr>
         <p:txBody>
-          <a:bodyPr xmlns:a="http://schemas.openxmlformats.org/drawingml/2006/main">
+          <a:bodyPr>
             <a:noAutofit/>
           </a:bodyPr>
-          <a:lstStyle xmlns:a="http://schemas.openxmlformats.org/drawingml/2006/main"/>
-          <a:p xmlns:a="http://schemas.openxmlformats.org/drawingml/2006/main">
+          <a:lstStyle/>
+          <a:p>
             <a:pPr>
               <a:defRPr sz="2100" b="0">
                 <a:solidFill>
@@ -3738,7 +3641,7 @@
               <a:t>El campo price contiene un float después de la validación.</a:t>
             </a:r>
           </a:p>
-          <a:p xmlns:a="http://schemas.openxmlformats.org/drawingml/2006/main">
+          <a:p>
             <a:pPr>
               <a:defRPr sz="2100" b="0">
                 <a:solidFill>
@@ -3770,17 +3673,21 @@
       </p:ext>
     </p:extLst>
   </p:cSld>
+  <p:clrMapOvr>
+    <a:masterClrMapping/>
+  </p:clrMapOvr>
 </p:sld>
 </file>
 
 <file path=ppt/slides/slide12.xml><?xml version="1.0" encoding="utf-8"?>
-<p:sld xmlns:p="http://schemas.openxmlformats.org/presentationml/2006/main">
+<p:sld xmlns:a="http://schemas.openxmlformats.org/drawingml/2006/main" xmlns:r="http://schemas.openxmlformats.org/officeDocument/2006/relationships" xmlns:p="http://schemas.openxmlformats.org/presentationml/2006/main">
   <p:cSld>
     <p:bg>
       <p:bgPr>
-        <a:solidFill xmlns:a="http://schemas.openxmlformats.org/drawingml/2006/main">
+        <a:solidFill>
           <a:srgbClr val="142738"/>
         </a:solidFill>
+        <a:effectLst/>
       </p:bgPr>
     </p:bg>
     <p:spTree>
@@ -3790,41 +3697,46 @@
         <p:nvPr/>
       </p:nvGrpSpPr>
       <p:grpSpPr>
-        <a:xfrm xmlns:a="http://schemas.openxmlformats.org/drawingml/2006/main"/>
+        <a:xfrm>
+          <a:off x="0" y="0"/>
+          <a:ext cx="0" cy="0"/>
+          <a:chOff x="0" y="0"/>
+          <a:chExt cx="0" cy="0"/>
+        </a:xfrm>
       </p:grpSpPr>
       <p:sp>
         <p:nvSpPr>
-          <p:cNvPr id="6" name="">
-            <a:extLst xmlns:a="http://schemas.openxmlformats.org/drawingml/2006/main">
+          <p:cNvPr id="6" name="Rectangle 5">
+            <a:extLst>
               <a:ext uri="{FF2B5EF4-FFF2-40B4-BE49-F238E27FC236}">
                 <a16:creationId xmlns:a16="http://schemas.microsoft.com/office/drawing/2014/main" id="{9DF40755-1EAA-4EA2-A8E1-3CAA3FC87F16}"/>
               </a:ext>
             </a:extLst>
           </p:cNvPr>
           <p:cNvSpPr>
-            <a:spLocks xmlns:a="http://schemas.openxmlformats.org/drawingml/2006/main" noGrp="1"/>
+            <a:spLocks noGrp="1"/>
           </p:cNvSpPr>
           <p:nvPr/>
         </p:nvSpPr>
         <p:spPr>
-          <a:xfrm xmlns:a="http://schemas.openxmlformats.org/drawingml/2006/main">
+          <a:xfrm>
             <a:off x="609600" y="438150"/>
             <a:ext cx="10934700" cy="952500"/>
           </a:xfrm>
-          <a:prstGeom xmlns:a="http://schemas.openxmlformats.org/drawingml/2006/main" prst="rect">
+          <a:prstGeom prst="rect">
             <a:avLst/>
           </a:prstGeom>
-          <a:noFill xmlns:a="http://schemas.openxmlformats.org/drawingml/2006/main"/>
-          <a:ln xmlns:a="http://schemas.openxmlformats.org/drawingml/2006/main" w="0">
+          <a:noFill/>
+          <a:ln w="0">
             <a:noFill/>
           </a:ln>
         </p:spPr>
         <p:txBody>
-          <a:bodyPr xmlns:a="http://schemas.openxmlformats.org/drawingml/2006/main">
+          <a:bodyPr>
             <a:noAutofit/>
           </a:bodyPr>
-          <a:lstStyle xmlns:a="http://schemas.openxmlformats.org/drawingml/2006/main"/>
-          <a:p xmlns:a="http://schemas.openxmlformats.org/drawingml/2006/main">
+          <a:lstStyle/>
+          <a:p>
             <a:pPr>
               <a:defRPr sz="3450" b="1">
                 <a:solidFill>
@@ -3851,37 +3763,37 @@
       </p:sp>
       <p:sp>
         <p:nvSpPr>
-          <p:cNvPr id="2" name="">
-            <a:extLst xmlns:a="http://schemas.openxmlformats.org/drawingml/2006/main">
+          <p:cNvPr id="2" name="Rectangle 1">
+            <a:extLst>
               <a:ext uri="{FF2B5EF4-FFF2-40B4-BE49-F238E27FC236}">
                 <a16:creationId xmlns:a16="http://schemas.microsoft.com/office/drawing/2014/main" id="{E4B8C857-E0B4-4896-9A83-12298709DB43}"/>
               </a:ext>
             </a:extLst>
           </p:cNvPr>
           <p:cNvSpPr>
-            <a:spLocks xmlns:a="http://schemas.openxmlformats.org/drawingml/2006/main" noGrp="1"/>
+            <a:spLocks noGrp="1"/>
           </p:cNvSpPr>
           <p:nvPr/>
         </p:nvSpPr>
         <p:spPr>
-          <a:xfrm xmlns:a="http://schemas.openxmlformats.org/drawingml/2006/main">
+          <a:xfrm>
             <a:off x="11144250" y="6343650"/>
             <a:ext cx="476250" cy="266700"/>
           </a:xfrm>
-          <a:prstGeom xmlns:a="http://schemas.openxmlformats.org/drawingml/2006/main" prst="rect">
+          <a:prstGeom prst="rect">
             <a:avLst/>
           </a:prstGeom>
-          <a:noFill xmlns:a="http://schemas.openxmlformats.org/drawingml/2006/main"/>
-          <a:ln xmlns:a="http://schemas.openxmlformats.org/drawingml/2006/main" w="0">
+          <a:noFill/>
+          <a:ln w="0">
             <a:noFill/>
           </a:ln>
         </p:spPr>
         <p:txBody>
-          <a:bodyPr xmlns:a="http://schemas.openxmlformats.org/drawingml/2006/main">
+          <a:bodyPr>
             <a:noAutofit/>
           </a:bodyPr>
-          <a:lstStyle xmlns:a="http://schemas.openxmlformats.org/drawingml/2006/main"/>
-          <a:p xmlns:a="http://schemas.openxmlformats.org/drawingml/2006/main">
+          <a:lstStyle/>
+          <a:p>
             <a:pPr>
               <a:defRPr sz="1350" b="0">
                 <a:solidFill>
@@ -3908,37 +3820,37 @@
       </p:sp>
       <p:sp>
         <p:nvSpPr>
-          <p:cNvPr id="3" name="">
-            <a:extLst xmlns:a="http://schemas.openxmlformats.org/drawingml/2006/main">
+          <p:cNvPr id="3" name="Rectangle 2">
+            <a:extLst>
               <a:ext uri="{FF2B5EF4-FFF2-40B4-BE49-F238E27FC236}">
                 <a16:creationId xmlns:a16="http://schemas.microsoft.com/office/drawing/2014/main" id="{9F2CA8A7-8025-4DED-8D4E-9D427353C9C4}"/>
               </a:ext>
             </a:extLst>
           </p:cNvPr>
           <p:cNvSpPr>
-            <a:spLocks xmlns:a="http://schemas.openxmlformats.org/drawingml/2006/main" noGrp="1"/>
+            <a:spLocks noGrp="1"/>
           </p:cNvSpPr>
           <p:nvPr/>
         </p:nvSpPr>
         <p:spPr>
-          <a:xfrm xmlns:a="http://schemas.openxmlformats.org/drawingml/2006/main">
+          <a:xfrm>
             <a:off x="609600" y="1714500"/>
             <a:ext cx="10668000" cy="2571750"/>
           </a:xfrm>
-          <a:prstGeom xmlns:a="http://schemas.openxmlformats.org/drawingml/2006/main" prst="rect">
+          <a:prstGeom prst="rect">
             <a:avLst/>
           </a:prstGeom>
-          <a:noFill xmlns:a="http://schemas.openxmlformats.org/drawingml/2006/main"/>
-          <a:ln xmlns:a="http://schemas.openxmlformats.org/drawingml/2006/main" w="0">
+          <a:noFill/>
+          <a:ln w="0">
             <a:noFill/>
           </a:ln>
         </p:spPr>
         <p:txBody>
-          <a:bodyPr xmlns:a="http://schemas.openxmlformats.org/drawingml/2006/main">
+          <a:bodyPr>
             <a:noAutofit/>
           </a:bodyPr>
-          <a:lstStyle xmlns:a="http://schemas.openxmlformats.org/drawingml/2006/main"/>
-          <a:p xmlns:a="http://schemas.openxmlformats.org/drawingml/2006/main">
+          <a:lstStyle/>
+          <a:p>
             <a:pPr>
               <a:defRPr sz="2325" b="0">
                 <a:solidFill>
@@ -3961,12 +3873,17 @@
               <a:t>from pydantic import BaseModel, Field</a:t>
             </a:r>
           </a:p>
-          <a:p xmlns:a="http://schemas.openxmlformats.org/drawingml/2006/main">
-            <a:r>
-              <a:t/>
-            </a:r>
-          </a:p>
-          <a:p xmlns:a="http://schemas.openxmlformats.org/drawingml/2006/main">
+          <a:p>
+            <a:endParaRPr sz="2325" b="0">
+              <a:solidFill>
+                <a:srgbClr val="D5E9F2"/>
+              </a:solidFill>
+              <a:latin typeface="Helvetica Neue"/>
+              <a:ea typeface="Helvetica Neue"/>
+              <a:cs typeface="Helvetica Neue"/>
+            </a:endParaRPr>
+          </a:p>
+          <a:p>
             <a:pPr>
               <a:defRPr sz="2325" b="0">
                 <a:solidFill>
@@ -3989,7 +3906,7 @@
               <a:t>class Product(BaseModel):</a:t>
             </a:r>
           </a:p>
-          <a:p xmlns:a="http://schemas.openxmlformats.org/drawingml/2006/main">
+          <a:p>
             <a:pPr>
               <a:defRPr sz="2325" b="0">
                 <a:solidFill>
@@ -4012,7 +3929,7 @@
               <a:t>    name: str</a:t>
             </a:r>
           </a:p>
-          <a:p xmlns:a="http://schemas.openxmlformats.org/drawingml/2006/main">
+          <a:p>
             <a:pPr>
               <a:defRPr sz="2325" b="0">
                 <a:solidFill>
@@ -4039,37 +3956,37 @@
       </p:sp>
       <p:sp>
         <p:nvSpPr>
-          <p:cNvPr id="4" name="">
-            <a:extLst xmlns:a="http://schemas.openxmlformats.org/drawingml/2006/main">
+          <p:cNvPr id="4" name="Rectangle 3">
+            <a:extLst>
               <a:ext uri="{FF2B5EF4-FFF2-40B4-BE49-F238E27FC236}">
                 <a16:creationId xmlns:a16="http://schemas.microsoft.com/office/drawing/2014/main" id="{481E3BF7-6396-44C6-837A-8819748E6510}"/>
               </a:ext>
             </a:extLst>
           </p:cNvPr>
           <p:cNvSpPr>
-            <a:spLocks xmlns:a="http://schemas.openxmlformats.org/drawingml/2006/main" noGrp="1"/>
+            <a:spLocks noGrp="1"/>
           </p:cNvSpPr>
           <p:nvPr/>
         </p:nvSpPr>
         <p:spPr>
-          <a:xfrm xmlns:a="http://schemas.openxmlformats.org/drawingml/2006/main">
+          <a:xfrm>
             <a:off x="609600" y="4524375"/>
             <a:ext cx="3905250" cy="1143000"/>
           </a:xfrm>
-          <a:prstGeom xmlns:a="http://schemas.openxmlformats.org/drawingml/2006/main" prst="rect">
+          <a:prstGeom prst="rect">
             <a:avLst/>
           </a:prstGeom>
-          <a:noFill xmlns:a="http://schemas.openxmlformats.org/drawingml/2006/main"/>
-          <a:ln xmlns:a="http://schemas.openxmlformats.org/drawingml/2006/main" w="0">
+          <a:noFill/>
+          <a:ln w="0">
             <a:noFill/>
           </a:ln>
         </p:spPr>
         <p:txBody>
-          <a:bodyPr xmlns:a="http://schemas.openxmlformats.org/drawingml/2006/main">
+          <a:bodyPr>
             <a:noAutofit/>
           </a:bodyPr>
-          <a:lstStyle xmlns:a="http://schemas.openxmlformats.org/drawingml/2006/main"/>
-          <a:p xmlns:a="http://schemas.openxmlformats.org/drawingml/2006/main">
+          <a:lstStyle/>
+          <a:p>
             <a:pPr>
               <a:defRPr sz="2550" b="0">
                 <a:solidFill>
@@ -4092,7 +4009,7 @@
               <a:t>Entrada</a:t>
             </a:r>
           </a:p>
-          <a:p xmlns:a="http://schemas.openxmlformats.org/drawingml/2006/main">
+          <a:p>
             <a:pPr>
               <a:defRPr sz="2550" b="0">
                 <a:solidFill>
@@ -4119,37 +4036,37 @@
       </p:sp>
       <p:sp>
         <p:nvSpPr>
-          <p:cNvPr id="5" name="">
-            <a:extLst xmlns:a="http://schemas.openxmlformats.org/drawingml/2006/main">
+          <p:cNvPr id="5" name="Rectangle 4">
+            <a:extLst>
               <a:ext uri="{FF2B5EF4-FFF2-40B4-BE49-F238E27FC236}">
                 <a16:creationId xmlns:a16="http://schemas.microsoft.com/office/drawing/2014/main" id="{94DDE490-A65C-451F-BD64-49F96D322456}"/>
               </a:ext>
             </a:extLst>
           </p:cNvPr>
           <p:cNvSpPr>
-            <a:spLocks xmlns:a="http://schemas.openxmlformats.org/drawingml/2006/main" noGrp="1"/>
+            <a:spLocks noGrp="1"/>
           </p:cNvSpPr>
           <p:nvPr/>
         </p:nvSpPr>
         <p:spPr>
-          <a:xfrm xmlns:a="http://schemas.openxmlformats.org/drawingml/2006/main">
+          <a:xfrm>
             <a:off x="5762625" y="4476750"/>
             <a:ext cx="5619750" cy="1476375"/>
           </a:xfrm>
-          <a:prstGeom xmlns:a="http://schemas.openxmlformats.org/drawingml/2006/main" prst="rect">
+          <a:prstGeom prst="rect">
             <a:avLst/>
           </a:prstGeom>
-          <a:noFill xmlns:a="http://schemas.openxmlformats.org/drawingml/2006/main"/>
-          <a:ln xmlns:a="http://schemas.openxmlformats.org/drawingml/2006/main" w="0">
+          <a:noFill/>
+          <a:ln w="0">
             <a:noFill/>
           </a:ln>
         </p:spPr>
         <p:txBody>
-          <a:bodyPr xmlns:a="http://schemas.openxmlformats.org/drawingml/2006/main">
+          <a:bodyPr>
             <a:noAutofit/>
           </a:bodyPr>
-          <a:lstStyle xmlns:a="http://schemas.openxmlformats.org/drawingml/2006/main"/>
-          <a:p xmlns:a="http://schemas.openxmlformats.org/drawingml/2006/main">
+          <a:lstStyle/>
+          <a:p>
             <a:pPr>
               <a:defRPr sz="2100" b="0">
                 <a:solidFill>
@@ -4172,7 +4089,7 @@
               <a:t>Campo: price</a:t>
             </a:r>
           </a:p>
-          <a:p xmlns:a="http://schemas.openxmlformats.org/drawingml/2006/main">
+          <a:p>
             <a:pPr>
               <a:defRPr sz="2100" b="0">
                 <a:solidFill>
@@ -4195,7 +4112,7 @@
               <a:t>Regla: valor mayor que cero</a:t>
             </a:r>
           </a:p>
-          <a:p xmlns:a="http://schemas.openxmlformats.org/drawingml/2006/main">
+          <a:p>
             <a:pPr>
               <a:defRPr sz="2100" b="0">
                 <a:solidFill>
@@ -4227,17 +4144,21 @@
       </p:ext>
     </p:extLst>
   </p:cSld>
+  <p:clrMapOvr>
+    <a:masterClrMapping/>
+  </p:clrMapOvr>
 </p:sld>
 </file>
 
 <file path=ppt/slides/slide13.xml><?xml version="1.0" encoding="utf-8"?>
-<p:sld xmlns:p="http://schemas.openxmlformats.org/presentationml/2006/main">
+<p:sld xmlns:a="http://schemas.openxmlformats.org/drawingml/2006/main" xmlns:r="http://schemas.openxmlformats.org/officeDocument/2006/relationships" xmlns:p="http://schemas.openxmlformats.org/presentationml/2006/main">
   <p:cSld>
     <p:bg>
       <p:bgPr>
-        <a:solidFill xmlns:a="http://schemas.openxmlformats.org/drawingml/2006/main">
+        <a:solidFill>
           <a:srgbClr val="F7F5EF"/>
         </a:solidFill>
+        <a:effectLst/>
       </p:bgPr>
     </p:bg>
     <p:spTree>
@@ -4247,41 +4168,46 @@
         <p:nvPr/>
       </p:nvGrpSpPr>
       <p:grpSpPr>
-        <a:xfrm xmlns:a="http://schemas.openxmlformats.org/drawingml/2006/main"/>
+        <a:xfrm>
+          <a:off x="0" y="0"/>
+          <a:ext cx="0" cy="0"/>
+          <a:chOff x="0" y="0"/>
+          <a:chExt cx="0" cy="0"/>
+        </a:xfrm>
       </p:grpSpPr>
       <p:sp>
         <p:nvSpPr>
-          <p:cNvPr id="5" name="">
-            <a:extLst xmlns:a="http://schemas.openxmlformats.org/drawingml/2006/main">
+          <p:cNvPr id="5" name="Rectangle 4">
+            <a:extLst>
               <a:ext uri="{FF2B5EF4-FFF2-40B4-BE49-F238E27FC236}">
                 <a16:creationId xmlns:a16="http://schemas.microsoft.com/office/drawing/2014/main" id="{34A0AA33-E196-4642-B416-B44DFC81A086}"/>
               </a:ext>
             </a:extLst>
           </p:cNvPr>
           <p:cNvSpPr>
-            <a:spLocks xmlns:a="http://schemas.openxmlformats.org/drawingml/2006/main" noGrp="1"/>
+            <a:spLocks noGrp="1"/>
           </p:cNvSpPr>
           <p:nvPr/>
         </p:nvSpPr>
         <p:spPr>
-          <a:xfrm xmlns:a="http://schemas.openxmlformats.org/drawingml/2006/main">
+          <a:xfrm>
             <a:off x="609600" y="438150"/>
             <a:ext cx="10934700" cy="952500"/>
           </a:xfrm>
-          <a:prstGeom xmlns:a="http://schemas.openxmlformats.org/drawingml/2006/main" prst="rect">
+          <a:prstGeom prst="rect">
             <a:avLst/>
           </a:prstGeom>
-          <a:noFill xmlns:a="http://schemas.openxmlformats.org/drawingml/2006/main"/>
-          <a:ln xmlns:a="http://schemas.openxmlformats.org/drawingml/2006/main" w="0">
+          <a:noFill/>
+          <a:ln w="0">
             <a:noFill/>
           </a:ln>
         </p:spPr>
         <p:txBody>
-          <a:bodyPr xmlns:a="http://schemas.openxmlformats.org/drawingml/2006/main">
+          <a:bodyPr>
             <a:noAutofit/>
           </a:bodyPr>
-          <a:lstStyle xmlns:a="http://schemas.openxmlformats.org/drawingml/2006/main"/>
-          <a:p xmlns:a="http://schemas.openxmlformats.org/drawingml/2006/main">
+          <a:lstStyle/>
+          <a:p>
             <a:pPr>
               <a:defRPr sz="3450" b="1">
                 <a:solidFill>
@@ -4308,37 +4234,37 @@
       </p:sp>
       <p:sp>
         <p:nvSpPr>
-          <p:cNvPr id="2" name="">
-            <a:extLst xmlns:a="http://schemas.openxmlformats.org/drawingml/2006/main">
+          <p:cNvPr id="2" name="Rectangle 1">
+            <a:extLst>
               <a:ext uri="{FF2B5EF4-FFF2-40B4-BE49-F238E27FC236}">
                 <a16:creationId xmlns:a16="http://schemas.microsoft.com/office/drawing/2014/main" id="{1AEE1D4E-CE6A-43C6-980D-FA6D7BF216A7}"/>
               </a:ext>
             </a:extLst>
           </p:cNvPr>
           <p:cNvSpPr>
-            <a:spLocks xmlns:a="http://schemas.openxmlformats.org/drawingml/2006/main" noGrp="1"/>
+            <a:spLocks noGrp="1"/>
           </p:cNvSpPr>
           <p:nvPr/>
         </p:nvSpPr>
         <p:spPr>
-          <a:xfrm xmlns:a="http://schemas.openxmlformats.org/drawingml/2006/main">
+          <a:xfrm>
             <a:off x="11144250" y="6343650"/>
             <a:ext cx="476250" cy="266700"/>
           </a:xfrm>
-          <a:prstGeom xmlns:a="http://schemas.openxmlformats.org/drawingml/2006/main" prst="rect">
+          <a:prstGeom prst="rect">
             <a:avLst/>
           </a:prstGeom>
-          <a:noFill xmlns:a="http://schemas.openxmlformats.org/drawingml/2006/main"/>
-          <a:ln xmlns:a="http://schemas.openxmlformats.org/drawingml/2006/main" w="0">
+          <a:noFill/>
+          <a:ln w="0">
             <a:noFill/>
           </a:ln>
         </p:spPr>
         <p:txBody>
-          <a:bodyPr xmlns:a="http://schemas.openxmlformats.org/drawingml/2006/main">
+          <a:bodyPr>
             <a:noAutofit/>
           </a:bodyPr>
-          <a:lstStyle xmlns:a="http://schemas.openxmlformats.org/drawingml/2006/main"/>
-          <a:p xmlns:a="http://schemas.openxmlformats.org/drawingml/2006/main">
+          <a:lstStyle/>
+          <a:p>
             <a:pPr>
               <a:defRPr sz="1350" b="0">
                 <a:solidFill>
@@ -4365,59 +4291,59 @@
       </p:sp>
       <p:pic>
         <p:nvPicPr>
-          <p:cNvPr id="7" name=""/>
+          <p:cNvPr id="7" name="Picture 6"/>
           <p:cNvPicPr>
-            <a:picLocks xmlns:a="http://schemas.openxmlformats.org/drawingml/2006/main" noChangeAspect="1"/>
+            <a:picLocks noChangeAspect="1"/>
           </p:cNvPicPr>
           <p:nvPr/>
         </p:nvPicPr>
         <p:blipFill>
-          <a:blip xmlns:r="http://schemas.openxmlformats.org/officeDocument/2006/relationships" xmlns:a="http://schemas.openxmlformats.org/drawingml/2006/main" r:embed="R03f523270892441c"/>
-          <a:stretch xmlns:a="http://schemas.openxmlformats.org/drawingml/2006/main"/>
+          <a:blip r:embed="rId3"/>
+          <a:stretch/>
         </p:blipFill>
         <p:spPr>
-          <a:xfrm xmlns:a="http://schemas.openxmlformats.org/drawingml/2006/main">
+          <a:xfrm>
             <a:off x="6772275" y="1728788"/>
             <a:ext cx="4762500" cy="3571875"/>
           </a:xfrm>
-          <a:prstGeom xmlns:a="http://schemas.openxmlformats.org/drawingml/2006/main" prst="rect">
+          <a:prstGeom prst="rect">
             <a:avLst/>
           </a:prstGeom>
         </p:spPr>
       </p:pic>
       <p:sp>
         <p:nvSpPr>
-          <p:cNvPr id="4" name="">
-            <a:extLst xmlns:a="http://schemas.openxmlformats.org/drawingml/2006/main">
+          <p:cNvPr id="4" name="Rectangle 3">
+            <a:extLst>
               <a:ext uri="{FF2B5EF4-FFF2-40B4-BE49-F238E27FC236}">
                 <a16:creationId xmlns:a16="http://schemas.microsoft.com/office/drawing/2014/main" id="{4E3F3398-BF00-48A2-8190-93B5B73C906B}"/>
               </a:ext>
             </a:extLst>
           </p:cNvPr>
           <p:cNvSpPr>
-            <a:spLocks xmlns:a="http://schemas.openxmlformats.org/drawingml/2006/main" noGrp="1"/>
+            <a:spLocks noGrp="1"/>
           </p:cNvSpPr>
           <p:nvPr/>
         </p:nvSpPr>
         <p:spPr>
-          <a:xfrm xmlns:a="http://schemas.openxmlformats.org/drawingml/2006/main">
+          <a:xfrm>
             <a:off x="609600" y="1724025"/>
             <a:ext cx="5715000" cy="4286250"/>
           </a:xfrm>
-          <a:prstGeom xmlns:a="http://schemas.openxmlformats.org/drawingml/2006/main" prst="rect">
+          <a:prstGeom prst="rect">
             <a:avLst/>
           </a:prstGeom>
-          <a:noFill xmlns:a="http://schemas.openxmlformats.org/drawingml/2006/main"/>
-          <a:ln xmlns:a="http://schemas.openxmlformats.org/drawingml/2006/main" w="0">
+          <a:noFill/>
+          <a:ln w="0">
             <a:noFill/>
           </a:ln>
         </p:spPr>
         <p:txBody>
-          <a:bodyPr xmlns:a="http://schemas.openxmlformats.org/drawingml/2006/main">
+          <a:bodyPr>
             <a:noAutofit/>
           </a:bodyPr>
-          <a:lstStyle xmlns:a="http://schemas.openxmlformats.org/drawingml/2006/main"/>
-          <a:p xmlns:a="http://schemas.openxmlformats.org/drawingml/2006/main">
+          <a:lstStyle/>
+          <a:p>
             <a:pPr>
               <a:defRPr sz="2175" b="0">
                 <a:solidFill>
@@ -4440,7 +4366,7 @@
               <a:t>name</a:t>
             </a:r>
           </a:p>
-          <a:p xmlns:a="http://schemas.openxmlformats.org/drawingml/2006/main">
+          <a:p>
             <a:pPr>
               <a:defRPr sz="2175" b="0">
                 <a:solidFill>
@@ -4463,12 +4389,17 @@
               <a:t>Nombre requerido</a:t>
             </a:r>
           </a:p>
-          <a:p xmlns:a="http://schemas.openxmlformats.org/drawingml/2006/main">
-            <a:r>
-              <a:t/>
-            </a:r>
-          </a:p>
-          <a:p xmlns:a="http://schemas.openxmlformats.org/drawingml/2006/main">
+          <a:p>
+            <a:endParaRPr sz="2175" b="0">
+              <a:solidFill>
+                <a:srgbClr val="172B3A"/>
+              </a:solidFill>
+              <a:latin typeface="Helvetica Neue"/>
+              <a:ea typeface="Helvetica Neue"/>
+              <a:cs typeface="Helvetica Neue"/>
+            </a:endParaRPr>
+          </a:p>
+          <a:p>
             <a:pPr>
               <a:defRPr sz="2175" b="0">
                 <a:solidFill>
@@ -4491,7 +4422,7 @@
               <a:t>email</a:t>
             </a:r>
           </a:p>
-          <a:p xmlns:a="http://schemas.openxmlformats.org/drawingml/2006/main">
+          <a:p>
             <a:pPr>
               <a:defRPr sz="2175" b="0">
                 <a:solidFill>
@@ -4514,12 +4445,17 @@
               <a:t>Formato validado con EmailStr</a:t>
             </a:r>
           </a:p>
-          <a:p xmlns:a="http://schemas.openxmlformats.org/drawingml/2006/main">
-            <a:r>
-              <a:t/>
-            </a:r>
-          </a:p>
-          <a:p xmlns:a="http://schemas.openxmlformats.org/drawingml/2006/main">
+          <a:p>
+            <a:endParaRPr sz="2175" b="0">
+              <a:solidFill>
+                <a:srgbClr val="172B3A"/>
+              </a:solidFill>
+              <a:latin typeface="Helvetica Neue"/>
+              <a:ea typeface="Helvetica Neue"/>
+              <a:cs typeface="Helvetica Neue"/>
+            </a:endParaRPr>
+          </a:p>
+          <a:p>
             <a:pPr>
               <a:defRPr sz="2175" b="0">
                 <a:solidFill>
@@ -4542,7 +4478,7 @@
               <a:t>role</a:t>
             </a:r>
           </a:p>
-          <a:p xmlns:a="http://schemas.openxmlformats.org/drawingml/2006/main">
+          <a:p>
             <a:pPr>
               <a:defRPr sz="2175" b="0">
                 <a:solidFill>
@@ -4574,17 +4510,21 @@
       </p:ext>
     </p:extLst>
   </p:cSld>
+  <p:clrMapOvr>
+    <a:masterClrMapping/>
+  </p:clrMapOvr>
 </p:sld>
 </file>
 
 <file path=ppt/slides/slide14.xml><?xml version="1.0" encoding="utf-8"?>
-<p:sld xmlns:p="http://schemas.openxmlformats.org/presentationml/2006/main">
+<p:sld xmlns:a="http://schemas.openxmlformats.org/drawingml/2006/main" xmlns:r="http://schemas.openxmlformats.org/officeDocument/2006/relationships" xmlns:p="http://schemas.openxmlformats.org/presentationml/2006/main">
   <p:cSld>
     <p:bg>
       <p:bgPr>
-        <a:solidFill xmlns:a="http://schemas.openxmlformats.org/drawingml/2006/main">
+        <a:solidFill>
           <a:srgbClr val="142738"/>
         </a:solidFill>
+        <a:effectLst/>
       </p:bgPr>
     </p:bg>
     <p:spTree>
@@ -4594,41 +4534,46 @@
         <p:nvPr/>
       </p:nvGrpSpPr>
       <p:grpSpPr>
-        <a:xfrm xmlns:a="http://schemas.openxmlformats.org/drawingml/2006/main"/>
+        <a:xfrm>
+          <a:off x="0" y="0"/>
+          <a:ext cx="0" cy="0"/>
+          <a:chOff x="0" y="0"/>
+          <a:chExt cx="0" cy="0"/>
+        </a:xfrm>
       </p:grpSpPr>
       <p:sp>
         <p:nvSpPr>
-          <p:cNvPr id="5" name="">
-            <a:extLst xmlns:a="http://schemas.openxmlformats.org/drawingml/2006/main">
+          <p:cNvPr id="5" name="Rectangle 4">
+            <a:extLst>
               <a:ext uri="{FF2B5EF4-FFF2-40B4-BE49-F238E27FC236}">
                 <a16:creationId xmlns:a16="http://schemas.microsoft.com/office/drawing/2014/main" id="{514C27E5-2922-46A3-A819-C64BE4E346B5}"/>
               </a:ext>
             </a:extLst>
           </p:cNvPr>
           <p:cNvSpPr>
-            <a:spLocks xmlns:a="http://schemas.openxmlformats.org/drawingml/2006/main" noGrp="1"/>
+            <a:spLocks noGrp="1"/>
           </p:cNvSpPr>
           <p:nvPr/>
         </p:nvSpPr>
         <p:spPr>
-          <a:xfrm xmlns:a="http://schemas.openxmlformats.org/drawingml/2006/main">
+          <a:xfrm>
             <a:off x="609600" y="438150"/>
             <a:ext cx="10934700" cy="952500"/>
           </a:xfrm>
-          <a:prstGeom xmlns:a="http://schemas.openxmlformats.org/drawingml/2006/main" prst="rect">
+          <a:prstGeom prst="rect">
             <a:avLst/>
           </a:prstGeom>
-          <a:noFill xmlns:a="http://schemas.openxmlformats.org/drawingml/2006/main"/>
-          <a:ln xmlns:a="http://schemas.openxmlformats.org/drawingml/2006/main" w="0">
+          <a:noFill/>
+          <a:ln w="0">
             <a:noFill/>
           </a:ln>
         </p:spPr>
         <p:txBody>
-          <a:bodyPr xmlns:a="http://schemas.openxmlformats.org/drawingml/2006/main">
+          <a:bodyPr>
             <a:noAutofit/>
           </a:bodyPr>
-          <a:lstStyle xmlns:a="http://schemas.openxmlformats.org/drawingml/2006/main"/>
-          <a:p xmlns:a="http://schemas.openxmlformats.org/drawingml/2006/main">
+          <a:lstStyle/>
+          <a:p>
             <a:pPr>
               <a:defRPr sz="3450" b="1">
                 <a:solidFill>
@@ -4655,37 +4600,37 @@
       </p:sp>
       <p:sp>
         <p:nvSpPr>
-          <p:cNvPr id="2" name="">
-            <a:extLst xmlns:a="http://schemas.openxmlformats.org/drawingml/2006/main">
+          <p:cNvPr id="2" name="Rectangle 1">
+            <a:extLst>
               <a:ext uri="{FF2B5EF4-FFF2-40B4-BE49-F238E27FC236}">
                 <a16:creationId xmlns:a16="http://schemas.microsoft.com/office/drawing/2014/main" id="{165D2D5D-DE5E-45D2-AA71-E2C28FCF32E5}"/>
               </a:ext>
             </a:extLst>
           </p:cNvPr>
           <p:cNvSpPr>
-            <a:spLocks xmlns:a="http://schemas.openxmlformats.org/drawingml/2006/main" noGrp="1"/>
+            <a:spLocks noGrp="1"/>
           </p:cNvSpPr>
           <p:nvPr/>
         </p:nvSpPr>
         <p:spPr>
-          <a:xfrm xmlns:a="http://schemas.openxmlformats.org/drawingml/2006/main">
+          <a:xfrm>
             <a:off x="11144250" y="6343650"/>
             <a:ext cx="476250" cy="266700"/>
           </a:xfrm>
-          <a:prstGeom xmlns:a="http://schemas.openxmlformats.org/drawingml/2006/main" prst="rect">
+          <a:prstGeom prst="rect">
             <a:avLst/>
           </a:prstGeom>
-          <a:noFill xmlns:a="http://schemas.openxmlformats.org/drawingml/2006/main"/>
-          <a:ln xmlns:a="http://schemas.openxmlformats.org/drawingml/2006/main" w="0">
+          <a:noFill/>
+          <a:ln w="0">
             <a:noFill/>
           </a:ln>
         </p:spPr>
         <p:txBody>
-          <a:bodyPr xmlns:a="http://schemas.openxmlformats.org/drawingml/2006/main">
+          <a:bodyPr>
             <a:noAutofit/>
           </a:bodyPr>
-          <a:lstStyle xmlns:a="http://schemas.openxmlformats.org/drawingml/2006/main"/>
-          <a:p xmlns:a="http://schemas.openxmlformats.org/drawingml/2006/main">
+          <a:lstStyle/>
+          <a:p>
             <a:pPr>
               <a:defRPr sz="1350" b="0">
                 <a:solidFill>
@@ -4712,37 +4657,37 @@
       </p:sp>
       <p:sp>
         <p:nvSpPr>
-          <p:cNvPr id="3" name="">
-            <a:extLst xmlns:a="http://schemas.openxmlformats.org/drawingml/2006/main">
+          <p:cNvPr id="3" name="Rectangle 2">
+            <a:extLst>
               <a:ext uri="{FF2B5EF4-FFF2-40B4-BE49-F238E27FC236}">
                 <a16:creationId xmlns:a16="http://schemas.microsoft.com/office/drawing/2014/main" id="{38605956-11D8-426B-A6BA-A769A01641F6}"/>
               </a:ext>
             </a:extLst>
           </p:cNvPr>
           <p:cNvSpPr>
-            <a:spLocks xmlns:a="http://schemas.openxmlformats.org/drawingml/2006/main" noGrp="1"/>
+            <a:spLocks noGrp="1"/>
           </p:cNvSpPr>
           <p:nvPr/>
         </p:nvSpPr>
         <p:spPr>
-          <a:xfrm xmlns:a="http://schemas.openxmlformats.org/drawingml/2006/main">
+          <a:xfrm>
             <a:off x="609600" y="1752600"/>
             <a:ext cx="10858500" cy="3333750"/>
           </a:xfrm>
-          <a:prstGeom xmlns:a="http://schemas.openxmlformats.org/drawingml/2006/main" prst="rect">
+          <a:prstGeom prst="rect">
             <a:avLst/>
           </a:prstGeom>
-          <a:noFill xmlns:a="http://schemas.openxmlformats.org/drawingml/2006/main"/>
-          <a:ln xmlns:a="http://schemas.openxmlformats.org/drawingml/2006/main" w="0">
+          <a:noFill/>
+          <a:ln w="0">
             <a:noFill/>
           </a:ln>
         </p:spPr>
         <p:txBody>
-          <a:bodyPr xmlns:a="http://schemas.openxmlformats.org/drawingml/2006/main">
+          <a:bodyPr>
             <a:noAutofit/>
           </a:bodyPr>
-          <a:lstStyle xmlns:a="http://schemas.openxmlformats.org/drawingml/2006/main"/>
-          <a:p xmlns:a="http://schemas.openxmlformats.org/drawingml/2006/main">
+          <a:lstStyle/>
+          <a:p>
             <a:pPr>
               <a:defRPr sz="2025" b="0">
                 <a:solidFill>
@@ -4765,7 +4710,7 @@
               <a:t>from typing import Literal</a:t>
             </a:r>
           </a:p>
-          <a:p xmlns:a="http://schemas.openxmlformats.org/drawingml/2006/main">
+          <a:p>
             <a:pPr>
               <a:defRPr sz="2025" b="0">
                 <a:solidFill>
@@ -4788,12 +4733,17 @@
               <a:t>from pydantic import BaseModel, EmailStr, Field, SecretStr</a:t>
             </a:r>
           </a:p>
-          <a:p xmlns:a="http://schemas.openxmlformats.org/drawingml/2006/main">
-            <a:r>
-              <a:t/>
-            </a:r>
-          </a:p>
-          <a:p xmlns:a="http://schemas.openxmlformats.org/drawingml/2006/main">
+          <a:p>
+            <a:endParaRPr sz="2025" b="0">
+              <a:solidFill>
+                <a:srgbClr val="D5E9F2"/>
+              </a:solidFill>
+              <a:latin typeface="Helvetica Neue"/>
+              <a:ea typeface="Helvetica Neue"/>
+              <a:cs typeface="Helvetica Neue"/>
+            </a:endParaRPr>
+          </a:p>
+          <a:p>
             <a:pPr>
               <a:defRPr sz="2025" b="0">
                 <a:solidFill>
@@ -4816,7 +4766,7 @@
               <a:t>class User(BaseModel):</a:t>
             </a:r>
           </a:p>
-          <a:p xmlns:a="http://schemas.openxmlformats.org/drawingml/2006/main">
+          <a:p>
             <a:pPr>
               <a:defRPr sz="2025" b="0">
                 <a:solidFill>
@@ -4839,7 +4789,7 @@
               <a:t>    name: str = Field(min_length=2)</a:t>
             </a:r>
           </a:p>
-          <a:p xmlns:a="http://schemas.openxmlformats.org/drawingml/2006/main">
+          <a:p>
             <a:pPr>
               <a:defRPr sz="2025" b="0">
                 <a:solidFill>
@@ -4862,7 +4812,7 @@
               <a:t>    email: EmailStr</a:t>
             </a:r>
           </a:p>
-          <a:p xmlns:a="http://schemas.openxmlformats.org/drawingml/2006/main">
+          <a:p>
             <a:pPr>
               <a:defRPr sz="2025" b="0">
                 <a:solidFill>
@@ -4885,7 +4835,7 @@
               <a:t>    password: SecretStr = Field(exclude=True)</a:t>
             </a:r>
           </a:p>
-          <a:p xmlns:a="http://schemas.openxmlformats.org/drawingml/2006/main">
+          <a:p>
             <a:pPr>
               <a:defRPr sz="2025" b="0">
                 <a:solidFill>
@@ -4912,37 +4862,37 @@
       </p:sp>
       <p:sp>
         <p:nvSpPr>
-          <p:cNvPr id="4" name="">
-            <a:extLst xmlns:a="http://schemas.openxmlformats.org/drawingml/2006/main">
+          <p:cNvPr id="4" name="Rectangle 3">
+            <a:extLst>
               <a:ext uri="{FF2B5EF4-FFF2-40B4-BE49-F238E27FC236}">
                 <a16:creationId xmlns:a16="http://schemas.microsoft.com/office/drawing/2014/main" id="{2F40962A-8262-4659-93AE-7DC493EC7336}"/>
               </a:ext>
             </a:extLst>
           </p:cNvPr>
           <p:cNvSpPr>
-            <a:spLocks xmlns:a="http://schemas.openxmlformats.org/drawingml/2006/main" noGrp="1"/>
+            <a:spLocks noGrp="1"/>
           </p:cNvSpPr>
           <p:nvPr/>
         </p:nvSpPr>
         <p:spPr>
-          <a:xfrm xmlns:a="http://schemas.openxmlformats.org/drawingml/2006/main">
+          <a:xfrm>
             <a:off x="609600" y="5295900"/>
             <a:ext cx="10858500" cy="809625"/>
           </a:xfrm>
-          <a:prstGeom xmlns:a="http://schemas.openxmlformats.org/drawingml/2006/main" prst="rect">
+          <a:prstGeom prst="rect">
             <a:avLst/>
           </a:prstGeom>
-          <a:noFill xmlns:a="http://schemas.openxmlformats.org/drawingml/2006/main"/>
-          <a:ln xmlns:a="http://schemas.openxmlformats.org/drawingml/2006/main" w="0">
+          <a:noFill/>
+          <a:ln w="0">
             <a:noFill/>
           </a:ln>
         </p:spPr>
         <p:txBody>
-          <a:bodyPr xmlns:a="http://schemas.openxmlformats.org/drawingml/2006/main">
+          <a:bodyPr>
             <a:noAutofit/>
           </a:bodyPr>
-          <a:lstStyle xmlns:a="http://schemas.openxmlformats.org/drawingml/2006/main"/>
-          <a:p xmlns:a="http://schemas.openxmlformats.org/drawingml/2006/main">
+          <a:lstStyle/>
+          <a:p>
             <a:pPr>
               <a:defRPr sz="1950" b="0">
                 <a:solidFill>
@@ -4965,7 +4915,7 @@
               <a:t>SecretStr oculta el valor al representarlo. No cifra la contraseña.</a:t>
             </a:r>
           </a:p>
-          <a:p xmlns:a="http://schemas.openxmlformats.org/drawingml/2006/main">
+          <a:p>
             <a:pPr>
               <a:defRPr sz="1950" b="0">
                 <a:solidFill>
@@ -4997,17 +4947,21 @@
       </p:ext>
     </p:extLst>
   </p:cSld>
+  <p:clrMapOvr>
+    <a:masterClrMapping/>
+  </p:clrMapOvr>
 </p:sld>
 </file>
 
 <file path=ppt/slides/slide15.xml><?xml version="1.0" encoding="utf-8"?>
-<p:sld xmlns:p="http://schemas.openxmlformats.org/presentationml/2006/main">
+<p:sld xmlns:a="http://schemas.openxmlformats.org/drawingml/2006/main" xmlns:r="http://schemas.openxmlformats.org/officeDocument/2006/relationships" xmlns:p="http://schemas.openxmlformats.org/presentationml/2006/main">
   <p:cSld>
     <p:bg>
       <p:bgPr>
-        <a:solidFill xmlns:a="http://schemas.openxmlformats.org/drawingml/2006/main">
+        <a:solidFill>
           <a:srgbClr val="F7F5EF"/>
         </a:solidFill>
+        <a:effectLst/>
       </p:bgPr>
     </p:bg>
     <p:spTree>
@@ -5017,41 +4971,46 @@
         <p:nvPr/>
       </p:nvGrpSpPr>
       <p:grpSpPr>
-        <a:xfrm xmlns:a="http://schemas.openxmlformats.org/drawingml/2006/main"/>
+        <a:xfrm>
+          <a:off x="0" y="0"/>
+          <a:ext cx="0" cy="0"/>
+          <a:chOff x="0" y="0"/>
+          <a:chExt cx="0" cy="0"/>
+        </a:xfrm>
       </p:grpSpPr>
       <p:sp>
         <p:nvSpPr>
-          <p:cNvPr id="9" name="">
-            <a:extLst xmlns:a="http://schemas.openxmlformats.org/drawingml/2006/main">
+          <p:cNvPr id="9" name="Rectangle 8">
+            <a:extLst>
               <a:ext uri="{FF2B5EF4-FFF2-40B4-BE49-F238E27FC236}">
                 <a16:creationId xmlns:a16="http://schemas.microsoft.com/office/drawing/2014/main" id="{1238ABDB-8608-4632-9D04-3C8EC43DEF7E}"/>
               </a:ext>
             </a:extLst>
           </p:cNvPr>
           <p:cNvSpPr>
-            <a:spLocks xmlns:a="http://schemas.openxmlformats.org/drawingml/2006/main" noGrp="1"/>
+            <a:spLocks noGrp="1"/>
           </p:cNvSpPr>
           <p:nvPr/>
         </p:nvSpPr>
         <p:spPr>
-          <a:xfrm xmlns:a="http://schemas.openxmlformats.org/drawingml/2006/main">
+          <a:xfrm>
             <a:off x="609600" y="438150"/>
             <a:ext cx="10934700" cy="952500"/>
           </a:xfrm>
-          <a:prstGeom xmlns:a="http://schemas.openxmlformats.org/drawingml/2006/main" prst="rect">
+          <a:prstGeom prst="rect">
             <a:avLst/>
           </a:prstGeom>
-          <a:noFill xmlns:a="http://schemas.openxmlformats.org/drawingml/2006/main"/>
-          <a:ln xmlns:a="http://schemas.openxmlformats.org/drawingml/2006/main" w="0">
+          <a:noFill/>
+          <a:ln w="0">
             <a:noFill/>
           </a:ln>
         </p:spPr>
         <p:txBody>
-          <a:bodyPr xmlns:a="http://schemas.openxmlformats.org/drawingml/2006/main">
+          <a:bodyPr>
             <a:noAutofit/>
           </a:bodyPr>
-          <a:lstStyle xmlns:a="http://schemas.openxmlformats.org/drawingml/2006/main"/>
-          <a:p xmlns:a="http://schemas.openxmlformats.org/drawingml/2006/main">
+          <a:lstStyle/>
+          <a:p>
             <a:pPr>
               <a:defRPr sz="3450" b="1">
                 <a:solidFill>
@@ -5078,37 +5037,37 @@
       </p:sp>
       <p:sp>
         <p:nvSpPr>
-          <p:cNvPr id="2" name="">
-            <a:extLst xmlns:a="http://schemas.openxmlformats.org/drawingml/2006/main">
+          <p:cNvPr id="2" name="Rectangle 1">
+            <a:extLst>
               <a:ext uri="{FF2B5EF4-FFF2-40B4-BE49-F238E27FC236}">
                 <a16:creationId xmlns:a16="http://schemas.microsoft.com/office/drawing/2014/main" id="{B5AAD767-DEAE-4846-B700-8B321C800713}"/>
               </a:ext>
             </a:extLst>
           </p:cNvPr>
           <p:cNvSpPr>
-            <a:spLocks xmlns:a="http://schemas.openxmlformats.org/drawingml/2006/main" noGrp="1"/>
+            <a:spLocks noGrp="1"/>
           </p:cNvSpPr>
           <p:nvPr/>
         </p:nvSpPr>
         <p:spPr>
-          <a:xfrm xmlns:a="http://schemas.openxmlformats.org/drawingml/2006/main">
+          <a:xfrm>
             <a:off x="11144250" y="6343650"/>
             <a:ext cx="476250" cy="266700"/>
           </a:xfrm>
-          <a:prstGeom xmlns:a="http://schemas.openxmlformats.org/drawingml/2006/main" prst="rect">
+          <a:prstGeom prst="rect">
             <a:avLst/>
           </a:prstGeom>
-          <a:noFill xmlns:a="http://schemas.openxmlformats.org/drawingml/2006/main"/>
-          <a:ln xmlns:a="http://schemas.openxmlformats.org/drawingml/2006/main" w="0">
+          <a:noFill/>
+          <a:ln w="0">
             <a:noFill/>
           </a:ln>
         </p:spPr>
         <p:txBody>
-          <a:bodyPr xmlns:a="http://schemas.openxmlformats.org/drawingml/2006/main">
+          <a:bodyPr>
             <a:noAutofit/>
           </a:bodyPr>
-          <a:lstStyle xmlns:a="http://schemas.openxmlformats.org/drawingml/2006/main"/>
-          <a:p xmlns:a="http://schemas.openxmlformats.org/drawingml/2006/main">
+          <a:lstStyle/>
+          <a:p>
             <a:pPr>
               <a:defRPr sz="1350" b="0">
                 <a:solidFill>
@@ -5135,37 +5094,37 @@
       </p:sp>
       <p:sp>
         <p:nvSpPr>
-          <p:cNvPr id="3" name="">
-            <a:extLst xmlns:a="http://schemas.openxmlformats.org/drawingml/2006/main">
+          <p:cNvPr id="3" name="Rectangle 2">
+            <a:extLst>
               <a:ext uri="{FF2B5EF4-FFF2-40B4-BE49-F238E27FC236}">
                 <a16:creationId xmlns:a16="http://schemas.microsoft.com/office/drawing/2014/main" id="{C4F69470-5248-40BF-AEA0-34B87528F600}"/>
               </a:ext>
             </a:extLst>
           </p:cNvPr>
           <p:cNvSpPr>
-            <a:spLocks xmlns:a="http://schemas.openxmlformats.org/drawingml/2006/main" noGrp="1"/>
+            <a:spLocks noGrp="1"/>
           </p:cNvSpPr>
           <p:nvPr/>
         </p:nvSpPr>
         <p:spPr>
-          <a:xfrm xmlns:a="http://schemas.openxmlformats.org/drawingml/2006/main">
+          <a:xfrm>
             <a:off x="609600" y="1743075"/>
             <a:ext cx="3524250" cy="476250"/>
           </a:xfrm>
-          <a:prstGeom xmlns:a="http://schemas.openxmlformats.org/drawingml/2006/main" prst="rect">
+          <a:prstGeom prst="rect">
             <a:avLst/>
           </a:prstGeom>
-          <a:noFill xmlns:a="http://schemas.openxmlformats.org/drawingml/2006/main"/>
-          <a:ln xmlns:a="http://schemas.openxmlformats.org/drawingml/2006/main" w="0">
+          <a:noFill/>
+          <a:ln w="0">
             <a:noFill/>
           </a:ln>
         </p:spPr>
         <p:txBody>
-          <a:bodyPr xmlns:a="http://schemas.openxmlformats.org/drawingml/2006/main">
+          <a:bodyPr>
             <a:noAutofit/>
           </a:bodyPr>
-          <a:lstStyle xmlns:a="http://schemas.openxmlformats.org/drawingml/2006/main"/>
-          <a:p xmlns:a="http://schemas.openxmlformats.org/drawingml/2006/main">
+          <a:lstStyle/>
+          <a:p>
             <a:pPr>
               <a:defRPr sz="2475" b="0">
                 <a:solidFill>
@@ -5192,37 +5151,37 @@
       </p:sp>
       <p:sp>
         <p:nvSpPr>
-          <p:cNvPr id="4" name="">
-            <a:extLst xmlns:a="http://schemas.openxmlformats.org/drawingml/2006/main">
+          <p:cNvPr id="4" name="Rectangle 3">
+            <a:extLst>
               <a:ext uri="{FF2B5EF4-FFF2-40B4-BE49-F238E27FC236}">
                 <a16:creationId xmlns:a16="http://schemas.microsoft.com/office/drawing/2014/main" id="{B3DF07B6-F084-431B-9A57-5ABC5E2F13B2}"/>
               </a:ext>
             </a:extLst>
           </p:cNvPr>
           <p:cNvSpPr>
-            <a:spLocks xmlns:a="http://schemas.openxmlformats.org/drawingml/2006/main" noGrp="1"/>
+            <a:spLocks noGrp="1"/>
           </p:cNvSpPr>
           <p:nvPr/>
         </p:nvSpPr>
         <p:spPr>
-          <a:xfrm xmlns:a="http://schemas.openxmlformats.org/drawingml/2006/main">
+          <a:xfrm>
             <a:off x="609600" y="2638425"/>
             <a:ext cx="3714750" cy="1428750"/>
           </a:xfrm>
-          <a:prstGeom xmlns:a="http://schemas.openxmlformats.org/drawingml/2006/main" prst="rect">
+          <a:prstGeom prst="rect">
             <a:avLst/>
           </a:prstGeom>
-          <a:noFill xmlns:a="http://schemas.openxmlformats.org/drawingml/2006/main"/>
-          <a:ln xmlns:a="http://schemas.openxmlformats.org/drawingml/2006/main" w="0">
+          <a:noFill/>
+          <a:ln w="0">
             <a:noFill/>
           </a:ln>
         </p:spPr>
         <p:txBody>
-          <a:bodyPr xmlns:a="http://schemas.openxmlformats.org/drawingml/2006/main">
+          <a:bodyPr>
             <a:noAutofit/>
           </a:bodyPr>
-          <a:lstStyle xmlns:a="http://schemas.openxmlformats.org/drawingml/2006/main"/>
-          <a:p xmlns:a="http://schemas.openxmlformats.org/drawingml/2006/main">
+          <a:lstStyle/>
+          <a:p>
             <a:pPr>
               <a:defRPr sz="2400" b="0">
                 <a:solidFill>
@@ -5245,7 +5204,7 @@
               <a:t>user.name</a:t>
             </a:r>
           </a:p>
-          <a:p xmlns:a="http://schemas.openxmlformats.org/drawingml/2006/main">
+          <a:p>
             <a:pPr>
               <a:defRPr sz="2400" b="0">
                 <a:solidFill>
@@ -5272,37 +5231,37 @@
       </p:sp>
       <p:sp>
         <p:nvSpPr>
-          <p:cNvPr id="5" name="">
-            <a:extLst xmlns:a="http://schemas.openxmlformats.org/drawingml/2006/main">
+          <p:cNvPr id="5" name="Rectangle 4">
+            <a:extLst>
               <a:ext uri="{FF2B5EF4-FFF2-40B4-BE49-F238E27FC236}">
                 <a16:creationId xmlns:a16="http://schemas.microsoft.com/office/drawing/2014/main" id="{FDDBC8B9-8435-47A4-AA0B-117C4EDCD285}"/>
               </a:ext>
             </a:extLst>
           </p:cNvPr>
           <p:cNvSpPr>
-            <a:spLocks xmlns:a="http://schemas.openxmlformats.org/drawingml/2006/main" noGrp="1"/>
+            <a:spLocks noGrp="1"/>
           </p:cNvSpPr>
           <p:nvPr/>
         </p:nvSpPr>
         <p:spPr>
-          <a:xfrm xmlns:a="http://schemas.openxmlformats.org/drawingml/2006/main">
+          <a:xfrm>
             <a:off x="4591050" y="1743075"/>
             <a:ext cx="3714750" cy="476250"/>
           </a:xfrm>
-          <a:prstGeom xmlns:a="http://schemas.openxmlformats.org/drawingml/2006/main" prst="rect">
+          <a:prstGeom prst="rect">
             <a:avLst/>
           </a:prstGeom>
-          <a:noFill xmlns:a="http://schemas.openxmlformats.org/drawingml/2006/main"/>
-          <a:ln xmlns:a="http://schemas.openxmlformats.org/drawingml/2006/main" w="0">
+          <a:noFill/>
+          <a:ln w="0">
             <a:noFill/>
           </a:ln>
         </p:spPr>
         <p:txBody>
-          <a:bodyPr xmlns:a="http://schemas.openxmlformats.org/drawingml/2006/main">
+          <a:bodyPr>
             <a:noAutofit/>
           </a:bodyPr>
-          <a:lstStyle xmlns:a="http://schemas.openxmlformats.org/drawingml/2006/main"/>
-          <a:p xmlns:a="http://schemas.openxmlformats.org/drawingml/2006/main">
+          <a:lstStyle/>
+          <a:p>
             <a:pPr>
               <a:defRPr sz="2475" b="0">
                 <a:solidFill>
@@ -5329,37 +5288,37 @@
       </p:sp>
       <p:sp>
         <p:nvSpPr>
-          <p:cNvPr id="6" name="">
-            <a:extLst xmlns:a="http://schemas.openxmlformats.org/drawingml/2006/main">
+          <p:cNvPr id="6" name="Rectangle 5">
+            <a:extLst>
               <a:ext uri="{FF2B5EF4-FFF2-40B4-BE49-F238E27FC236}">
                 <a16:creationId xmlns:a16="http://schemas.microsoft.com/office/drawing/2014/main" id="{F9140AFE-F69A-4397-8A88-EBEC9251B8AA}"/>
               </a:ext>
             </a:extLst>
           </p:cNvPr>
           <p:cNvSpPr>
-            <a:spLocks xmlns:a="http://schemas.openxmlformats.org/drawingml/2006/main" noGrp="1"/>
+            <a:spLocks noGrp="1"/>
           </p:cNvSpPr>
           <p:nvPr/>
         </p:nvSpPr>
         <p:spPr>
-          <a:xfrm xmlns:a="http://schemas.openxmlformats.org/drawingml/2006/main">
+          <a:xfrm>
             <a:off x="4591050" y="2638425"/>
             <a:ext cx="6858000" cy="619125"/>
           </a:xfrm>
-          <a:prstGeom xmlns:a="http://schemas.openxmlformats.org/drawingml/2006/main" prst="rect">
+          <a:prstGeom prst="rect">
             <a:avLst/>
           </a:prstGeom>
-          <a:noFill xmlns:a="http://schemas.openxmlformats.org/drawingml/2006/main"/>
-          <a:ln xmlns:a="http://schemas.openxmlformats.org/drawingml/2006/main" w="0">
+          <a:noFill/>
+          <a:ln w="0">
             <a:noFill/>
           </a:ln>
         </p:spPr>
         <p:txBody>
-          <a:bodyPr xmlns:a="http://schemas.openxmlformats.org/drawingml/2006/main">
+          <a:bodyPr>
             <a:noAutofit/>
           </a:bodyPr>
-          <a:lstStyle xmlns:a="http://schemas.openxmlformats.org/drawingml/2006/main"/>
-          <a:p xmlns:a="http://schemas.openxmlformats.org/drawingml/2006/main">
+          <a:lstStyle/>
+          <a:p>
             <a:pPr>
               <a:defRPr sz="2400" b="0">
                 <a:solidFill>
@@ -5386,37 +5345,37 @@
       </p:sp>
       <p:sp>
         <p:nvSpPr>
-          <p:cNvPr id="7" name="">
-            <a:extLst xmlns:a="http://schemas.openxmlformats.org/drawingml/2006/main">
+          <p:cNvPr id="7" name="Rectangle 6">
+            <a:extLst>
               <a:ext uri="{FF2B5EF4-FFF2-40B4-BE49-F238E27FC236}">
                 <a16:creationId xmlns:a16="http://schemas.microsoft.com/office/drawing/2014/main" id="{3E743067-1149-498E-9207-DBACE69AEE4E}"/>
               </a:ext>
             </a:extLst>
           </p:cNvPr>
           <p:cNvSpPr>
-            <a:spLocks xmlns:a="http://schemas.openxmlformats.org/drawingml/2006/main" noGrp="1"/>
+            <a:spLocks noGrp="1"/>
           </p:cNvSpPr>
           <p:nvPr/>
         </p:nvSpPr>
         <p:spPr>
-          <a:xfrm xmlns:a="http://schemas.openxmlformats.org/drawingml/2006/main">
+          <a:xfrm>
             <a:off x="4591050" y="4114800"/>
             <a:ext cx="3714750" cy="476250"/>
           </a:xfrm>
-          <a:prstGeom xmlns:a="http://schemas.openxmlformats.org/drawingml/2006/main" prst="rect">
+          <a:prstGeom prst="rect">
             <a:avLst/>
           </a:prstGeom>
-          <a:noFill xmlns:a="http://schemas.openxmlformats.org/drawingml/2006/main"/>
-          <a:ln xmlns:a="http://schemas.openxmlformats.org/drawingml/2006/main" w="0">
+          <a:noFill/>
+          <a:ln w="0">
             <a:noFill/>
           </a:ln>
         </p:spPr>
         <p:txBody>
-          <a:bodyPr xmlns:a="http://schemas.openxmlformats.org/drawingml/2006/main">
+          <a:bodyPr>
             <a:noAutofit/>
           </a:bodyPr>
-          <a:lstStyle xmlns:a="http://schemas.openxmlformats.org/drawingml/2006/main"/>
-          <a:p xmlns:a="http://schemas.openxmlformats.org/drawingml/2006/main">
+          <a:lstStyle/>
+          <a:p>
             <a:pPr>
               <a:defRPr sz="2475" b="0">
                 <a:solidFill>
@@ -5443,37 +5402,37 @@
       </p:sp>
       <p:sp>
         <p:nvSpPr>
-          <p:cNvPr id="8" name="">
-            <a:extLst xmlns:a="http://schemas.openxmlformats.org/drawingml/2006/main">
+          <p:cNvPr id="8" name="Rectangle 7">
+            <a:extLst>
               <a:ext uri="{FF2B5EF4-FFF2-40B4-BE49-F238E27FC236}">
                 <a16:creationId xmlns:a16="http://schemas.microsoft.com/office/drawing/2014/main" id="{4E180BB6-D7EB-41D6-A38E-467A99D04A6C}"/>
               </a:ext>
             </a:extLst>
           </p:cNvPr>
           <p:cNvSpPr>
-            <a:spLocks xmlns:a="http://schemas.openxmlformats.org/drawingml/2006/main" noGrp="1"/>
+            <a:spLocks noGrp="1"/>
           </p:cNvSpPr>
           <p:nvPr/>
         </p:nvSpPr>
         <p:spPr>
-          <a:xfrm xmlns:a="http://schemas.openxmlformats.org/drawingml/2006/main">
+          <a:xfrm>
             <a:off x="4591050" y="4991100"/>
             <a:ext cx="6858000" cy="619125"/>
           </a:xfrm>
-          <a:prstGeom xmlns:a="http://schemas.openxmlformats.org/drawingml/2006/main" prst="rect">
+          <a:prstGeom prst="rect">
             <a:avLst/>
           </a:prstGeom>
-          <a:noFill xmlns:a="http://schemas.openxmlformats.org/drawingml/2006/main"/>
-          <a:ln xmlns:a="http://schemas.openxmlformats.org/drawingml/2006/main" w="0">
+          <a:noFill/>
+          <a:ln w="0">
             <a:noFill/>
           </a:ln>
         </p:spPr>
         <p:txBody>
-          <a:bodyPr xmlns:a="http://schemas.openxmlformats.org/drawingml/2006/main">
+          <a:bodyPr>
             <a:noAutofit/>
           </a:bodyPr>
-          <a:lstStyle xmlns:a="http://schemas.openxmlformats.org/drawingml/2006/main"/>
-          <a:p xmlns:a="http://schemas.openxmlformats.org/drawingml/2006/main">
+          <a:lstStyle/>
+          <a:p>
             <a:pPr>
               <a:defRPr sz="2400" b="0">
                 <a:solidFill>
@@ -5505,17 +5464,21 @@
       </p:ext>
     </p:extLst>
   </p:cSld>
+  <p:clrMapOvr>
+    <a:masterClrMapping/>
+  </p:clrMapOvr>
 </p:sld>
 </file>
 
 <file path=ppt/slides/slide16.xml><?xml version="1.0" encoding="utf-8"?>
-<p:sld xmlns:p="http://schemas.openxmlformats.org/presentationml/2006/main">
+<p:sld xmlns:a="http://schemas.openxmlformats.org/drawingml/2006/main" xmlns:r="http://schemas.openxmlformats.org/officeDocument/2006/relationships" xmlns:p="http://schemas.openxmlformats.org/presentationml/2006/main">
   <p:cSld>
     <p:bg>
       <p:bgPr>
-        <a:solidFill xmlns:a="http://schemas.openxmlformats.org/drawingml/2006/main">
+        <a:solidFill>
           <a:srgbClr val="142738"/>
         </a:solidFill>
+        <a:effectLst/>
       </p:bgPr>
     </p:bg>
     <p:spTree>
@@ -5525,41 +5488,46 @@
         <p:nvPr/>
       </p:nvGrpSpPr>
       <p:grpSpPr>
-        <a:xfrm xmlns:a="http://schemas.openxmlformats.org/drawingml/2006/main"/>
+        <a:xfrm>
+          <a:off x="0" y="0"/>
+          <a:ext cx="0" cy="0"/>
+          <a:chOff x="0" y="0"/>
+          <a:chExt cx="0" cy="0"/>
+        </a:xfrm>
       </p:grpSpPr>
       <p:sp>
         <p:nvSpPr>
-          <p:cNvPr id="5" name="">
-            <a:extLst xmlns:a="http://schemas.openxmlformats.org/drawingml/2006/main">
+          <p:cNvPr id="5" name="Rectangle 4">
+            <a:extLst>
               <a:ext uri="{FF2B5EF4-FFF2-40B4-BE49-F238E27FC236}">
                 <a16:creationId xmlns:a16="http://schemas.microsoft.com/office/drawing/2014/main" id="{015E55F2-1083-4F28-808D-7E90E4A99CAD}"/>
               </a:ext>
             </a:extLst>
           </p:cNvPr>
           <p:cNvSpPr>
-            <a:spLocks xmlns:a="http://schemas.openxmlformats.org/drawingml/2006/main" noGrp="1"/>
+            <a:spLocks noGrp="1"/>
           </p:cNvSpPr>
           <p:nvPr/>
         </p:nvSpPr>
         <p:spPr>
-          <a:xfrm xmlns:a="http://schemas.openxmlformats.org/drawingml/2006/main">
+          <a:xfrm>
             <a:off x="609600" y="438150"/>
             <a:ext cx="10934700" cy="952500"/>
           </a:xfrm>
-          <a:prstGeom xmlns:a="http://schemas.openxmlformats.org/drawingml/2006/main" prst="rect">
+          <a:prstGeom prst="rect">
             <a:avLst/>
           </a:prstGeom>
-          <a:noFill xmlns:a="http://schemas.openxmlformats.org/drawingml/2006/main"/>
-          <a:ln xmlns:a="http://schemas.openxmlformats.org/drawingml/2006/main" w="0">
+          <a:noFill/>
+          <a:ln w="0">
             <a:noFill/>
           </a:ln>
         </p:spPr>
         <p:txBody>
-          <a:bodyPr xmlns:a="http://schemas.openxmlformats.org/drawingml/2006/main">
+          <a:bodyPr>
             <a:noAutofit/>
           </a:bodyPr>
-          <a:lstStyle xmlns:a="http://schemas.openxmlformats.org/drawingml/2006/main"/>
-          <a:p xmlns:a="http://schemas.openxmlformats.org/drawingml/2006/main">
+          <a:lstStyle/>
+          <a:p>
             <a:pPr>
               <a:defRPr sz="3450" b="1">
                 <a:solidFill>
@@ -5586,37 +5554,37 @@
       </p:sp>
       <p:sp>
         <p:nvSpPr>
-          <p:cNvPr id="2" name="">
-            <a:extLst xmlns:a="http://schemas.openxmlformats.org/drawingml/2006/main">
+          <p:cNvPr id="2" name="Rectangle 1">
+            <a:extLst>
               <a:ext uri="{FF2B5EF4-FFF2-40B4-BE49-F238E27FC236}">
                 <a16:creationId xmlns:a16="http://schemas.microsoft.com/office/drawing/2014/main" id="{4850B6BC-F107-44EF-A3E3-32A4C04F1956}"/>
               </a:ext>
             </a:extLst>
           </p:cNvPr>
           <p:cNvSpPr>
-            <a:spLocks xmlns:a="http://schemas.openxmlformats.org/drawingml/2006/main" noGrp="1"/>
+            <a:spLocks noGrp="1"/>
           </p:cNvSpPr>
           <p:nvPr/>
         </p:nvSpPr>
         <p:spPr>
-          <a:xfrm xmlns:a="http://schemas.openxmlformats.org/drawingml/2006/main">
+          <a:xfrm>
             <a:off x="11144250" y="6343650"/>
             <a:ext cx="476250" cy="266700"/>
           </a:xfrm>
-          <a:prstGeom xmlns:a="http://schemas.openxmlformats.org/drawingml/2006/main" prst="rect">
+          <a:prstGeom prst="rect">
             <a:avLst/>
           </a:prstGeom>
-          <a:noFill xmlns:a="http://schemas.openxmlformats.org/drawingml/2006/main"/>
-          <a:ln xmlns:a="http://schemas.openxmlformats.org/drawingml/2006/main" w="0">
+          <a:noFill/>
+          <a:ln w="0">
             <a:noFill/>
           </a:ln>
         </p:spPr>
         <p:txBody>
-          <a:bodyPr xmlns:a="http://schemas.openxmlformats.org/drawingml/2006/main">
+          <a:bodyPr>
             <a:noAutofit/>
           </a:bodyPr>
-          <a:lstStyle xmlns:a="http://schemas.openxmlformats.org/drawingml/2006/main"/>
-          <a:p xmlns:a="http://schemas.openxmlformats.org/drawingml/2006/main">
+          <a:lstStyle/>
+          <a:p>
             <a:pPr>
               <a:defRPr sz="1350" b="0">
                 <a:solidFill>
@@ -5643,37 +5611,37 @@
       </p:sp>
       <p:sp>
         <p:nvSpPr>
-          <p:cNvPr id="3" name="">
-            <a:extLst xmlns:a="http://schemas.openxmlformats.org/drawingml/2006/main">
+          <p:cNvPr id="3" name="Rectangle 2">
+            <a:extLst>
               <a:ext uri="{FF2B5EF4-FFF2-40B4-BE49-F238E27FC236}">
                 <a16:creationId xmlns:a16="http://schemas.microsoft.com/office/drawing/2014/main" id="{E8707395-009C-42CB-A510-977CFE987EE2}"/>
               </a:ext>
             </a:extLst>
           </p:cNvPr>
           <p:cNvSpPr>
-            <a:spLocks xmlns:a="http://schemas.openxmlformats.org/drawingml/2006/main" noGrp="1"/>
+            <a:spLocks noGrp="1"/>
           </p:cNvSpPr>
           <p:nvPr/>
         </p:nvSpPr>
         <p:spPr>
-          <a:xfrm xmlns:a="http://schemas.openxmlformats.org/drawingml/2006/main">
+          <a:xfrm>
             <a:off x="609600" y="1714500"/>
             <a:ext cx="10953750" cy="3714750"/>
           </a:xfrm>
-          <a:prstGeom xmlns:a="http://schemas.openxmlformats.org/drawingml/2006/main" prst="rect">
+          <a:prstGeom prst="rect">
             <a:avLst/>
           </a:prstGeom>
-          <a:noFill xmlns:a="http://schemas.openxmlformats.org/drawingml/2006/main"/>
-          <a:ln xmlns:a="http://schemas.openxmlformats.org/drawingml/2006/main" w="0">
+          <a:noFill/>
+          <a:ln w="0">
             <a:noFill/>
           </a:ln>
         </p:spPr>
         <p:txBody>
-          <a:bodyPr xmlns:a="http://schemas.openxmlformats.org/drawingml/2006/main">
+          <a:bodyPr>
             <a:noAutofit/>
           </a:bodyPr>
-          <a:lstStyle xmlns:a="http://schemas.openxmlformats.org/drawingml/2006/main"/>
-          <a:p xmlns:a="http://schemas.openxmlformats.org/drawingml/2006/main">
+          <a:lstStyle/>
+          <a:p>
             <a:pPr>
               <a:defRPr sz="2550" b="0">
                 <a:solidFill>
@@ -5696,12 +5664,17 @@
               <a:t>Anotaciones y diagnósticos de mypy</a:t>
             </a:r>
           </a:p>
-          <a:p xmlns:a="http://schemas.openxmlformats.org/drawingml/2006/main">
-            <a:r>
-              <a:t/>
-            </a:r>
-          </a:p>
-          <a:p xmlns:a="http://schemas.openxmlformats.org/drawingml/2006/main">
+          <a:p>
+            <a:endParaRPr sz="2550" b="0">
+              <a:solidFill>
+                <a:srgbClr val="D7E4ED"/>
+              </a:solidFill>
+              <a:latin typeface="Helvetica Neue"/>
+              <a:ea typeface="Helvetica Neue"/>
+              <a:cs typeface="Helvetica Neue"/>
+            </a:endParaRPr>
+          </a:p>
+          <a:p>
             <a:pPr>
               <a:defRPr sz="2550" b="0">
                 <a:solidFill>
@@ -5724,12 +5697,17 @@
               <a:t>Descuentos y tipos de retorno</a:t>
             </a:r>
           </a:p>
-          <a:p xmlns:a="http://schemas.openxmlformats.org/drawingml/2006/main">
-            <a:r>
-              <a:t/>
-            </a:r>
-          </a:p>
-          <a:p xmlns:a="http://schemas.openxmlformats.org/drawingml/2006/main">
+          <a:p>
+            <a:endParaRPr sz="2550" b="0">
+              <a:solidFill>
+                <a:srgbClr val="D7E4ED"/>
+              </a:solidFill>
+              <a:latin typeface="Helvetica Neue"/>
+              <a:ea typeface="Helvetica Neue"/>
+              <a:cs typeface="Helvetica Neue"/>
+            </a:endParaRPr>
+          </a:p>
+          <a:p>
             <a:pPr>
               <a:defRPr sz="2550" b="0">
                 <a:solidFill>
@@ -5752,12 +5730,17 @@
               <a:t>Modelo User y errores de validación</a:t>
             </a:r>
           </a:p>
-          <a:p xmlns:a="http://schemas.openxmlformats.org/drawingml/2006/main">
-            <a:r>
-              <a:t/>
-            </a:r>
-          </a:p>
-          <a:p xmlns:a="http://schemas.openxmlformats.org/drawingml/2006/main">
+          <a:p>
+            <a:endParaRPr sz="2550" b="0">
+              <a:solidFill>
+                <a:srgbClr val="D7E4ED"/>
+              </a:solidFill>
+              <a:latin typeface="Helvetica Neue"/>
+              <a:ea typeface="Helvetica Neue"/>
+              <a:cs typeface="Helvetica Neue"/>
+            </a:endParaRPr>
+          </a:p>
+          <a:p>
             <a:pPr>
               <a:defRPr sz="2550" b="0">
                 <a:solidFill>
@@ -5784,37 +5767,37 @@
       </p:sp>
       <p:sp>
         <p:nvSpPr>
-          <p:cNvPr id="4" name="">
-            <a:extLst xmlns:a="http://schemas.openxmlformats.org/drawingml/2006/main">
+          <p:cNvPr id="4" name="Rectangle 3">
+            <a:extLst>
               <a:ext uri="{FF2B5EF4-FFF2-40B4-BE49-F238E27FC236}">
                 <a16:creationId xmlns:a16="http://schemas.microsoft.com/office/drawing/2014/main" id="{7369C6F9-E71C-4A3F-A9D8-6107D2ADA29F}"/>
               </a:ext>
             </a:extLst>
           </p:cNvPr>
           <p:cNvSpPr>
-            <a:spLocks xmlns:a="http://schemas.openxmlformats.org/drawingml/2006/main" noGrp="1"/>
+            <a:spLocks noGrp="1"/>
           </p:cNvSpPr>
           <p:nvPr/>
         </p:nvSpPr>
         <p:spPr>
-          <a:xfrm xmlns:a="http://schemas.openxmlformats.org/drawingml/2006/main">
+          <a:xfrm>
             <a:off x="609600" y="5762625"/>
             <a:ext cx="10477500" cy="476250"/>
           </a:xfrm>
-          <a:prstGeom xmlns:a="http://schemas.openxmlformats.org/drawingml/2006/main" prst="rect">
+          <a:prstGeom prst="rect">
             <a:avLst/>
           </a:prstGeom>
-          <a:noFill xmlns:a="http://schemas.openxmlformats.org/drawingml/2006/main"/>
-          <a:ln xmlns:a="http://schemas.openxmlformats.org/drawingml/2006/main" w="0">
+          <a:noFill/>
+          <a:ln w="0">
             <a:noFill/>
           </a:ln>
         </p:spPr>
         <p:txBody>
-          <a:bodyPr xmlns:a="http://schemas.openxmlformats.org/drawingml/2006/main">
+          <a:bodyPr>
             <a:noAutofit/>
           </a:bodyPr>
-          <a:lstStyle xmlns:a="http://schemas.openxmlformats.org/drawingml/2006/main"/>
-          <a:p xmlns:a="http://schemas.openxmlformats.org/drawingml/2006/main">
+          <a:lstStyle/>
+          <a:p>
             <a:pPr>
               <a:defRPr sz="1950" b="0">
                 <a:solidFill>
@@ -5846,17 +5829,21 @@
       </p:ext>
     </p:extLst>
   </p:cSld>
+  <p:clrMapOvr>
+    <a:masterClrMapping/>
+  </p:clrMapOvr>
 </p:sld>
 </file>
 
 <file path=ppt/slides/slide2.xml><?xml version="1.0" encoding="utf-8"?>
-<p:sld xmlns:p="http://schemas.openxmlformats.org/presentationml/2006/main">
+<p:sld xmlns:a="http://schemas.openxmlformats.org/drawingml/2006/main" xmlns:r="http://schemas.openxmlformats.org/officeDocument/2006/relationships" xmlns:p="http://schemas.openxmlformats.org/presentationml/2006/main">
   <p:cSld>
     <p:bg>
       <p:bgPr>
-        <a:solidFill xmlns:a="http://schemas.openxmlformats.org/drawingml/2006/main">
+        <a:solidFill>
           <a:srgbClr val="F7F5EF"/>
         </a:solidFill>
+        <a:effectLst/>
       </p:bgPr>
     </p:bg>
     <p:spTree>
@@ -5866,41 +5853,46 @@
         <p:nvPr/>
       </p:nvGrpSpPr>
       <p:grpSpPr>
-        <a:xfrm xmlns:a="http://schemas.openxmlformats.org/drawingml/2006/main"/>
+        <a:xfrm>
+          <a:off x="0" y="0"/>
+          <a:ext cx="0" cy="0"/>
+          <a:chOff x="0" y="0"/>
+          <a:chExt cx="0" cy="0"/>
+        </a:xfrm>
       </p:grpSpPr>
       <p:sp>
         <p:nvSpPr>
-          <p:cNvPr id="6" name="">
-            <a:extLst xmlns:a="http://schemas.openxmlformats.org/drawingml/2006/main">
+          <p:cNvPr id="6" name="Rectangle 5">
+            <a:extLst>
               <a:ext uri="{FF2B5EF4-FFF2-40B4-BE49-F238E27FC236}">
                 <a16:creationId xmlns:a16="http://schemas.microsoft.com/office/drawing/2014/main" id="{037CFD58-01AA-4784-9A06-262BE9EF73B6}"/>
               </a:ext>
             </a:extLst>
           </p:cNvPr>
           <p:cNvSpPr>
-            <a:spLocks xmlns:a="http://schemas.openxmlformats.org/drawingml/2006/main" noGrp="1"/>
+            <a:spLocks noGrp="1"/>
           </p:cNvSpPr>
           <p:nvPr/>
         </p:nvSpPr>
         <p:spPr>
-          <a:xfrm xmlns:a="http://schemas.openxmlformats.org/drawingml/2006/main">
+          <a:xfrm>
             <a:off x="609600" y="438150"/>
             <a:ext cx="10934700" cy="952500"/>
           </a:xfrm>
-          <a:prstGeom xmlns:a="http://schemas.openxmlformats.org/drawingml/2006/main" prst="rect">
+          <a:prstGeom prst="rect">
             <a:avLst/>
           </a:prstGeom>
-          <a:noFill xmlns:a="http://schemas.openxmlformats.org/drawingml/2006/main"/>
-          <a:ln xmlns:a="http://schemas.openxmlformats.org/drawingml/2006/main" w="0">
+          <a:noFill/>
+          <a:ln w="0">
             <a:noFill/>
           </a:ln>
         </p:spPr>
         <p:txBody>
-          <a:bodyPr xmlns:a="http://schemas.openxmlformats.org/drawingml/2006/main">
+          <a:bodyPr>
             <a:noAutofit/>
           </a:bodyPr>
-          <a:lstStyle xmlns:a="http://schemas.openxmlformats.org/drawingml/2006/main"/>
-          <a:p xmlns:a="http://schemas.openxmlformats.org/drawingml/2006/main">
+          <a:lstStyle/>
+          <a:p>
             <a:pPr>
               <a:defRPr sz="3450" b="1">
                 <a:solidFill>
@@ -5927,37 +5919,37 @@
       </p:sp>
       <p:sp>
         <p:nvSpPr>
-          <p:cNvPr id="2" name="">
-            <a:extLst xmlns:a="http://schemas.openxmlformats.org/drawingml/2006/main">
+          <p:cNvPr id="2" name="Rectangle 1">
+            <a:extLst>
               <a:ext uri="{FF2B5EF4-FFF2-40B4-BE49-F238E27FC236}">
                 <a16:creationId xmlns:a16="http://schemas.microsoft.com/office/drawing/2014/main" id="{36BB3018-6870-4F5F-8326-606BDF4BC810}"/>
               </a:ext>
             </a:extLst>
           </p:cNvPr>
           <p:cNvSpPr>
-            <a:spLocks xmlns:a="http://schemas.openxmlformats.org/drawingml/2006/main" noGrp="1"/>
+            <a:spLocks noGrp="1"/>
           </p:cNvSpPr>
           <p:nvPr/>
         </p:nvSpPr>
         <p:spPr>
-          <a:xfrm xmlns:a="http://schemas.openxmlformats.org/drawingml/2006/main">
+          <a:xfrm>
             <a:off x="11144250" y="6343650"/>
             <a:ext cx="476250" cy="266700"/>
           </a:xfrm>
-          <a:prstGeom xmlns:a="http://schemas.openxmlformats.org/drawingml/2006/main" prst="rect">
+          <a:prstGeom prst="rect">
             <a:avLst/>
           </a:prstGeom>
-          <a:noFill xmlns:a="http://schemas.openxmlformats.org/drawingml/2006/main"/>
-          <a:ln xmlns:a="http://schemas.openxmlformats.org/drawingml/2006/main" w="0">
+          <a:noFill/>
+          <a:ln w="0">
             <a:noFill/>
           </a:ln>
         </p:spPr>
         <p:txBody>
-          <a:bodyPr xmlns:a="http://schemas.openxmlformats.org/drawingml/2006/main">
+          <a:bodyPr>
             <a:noAutofit/>
           </a:bodyPr>
-          <a:lstStyle xmlns:a="http://schemas.openxmlformats.org/drawingml/2006/main"/>
-          <a:p xmlns:a="http://schemas.openxmlformats.org/drawingml/2006/main">
+          <a:lstStyle/>
+          <a:p>
             <a:pPr>
               <a:defRPr sz="1350" b="0">
                 <a:solidFill>
@@ -5984,37 +5976,37 @@
       </p:sp>
       <p:sp>
         <p:nvSpPr>
-          <p:cNvPr id="3" name="">
-            <a:extLst xmlns:a="http://schemas.openxmlformats.org/drawingml/2006/main">
+          <p:cNvPr id="3" name="Rectangle 2">
+            <a:extLst>
               <a:ext uri="{FF2B5EF4-FFF2-40B4-BE49-F238E27FC236}">
                 <a16:creationId xmlns:a16="http://schemas.microsoft.com/office/drawing/2014/main" id="{B963C268-0395-4510-BD04-7316E5A04909}"/>
               </a:ext>
             </a:extLst>
           </p:cNvPr>
           <p:cNvSpPr>
-            <a:spLocks xmlns:a="http://schemas.openxmlformats.org/drawingml/2006/main" noGrp="1"/>
+            <a:spLocks noGrp="1"/>
           </p:cNvSpPr>
           <p:nvPr/>
         </p:nvSpPr>
         <p:spPr>
-          <a:xfrm xmlns:a="http://schemas.openxmlformats.org/drawingml/2006/main">
+          <a:xfrm>
             <a:off x="609600" y="1847850"/>
             <a:ext cx="4476750" cy="1524000"/>
           </a:xfrm>
-          <a:prstGeom xmlns:a="http://schemas.openxmlformats.org/drawingml/2006/main" prst="rect">
+          <a:prstGeom prst="rect">
             <a:avLst/>
           </a:prstGeom>
-          <a:noFill xmlns:a="http://schemas.openxmlformats.org/drawingml/2006/main"/>
-          <a:ln xmlns:a="http://schemas.openxmlformats.org/drawingml/2006/main" w="0">
+          <a:noFill/>
+          <a:ln w="0">
             <a:noFill/>
           </a:ln>
         </p:spPr>
         <p:txBody>
-          <a:bodyPr xmlns:a="http://schemas.openxmlformats.org/drawingml/2006/main">
+          <a:bodyPr>
             <a:noAutofit/>
           </a:bodyPr>
-          <a:lstStyle xmlns:a="http://schemas.openxmlformats.org/drawingml/2006/main"/>
-          <a:p xmlns:a="http://schemas.openxmlformats.org/drawingml/2006/main">
+          <a:lstStyle/>
+          <a:p>
             <a:pPr>
               <a:defRPr sz="2325" b="0">
                 <a:solidFill>
@@ -6041,37 +6033,37 @@
       </p:sp>
       <p:sp>
         <p:nvSpPr>
-          <p:cNvPr id="4" name="">
-            <a:extLst xmlns:a="http://schemas.openxmlformats.org/drawingml/2006/main">
+          <p:cNvPr id="4" name="Rectangle 3">
+            <a:extLst>
               <a:ext uri="{FF2B5EF4-FFF2-40B4-BE49-F238E27FC236}">
                 <a16:creationId xmlns:a16="http://schemas.microsoft.com/office/drawing/2014/main" id="{3D75ECA9-6A27-41C4-B12F-55C73C7D1B4C}"/>
               </a:ext>
             </a:extLst>
           </p:cNvPr>
           <p:cNvSpPr>
-            <a:spLocks xmlns:a="http://schemas.openxmlformats.org/drawingml/2006/main" noGrp="1"/>
+            <a:spLocks noGrp="1"/>
           </p:cNvSpPr>
           <p:nvPr/>
         </p:nvSpPr>
         <p:spPr>
-          <a:xfrm xmlns:a="http://schemas.openxmlformats.org/drawingml/2006/main">
+          <a:xfrm>
             <a:off x="609600" y="3714750"/>
             <a:ext cx="4476750" cy="1905000"/>
           </a:xfrm>
-          <a:prstGeom xmlns:a="http://schemas.openxmlformats.org/drawingml/2006/main" prst="rect">
+          <a:prstGeom prst="rect">
             <a:avLst/>
           </a:prstGeom>
-          <a:noFill xmlns:a="http://schemas.openxmlformats.org/drawingml/2006/main"/>
-          <a:ln xmlns:a="http://schemas.openxmlformats.org/drawingml/2006/main" w="0">
+          <a:noFill/>
+          <a:ln w="0">
             <a:noFill/>
           </a:ln>
         </p:spPr>
         <p:txBody>
-          <a:bodyPr xmlns:a="http://schemas.openxmlformats.org/drawingml/2006/main">
+          <a:bodyPr>
             <a:noAutofit/>
           </a:bodyPr>
-          <a:lstStyle xmlns:a="http://schemas.openxmlformats.org/drawingml/2006/main"/>
-          <a:p xmlns:a="http://schemas.openxmlformats.org/drawingml/2006/main">
+          <a:lstStyle/>
+          <a:p>
             <a:pPr>
               <a:defRPr sz="1950" b="0">
                 <a:solidFill>
@@ -6098,22 +6090,22 @@
       </p:sp>
       <p:pic>
         <p:nvPicPr>
-          <p:cNvPr id="10" name=""/>
+          <p:cNvPr id="10" name="Picture 9"/>
           <p:cNvPicPr>
-            <a:picLocks xmlns:a="http://schemas.openxmlformats.org/drawingml/2006/main" noChangeAspect="1"/>
+            <a:picLocks noChangeAspect="1"/>
           </p:cNvPicPr>
           <p:nvPr/>
         </p:nvPicPr>
         <p:blipFill>
-          <a:blip xmlns:r="http://schemas.openxmlformats.org/officeDocument/2006/relationships" xmlns:a="http://schemas.openxmlformats.org/drawingml/2006/main" r:embed="R322647ca1a2f4c6a"/>
-          <a:stretch xmlns:a="http://schemas.openxmlformats.org/drawingml/2006/main"/>
+          <a:blip r:embed="rId3"/>
+          <a:stretch/>
         </p:blipFill>
         <p:spPr>
-          <a:xfrm xmlns:a="http://schemas.openxmlformats.org/drawingml/2006/main">
+          <a:xfrm>
             <a:off x="5524500" y="1675534"/>
             <a:ext cx="6000750" cy="4364182"/>
           </a:xfrm>
-          <a:prstGeom xmlns:a="http://schemas.openxmlformats.org/drawingml/2006/main" prst="rect">
+          <a:prstGeom prst="rect">
             <a:avLst/>
           </a:prstGeom>
         </p:spPr>
@@ -6125,17 +6117,21 @@
       </p:ext>
     </p:extLst>
   </p:cSld>
+  <p:clrMapOvr>
+    <a:masterClrMapping/>
+  </p:clrMapOvr>
 </p:sld>
 </file>
 
 <file path=ppt/slides/slide3.xml><?xml version="1.0" encoding="utf-8"?>
-<p:sld xmlns:p="http://schemas.openxmlformats.org/presentationml/2006/main">
+<p:sld xmlns:a="http://schemas.openxmlformats.org/drawingml/2006/main" xmlns:r="http://schemas.openxmlformats.org/officeDocument/2006/relationships" xmlns:p="http://schemas.openxmlformats.org/presentationml/2006/main">
   <p:cSld>
     <p:bg>
       <p:bgPr>
-        <a:solidFill xmlns:a="http://schemas.openxmlformats.org/drawingml/2006/main">
+        <a:solidFill>
           <a:srgbClr val="F7F5EF"/>
         </a:solidFill>
+        <a:effectLst/>
       </p:bgPr>
     </p:bg>
     <p:spTree>
@@ -6145,41 +6141,46 @@
         <p:nvPr/>
       </p:nvGrpSpPr>
       <p:grpSpPr>
-        <a:xfrm xmlns:a="http://schemas.openxmlformats.org/drawingml/2006/main"/>
+        <a:xfrm>
+          <a:off x="0" y="0"/>
+          <a:ext cx="0" cy="0"/>
+          <a:chOff x="0" y="0"/>
+          <a:chExt cx="0" cy="0"/>
+        </a:xfrm>
       </p:grpSpPr>
       <p:sp>
         <p:nvSpPr>
-          <p:cNvPr id="12" name="">
-            <a:extLst xmlns:a="http://schemas.openxmlformats.org/drawingml/2006/main">
+          <p:cNvPr id="12" name="Rectangle 11">
+            <a:extLst>
               <a:ext uri="{FF2B5EF4-FFF2-40B4-BE49-F238E27FC236}">
                 <a16:creationId xmlns:a16="http://schemas.microsoft.com/office/drawing/2014/main" id="{5B608C93-144C-4A08-92FC-65D843EE1510}"/>
               </a:ext>
             </a:extLst>
           </p:cNvPr>
           <p:cNvSpPr>
-            <a:spLocks xmlns:a="http://schemas.openxmlformats.org/drawingml/2006/main" noGrp="1"/>
+            <a:spLocks noGrp="1"/>
           </p:cNvSpPr>
           <p:nvPr/>
         </p:nvSpPr>
         <p:spPr>
-          <a:xfrm xmlns:a="http://schemas.openxmlformats.org/drawingml/2006/main">
+          <a:xfrm>
             <a:off x="609600" y="438150"/>
             <a:ext cx="10934700" cy="952500"/>
           </a:xfrm>
-          <a:prstGeom xmlns:a="http://schemas.openxmlformats.org/drawingml/2006/main" prst="rect">
+          <a:prstGeom prst="rect">
             <a:avLst/>
           </a:prstGeom>
-          <a:noFill xmlns:a="http://schemas.openxmlformats.org/drawingml/2006/main"/>
-          <a:ln xmlns:a="http://schemas.openxmlformats.org/drawingml/2006/main" w="0">
+          <a:noFill/>
+          <a:ln w="0">
             <a:noFill/>
           </a:ln>
         </p:spPr>
         <p:txBody>
-          <a:bodyPr xmlns:a="http://schemas.openxmlformats.org/drawingml/2006/main">
+          <a:bodyPr>
             <a:noAutofit/>
           </a:bodyPr>
-          <a:lstStyle xmlns:a="http://schemas.openxmlformats.org/drawingml/2006/main"/>
-          <a:p xmlns:a="http://schemas.openxmlformats.org/drawingml/2006/main">
+          <a:lstStyle/>
+          <a:p>
             <a:pPr>
               <a:defRPr sz="3450" b="1">
                 <a:solidFill>
@@ -6206,37 +6207,37 @@
       </p:sp>
       <p:sp>
         <p:nvSpPr>
-          <p:cNvPr id="2" name="">
-            <a:extLst xmlns:a="http://schemas.openxmlformats.org/drawingml/2006/main">
+          <p:cNvPr id="2" name="Rectangle 1">
+            <a:extLst>
               <a:ext uri="{FF2B5EF4-FFF2-40B4-BE49-F238E27FC236}">
                 <a16:creationId xmlns:a16="http://schemas.microsoft.com/office/drawing/2014/main" id="{70362514-82CA-4E1C-8AFC-8019F473EBE8}"/>
               </a:ext>
             </a:extLst>
           </p:cNvPr>
           <p:cNvSpPr>
-            <a:spLocks xmlns:a="http://schemas.openxmlformats.org/drawingml/2006/main" noGrp="1"/>
+            <a:spLocks noGrp="1"/>
           </p:cNvSpPr>
           <p:nvPr/>
         </p:nvSpPr>
         <p:spPr>
-          <a:xfrm xmlns:a="http://schemas.openxmlformats.org/drawingml/2006/main">
+          <a:xfrm>
             <a:off x="11144250" y="6343650"/>
             <a:ext cx="476250" cy="266700"/>
           </a:xfrm>
-          <a:prstGeom xmlns:a="http://schemas.openxmlformats.org/drawingml/2006/main" prst="rect">
+          <a:prstGeom prst="rect">
             <a:avLst/>
           </a:prstGeom>
-          <a:noFill xmlns:a="http://schemas.openxmlformats.org/drawingml/2006/main"/>
-          <a:ln xmlns:a="http://schemas.openxmlformats.org/drawingml/2006/main" w="0">
+          <a:noFill/>
+          <a:ln w="0">
             <a:noFill/>
           </a:ln>
         </p:spPr>
         <p:txBody>
-          <a:bodyPr xmlns:a="http://schemas.openxmlformats.org/drawingml/2006/main">
+          <a:bodyPr>
             <a:noAutofit/>
           </a:bodyPr>
-          <a:lstStyle xmlns:a="http://schemas.openxmlformats.org/drawingml/2006/main"/>
-          <a:p xmlns:a="http://schemas.openxmlformats.org/drawingml/2006/main">
+          <a:lstStyle/>
+          <a:p>
             <a:pPr>
               <a:defRPr sz="1350" b="0">
                 <a:solidFill>
@@ -6263,37 +6264,37 @@
       </p:sp>
       <p:sp>
         <p:nvSpPr>
-          <p:cNvPr id="3" name="">
-            <a:extLst xmlns:a="http://schemas.openxmlformats.org/drawingml/2006/main">
+          <p:cNvPr id="3" name="Rectangle 2">
+            <a:extLst>
               <a:ext uri="{FF2B5EF4-FFF2-40B4-BE49-F238E27FC236}">
                 <a16:creationId xmlns:a16="http://schemas.microsoft.com/office/drawing/2014/main" id="{63738F50-C517-438E-92BF-0D50762794DF}"/>
               </a:ext>
             </a:extLst>
           </p:cNvPr>
           <p:cNvSpPr>
-            <a:spLocks xmlns:a="http://schemas.openxmlformats.org/drawingml/2006/main" noGrp="1"/>
+            <a:spLocks noGrp="1"/>
           </p:cNvSpPr>
           <p:nvPr/>
         </p:nvSpPr>
         <p:spPr>
-          <a:xfrm xmlns:a="http://schemas.openxmlformats.org/drawingml/2006/main">
+          <a:xfrm>
             <a:off x="609600" y="1828800"/>
             <a:ext cx="3238500" cy="666750"/>
           </a:xfrm>
-          <a:prstGeom xmlns:a="http://schemas.openxmlformats.org/drawingml/2006/main" prst="rect">
+          <a:prstGeom prst="rect">
             <a:avLst/>
           </a:prstGeom>
-          <a:noFill xmlns:a="http://schemas.openxmlformats.org/drawingml/2006/main"/>
-          <a:ln xmlns:a="http://schemas.openxmlformats.org/drawingml/2006/main" w="0">
+          <a:noFill/>
+          <a:ln w="0">
             <a:noFill/>
           </a:ln>
         </p:spPr>
         <p:txBody>
-          <a:bodyPr xmlns:a="http://schemas.openxmlformats.org/drawingml/2006/main">
+          <a:bodyPr>
             <a:noAutofit/>
           </a:bodyPr>
-          <a:lstStyle xmlns:a="http://schemas.openxmlformats.org/drawingml/2006/main"/>
-          <a:p xmlns:a="http://schemas.openxmlformats.org/drawingml/2006/main">
+          <a:lstStyle/>
+          <a:p>
             <a:pPr>
               <a:defRPr sz="3000" b="1">
                 <a:solidFill>
@@ -6320,37 +6321,37 @@
       </p:sp>
       <p:sp>
         <p:nvSpPr>
-          <p:cNvPr id="4" name="">
-            <a:extLst xmlns:a="http://schemas.openxmlformats.org/drawingml/2006/main">
+          <p:cNvPr id="4" name="Rectangle 3">
+            <a:extLst>
               <a:ext uri="{FF2B5EF4-FFF2-40B4-BE49-F238E27FC236}">
                 <a16:creationId xmlns:a16="http://schemas.microsoft.com/office/drawing/2014/main" id="{CE00E94A-6847-4A14-A96D-0A4DFCC65FB0}"/>
               </a:ext>
             </a:extLst>
           </p:cNvPr>
           <p:cNvSpPr>
-            <a:spLocks xmlns:a="http://schemas.openxmlformats.org/drawingml/2006/main" noGrp="1"/>
+            <a:spLocks noGrp="1"/>
           </p:cNvSpPr>
           <p:nvPr/>
         </p:nvSpPr>
         <p:spPr>
-          <a:xfrm xmlns:a="http://schemas.openxmlformats.org/drawingml/2006/main">
+          <a:xfrm>
             <a:off x="609600" y="2638425"/>
             <a:ext cx="3238500" cy="428625"/>
           </a:xfrm>
-          <a:prstGeom xmlns:a="http://schemas.openxmlformats.org/drawingml/2006/main" prst="rect">
+          <a:prstGeom prst="rect">
             <a:avLst/>
           </a:prstGeom>
-          <a:noFill xmlns:a="http://schemas.openxmlformats.org/drawingml/2006/main"/>
-          <a:ln xmlns:a="http://schemas.openxmlformats.org/drawingml/2006/main" w="0">
+          <a:noFill/>
+          <a:ln w="0">
             <a:noFill/>
           </a:ln>
         </p:spPr>
         <p:txBody>
-          <a:bodyPr xmlns:a="http://schemas.openxmlformats.org/drawingml/2006/main">
+          <a:bodyPr>
             <a:noAutofit/>
           </a:bodyPr>
-          <a:lstStyle xmlns:a="http://schemas.openxmlformats.org/drawingml/2006/main"/>
-          <a:p xmlns:a="http://schemas.openxmlformats.org/drawingml/2006/main">
+          <a:lstStyle/>
+          <a:p>
             <a:pPr>
               <a:defRPr sz="1950" b="1">
                 <a:solidFill>
@@ -6377,37 +6378,37 @@
       </p:sp>
       <p:sp>
         <p:nvSpPr>
-          <p:cNvPr id="5" name="">
-            <a:extLst xmlns:a="http://schemas.openxmlformats.org/drawingml/2006/main">
+          <p:cNvPr id="5" name="Rectangle 4">
+            <a:extLst>
               <a:ext uri="{FF2B5EF4-FFF2-40B4-BE49-F238E27FC236}">
                 <a16:creationId xmlns:a16="http://schemas.microsoft.com/office/drawing/2014/main" id="{8B8E4753-70C1-4DE7-AA74-ADE22BD0A9B9}"/>
               </a:ext>
             </a:extLst>
           </p:cNvPr>
           <p:cNvSpPr>
-            <a:spLocks xmlns:a="http://schemas.openxmlformats.org/drawingml/2006/main" noGrp="1"/>
+            <a:spLocks noGrp="1"/>
           </p:cNvSpPr>
           <p:nvPr/>
         </p:nvSpPr>
         <p:spPr>
-          <a:xfrm xmlns:a="http://schemas.openxmlformats.org/drawingml/2006/main">
+          <a:xfrm>
             <a:off x="609600" y="3381375"/>
             <a:ext cx="3095625" cy="2190750"/>
           </a:xfrm>
-          <a:prstGeom xmlns:a="http://schemas.openxmlformats.org/drawingml/2006/main" prst="rect">
+          <a:prstGeom prst="rect">
             <a:avLst/>
           </a:prstGeom>
-          <a:noFill xmlns:a="http://schemas.openxmlformats.org/drawingml/2006/main"/>
-          <a:ln xmlns:a="http://schemas.openxmlformats.org/drawingml/2006/main" w="0">
+          <a:noFill/>
+          <a:ln w="0">
             <a:noFill/>
           </a:ln>
         </p:spPr>
         <p:txBody>
-          <a:bodyPr xmlns:a="http://schemas.openxmlformats.org/drawingml/2006/main">
+          <a:bodyPr>
             <a:noAutofit/>
           </a:bodyPr>
-          <a:lstStyle xmlns:a="http://schemas.openxmlformats.org/drawingml/2006/main"/>
-          <a:p xmlns:a="http://schemas.openxmlformats.org/drawingml/2006/main">
+          <a:lstStyle/>
+          <a:p>
             <a:pPr>
               <a:defRPr sz="2100" b="0">
                 <a:solidFill>
@@ -6430,12 +6431,17 @@
               <a:t>Sintaxis para anotar parámetros y retornos.</a:t>
             </a:r>
           </a:p>
-          <a:p xmlns:a="http://schemas.openxmlformats.org/drawingml/2006/main">
-            <a:r>
-              <a:t/>
-            </a:r>
-          </a:p>
-          <a:p xmlns:a="http://schemas.openxmlformats.org/drawingml/2006/main">
+          <a:p>
+            <a:endParaRPr sz="2100" b="0">
+              <a:solidFill>
+                <a:srgbClr val="172B3A"/>
+              </a:solidFill>
+              <a:latin typeface="Helvetica Neue"/>
+              <a:ea typeface="Helvetica Neue"/>
+              <a:cs typeface="Helvetica Neue"/>
+            </a:endParaRPr>
+          </a:p>
+          <a:p>
             <a:pPr>
               <a:defRPr sz="2100" b="0">
                 <a:solidFill>
@@ -6462,37 +6468,37 @@
       </p:sp>
       <p:sp>
         <p:nvSpPr>
-          <p:cNvPr id="6" name="">
-            <a:extLst xmlns:a="http://schemas.openxmlformats.org/drawingml/2006/main">
+          <p:cNvPr id="6" name="Rectangle 5">
+            <a:extLst>
               <a:ext uri="{FF2B5EF4-FFF2-40B4-BE49-F238E27FC236}">
                 <a16:creationId xmlns:a16="http://schemas.microsoft.com/office/drawing/2014/main" id="{AF1B498C-5486-48C3-9101-8EEEA23E1A02}"/>
               </a:ext>
             </a:extLst>
           </p:cNvPr>
           <p:cNvSpPr>
-            <a:spLocks xmlns:a="http://schemas.openxmlformats.org/drawingml/2006/main" noGrp="1"/>
+            <a:spLocks noGrp="1"/>
           </p:cNvSpPr>
           <p:nvPr/>
         </p:nvSpPr>
         <p:spPr>
-          <a:xfrm xmlns:a="http://schemas.openxmlformats.org/drawingml/2006/main">
+          <a:xfrm>
             <a:off x="4429125" y="1828800"/>
             <a:ext cx="3238500" cy="666750"/>
           </a:xfrm>
-          <a:prstGeom xmlns:a="http://schemas.openxmlformats.org/drawingml/2006/main" prst="rect">
+          <a:prstGeom prst="rect">
             <a:avLst/>
           </a:prstGeom>
-          <a:noFill xmlns:a="http://schemas.openxmlformats.org/drawingml/2006/main"/>
-          <a:ln xmlns:a="http://schemas.openxmlformats.org/drawingml/2006/main" w="0">
+          <a:noFill/>
+          <a:ln w="0">
             <a:noFill/>
           </a:ln>
         </p:spPr>
         <p:txBody>
-          <a:bodyPr xmlns:a="http://schemas.openxmlformats.org/drawingml/2006/main">
+          <a:bodyPr>
             <a:noAutofit/>
           </a:bodyPr>
-          <a:lstStyle xmlns:a="http://schemas.openxmlformats.org/drawingml/2006/main"/>
-          <a:p xmlns:a="http://schemas.openxmlformats.org/drawingml/2006/main">
+          <a:lstStyle/>
+          <a:p>
             <a:pPr>
               <a:defRPr sz="3000" b="1">
                 <a:solidFill>
@@ -6519,37 +6525,37 @@
       </p:sp>
       <p:sp>
         <p:nvSpPr>
-          <p:cNvPr id="7" name="">
-            <a:extLst xmlns:a="http://schemas.openxmlformats.org/drawingml/2006/main">
+          <p:cNvPr id="7" name="Rectangle 6">
+            <a:extLst>
               <a:ext uri="{FF2B5EF4-FFF2-40B4-BE49-F238E27FC236}">
                 <a16:creationId xmlns:a16="http://schemas.microsoft.com/office/drawing/2014/main" id="{BC202593-A9F0-4C86-A207-B006FFA5FDE5}"/>
               </a:ext>
             </a:extLst>
           </p:cNvPr>
           <p:cNvSpPr>
-            <a:spLocks xmlns:a="http://schemas.openxmlformats.org/drawingml/2006/main" noGrp="1"/>
+            <a:spLocks noGrp="1"/>
           </p:cNvSpPr>
           <p:nvPr/>
         </p:nvSpPr>
         <p:spPr>
-          <a:xfrm xmlns:a="http://schemas.openxmlformats.org/drawingml/2006/main">
+          <a:xfrm>
             <a:off x="4429125" y="2638425"/>
             <a:ext cx="3238500" cy="428625"/>
           </a:xfrm>
-          <a:prstGeom xmlns:a="http://schemas.openxmlformats.org/drawingml/2006/main" prst="rect">
+          <a:prstGeom prst="rect">
             <a:avLst/>
           </a:prstGeom>
-          <a:noFill xmlns:a="http://schemas.openxmlformats.org/drawingml/2006/main"/>
-          <a:ln xmlns:a="http://schemas.openxmlformats.org/drawingml/2006/main" w="0">
+          <a:noFill/>
+          <a:ln w="0">
             <a:noFill/>
           </a:ln>
         </p:spPr>
         <p:txBody>
-          <a:bodyPr xmlns:a="http://schemas.openxmlformats.org/drawingml/2006/main">
+          <a:bodyPr>
             <a:noAutofit/>
           </a:bodyPr>
-          <a:lstStyle xmlns:a="http://schemas.openxmlformats.org/drawingml/2006/main"/>
-          <a:p xmlns:a="http://schemas.openxmlformats.org/drawingml/2006/main">
+          <a:lstStyle/>
+          <a:p>
             <a:pPr>
               <a:defRPr sz="1950" b="1">
                 <a:solidFill>
@@ -6576,37 +6582,37 @@
       </p:sp>
       <p:sp>
         <p:nvSpPr>
-          <p:cNvPr id="8" name="">
-            <a:extLst xmlns:a="http://schemas.openxmlformats.org/drawingml/2006/main">
+          <p:cNvPr id="8" name="Rectangle 7">
+            <a:extLst>
               <a:ext uri="{FF2B5EF4-FFF2-40B4-BE49-F238E27FC236}">
                 <a16:creationId xmlns:a16="http://schemas.microsoft.com/office/drawing/2014/main" id="{36A273F9-79E4-4DD2-8D8B-0FDE28F51762}"/>
               </a:ext>
             </a:extLst>
           </p:cNvPr>
           <p:cNvSpPr>
-            <a:spLocks xmlns:a="http://schemas.openxmlformats.org/drawingml/2006/main" noGrp="1"/>
+            <a:spLocks noGrp="1"/>
           </p:cNvSpPr>
           <p:nvPr/>
         </p:nvSpPr>
         <p:spPr>
-          <a:xfrm xmlns:a="http://schemas.openxmlformats.org/drawingml/2006/main">
+          <a:xfrm>
             <a:off x="4429125" y="3381375"/>
             <a:ext cx="3095625" cy="2190750"/>
           </a:xfrm>
-          <a:prstGeom xmlns:a="http://schemas.openxmlformats.org/drawingml/2006/main" prst="rect">
+          <a:prstGeom prst="rect">
             <a:avLst/>
           </a:prstGeom>
-          <a:noFill xmlns:a="http://schemas.openxmlformats.org/drawingml/2006/main"/>
-          <a:ln xmlns:a="http://schemas.openxmlformats.org/drawingml/2006/main" w="0">
+          <a:noFill/>
+          <a:ln w="0">
             <a:noFill/>
           </a:ln>
         </p:spPr>
         <p:txBody>
-          <a:bodyPr xmlns:a="http://schemas.openxmlformats.org/drawingml/2006/main">
+          <a:bodyPr>
             <a:noAutofit/>
           </a:bodyPr>
-          <a:lstStyle xmlns:a="http://schemas.openxmlformats.org/drawingml/2006/main"/>
-          <a:p xmlns:a="http://schemas.openxmlformats.org/drawingml/2006/main">
+          <a:lstStyle/>
+          <a:p>
             <a:pPr>
               <a:defRPr sz="2100" b="0">
                 <a:solidFill>
@@ -6629,12 +6635,17 @@
               <a:t>Convenciones de type hints para el análisis estático.</a:t>
             </a:r>
           </a:p>
-          <a:p xmlns:a="http://schemas.openxmlformats.org/drawingml/2006/main">
-            <a:r>
-              <a:t/>
-            </a:r>
-          </a:p>
-          <a:p xmlns:a="http://schemas.openxmlformats.org/drawingml/2006/main">
+          <a:p>
+            <a:endParaRPr sz="2100" b="0">
+              <a:solidFill>
+                <a:srgbClr val="172B3A"/>
+              </a:solidFill>
+              <a:latin typeface="Helvetica Neue"/>
+              <a:ea typeface="Helvetica Neue"/>
+              <a:cs typeface="Helvetica Neue"/>
+            </a:endParaRPr>
+          </a:p>
+          <a:p>
             <a:pPr>
               <a:defRPr sz="2100" b="0">
                 <a:solidFill>
@@ -6661,37 +6672,37 @@
       </p:sp>
       <p:sp>
         <p:nvSpPr>
-          <p:cNvPr id="9" name="">
-            <a:extLst xmlns:a="http://schemas.openxmlformats.org/drawingml/2006/main">
+          <p:cNvPr id="9" name="Rectangle 8">
+            <a:extLst>
               <a:ext uri="{FF2B5EF4-FFF2-40B4-BE49-F238E27FC236}">
                 <a16:creationId xmlns:a16="http://schemas.microsoft.com/office/drawing/2014/main" id="{1D630C57-939C-4E02-8990-87B9310C6C60}"/>
               </a:ext>
             </a:extLst>
           </p:cNvPr>
           <p:cNvSpPr>
-            <a:spLocks xmlns:a="http://schemas.openxmlformats.org/drawingml/2006/main" noGrp="1"/>
+            <a:spLocks noGrp="1"/>
           </p:cNvSpPr>
           <p:nvPr/>
         </p:nvSpPr>
         <p:spPr>
-          <a:xfrm xmlns:a="http://schemas.openxmlformats.org/drawingml/2006/main">
+          <a:xfrm>
             <a:off x="8248650" y="1828800"/>
             <a:ext cx="3238500" cy="666750"/>
           </a:xfrm>
-          <a:prstGeom xmlns:a="http://schemas.openxmlformats.org/drawingml/2006/main" prst="rect">
+          <a:prstGeom prst="rect">
             <a:avLst/>
           </a:prstGeom>
-          <a:noFill xmlns:a="http://schemas.openxmlformats.org/drawingml/2006/main"/>
-          <a:ln xmlns:a="http://schemas.openxmlformats.org/drawingml/2006/main" w="0">
+          <a:noFill/>
+          <a:ln w="0">
             <a:noFill/>
           </a:ln>
         </p:spPr>
         <p:txBody>
-          <a:bodyPr xmlns:a="http://schemas.openxmlformats.org/drawingml/2006/main">
+          <a:bodyPr>
             <a:noAutofit/>
           </a:bodyPr>
-          <a:lstStyle xmlns:a="http://schemas.openxmlformats.org/drawingml/2006/main"/>
-          <a:p xmlns:a="http://schemas.openxmlformats.org/drawingml/2006/main">
+          <a:lstStyle/>
+          <a:p>
             <a:pPr>
               <a:defRPr sz="3000" b="1">
                 <a:solidFill>
@@ -6718,37 +6729,37 @@
       </p:sp>
       <p:sp>
         <p:nvSpPr>
-          <p:cNvPr id="10" name="">
-            <a:extLst xmlns:a="http://schemas.openxmlformats.org/drawingml/2006/main">
+          <p:cNvPr id="10" name="Rectangle 9">
+            <a:extLst>
               <a:ext uri="{FF2B5EF4-FFF2-40B4-BE49-F238E27FC236}">
                 <a16:creationId xmlns:a16="http://schemas.microsoft.com/office/drawing/2014/main" id="{EBC20EED-DC35-4B3F-9DC6-8B321137D4A5}"/>
               </a:ext>
             </a:extLst>
           </p:cNvPr>
           <p:cNvSpPr>
-            <a:spLocks xmlns:a="http://schemas.openxmlformats.org/drawingml/2006/main" noGrp="1"/>
+            <a:spLocks noGrp="1"/>
           </p:cNvSpPr>
           <p:nvPr/>
         </p:nvSpPr>
         <p:spPr>
-          <a:xfrm xmlns:a="http://schemas.openxmlformats.org/drawingml/2006/main">
+          <a:xfrm>
             <a:off x="8248650" y="2638425"/>
             <a:ext cx="3238500" cy="428625"/>
           </a:xfrm>
-          <a:prstGeom xmlns:a="http://schemas.openxmlformats.org/drawingml/2006/main" prst="rect">
+          <a:prstGeom prst="rect">
             <a:avLst/>
           </a:prstGeom>
-          <a:noFill xmlns:a="http://schemas.openxmlformats.org/drawingml/2006/main"/>
-          <a:ln xmlns:a="http://schemas.openxmlformats.org/drawingml/2006/main" w="0">
+          <a:noFill/>
+          <a:ln w="0">
             <a:noFill/>
           </a:ln>
         </p:spPr>
         <p:txBody>
-          <a:bodyPr xmlns:a="http://schemas.openxmlformats.org/drawingml/2006/main">
+          <a:bodyPr>
             <a:noAutofit/>
           </a:bodyPr>
-          <a:lstStyle xmlns:a="http://schemas.openxmlformats.org/drawingml/2006/main"/>
-          <a:p xmlns:a="http://schemas.openxmlformats.org/drawingml/2006/main">
+          <a:lstStyle/>
+          <a:p>
             <a:pPr>
               <a:defRPr sz="1950" b="1">
                 <a:solidFill>
@@ -6775,37 +6786,37 @@
       </p:sp>
       <p:sp>
         <p:nvSpPr>
-          <p:cNvPr id="11" name="">
-            <a:extLst xmlns:a="http://schemas.openxmlformats.org/drawingml/2006/main">
+          <p:cNvPr id="11" name="Rectangle 10">
+            <a:extLst>
               <a:ext uri="{FF2B5EF4-FFF2-40B4-BE49-F238E27FC236}">
                 <a16:creationId xmlns:a16="http://schemas.microsoft.com/office/drawing/2014/main" id="{80E014C9-44C6-48A0-91EE-84AF4C11666C}"/>
               </a:ext>
             </a:extLst>
           </p:cNvPr>
           <p:cNvSpPr>
-            <a:spLocks xmlns:a="http://schemas.openxmlformats.org/drawingml/2006/main" noGrp="1"/>
+            <a:spLocks noGrp="1"/>
           </p:cNvSpPr>
           <p:nvPr/>
         </p:nvSpPr>
         <p:spPr>
-          <a:xfrm xmlns:a="http://schemas.openxmlformats.org/drawingml/2006/main">
+          <a:xfrm>
             <a:off x="8248650" y="3381375"/>
             <a:ext cx="3095625" cy="2190750"/>
           </a:xfrm>
-          <a:prstGeom xmlns:a="http://schemas.openxmlformats.org/drawingml/2006/main" prst="rect">
+          <a:prstGeom prst="rect">
             <a:avLst/>
           </a:prstGeom>
-          <a:noFill xmlns:a="http://schemas.openxmlformats.org/drawingml/2006/main"/>
-          <a:ln xmlns:a="http://schemas.openxmlformats.org/drawingml/2006/main" w="0">
+          <a:noFill/>
+          <a:ln w="0">
             <a:noFill/>
           </a:ln>
         </p:spPr>
         <p:txBody>
-          <a:bodyPr xmlns:a="http://schemas.openxmlformats.org/drawingml/2006/main">
+          <a:bodyPr>
             <a:noAutofit/>
           </a:bodyPr>
-          <a:lstStyle xmlns:a="http://schemas.openxmlformats.org/drawingml/2006/main"/>
-          <a:p xmlns:a="http://schemas.openxmlformats.org/drawingml/2006/main">
+          <a:lstStyle/>
+          <a:p>
             <a:pPr>
               <a:defRPr sz="2100" b="0">
                 <a:solidFill>
@@ -6828,12 +6839,17 @@
               <a:t>Sintaxis para anotar variables.</a:t>
             </a:r>
           </a:p>
-          <a:p xmlns:a="http://schemas.openxmlformats.org/drawingml/2006/main">
-            <a:r>
-              <a:t/>
-            </a:r>
-          </a:p>
-          <a:p xmlns:a="http://schemas.openxmlformats.org/drawingml/2006/main">
+          <a:p>
+            <a:endParaRPr sz="2100" b="0">
+              <a:solidFill>
+                <a:srgbClr val="172B3A"/>
+              </a:solidFill>
+              <a:latin typeface="Helvetica Neue"/>
+              <a:ea typeface="Helvetica Neue"/>
+              <a:cs typeface="Helvetica Neue"/>
+            </a:endParaRPr>
+          </a:p>
+          <a:p>
             <a:pPr>
               <a:defRPr sz="2100" b="0">
                 <a:solidFill>
@@ -6865,17 +6881,21 @@
       </p:ext>
     </p:extLst>
   </p:cSld>
+  <p:clrMapOvr>
+    <a:masterClrMapping/>
+  </p:clrMapOvr>
 </p:sld>
 </file>
 
 <file path=ppt/slides/slide4.xml><?xml version="1.0" encoding="utf-8"?>
-<p:sld xmlns:p="http://schemas.openxmlformats.org/presentationml/2006/main">
+<p:sld xmlns:a="http://schemas.openxmlformats.org/drawingml/2006/main" xmlns:r="http://schemas.openxmlformats.org/officeDocument/2006/relationships" xmlns:p="http://schemas.openxmlformats.org/presentationml/2006/main">
   <p:cSld>
     <p:bg>
       <p:bgPr>
-        <a:solidFill xmlns:a="http://schemas.openxmlformats.org/drawingml/2006/main">
+        <a:solidFill>
           <a:srgbClr val="142738"/>
         </a:solidFill>
+        <a:effectLst/>
       </p:bgPr>
     </p:bg>
     <p:spTree>
@@ -6885,41 +6905,46 @@
         <p:nvPr/>
       </p:nvGrpSpPr>
       <p:grpSpPr>
-        <a:xfrm xmlns:a="http://schemas.openxmlformats.org/drawingml/2006/main"/>
+        <a:xfrm>
+          <a:off x="0" y="0"/>
+          <a:ext cx="0" cy="0"/>
+          <a:chOff x="0" y="0"/>
+          <a:chExt cx="0" cy="0"/>
+        </a:xfrm>
       </p:grpSpPr>
       <p:sp>
         <p:nvSpPr>
-          <p:cNvPr id="7" name="">
-            <a:extLst xmlns:a="http://schemas.openxmlformats.org/drawingml/2006/main">
+          <p:cNvPr id="7" name="Rectangle 6">
+            <a:extLst>
               <a:ext uri="{FF2B5EF4-FFF2-40B4-BE49-F238E27FC236}">
                 <a16:creationId xmlns:a16="http://schemas.microsoft.com/office/drawing/2014/main" id="{4D0A1556-3336-479C-8048-37C52F64A063}"/>
               </a:ext>
             </a:extLst>
           </p:cNvPr>
           <p:cNvSpPr>
-            <a:spLocks xmlns:a="http://schemas.openxmlformats.org/drawingml/2006/main" noGrp="1"/>
+            <a:spLocks noGrp="1"/>
           </p:cNvSpPr>
           <p:nvPr/>
         </p:nvSpPr>
         <p:spPr>
-          <a:xfrm xmlns:a="http://schemas.openxmlformats.org/drawingml/2006/main">
+          <a:xfrm>
             <a:off x="609600" y="438150"/>
             <a:ext cx="10934700" cy="952500"/>
           </a:xfrm>
-          <a:prstGeom xmlns:a="http://schemas.openxmlformats.org/drawingml/2006/main" prst="rect">
+          <a:prstGeom prst="rect">
             <a:avLst/>
           </a:prstGeom>
-          <a:noFill xmlns:a="http://schemas.openxmlformats.org/drawingml/2006/main"/>
-          <a:ln xmlns:a="http://schemas.openxmlformats.org/drawingml/2006/main" w="0">
+          <a:noFill/>
+          <a:ln w="0">
             <a:noFill/>
           </a:ln>
         </p:spPr>
         <p:txBody>
-          <a:bodyPr xmlns:a="http://schemas.openxmlformats.org/drawingml/2006/main">
+          <a:bodyPr>
             <a:noAutofit/>
           </a:bodyPr>
-          <a:lstStyle xmlns:a="http://schemas.openxmlformats.org/drawingml/2006/main"/>
-          <a:p xmlns:a="http://schemas.openxmlformats.org/drawingml/2006/main">
+          <a:lstStyle/>
+          <a:p>
             <a:pPr>
               <a:defRPr sz="3450" b="1">
                 <a:solidFill>
@@ -6946,37 +6971,37 @@
       </p:sp>
       <p:sp>
         <p:nvSpPr>
-          <p:cNvPr id="2" name="">
-            <a:extLst xmlns:a="http://schemas.openxmlformats.org/drawingml/2006/main">
+          <p:cNvPr id="2" name="Rectangle 1">
+            <a:extLst>
               <a:ext uri="{FF2B5EF4-FFF2-40B4-BE49-F238E27FC236}">
                 <a16:creationId xmlns:a16="http://schemas.microsoft.com/office/drawing/2014/main" id="{C30359B4-B499-45E7-8F33-8453B90F43AB}"/>
               </a:ext>
             </a:extLst>
           </p:cNvPr>
           <p:cNvSpPr>
-            <a:spLocks xmlns:a="http://schemas.openxmlformats.org/drawingml/2006/main" noGrp="1"/>
+            <a:spLocks noGrp="1"/>
           </p:cNvSpPr>
           <p:nvPr/>
         </p:nvSpPr>
         <p:spPr>
-          <a:xfrm xmlns:a="http://schemas.openxmlformats.org/drawingml/2006/main">
+          <a:xfrm>
             <a:off x="11144250" y="6343650"/>
             <a:ext cx="476250" cy="266700"/>
           </a:xfrm>
-          <a:prstGeom xmlns:a="http://schemas.openxmlformats.org/drawingml/2006/main" prst="rect">
+          <a:prstGeom prst="rect">
             <a:avLst/>
           </a:prstGeom>
-          <a:noFill xmlns:a="http://schemas.openxmlformats.org/drawingml/2006/main"/>
-          <a:ln xmlns:a="http://schemas.openxmlformats.org/drawingml/2006/main" w="0">
+          <a:noFill/>
+          <a:ln w="0">
             <a:noFill/>
           </a:ln>
         </p:spPr>
         <p:txBody>
-          <a:bodyPr xmlns:a="http://schemas.openxmlformats.org/drawingml/2006/main">
+          <a:bodyPr>
             <a:noAutofit/>
           </a:bodyPr>
-          <a:lstStyle xmlns:a="http://schemas.openxmlformats.org/drawingml/2006/main"/>
-          <a:p xmlns:a="http://schemas.openxmlformats.org/drawingml/2006/main">
+          <a:lstStyle/>
+          <a:p>
             <a:pPr>
               <a:defRPr sz="1350" b="0">
                 <a:solidFill>
@@ -7003,37 +7028,37 @@
       </p:sp>
       <p:sp>
         <p:nvSpPr>
-          <p:cNvPr id="3" name="">
-            <a:extLst xmlns:a="http://schemas.openxmlformats.org/drawingml/2006/main">
+          <p:cNvPr id="3" name="Rectangle 2">
+            <a:extLst>
               <a:ext uri="{FF2B5EF4-FFF2-40B4-BE49-F238E27FC236}">
                 <a16:creationId xmlns:a16="http://schemas.microsoft.com/office/drawing/2014/main" id="{8F0AFE45-733E-4067-AA0D-BAC167FD4905}"/>
               </a:ext>
             </a:extLst>
           </p:cNvPr>
           <p:cNvSpPr>
-            <a:spLocks xmlns:a="http://schemas.openxmlformats.org/drawingml/2006/main" noGrp="1"/>
+            <a:spLocks noGrp="1"/>
           </p:cNvSpPr>
           <p:nvPr/>
         </p:nvSpPr>
         <p:spPr>
-          <a:xfrm xmlns:a="http://schemas.openxmlformats.org/drawingml/2006/main">
+          <a:xfrm>
             <a:off x="609600" y="1790700"/>
             <a:ext cx="10477500" cy="476250"/>
           </a:xfrm>
-          <a:prstGeom xmlns:a="http://schemas.openxmlformats.org/drawingml/2006/main" prst="rect">
+          <a:prstGeom prst="rect">
             <a:avLst/>
           </a:prstGeom>
-          <a:noFill xmlns:a="http://schemas.openxmlformats.org/drawingml/2006/main"/>
-          <a:ln xmlns:a="http://schemas.openxmlformats.org/drawingml/2006/main" w="0">
+          <a:noFill/>
+          <a:ln w="0">
             <a:noFill/>
           </a:ln>
         </p:spPr>
         <p:txBody>
-          <a:bodyPr xmlns:a="http://schemas.openxmlformats.org/drawingml/2006/main">
+          <a:bodyPr>
             <a:noAutofit/>
           </a:bodyPr>
-          <a:lstStyle xmlns:a="http://schemas.openxmlformats.org/drawingml/2006/main"/>
-          <a:p xmlns:a="http://schemas.openxmlformats.org/drawingml/2006/main">
+          <a:lstStyle/>
+          <a:p>
             <a:pPr>
               <a:defRPr sz="2250" b="1">
                 <a:solidFill>
@@ -7060,37 +7085,37 @@
       </p:sp>
       <p:sp>
         <p:nvSpPr>
-          <p:cNvPr id="4" name="">
-            <a:extLst xmlns:a="http://schemas.openxmlformats.org/drawingml/2006/main">
+          <p:cNvPr id="4" name="Rectangle 3">
+            <a:extLst>
               <a:ext uri="{FF2B5EF4-FFF2-40B4-BE49-F238E27FC236}">
                 <a16:creationId xmlns:a16="http://schemas.microsoft.com/office/drawing/2014/main" id="{D9074CB4-A94A-4663-B4BC-7C611AAAFFA6}"/>
               </a:ext>
             </a:extLst>
           </p:cNvPr>
           <p:cNvSpPr>
-            <a:spLocks xmlns:a="http://schemas.openxmlformats.org/drawingml/2006/main" noGrp="1"/>
+            <a:spLocks noGrp="1"/>
           </p:cNvSpPr>
           <p:nvPr/>
         </p:nvSpPr>
         <p:spPr>
-          <a:xfrm xmlns:a="http://schemas.openxmlformats.org/drawingml/2006/main">
+          <a:xfrm>
             <a:off x="609600" y="2476500"/>
             <a:ext cx="10668000" cy="619125"/>
           </a:xfrm>
-          <a:prstGeom xmlns:a="http://schemas.openxmlformats.org/drawingml/2006/main" prst="rect">
+          <a:prstGeom prst="rect">
             <a:avLst/>
           </a:prstGeom>
-          <a:noFill xmlns:a="http://schemas.openxmlformats.org/drawingml/2006/main"/>
-          <a:ln xmlns:a="http://schemas.openxmlformats.org/drawingml/2006/main" w="0">
+          <a:noFill/>
+          <a:ln w="0">
             <a:noFill/>
           </a:ln>
         </p:spPr>
         <p:txBody>
-          <a:bodyPr xmlns:a="http://schemas.openxmlformats.org/drawingml/2006/main">
+          <a:bodyPr>
             <a:noAutofit/>
           </a:bodyPr>
-          <a:lstStyle xmlns:a="http://schemas.openxmlformats.org/drawingml/2006/main"/>
-          <a:p xmlns:a="http://schemas.openxmlformats.org/drawingml/2006/main">
+          <a:lstStyle/>
+          <a:p>
             <a:pPr>
               <a:defRPr sz="3000" b="0">
                 <a:solidFill>
@@ -7117,37 +7142,37 @@
       </p:sp>
       <p:sp>
         <p:nvSpPr>
-          <p:cNvPr id="5" name="">
-            <a:extLst xmlns:a="http://schemas.openxmlformats.org/drawingml/2006/main">
+          <p:cNvPr id="5" name="Rectangle 4">
+            <a:extLst>
               <a:ext uri="{FF2B5EF4-FFF2-40B4-BE49-F238E27FC236}">
                 <a16:creationId xmlns:a16="http://schemas.microsoft.com/office/drawing/2014/main" id="{B71846F1-8F38-4594-A6B2-ABF46ED6627B}"/>
               </a:ext>
             </a:extLst>
           </p:cNvPr>
           <p:cNvSpPr>
-            <a:spLocks xmlns:a="http://schemas.openxmlformats.org/drawingml/2006/main" noGrp="1"/>
+            <a:spLocks noGrp="1"/>
           </p:cNvSpPr>
           <p:nvPr/>
         </p:nvSpPr>
         <p:spPr>
-          <a:xfrm xmlns:a="http://schemas.openxmlformats.org/drawingml/2006/main">
+          <a:xfrm>
             <a:off x="609600" y="3695700"/>
             <a:ext cx="10477500" cy="476250"/>
           </a:xfrm>
-          <a:prstGeom xmlns:a="http://schemas.openxmlformats.org/drawingml/2006/main" prst="rect">
+          <a:prstGeom prst="rect">
             <a:avLst/>
           </a:prstGeom>
-          <a:noFill xmlns:a="http://schemas.openxmlformats.org/drawingml/2006/main"/>
-          <a:ln xmlns:a="http://schemas.openxmlformats.org/drawingml/2006/main" w="0">
+          <a:noFill/>
+          <a:ln w="0">
             <a:noFill/>
           </a:ln>
         </p:spPr>
         <p:txBody>
-          <a:bodyPr xmlns:a="http://schemas.openxmlformats.org/drawingml/2006/main">
+          <a:bodyPr>
             <a:noAutofit/>
           </a:bodyPr>
-          <a:lstStyle xmlns:a="http://schemas.openxmlformats.org/drawingml/2006/main"/>
-          <a:p xmlns:a="http://schemas.openxmlformats.org/drawingml/2006/main">
+          <a:lstStyle/>
+          <a:p>
             <a:pPr>
               <a:defRPr sz="2250" b="1">
                 <a:solidFill>
@@ -7174,37 +7199,37 @@
       </p:sp>
       <p:sp>
         <p:nvSpPr>
-          <p:cNvPr id="6" name="">
-            <a:extLst xmlns:a="http://schemas.openxmlformats.org/drawingml/2006/main">
+          <p:cNvPr id="6" name="Rectangle 5">
+            <a:extLst>
               <a:ext uri="{FF2B5EF4-FFF2-40B4-BE49-F238E27FC236}">
                 <a16:creationId xmlns:a16="http://schemas.microsoft.com/office/drawing/2014/main" id="{51C8A308-584D-47BA-B162-C75666C67F59}"/>
               </a:ext>
             </a:extLst>
           </p:cNvPr>
           <p:cNvSpPr>
-            <a:spLocks xmlns:a="http://schemas.openxmlformats.org/drawingml/2006/main" noGrp="1"/>
+            <a:spLocks noGrp="1"/>
           </p:cNvSpPr>
           <p:nvPr/>
         </p:nvSpPr>
         <p:spPr>
-          <a:xfrm xmlns:a="http://schemas.openxmlformats.org/drawingml/2006/main">
+          <a:xfrm>
             <a:off x="609600" y="4400550"/>
             <a:ext cx="10668000" cy="619125"/>
           </a:xfrm>
-          <a:prstGeom xmlns:a="http://schemas.openxmlformats.org/drawingml/2006/main" prst="rect">
+          <a:prstGeom prst="rect">
             <a:avLst/>
           </a:prstGeom>
-          <a:noFill xmlns:a="http://schemas.openxmlformats.org/drawingml/2006/main"/>
-          <a:ln xmlns:a="http://schemas.openxmlformats.org/drawingml/2006/main" w="0">
+          <a:noFill/>
+          <a:ln w="0">
             <a:noFill/>
           </a:ln>
         </p:spPr>
         <p:txBody>
-          <a:bodyPr xmlns:a="http://schemas.openxmlformats.org/drawingml/2006/main">
+          <a:bodyPr>
             <a:noAutofit/>
           </a:bodyPr>
-          <a:lstStyle xmlns:a="http://schemas.openxmlformats.org/drawingml/2006/main"/>
-          <a:p xmlns:a="http://schemas.openxmlformats.org/drawingml/2006/main">
+          <a:lstStyle/>
+          <a:p>
             <a:pPr>
               <a:defRPr sz="3000" b="0">
                 <a:solidFill>
@@ -7236,17 +7261,21 @@
       </p:ext>
     </p:extLst>
   </p:cSld>
+  <p:clrMapOvr>
+    <a:masterClrMapping/>
+  </p:clrMapOvr>
 </p:sld>
 </file>
 
 <file path=ppt/slides/slide5.xml><?xml version="1.0" encoding="utf-8"?>
-<p:sld xmlns:p="http://schemas.openxmlformats.org/presentationml/2006/main">
+<p:sld xmlns:a="http://schemas.openxmlformats.org/drawingml/2006/main" xmlns:r="http://schemas.openxmlformats.org/officeDocument/2006/relationships" xmlns:p="http://schemas.openxmlformats.org/presentationml/2006/main">
   <p:cSld>
     <p:bg>
       <p:bgPr>
-        <a:solidFill xmlns:a="http://schemas.openxmlformats.org/drawingml/2006/main">
+        <a:solidFill>
           <a:srgbClr val="F7F5EF"/>
         </a:solidFill>
+        <a:effectLst/>
       </p:bgPr>
     </p:bg>
     <p:spTree>
@@ -7256,41 +7285,46 @@
         <p:nvPr/>
       </p:nvGrpSpPr>
       <p:grpSpPr>
-        <a:xfrm xmlns:a="http://schemas.openxmlformats.org/drawingml/2006/main"/>
+        <a:xfrm>
+          <a:off x="0" y="0"/>
+          <a:ext cx="0" cy="0"/>
+          <a:chOff x="0" y="0"/>
+          <a:chExt cx="0" cy="0"/>
+        </a:xfrm>
       </p:grpSpPr>
       <p:sp>
         <p:nvSpPr>
-          <p:cNvPr id="6" name="">
-            <a:extLst xmlns:a="http://schemas.openxmlformats.org/drawingml/2006/main">
+          <p:cNvPr id="6" name="Rectangle 5">
+            <a:extLst>
               <a:ext uri="{FF2B5EF4-FFF2-40B4-BE49-F238E27FC236}">
                 <a16:creationId xmlns:a16="http://schemas.microsoft.com/office/drawing/2014/main" id="{DD9A83F1-7216-43E5-A716-557BD4B5AE6F}"/>
               </a:ext>
             </a:extLst>
           </p:cNvPr>
           <p:cNvSpPr>
-            <a:spLocks xmlns:a="http://schemas.openxmlformats.org/drawingml/2006/main" noGrp="1"/>
+            <a:spLocks noGrp="1"/>
           </p:cNvSpPr>
           <p:nvPr/>
         </p:nvSpPr>
         <p:spPr>
-          <a:xfrm xmlns:a="http://schemas.openxmlformats.org/drawingml/2006/main">
+          <a:xfrm>
             <a:off x="609600" y="438150"/>
             <a:ext cx="10934700" cy="952500"/>
           </a:xfrm>
-          <a:prstGeom xmlns:a="http://schemas.openxmlformats.org/drawingml/2006/main" prst="rect">
+          <a:prstGeom prst="rect">
             <a:avLst/>
           </a:prstGeom>
-          <a:noFill xmlns:a="http://schemas.openxmlformats.org/drawingml/2006/main"/>
-          <a:ln xmlns:a="http://schemas.openxmlformats.org/drawingml/2006/main" w="0">
+          <a:noFill/>
+          <a:ln w="0">
             <a:noFill/>
           </a:ln>
         </p:spPr>
         <p:txBody>
-          <a:bodyPr xmlns:a="http://schemas.openxmlformats.org/drawingml/2006/main">
+          <a:bodyPr>
             <a:noAutofit/>
           </a:bodyPr>
-          <a:lstStyle xmlns:a="http://schemas.openxmlformats.org/drawingml/2006/main"/>
-          <a:p xmlns:a="http://schemas.openxmlformats.org/drawingml/2006/main">
+          <a:lstStyle/>
+          <a:p>
             <a:pPr>
               <a:defRPr sz="3450" b="1">
                 <a:solidFill>
@@ -7317,37 +7351,37 @@
       </p:sp>
       <p:sp>
         <p:nvSpPr>
-          <p:cNvPr id="2" name="">
-            <a:extLst xmlns:a="http://schemas.openxmlformats.org/drawingml/2006/main">
+          <p:cNvPr id="2" name="Rectangle 1">
+            <a:extLst>
               <a:ext uri="{FF2B5EF4-FFF2-40B4-BE49-F238E27FC236}">
                 <a16:creationId xmlns:a16="http://schemas.microsoft.com/office/drawing/2014/main" id="{CE08CE25-C931-42BE-897D-12649D0BACED}"/>
               </a:ext>
             </a:extLst>
           </p:cNvPr>
           <p:cNvSpPr>
-            <a:spLocks xmlns:a="http://schemas.openxmlformats.org/drawingml/2006/main" noGrp="1"/>
+            <a:spLocks noGrp="1"/>
           </p:cNvSpPr>
           <p:nvPr/>
         </p:nvSpPr>
         <p:spPr>
-          <a:xfrm xmlns:a="http://schemas.openxmlformats.org/drawingml/2006/main">
+          <a:xfrm>
             <a:off x="11144250" y="6343650"/>
             <a:ext cx="476250" cy="266700"/>
           </a:xfrm>
-          <a:prstGeom xmlns:a="http://schemas.openxmlformats.org/drawingml/2006/main" prst="rect">
+          <a:prstGeom prst="rect">
             <a:avLst/>
           </a:prstGeom>
-          <a:noFill xmlns:a="http://schemas.openxmlformats.org/drawingml/2006/main"/>
-          <a:ln xmlns:a="http://schemas.openxmlformats.org/drawingml/2006/main" w="0">
+          <a:noFill/>
+          <a:ln w="0">
             <a:noFill/>
           </a:ln>
         </p:spPr>
         <p:txBody>
-          <a:bodyPr xmlns:a="http://schemas.openxmlformats.org/drawingml/2006/main">
+          <a:bodyPr>
             <a:noAutofit/>
           </a:bodyPr>
-          <a:lstStyle xmlns:a="http://schemas.openxmlformats.org/drawingml/2006/main"/>
-          <a:p xmlns:a="http://schemas.openxmlformats.org/drawingml/2006/main">
+          <a:lstStyle/>
+          <a:p>
             <a:pPr>
               <a:defRPr sz="1350" b="0">
                 <a:solidFill>
@@ -7374,37 +7408,37 @@
       </p:sp>
       <p:sp>
         <p:nvSpPr>
-          <p:cNvPr id="3" name="">
-            <a:extLst xmlns:a="http://schemas.openxmlformats.org/drawingml/2006/main">
+          <p:cNvPr id="3" name="Rectangle 2">
+            <a:extLst>
               <a:ext uri="{FF2B5EF4-FFF2-40B4-BE49-F238E27FC236}">
                 <a16:creationId xmlns:a16="http://schemas.microsoft.com/office/drawing/2014/main" id="{ACE5EB05-04B3-4426-BD75-5D80B49C7C71}"/>
               </a:ext>
             </a:extLst>
           </p:cNvPr>
           <p:cNvSpPr>
-            <a:spLocks xmlns:a="http://schemas.openxmlformats.org/drawingml/2006/main" noGrp="1"/>
+            <a:spLocks noGrp="1"/>
           </p:cNvSpPr>
           <p:nvPr/>
         </p:nvSpPr>
         <p:spPr>
-          <a:xfrm xmlns:a="http://schemas.openxmlformats.org/drawingml/2006/main">
+          <a:xfrm>
             <a:off x="609600" y="1885950"/>
             <a:ext cx="10477500" cy="1714500"/>
           </a:xfrm>
-          <a:prstGeom xmlns:a="http://schemas.openxmlformats.org/drawingml/2006/main" prst="rect">
+          <a:prstGeom prst="rect">
             <a:avLst/>
           </a:prstGeom>
-          <a:noFill xmlns:a="http://schemas.openxmlformats.org/drawingml/2006/main"/>
-          <a:ln xmlns:a="http://schemas.openxmlformats.org/drawingml/2006/main" w="0">
+          <a:noFill/>
+          <a:ln w="0">
             <a:noFill/>
           </a:ln>
         </p:spPr>
         <p:txBody>
-          <a:bodyPr xmlns:a="http://schemas.openxmlformats.org/drawingml/2006/main">
+          <a:bodyPr>
             <a:noAutofit/>
           </a:bodyPr>
-          <a:lstStyle xmlns:a="http://schemas.openxmlformats.org/drawingml/2006/main"/>
-          <a:p xmlns:a="http://schemas.openxmlformats.org/drawingml/2006/main">
+          <a:lstStyle/>
+          <a:p>
             <a:pPr>
               <a:defRPr sz="3150" b="0">
                 <a:solidFill>
@@ -7427,7 +7461,7 @@
               <a:t>def greet(name: str) -&gt; str:</a:t>
             </a:r>
           </a:p>
-          <a:p xmlns:a="http://schemas.openxmlformats.org/drawingml/2006/main">
+          <a:p>
             <a:pPr>
               <a:defRPr sz="3150" b="0">
                 <a:solidFill>
@@ -7454,37 +7488,37 @@
       </p:sp>
       <p:sp>
         <p:nvSpPr>
-          <p:cNvPr id="4" name="">
-            <a:extLst xmlns:a="http://schemas.openxmlformats.org/drawingml/2006/main">
+          <p:cNvPr id="4" name="Rectangle 3">
+            <a:extLst>
               <a:ext uri="{FF2B5EF4-FFF2-40B4-BE49-F238E27FC236}">
                 <a16:creationId xmlns:a16="http://schemas.microsoft.com/office/drawing/2014/main" id="{6F4B47A9-7756-43C4-87B0-18EE33A82187}"/>
               </a:ext>
             </a:extLst>
           </p:cNvPr>
           <p:cNvSpPr>
-            <a:spLocks xmlns:a="http://schemas.openxmlformats.org/drawingml/2006/main" noGrp="1"/>
+            <a:spLocks noGrp="1"/>
           </p:cNvSpPr>
           <p:nvPr/>
         </p:nvSpPr>
         <p:spPr>
-          <a:xfrm xmlns:a="http://schemas.openxmlformats.org/drawingml/2006/main">
+          <a:xfrm>
             <a:off x="609600" y="4162425"/>
             <a:ext cx="10572750" cy="666750"/>
           </a:xfrm>
-          <a:prstGeom xmlns:a="http://schemas.openxmlformats.org/drawingml/2006/main" prst="rect">
+          <a:prstGeom prst="rect">
             <a:avLst/>
           </a:prstGeom>
-          <a:noFill xmlns:a="http://schemas.openxmlformats.org/drawingml/2006/main"/>
-          <a:ln xmlns:a="http://schemas.openxmlformats.org/drawingml/2006/main" w="0">
+          <a:noFill/>
+          <a:ln w="0">
             <a:noFill/>
           </a:ln>
         </p:spPr>
         <p:txBody>
-          <a:bodyPr xmlns:a="http://schemas.openxmlformats.org/drawingml/2006/main">
+          <a:bodyPr>
             <a:noAutofit/>
           </a:bodyPr>
-          <a:lstStyle xmlns:a="http://schemas.openxmlformats.org/drawingml/2006/main"/>
-          <a:p xmlns:a="http://schemas.openxmlformats.org/drawingml/2006/main">
+          <a:lstStyle/>
+          <a:p>
             <a:pPr>
               <a:defRPr sz="2175" b="0">
                 <a:solidFill>
@@ -7511,37 +7545,37 @@
       </p:sp>
       <p:sp>
         <p:nvSpPr>
-          <p:cNvPr id="5" name="">
-            <a:extLst xmlns:a="http://schemas.openxmlformats.org/drawingml/2006/main">
+          <p:cNvPr id="5" name="Rectangle 4">
+            <a:extLst>
               <a:ext uri="{FF2B5EF4-FFF2-40B4-BE49-F238E27FC236}">
                 <a16:creationId xmlns:a16="http://schemas.microsoft.com/office/drawing/2014/main" id="{F953594E-B18F-4FBE-9207-D0E78020E22D}"/>
               </a:ext>
             </a:extLst>
           </p:cNvPr>
           <p:cNvSpPr>
-            <a:spLocks xmlns:a="http://schemas.openxmlformats.org/drawingml/2006/main" noGrp="1"/>
+            <a:spLocks noGrp="1"/>
           </p:cNvSpPr>
           <p:nvPr/>
         </p:nvSpPr>
         <p:spPr>
-          <a:xfrm xmlns:a="http://schemas.openxmlformats.org/drawingml/2006/main">
+          <a:xfrm>
             <a:off x="609600" y="4962525"/>
             <a:ext cx="10572750" cy="666750"/>
           </a:xfrm>
-          <a:prstGeom xmlns:a="http://schemas.openxmlformats.org/drawingml/2006/main" prst="rect">
+          <a:prstGeom prst="rect">
             <a:avLst/>
           </a:prstGeom>
-          <a:noFill xmlns:a="http://schemas.openxmlformats.org/drawingml/2006/main"/>
-          <a:ln xmlns:a="http://schemas.openxmlformats.org/drawingml/2006/main" w="0">
+          <a:noFill/>
+          <a:ln w="0">
             <a:noFill/>
           </a:ln>
         </p:spPr>
         <p:txBody>
-          <a:bodyPr xmlns:a="http://schemas.openxmlformats.org/drawingml/2006/main">
+          <a:bodyPr>
             <a:noAutofit/>
           </a:bodyPr>
-          <a:lstStyle xmlns:a="http://schemas.openxmlformats.org/drawingml/2006/main"/>
-          <a:p xmlns:a="http://schemas.openxmlformats.org/drawingml/2006/main">
+          <a:lstStyle/>
+          <a:p>
             <a:pPr>
               <a:defRPr sz="2175" b="0">
                 <a:solidFill>
@@ -7573,17 +7607,21 @@
       </p:ext>
     </p:extLst>
   </p:cSld>
+  <p:clrMapOvr>
+    <a:masterClrMapping/>
+  </p:clrMapOvr>
 </p:sld>
 </file>
 
 <file path=ppt/slides/slide6.xml><?xml version="1.0" encoding="utf-8"?>
-<p:sld xmlns:p="http://schemas.openxmlformats.org/presentationml/2006/main">
+<p:sld xmlns:a="http://schemas.openxmlformats.org/drawingml/2006/main" xmlns:r="http://schemas.openxmlformats.org/officeDocument/2006/relationships" xmlns:p="http://schemas.openxmlformats.org/presentationml/2006/main">
   <p:cSld>
     <p:bg>
       <p:bgPr>
-        <a:solidFill xmlns:a="http://schemas.openxmlformats.org/drawingml/2006/main">
+        <a:solidFill>
           <a:srgbClr val="142738"/>
         </a:solidFill>
+        <a:effectLst/>
       </p:bgPr>
     </p:bg>
     <p:spTree>
@@ -7593,41 +7631,46 @@
         <p:nvPr/>
       </p:nvGrpSpPr>
       <p:grpSpPr>
-        <a:xfrm xmlns:a="http://schemas.openxmlformats.org/drawingml/2006/main"/>
+        <a:xfrm>
+          <a:off x="0" y="0"/>
+          <a:ext cx="0" cy="0"/>
+          <a:chOff x="0" y="0"/>
+          <a:chExt cx="0" cy="0"/>
+        </a:xfrm>
       </p:grpSpPr>
       <p:sp>
         <p:nvSpPr>
-          <p:cNvPr id="5" name="">
-            <a:extLst xmlns:a="http://schemas.openxmlformats.org/drawingml/2006/main">
+          <p:cNvPr id="5" name="Rectangle 4">
+            <a:extLst>
               <a:ext uri="{FF2B5EF4-FFF2-40B4-BE49-F238E27FC236}">
                 <a16:creationId xmlns:a16="http://schemas.microsoft.com/office/drawing/2014/main" id="{12F5F2F0-BC35-43B3-9E6F-2D616D7CF8A6}"/>
               </a:ext>
             </a:extLst>
           </p:cNvPr>
           <p:cNvSpPr>
-            <a:spLocks xmlns:a="http://schemas.openxmlformats.org/drawingml/2006/main" noGrp="1"/>
+            <a:spLocks noGrp="1"/>
           </p:cNvSpPr>
           <p:nvPr/>
         </p:nvSpPr>
         <p:spPr>
-          <a:xfrm xmlns:a="http://schemas.openxmlformats.org/drawingml/2006/main">
+          <a:xfrm>
             <a:off x="609600" y="438150"/>
             <a:ext cx="10934700" cy="952500"/>
           </a:xfrm>
-          <a:prstGeom xmlns:a="http://schemas.openxmlformats.org/drawingml/2006/main" prst="rect">
+          <a:prstGeom prst="rect">
             <a:avLst/>
           </a:prstGeom>
-          <a:noFill xmlns:a="http://schemas.openxmlformats.org/drawingml/2006/main"/>
-          <a:ln xmlns:a="http://schemas.openxmlformats.org/drawingml/2006/main" w="0">
+          <a:noFill/>
+          <a:ln w="0">
             <a:noFill/>
           </a:ln>
         </p:spPr>
         <p:txBody>
-          <a:bodyPr xmlns:a="http://schemas.openxmlformats.org/drawingml/2006/main">
+          <a:bodyPr>
             <a:noAutofit/>
           </a:bodyPr>
-          <a:lstStyle xmlns:a="http://schemas.openxmlformats.org/drawingml/2006/main"/>
-          <a:p xmlns:a="http://schemas.openxmlformats.org/drawingml/2006/main">
+          <a:lstStyle/>
+          <a:p>
             <a:pPr>
               <a:defRPr sz="3450" b="1">
                 <a:solidFill>
@@ -7654,37 +7697,37 @@
       </p:sp>
       <p:sp>
         <p:nvSpPr>
-          <p:cNvPr id="2" name="">
-            <a:extLst xmlns:a="http://schemas.openxmlformats.org/drawingml/2006/main">
+          <p:cNvPr id="2" name="Rectangle 1">
+            <a:extLst>
               <a:ext uri="{FF2B5EF4-FFF2-40B4-BE49-F238E27FC236}">
                 <a16:creationId xmlns:a16="http://schemas.microsoft.com/office/drawing/2014/main" id="{C394DC93-69AE-4289-8DB7-C95AC4479039}"/>
               </a:ext>
             </a:extLst>
           </p:cNvPr>
           <p:cNvSpPr>
-            <a:spLocks xmlns:a="http://schemas.openxmlformats.org/drawingml/2006/main" noGrp="1"/>
+            <a:spLocks noGrp="1"/>
           </p:cNvSpPr>
           <p:nvPr/>
         </p:nvSpPr>
         <p:spPr>
-          <a:xfrm xmlns:a="http://schemas.openxmlformats.org/drawingml/2006/main">
+          <a:xfrm>
             <a:off x="11144250" y="6343650"/>
             <a:ext cx="476250" cy="266700"/>
           </a:xfrm>
-          <a:prstGeom xmlns:a="http://schemas.openxmlformats.org/drawingml/2006/main" prst="rect">
+          <a:prstGeom prst="rect">
             <a:avLst/>
           </a:prstGeom>
-          <a:noFill xmlns:a="http://schemas.openxmlformats.org/drawingml/2006/main"/>
-          <a:ln xmlns:a="http://schemas.openxmlformats.org/drawingml/2006/main" w="0">
+          <a:noFill/>
+          <a:ln w="0">
             <a:noFill/>
           </a:ln>
         </p:spPr>
         <p:txBody>
-          <a:bodyPr xmlns:a="http://schemas.openxmlformats.org/drawingml/2006/main">
+          <a:bodyPr>
             <a:noAutofit/>
           </a:bodyPr>
-          <a:lstStyle xmlns:a="http://schemas.openxmlformats.org/drawingml/2006/main"/>
-          <a:p xmlns:a="http://schemas.openxmlformats.org/drawingml/2006/main">
+          <a:lstStyle/>
+          <a:p>
             <a:pPr>
               <a:defRPr sz="1350" b="0">
                 <a:solidFill>
@@ -7711,37 +7754,37 @@
       </p:sp>
       <p:sp>
         <p:nvSpPr>
-          <p:cNvPr id="3" name="">
-            <a:extLst xmlns:a="http://schemas.openxmlformats.org/drawingml/2006/main">
+          <p:cNvPr id="3" name="Rectangle 2">
+            <a:extLst>
               <a:ext uri="{FF2B5EF4-FFF2-40B4-BE49-F238E27FC236}">
                 <a16:creationId xmlns:a16="http://schemas.microsoft.com/office/drawing/2014/main" id="{D759D01E-4AB1-451A-94FE-E80232731C51}"/>
               </a:ext>
             </a:extLst>
           </p:cNvPr>
           <p:cNvSpPr>
-            <a:spLocks xmlns:a="http://schemas.openxmlformats.org/drawingml/2006/main" noGrp="1"/>
+            <a:spLocks noGrp="1"/>
           </p:cNvSpPr>
           <p:nvPr/>
         </p:nvSpPr>
         <p:spPr>
-          <a:xfrm xmlns:a="http://schemas.openxmlformats.org/drawingml/2006/main">
+          <a:xfrm>
             <a:off x="609600" y="1828800"/>
             <a:ext cx="11049000" cy="2857500"/>
           </a:xfrm>
-          <a:prstGeom xmlns:a="http://schemas.openxmlformats.org/drawingml/2006/main" prst="rect">
+          <a:prstGeom prst="rect">
             <a:avLst/>
           </a:prstGeom>
-          <a:noFill xmlns:a="http://schemas.openxmlformats.org/drawingml/2006/main"/>
-          <a:ln xmlns:a="http://schemas.openxmlformats.org/drawingml/2006/main" w="0">
+          <a:noFill/>
+          <a:ln w="0">
             <a:noFill/>
           </a:ln>
         </p:spPr>
         <p:txBody>
-          <a:bodyPr xmlns:a="http://schemas.openxmlformats.org/drawingml/2006/main">
+          <a:bodyPr>
             <a:noAutofit/>
           </a:bodyPr>
-          <a:lstStyle xmlns:a="http://schemas.openxmlformats.org/drawingml/2006/main"/>
-          <a:p xmlns:a="http://schemas.openxmlformats.org/drawingml/2006/main">
+          <a:lstStyle/>
+          <a:p>
             <a:pPr>
               <a:defRPr sz="2250" b="0">
                 <a:solidFill>
@@ -7764,7 +7807,7 @@
               <a:t>def repeat_text(text: str, times: int) -&gt; str:</a:t>
             </a:r>
           </a:p>
-          <a:p xmlns:a="http://schemas.openxmlformats.org/drawingml/2006/main">
+          <a:p>
             <a:pPr>
               <a:defRPr sz="2250" b="0">
                 <a:solidFill>
@@ -7787,12 +7830,17 @@
               <a:t>    return text * times</a:t>
             </a:r>
           </a:p>
-          <a:p xmlns:a="http://schemas.openxmlformats.org/drawingml/2006/main">
-            <a:r>
-              <a:t/>
-            </a:r>
-          </a:p>
-          <a:p xmlns:a="http://schemas.openxmlformats.org/drawingml/2006/main">
+          <a:p>
+            <a:endParaRPr sz="2250" b="0">
+              <a:solidFill>
+                <a:srgbClr val="D5E9F2"/>
+              </a:solidFill>
+              <a:latin typeface="Helvetica Neue"/>
+              <a:ea typeface="Helvetica Neue"/>
+              <a:cs typeface="Helvetica Neue"/>
+            </a:endParaRPr>
+          </a:p>
+          <a:p>
             <a:pPr>
               <a:defRPr sz="2250" b="0">
                 <a:solidFill>
@@ -7815,7 +7863,7 @@
               <a:t>repeat_text("hi", 2)   # "hihi"</a:t>
             </a:r>
           </a:p>
-          <a:p xmlns:a="http://schemas.openxmlformats.org/drawingml/2006/main">
+          <a:p>
             <a:pPr>
               <a:defRPr sz="2250" b="0">
                 <a:solidFill>
@@ -7842,37 +7890,37 @@
       </p:sp>
       <p:sp>
         <p:nvSpPr>
-          <p:cNvPr id="4" name="">
-            <a:extLst xmlns:a="http://schemas.openxmlformats.org/drawingml/2006/main">
+          <p:cNvPr id="4" name="Rectangle 3">
+            <a:extLst>
               <a:ext uri="{FF2B5EF4-FFF2-40B4-BE49-F238E27FC236}">
                 <a16:creationId xmlns:a16="http://schemas.microsoft.com/office/drawing/2014/main" id="{C1944DCD-BFB1-4DF8-803C-3EF3263D8D6D}"/>
               </a:ext>
             </a:extLst>
           </p:cNvPr>
           <p:cNvSpPr>
-            <a:spLocks xmlns:a="http://schemas.openxmlformats.org/drawingml/2006/main" noGrp="1"/>
+            <a:spLocks noGrp="1"/>
           </p:cNvSpPr>
           <p:nvPr/>
         </p:nvSpPr>
         <p:spPr>
-          <a:xfrm xmlns:a="http://schemas.openxmlformats.org/drawingml/2006/main">
+          <a:xfrm>
             <a:off x="609600" y="5057775"/>
             <a:ext cx="10668000" cy="904875"/>
           </a:xfrm>
-          <a:prstGeom xmlns:a="http://schemas.openxmlformats.org/drawingml/2006/main" prst="rect">
+          <a:prstGeom prst="rect">
             <a:avLst/>
           </a:prstGeom>
-          <a:noFill xmlns:a="http://schemas.openxmlformats.org/drawingml/2006/main"/>
-          <a:ln xmlns:a="http://schemas.openxmlformats.org/drawingml/2006/main" w="0">
+          <a:noFill/>
+          <a:ln w="0">
             <a:noFill/>
           </a:ln>
         </p:spPr>
         <p:txBody>
-          <a:bodyPr xmlns:a="http://schemas.openxmlformats.org/drawingml/2006/main">
+          <a:bodyPr>
             <a:noAutofit/>
           </a:bodyPr>
-          <a:lstStyle xmlns:a="http://schemas.openxmlformats.org/drawingml/2006/main"/>
-          <a:p xmlns:a="http://schemas.openxmlformats.org/drawingml/2006/main">
+          <a:lstStyle/>
+          <a:p>
             <a:pPr>
               <a:defRPr sz="2100" b="0">
                 <a:solidFill>
@@ -7895,7 +7943,7 @@
               <a:t>Python ejecuta ambas llamadas. Las anotaciones por sí solas</a:t>
             </a:r>
           </a:p>
-          <a:p xmlns:a="http://schemas.openxmlformats.org/drawingml/2006/main">
+          <a:p>
             <a:pPr>
               <a:defRPr sz="2100" b="0">
                 <a:solidFill>
@@ -7927,17 +7975,21 @@
       </p:ext>
     </p:extLst>
   </p:cSld>
+  <p:clrMapOvr>
+    <a:masterClrMapping/>
+  </p:clrMapOvr>
 </p:sld>
 </file>
 
 <file path=ppt/slides/slide7.xml><?xml version="1.0" encoding="utf-8"?>
-<p:sld xmlns:p="http://schemas.openxmlformats.org/presentationml/2006/main">
+<p:sld xmlns:a="http://schemas.openxmlformats.org/drawingml/2006/main" xmlns:r="http://schemas.openxmlformats.org/officeDocument/2006/relationships" xmlns:p="http://schemas.openxmlformats.org/presentationml/2006/main">
   <p:cSld>
     <p:bg>
       <p:bgPr>
-        <a:solidFill xmlns:a="http://schemas.openxmlformats.org/drawingml/2006/main">
+        <a:solidFill>
           <a:srgbClr val="F7F5EF"/>
         </a:solidFill>
+        <a:effectLst/>
       </p:bgPr>
     </p:bg>
     <p:spTree>
@@ -7947,41 +7999,46 @@
         <p:nvPr/>
       </p:nvGrpSpPr>
       <p:grpSpPr>
-        <a:xfrm xmlns:a="http://schemas.openxmlformats.org/drawingml/2006/main"/>
+        <a:xfrm>
+          <a:off x="0" y="0"/>
+          <a:ext cx="0" cy="0"/>
+          <a:chOff x="0" y="0"/>
+          <a:chExt cx="0" cy="0"/>
+        </a:xfrm>
       </p:grpSpPr>
       <p:sp>
         <p:nvSpPr>
-          <p:cNvPr id="7" name="">
-            <a:extLst xmlns:a="http://schemas.openxmlformats.org/drawingml/2006/main">
+          <p:cNvPr id="7" name="Rectangle 6">
+            <a:extLst>
               <a:ext uri="{FF2B5EF4-FFF2-40B4-BE49-F238E27FC236}">
                 <a16:creationId xmlns:a16="http://schemas.microsoft.com/office/drawing/2014/main" id="{FBA20597-B728-4F76-B51D-8467AC300DD4}"/>
               </a:ext>
             </a:extLst>
           </p:cNvPr>
           <p:cNvSpPr>
-            <a:spLocks xmlns:a="http://schemas.openxmlformats.org/drawingml/2006/main" noGrp="1"/>
+            <a:spLocks noGrp="1"/>
           </p:cNvSpPr>
           <p:nvPr/>
         </p:nvSpPr>
         <p:spPr>
-          <a:xfrm xmlns:a="http://schemas.openxmlformats.org/drawingml/2006/main">
+          <a:xfrm>
             <a:off x="609600" y="438150"/>
             <a:ext cx="10934700" cy="952500"/>
           </a:xfrm>
-          <a:prstGeom xmlns:a="http://schemas.openxmlformats.org/drawingml/2006/main" prst="rect">
+          <a:prstGeom prst="rect">
             <a:avLst/>
           </a:prstGeom>
-          <a:noFill xmlns:a="http://schemas.openxmlformats.org/drawingml/2006/main"/>
-          <a:ln xmlns:a="http://schemas.openxmlformats.org/drawingml/2006/main" w="0">
+          <a:noFill/>
+          <a:ln w="0">
             <a:noFill/>
           </a:ln>
         </p:spPr>
         <p:txBody>
-          <a:bodyPr xmlns:a="http://schemas.openxmlformats.org/drawingml/2006/main">
+          <a:bodyPr>
             <a:noAutofit/>
           </a:bodyPr>
-          <a:lstStyle xmlns:a="http://schemas.openxmlformats.org/drawingml/2006/main"/>
-          <a:p xmlns:a="http://schemas.openxmlformats.org/drawingml/2006/main">
+          <a:lstStyle/>
+          <a:p>
             <a:pPr>
               <a:defRPr sz="3450" b="1">
                 <a:solidFill>
@@ -8008,37 +8065,37 @@
       </p:sp>
       <p:sp>
         <p:nvSpPr>
-          <p:cNvPr id="2" name="">
-            <a:extLst xmlns:a="http://schemas.openxmlformats.org/drawingml/2006/main">
+          <p:cNvPr id="2" name="Rectangle 1">
+            <a:extLst>
               <a:ext uri="{FF2B5EF4-FFF2-40B4-BE49-F238E27FC236}">
                 <a16:creationId xmlns:a16="http://schemas.microsoft.com/office/drawing/2014/main" id="{894420ED-C883-4E20-B496-259B5B36DEE1}"/>
               </a:ext>
             </a:extLst>
           </p:cNvPr>
           <p:cNvSpPr>
-            <a:spLocks xmlns:a="http://schemas.openxmlformats.org/drawingml/2006/main" noGrp="1"/>
+            <a:spLocks noGrp="1"/>
           </p:cNvSpPr>
           <p:nvPr/>
         </p:nvSpPr>
         <p:spPr>
-          <a:xfrm xmlns:a="http://schemas.openxmlformats.org/drawingml/2006/main">
+          <a:xfrm>
             <a:off x="11144250" y="6343650"/>
             <a:ext cx="476250" cy="266700"/>
           </a:xfrm>
-          <a:prstGeom xmlns:a="http://schemas.openxmlformats.org/drawingml/2006/main" prst="rect">
+          <a:prstGeom prst="rect">
             <a:avLst/>
           </a:prstGeom>
-          <a:noFill xmlns:a="http://schemas.openxmlformats.org/drawingml/2006/main"/>
-          <a:ln xmlns:a="http://schemas.openxmlformats.org/drawingml/2006/main" w="0">
+          <a:noFill/>
+          <a:ln w="0">
             <a:noFill/>
           </a:ln>
         </p:spPr>
         <p:txBody>
-          <a:bodyPr xmlns:a="http://schemas.openxmlformats.org/drawingml/2006/main">
+          <a:bodyPr>
             <a:noAutofit/>
           </a:bodyPr>
-          <a:lstStyle xmlns:a="http://schemas.openxmlformats.org/drawingml/2006/main"/>
-          <a:p xmlns:a="http://schemas.openxmlformats.org/drawingml/2006/main">
+          <a:lstStyle/>
+          <a:p>
             <a:pPr>
               <a:defRPr sz="1350" b="0">
                 <a:solidFill>
@@ -8065,37 +8122,37 @@
       </p:sp>
       <p:sp>
         <p:nvSpPr>
-          <p:cNvPr id="3" name="">
-            <a:extLst xmlns:a="http://schemas.openxmlformats.org/drawingml/2006/main">
+          <p:cNvPr id="3" name="Rectangle 2">
+            <a:extLst>
               <a:ext uri="{FF2B5EF4-FFF2-40B4-BE49-F238E27FC236}">
                 <a16:creationId xmlns:a16="http://schemas.microsoft.com/office/drawing/2014/main" id="{A24FC2D5-639D-408E-9827-EB0214117192}"/>
               </a:ext>
             </a:extLst>
           </p:cNvPr>
           <p:cNvSpPr>
-            <a:spLocks xmlns:a="http://schemas.openxmlformats.org/drawingml/2006/main" noGrp="1"/>
+            <a:spLocks noGrp="1"/>
           </p:cNvSpPr>
           <p:nvPr/>
         </p:nvSpPr>
         <p:spPr>
-          <a:xfrm xmlns:a="http://schemas.openxmlformats.org/drawingml/2006/main">
+          <a:xfrm>
             <a:off x="609600" y="1619250"/>
             <a:ext cx="10763250" cy="952500"/>
           </a:xfrm>
-          <a:prstGeom xmlns:a="http://schemas.openxmlformats.org/drawingml/2006/main" prst="rect">
+          <a:prstGeom prst="rect">
             <a:avLst/>
           </a:prstGeom>
-          <a:noFill xmlns:a="http://schemas.openxmlformats.org/drawingml/2006/main"/>
-          <a:ln xmlns:a="http://schemas.openxmlformats.org/drawingml/2006/main" w="0">
+          <a:noFill/>
+          <a:ln w="0">
             <a:noFill/>
           </a:ln>
         </p:spPr>
         <p:txBody>
-          <a:bodyPr xmlns:a="http://schemas.openxmlformats.org/drawingml/2006/main">
+          <a:bodyPr>
             <a:noAutofit/>
           </a:bodyPr>
-          <a:lstStyle xmlns:a="http://schemas.openxmlformats.org/drawingml/2006/main"/>
-          <a:p xmlns:a="http://schemas.openxmlformats.org/drawingml/2006/main">
+          <a:lstStyle/>
+          <a:p>
             <a:pPr>
               <a:defRPr sz="2325" b="0">
                 <a:solidFill>
@@ -8122,37 +8179,37 @@
       </p:sp>
       <p:sp>
         <p:nvSpPr>
-          <p:cNvPr id="4" name="">
-            <a:extLst xmlns:a="http://schemas.openxmlformats.org/drawingml/2006/main">
+          <p:cNvPr id="4" name="Rectangle 3">
+            <a:extLst>
               <a:ext uri="{FF2B5EF4-FFF2-40B4-BE49-F238E27FC236}">
                 <a16:creationId xmlns:a16="http://schemas.microsoft.com/office/drawing/2014/main" id="{558B2221-BCA3-44BB-97D9-57F1A0DBAFBF}"/>
               </a:ext>
             </a:extLst>
           </p:cNvPr>
           <p:cNvSpPr>
-            <a:spLocks xmlns:a="http://schemas.openxmlformats.org/drawingml/2006/main" noGrp="1"/>
+            <a:spLocks noGrp="1"/>
           </p:cNvSpPr>
           <p:nvPr/>
         </p:nvSpPr>
         <p:spPr>
-          <a:xfrm xmlns:a="http://schemas.openxmlformats.org/drawingml/2006/main">
+          <a:xfrm>
             <a:off x="609600" y="2952750"/>
             <a:ext cx="6858000" cy="2190750"/>
           </a:xfrm>
-          <a:prstGeom xmlns:a="http://schemas.openxmlformats.org/drawingml/2006/main" prst="rect">
+          <a:prstGeom prst="rect">
             <a:avLst/>
           </a:prstGeom>
-          <a:noFill xmlns:a="http://schemas.openxmlformats.org/drawingml/2006/main"/>
-          <a:ln xmlns:a="http://schemas.openxmlformats.org/drawingml/2006/main" w="0">
+          <a:noFill/>
+          <a:ln w="0">
             <a:noFill/>
           </a:ln>
         </p:spPr>
         <p:txBody>
-          <a:bodyPr xmlns:a="http://schemas.openxmlformats.org/drawingml/2006/main">
+          <a:bodyPr>
             <a:noAutofit/>
           </a:bodyPr>
-          <a:lstStyle xmlns:a="http://schemas.openxmlformats.org/drawingml/2006/main"/>
-          <a:p xmlns:a="http://schemas.openxmlformats.org/drawingml/2006/main">
+          <a:lstStyle/>
+          <a:p>
             <a:pPr>
               <a:defRPr sz="2325" b="0">
                 <a:solidFill>
@@ -8175,7 +8232,7 @@
               <a:t>def square(value: float) -&gt; float:</a:t>
             </a:r>
           </a:p>
-          <a:p xmlns:a="http://schemas.openxmlformats.org/drawingml/2006/main">
+          <a:p>
             <a:pPr>
               <a:defRPr sz="2325" b="0">
                 <a:solidFill>
@@ -8198,12 +8255,17 @@
               <a:t>    return value * value</a:t>
             </a:r>
           </a:p>
-          <a:p xmlns:a="http://schemas.openxmlformats.org/drawingml/2006/main">
-            <a:r>
-              <a:t/>
-            </a:r>
-          </a:p>
-          <a:p xmlns:a="http://schemas.openxmlformats.org/drawingml/2006/main">
+          <a:p>
+            <a:endParaRPr sz="2325" b="0">
+              <a:solidFill>
+                <a:srgbClr val="245E87"/>
+              </a:solidFill>
+              <a:latin typeface="Helvetica Neue"/>
+              <a:ea typeface="Helvetica Neue"/>
+              <a:cs typeface="Helvetica Neue"/>
+            </a:endParaRPr>
+          </a:p>
+          <a:p>
             <a:pPr>
               <a:defRPr sz="2325" b="0">
                 <a:solidFill>
@@ -8230,37 +8292,37 @@
       </p:sp>
       <p:sp>
         <p:nvSpPr>
-          <p:cNvPr id="5" name="">
-            <a:extLst xmlns:a="http://schemas.openxmlformats.org/drawingml/2006/main">
+          <p:cNvPr id="5" name="Rectangle 4">
+            <a:extLst>
               <a:ext uri="{FF2B5EF4-FFF2-40B4-BE49-F238E27FC236}">
                 <a16:creationId xmlns:a16="http://schemas.microsoft.com/office/drawing/2014/main" id="{503219C4-68CD-4A4E-989D-C928D9B4825A}"/>
               </a:ext>
             </a:extLst>
           </p:cNvPr>
           <p:cNvSpPr>
-            <a:spLocks xmlns:a="http://schemas.openxmlformats.org/drawingml/2006/main" noGrp="1"/>
+            <a:spLocks noGrp="1"/>
           </p:cNvSpPr>
           <p:nvPr/>
         </p:nvSpPr>
         <p:spPr>
-          <a:xfrm xmlns:a="http://schemas.openxmlformats.org/drawingml/2006/main">
+          <a:xfrm>
             <a:off x="8334375" y="3048000"/>
             <a:ext cx="3143250" cy="2571750"/>
           </a:xfrm>
-          <a:prstGeom xmlns:a="http://schemas.openxmlformats.org/drawingml/2006/main" prst="rect">
+          <a:prstGeom prst="rect">
             <a:avLst/>
           </a:prstGeom>
-          <a:noFill xmlns:a="http://schemas.openxmlformats.org/drawingml/2006/main"/>
-          <a:ln xmlns:a="http://schemas.openxmlformats.org/drawingml/2006/main" w="0">
+          <a:noFill/>
+          <a:ln w="0">
             <a:noFill/>
           </a:ln>
         </p:spPr>
         <p:txBody>
-          <a:bodyPr xmlns:a="http://schemas.openxmlformats.org/drawingml/2006/main">
+          <a:bodyPr>
             <a:noAutofit/>
           </a:bodyPr>
-          <a:lstStyle xmlns:a="http://schemas.openxmlformats.org/drawingml/2006/main"/>
-          <a:p xmlns:a="http://schemas.openxmlformats.org/drawingml/2006/main">
+          <a:lstStyle/>
+          <a:p>
             <a:pPr>
               <a:defRPr sz="2100" b="0">
                 <a:solidFill>
@@ -8283,7 +8345,7 @@
               <a:t>Argumento recibido</a:t>
             </a:r>
           </a:p>
-          <a:p xmlns:a="http://schemas.openxmlformats.org/drawingml/2006/main">
+          <a:p>
             <a:pPr>
               <a:defRPr sz="2100" b="0">
                 <a:solidFill>
@@ -8306,12 +8368,17 @@
               <a:t>str</a:t>
             </a:r>
           </a:p>
-          <a:p xmlns:a="http://schemas.openxmlformats.org/drawingml/2006/main">
-            <a:r>
-              <a:t/>
-            </a:r>
-          </a:p>
-          <a:p xmlns:a="http://schemas.openxmlformats.org/drawingml/2006/main">
+          <a:p>
+            <a:endParaRPr sz="2100" b="0">
+              <a:solidFill>
+                <a:srgbClr val="172B3A"/>
+              </a:solidFill>
+              <a:latin typeface="Helvetica Neue"/>
+              <a:ea typeface="Helvetica Neue"/>
+              <a:cs typeface="Helvetica Neue"/>
+            </a:endParaRPr>
+          </a:p>
+          <a:p>
             <a:pPr>
               <a:defRPr sz="2100" b="0">
                 <a:solidFill>
@@ -8334,7 +8401,7 @@
               <a:t>Tipo esperado</a:t>
             </a:r>
           </a:p>
-          <a:p xmlns:a="http://schemas.openxmlformats.org/drawingml/2006/main">
+          <a:p>
             <a:pPr>
               <a:defRPr sz="2100" b="0">
                 <a:solidFill>
@@ -8361,37 +8428,37 @@
       </p:sp>
       <p:sp>
         <p:nvSpPr>
-          <p:cNvPr id="6" name="">
-            <a:extLst xmlns:a="http://schemas.openxmlformats.org/drawingml/2006/main">
+          <p:cNvPr id="6" name="Rectangle 5">
+            <a:extLst>
               <a:ext uri="{FF2B5EF4-FFF2-40B4-BE49-F238E27FC236}">
                 <a16:creationId xmlns:a16="http://schemas.microsoft.com/office/drawing/2014/main" id="{735B7696-3C52-404A-9C28-550C5B92F3A5}"/>
               </a:ext>
             </a:extLst>
           </p:cNvPr>
           <p:cNvSpPr>
-            <a:spLocks xmlns:a="http://schemas.openxmlformats.org/drawingml/2006/main" noGrp="1"/>
+            <a:spLocks noGrp="1"/>
           </p:cNvSpPr>
           <p:nvPr/>
         </p:nvSpPr>
         <p:spPr>
-          <a:xfrm xmlns:a="http://schemas.openxmlformats.org/drawingml/2006/main">
+          <a:xfrm>
             <a:off x="609600" y="5572125"/>
             <a:ext cx="9525000" cy="476250"/>
           </a:xfrm>
-          <a:prstGeom xmlns:a="http://schemas.openxmlformats.org/drawingml/2006/main" prst="rect">
+          <a:prstGeom prst="rect">
             <a:avLst/>
           </a:prstGeom>
-          <a:noFill xmlns:a="http://schemas.openxmlformats.org/drawingml/2006/main"/>
-          <a:ln xmlns:a="http://schemas.openxmlformats.org/drawingml/2006/main" w="0">
+          <a:noFill/>
+          <a:ln w="0">
             <a:noFill/>
           </a:ln>
         </p:spPr>
         <p:txBody>
-          <a:bodyPr xmlns:a="http://schemas.openxmlformats.org/drawingml/2006/main">
+          <a:bodyPr>
             <a:noAutofit/>
           </a:bodyPr>
-          <a:lstStyle xmlns:a="http://schemas.openxmlformats.org/drawingml/2006/main"/>
-          <a:p xmlns:a="http://schemas.openxmlformats.org/drawingml/2006/main">
+          <a:lstStyle/>
+          <a:p>
             <a:pPr>
               <a:defRPr sz="2025" b="0">
                 <a:solidFill>
@@ -8423,17 +8490,21 @@
       </p:ext>
     </p:extLst>
   </p:cSld>
+  <p:clrMapOvr>
+    <a:masterClrMapping/>
+  </p:clrMapOvr>
 </p:sld>
 </file>
 
 <file path=ppt/slides/slide8.xml><?xml version="1.0" encoding="utf-8"?>
-<p:sld xmlns:p="http://schemas.openxmlformats.org/presentationml/2006/main">
+<p:sld xmlns:a="http://schemas.openxmlformats.org/drawingml/2006/main" xmlns:r="http://schemas.openxmlformats.org/officeDocument/2006/relationships" xmlns:p="http://schemas.openxmlformats.org/presentationml/2006/main">
   <p:cSld>
     <p:bg>
       <p:bgPr>
-        <a:solidFill xmlns:a="http://schemas.openxmlformats.org/drawingml/2006/main">
+        <a:solidFill>
           <a:srgbClr val="F7F5EF"/>
         </a:solidFill>
+        <a:effectLst/>
       </p:bgPr>
     </p:bg>
     <p:spTree>
@@ -8443,41 +8514,46 @@
         <p:nvPr/>
       </p:nvGrpSpPr>
       <p:grpSpPr>
-        <a:xfrm xmlns:a="http://schemas.openxmlformats.org/drawingml/2006/main"/>
+        <a:xfrm>
+          <a:off x="0" y="0"/>
+          <a:ext cx="0" cy="0"/>
+          <a:chOff x="0" y="0"/>
+          <a:chExt cx="0" cy="0"/>
+        </a:xfrm>
       </p:grpSpPr>
       <p:sp>
         <p:nvSpPr>
-          <p:cNvPr id="7" name="">
-            <a:extLst xmlns:a="http://schemas.openxmlformats.org/drawingml/2006/main">
+          <p:cNvPr id="7" name="Rectangle 6">
+            <a:extLst>
               <a:ext uri="{FF2B5EF4-FFF2-40B4-BE49-F238E27FC236}">
                 <a16:creationId xmlns:a16="http://schemas.microsoft.com/office/drawing/2014/main" id="{892B8270-9517-4635-8571-CD9AEA679BFC}"/>
               </a:ext>
             </a:extLst>
           </p:cNvPr>
           <p:cNvSpPr>
-            <a:spLocks xmlns:a="http://schemas.openxmlformats.org/drawingml/2006/main" noGrp="1"/>
+            <a:spLocks noGrp="1"/>
           </p:cNvSpPr>
           <p:nvPr/>
         </p:nvSpPr>
         <p:spPr>
-          <a:xfrm xmlns:a="http://schemas.openxmlformats.org/drawingml/2006/main">
+          <a:xfrm>
             <a:off x="609600" y="438150"/>
             <a:ext cx="10934700" cy="952500"/>
           </a:xfrm>
-          <a:prstGeom xmlns:a="http://schemas.openxmlformats.org/drawingml/2006/main" prst="rect">
+          <a:prstGeom prst="rect">
             <a:avLst/>
           </a:prstGeom>
-          <a:noFill xmlns:a="http://schemas.openxmlformats.org/drawingml/2006/main"/>
-          <a:ln xmlns:a="http://schemas.openxmlformats.org/drawingml/2006/main" w="0">
+          <a:noFill/>
+          <a:ln w="0">
             <a:noFill/>
           </a:ln>
         </p:spPr>
         <p:txBody>
-          <a:bodyPr xmlns:a="http://schemas.openxmlformats.org/drawingml/2006/main">
+          <a:bodyPr>
             <a:noAutofit/>
           </a:bodyPr>
-          <a:lstStyle xmlns:a="http://schemas.openxmlformats.org/drawingml/2006/main"/>
-          <a:p xmlns:a="http://schemas.openxmlformats.org/drawingml/2006/main">
+          <a:lstStyle/>
+          <a:p>
             <a:pPr>
               <a:defRPr sz="3450" b="1">
                 <a:solidFill>
@@ -8504,37 +8580,37 @@
       </p:sp>
       <p:sp>
         <p:nvSpPr>
-          <p:cNvPr id="2" name="">
-            <a:extLst xmlns:a="http://schemas.openxmlformats.org/drawingml/2006/main">
+          <p:cNvPr id="2" name="Rectangle 1">
+            <a:extLst>
               <a:ext uri="{FF2B5EF4-FFF2-40B4-BE49-F238E27FC236}">
                 <a16:creationId xmlns:a16="http://schemas.microsoft.com/office/drawing/2014/main" id="{987CA56C-EFED-426F-9252-3102BBBEF928}"/>
               </a:ext>
             </a:extLst>
           </p:cNvPr>
           <p:cNvSpPr>
-            <a:spLocks xmlns:a="http://schemas.openxmlformats.org/drawingml/2006/main" noGrp="1"/>
+            <a:spLocks noGrp="1"/>
           </p:cNvSpPr>
           <p:nvPr/>
         </p:nvSpPr>
         <p:spPr>
-          <a:xfrm xmlns:a="http://schemas.openxmlformats.org/drawingml/2006/main">
+          <a:xfrm>
             <a:off x="11144250" y="6343650"/>
             <a:ext cx="476250" cy="266700"/>
           </a:xfrm>
-          <a:prstGeom xmlns:a="http://schemas.openxmlformats.org/drawingml/2006/main" prst="rect">
+          <a:prstGeom prst="rect">
             <a:avLst/>
           </a:prstGeom>
-          <a:noFill xmlns:a="http://schemas.openxmlformats.org/drawingml/2006/main"/>
-          <a:ln xmlns:a="http://schemas.openxmlformats.org/drawingml/2006/main" w="0">
+          <a:noFill/>
+          <a:ln w="0">
             <a:noFill/>
           </a:ln>
         </p:spPr>
         <p:txBody>
-          <a:bodyPr xmlns:a="http://schemas.openxmlformats.org/drawingml/2006/main">
+          <a:bodyPr>
             <a:noAutofit/>
           </a:bodyPr>
-          <a:lstStyle xmlns:a="http://schemas.openxmlformats.org/drawingml/2006/main"/>
-          <a:p xmlns:a="http://schemas.openxmlformats.org/drawingml/2006/main">
+          <a:lstStyle/>
+          <a:p>
             <a:pPr>
               <a:defRPr sz="1350" b="0">
                 <a:solidFill>
@@ -8561,59 +8637,59 @@
       </p:sp>
       <p:pic>
         <p:nvPicPr>
-          <p:cNvPr id="9" name=""/>
+          <p:cNvPr id="9" name="Picture 8"/>
           <p:cNvPicPr>
-            <a:picLocks xmlns:a="http://schemas.openxmlformats.org/drawingml/2006/main" noChangeAspect="1"/>
+            <a:picLocks noChangeAspect="1"/>
           </p:cNvPicPr>
           <p:nvPr/>
         </p:nvPicPr>
         <p:blipFill>
-          <a:blip xmlns:r="http://schemas.openxmlformats.org/officeDocument/2006/relationships" xmlns:a="http://schemas.openxmlformats.org/drawingml/2006/main" r:embed="R31150adfab2845fd"/>
-          <a:stretch xmlns:a="http://schemas.openxmlformats.org/drawingml/2006/main"/>
+          <a:blip r:embed="rId3"/>
+          <a:stretch/>
         </p:blipFill>
         <p:spPr>
-          <a:xfrm xmlns:a="http://schemas.openxmlformats.org/drawingml/2006/main">
+          <a:xfrm>
             <a:off x="609600" y="1745456"/>
             <a:ext cx="4667250" cy="3500438"/>
           </a:xfrm>
-          <a:prstGeom xmlns:a="http://schemas.openxmlformats.org/drawingml/2006/main" prst="rect">
+          <a:prstGeom prst="rect">
             <a:avLst/>
           </a:prstGeom>
         </p:spPr>
       </p:pic>
       <p:sp>
         <p:nvSpPr>
-          <p:cNvPr id="4" name="">
-            <a:extLst xmlns:a="http://schemas.openxmlformats.org/drawingml/2006/main">
+          <p:cNvPr id="4" name="Rectangle 3">
+            <a:extLst>
               <a:ext uri="{FF2B5EF4-FFF2-40B4-BE49-F238E27FC236}">
                 <a16:creationId xmlns:a16="http://schemas.microsoft.com/office/drawing/2014/main" id="{20657482-5BBA-4686-A427-2547DA07230A}"/>
               </a:ext>
             </a:extLst>
           </p:cNvPr>
           <p:cNvSpPr>
-            <a:spLocks xmlns:a="http://schemas.openxmlformats.org/drawingml/2006/main" noGrp="1"/>
+            <a:spLocks noGrp="1"/>
           </p:cNvSpPr>
           <p:nvPr/>
         </p:nvSpPr>
         <p:spPr>
-          <a:xfrm xmlns:a="http://schemas.openxmlformats.org/drawingml/2006/main">
+          <a:xfrm>
             <a:off x="5857875" y="1790700"/>
             <a:ext cx="5524500" cy="523875"/>
           </a:xfrm>
-          <a:prstGeom xmlns:a="http://schemas.openxmlformats.org/drawingml/2006/main" prst="rect">
+          <a:prstGeom prst="rect">
             <a:avLst/>
           </a:prstGeom>
-          <a:noFill xmlns:a="http://schemas.openxmlformats.org/drawingml/2006/main"/>
-          <a:ln xmlns:a="http://schemas.openxmlformats.org/drawingml/2006/main" w="0">
+          <a:noFill/>
+          <a:ln w="0">
             <a:noFill/>
           </a:ln>
         </p:spPr>
         <p:txBody>
-          <a:bodyPr xmlns:a="http://schemas.openxmlformats.org/drawingml/2006/main">
+          <a:bodyPr>
             <a:noAutofit/>
           </a:bodyPr>
-          <a:lstStyle xmlns:a="http://schemas.openxmlformats.org/drawingml/2006/main"/>
-          <a:p xmlns:a="http://schemas.openxmlformats.org/drawingml/2006/main">
+          <a:lstStyle/>
+          <a:p>
             <a:pPr>
               <a:defRPr sz="2475" b="0">
                 <a:solidFill>
@@ -8640,37 +8716,37 @@
       </p:sp>
       <p:sp>
         <p:nvSpPr>
-          <p:cNvPr id="5" name="">
-            <a:extLst xmlns:a="http://schemas.openxmlformats.org/drawingml/2006/main">
+          <p:cNvPr id="5" name="Rectangle 4">
+            <a:extLst>
               <a:ext uri="{FF2B5EF4-FFF2-40B4-BE49-F238E27FC236}">
                 <a16:creationId xmlns:a16="http://schemas.microsoft.com/office/drawing/2014/main" id="{D5849643-4988-4E24-ABD5-C941E81794CE}"/>
               </a:ext>
             </a:extLst>
           </p:cNvPr>
           <p:cNvSpPr>
-            <a:spLocks xmlns:a="http://schemas.openxmlformats.org/drawingml/2006/main" noGrp="1"/>
+            <a:spLocks noGrp="1"/>
           </p:cNvSpPr>
           <p:nvPr/>
         </p:nvSpPr>
         <p:spPr>
-          <a:xfrm xmlns:a="http://schemas.openxmlformats.org/drawingml/2006/main">
+          <a:xfrm>
             <a:off x="5857875" y="2647950"/>
             <a:ext cx="5524500" cy="2619375"/>
           </a:xfrm>
-          <a:prstGeom xmlns:a="http://schemas.openxmlformats.org/drawingml/2006/main" prst="rect">
+          <a:prstGeom prst="rect">
             <a:avLst/>
           </a:prstGeom>
-          <a:noFill xmlns:a="http://schemas.openxmlformats.org/drawingml/2006/main"/>
-          <a:ln xmlns:a="http://schemas.openxmlformats.org/drawingml/2006/main" w="0">
+          <a:noFill/>
+          <a:ln w="0">
             <a:noFill/>
           </a:ln>
         </p:spPr>
         <p:txBody>
-          <a:bodyPr xmlns:a="http://schemas.openxmlformats.org/drawingml/2006/main">
+          <a:bodyPr>
             <a:noAutofit/>
           </a:bodyPr>
-          <a:lstStyle xmlns:a="http://schemas.openxmlformats.org/drawingml/2006/main"/>
-          <a:p xmlns:a="http://schemas.openxmlformats.org/drawingml/2006/main">
+          <a:lstStyle/>
+          <a:p>
             <a:pPr>
               <a:defRPr sz="2100" b="0">
                 <a:solidFill>
@@ -8693,12 +8769,17 @@
               <a:t>El original anota Iterable[float], aunque devuelve una lista.</a:t>
             </a:r>
           </a:p>
-          <a:p xmlns:a="http://schemas.openxmlformats.org/drawingml/2006/main">
-            <a:r>
-              <a:t/>
-            </a:r>
-          </a:p>
-          <a:p xmlns:a="http://schemas.openxmlformats.org/drawingml/2006/main">
+          <a:p>
+            <a:endParaRPr sz="2100" b="0">
+              <a:solidFill>
+                <a:srgbClr val="172B3A"/>
+              </a:solidFill>
+              <a:latin typeface="Helvetica Neue"/>
+              <a:ea typeface="Helvetica Neue"/>
+              <a:cs typeface="Helvetica Neue"/>
+            </a:endParaRPr>
+          </a:p>
+          <a:p>
             <a:pPr>
               <a:defRPr sz="2100" b="0">
                 <a:solidFill>
@@ -8725,37 +8806,37 @@
       </p:sp>
       <p:sp>
         <p:nvSpPr>
-          <p:cNvPr id="6" name="">
-            <a:extLst xmlns:a="http://schemas.openxmlformats.org/drawingml/2006/main">
+          <p:cNvPr id="6" name="Rectangle 5">
+            <a:extLst>
               <a:ext uri="{FF2B5EF4-FFF2-40B4-BE49-F238E27FC236}">
                 <a16:creationId xmlns:a16="http://schemas.microsoft.com/office/drawing/2014/main" id="{0D49903D-E94A-45F2-9D4F-34EC98D73D81}"/>
               </a:ext>
             </a:extLst>
           </p:cNvPr>
           <p:cNvSpPr>
-            <a:spLocks xmlns:a="http://schemas.openxmlformats.org/drawingml/2006/main" noGrp="1"/>
+            <a:spLocks noGrp="1"/>
           </p:cNvSpPr>
           <p:nvPr/>
         </p:nvSpPr>
         <p:spPr>
-          <a:xfrm xmlns:a="http://schemas.openxmlformats.org/drawingml/2006/main">
+          <a:xfrm>
             <a:off x="5857875" y="5381625"/>
             <a:ext cx="5524500" cy="714375"/>
           </a:xfrm>
-          <a:prstGeom xmlns:a="http://schemas.openxmlformats.org/drawingml/2006/main" prst="rect">
+          <a:prstGeom prst="rect">
             <a:avLst/>
           </a:prstGeom>
-          <a:noFill xmlns:a="http://schemas.openxmlformats.org/drawingml/2006/main"/>
-          <a:ln xmlns:a="http://schemas.openxmlformats.org/drawingml/2006/main" w="0">
+          <a:noFill/>
+          <a:ln w="0">
             <a:noFill/>
           </a:ln>
         </p:spPr>
         <p:txBody>
-          <a:bodyPr xmlns:a="http://schemas.openxmlformats.org/drawingml/2006/main">
+          <a:bodyPr>
             <a:noAutofit/>
           </a:bodyPr>
-          <a:lstStyle xmlns:a="http://schemas.openxmlformats.org/drawingml/2006/main"/>
-          <a:p xmlns:a="http://schemas.openxmlformats.org/drawingml/2006/main">
+          <a:lstStyle/>
+          <a:p>
             <a:pPr>
               <a:defRPr sz="1950" b="0">
                 <a:solidFill>
@@ -8778,7 +8859,7 @@
               <a:t>len(discounted_items)</a:t>
             </a:r>
           </a:p>
-          <a:p xmlns:a="http://schemas.openxmlformats.org/drawingml/2006/main">
+          <a:p>
             <a:pPr>
               <a:defRPr sz="1950" b="0">
                 <a:solidFill>
@@ -8810,17 +8891,21 @@
       </p:ext>
     </p:extLst>
   </p:cSld>
+  <p:clrMapOvr>
+    <a:masterClrMapping/>
+  </p:clrMapOvr>
 </p:sld>
 </file>
 
 <file path=ppt/slides/slide9.xml><?xml version="1.0" encoding="utf-8"?>
-<p:sld xmlns:p="http://schemas.openxmlformats.org/presentationml/2006/main">
+<p:sld xmlns:a="http://schemas.openxmlformats.org/drawingml/2006/main" xmlns:r="http://schemas.openxmlformats.org/officeDocument/2006/relationships" xmlns:p="http://schemas.openxmlformats.org/presentationml/2006/main">
   <p:cSld>
     <p:bg>
       <p:bgPr>
-        <a:solidFill xmlns:a="http://schemas.openxmlformats.org/drawingml/2006/main">
+        <a:solidFill>
           <a:srgbClr val="142738"/>
         </a:solidFill>
+        <a:effectLst/>
       </p:bgPr>
     </p:bg>
     <p:spTree>
@@ -8830,41 +8915,46 @@
         <p:nvPr/>
       </p:nvGrpSpPr>
       <p:grpSpPr>
-        <a:xfrm xmlns:a="http://schemas.openxmlformats.org/drawingml/2006/main"/>
+        <a:xfrm>
+          <a:off x="0" y="0"/>
+          <a:ext cx="0" cy="0"/>
+          <a:chOff x="0" y="0"/>
+          <a:chExt cx="0" cy="0"/>
+        </a:xfrm>
       </p:grpSpPr>
       <p:sp>
         <p:nvSpPr>
-          <p:cNvPr id="4" name="">
-            <a:extLst xmlns:a="http://schemas.openxmlformats.org/drawingml/2006/main">
+          <p:cNvPr id="4" name="Rectangle 3">
+            <a:extLst>
               <a:ext uri="{FF2B5EF4-FFF2-40B4-BE49-F238E27FC236}">
                 <a16:creationId xmlns:a16="http://schemas.microsoft.com/office/drawing/2014/main" id="{01438DFE-714D-4783-B52C-E71890337A82}"/>
               </a:ext>
             </a:extLst>
           </p:cNvPr>
           <p:cNvSpPr>
-            <a:spLocks xmlns:a="http://schemas.openxmlformats.org/drawingml/2006/main" noGrp="1"/>
+            <a:spLocks noGrp="1"/>
           </p:cNvSpPr>
           <p:nvPr/>
         </p:nvSpPr>
         <p:spPr>
-          <a:xfrm xmlns:a="http://schemas.openxmlformats.org/drawingml/2006/main">
+          <a:xfrm>
             <a:off x="609600" y="438150"/>
             <a:ext cx="10934700" cy="952500"/>
           </a:xfrm>
-          <a:prstGeom xmlns:a="http://schemas.openxmlformats.org/drawingml/2006/main" prst="rect">
+          <a:prstGeom prst="rect">
             <a:avLst/>
           </a:prstGeom>
-          <a:noFill xmlns:a="http://schemas.openxmlformats.org/drawingml/2006/main"/>
-          <a:ln xmlns:a="http://schemas.openxmlformats.org/drawingml/2006/main" w="0">
+          <a:noFill/>
+          <a:ln w="0">
             <a:noFill/>
           </a:ln>
         </p:spPr>
         <p:txBody>
-          <a:bodyPr xmlns:a="http://schemas.openxmlformats.org/drawingml/2006/main">
+          <a:bodyPr>
             <a:noAutofit/>
           </a:bodyPr>
-          <a:lstStyle xmlns:a="http://schemas.openxmlformats.org/drawingml/2006/main"/>
-          <a:p xmlns:a="http://schemas.openxmlformats.org/drawingml/2006/main">
+          <a:lstStyle/>
+          <a:p>
             <a:pPr>
               <a:defRPr sz="3450" b="1">
                 <a:solidFill>
@@ -8891,37 +8981,37 @@
       </p:sp>
       <p:sp>
         <p:nvSpPr>
-          <p:cNvPr id="2" name="">
-            <a:extLst xmlns:a="http://schemas.openxmlformats.org/drawingml/2006/main">
+          <p:cNvPr id="2" name="Rectangle 1">
+            <a:extLst>
               <a:ext uri="{FF2B5EF4-FFF2-40B4-BE49-F238E27FC236}">
                 <a16:creationId xmlns:a16="http://schemas.microsoft.com/office/drawing/2014/main" id="{3F0DDEA6-E414-4973-A11E-80D9F8C54C25}"/>
               </a:ext>
             </a:extLst>
           </p:cNvPr>
           <p:cNvSpPr>
-            <a:spLocks xmlns:a="http://schemas.openxmlformats.org/drawingml/2006/main" noGrp="1"/>
+            <a:spLocks noGrp="1"/>
           </p:cNvSpPr>
           <p:nvPr/>
         </p:nvSpPr>
         <p:spPr>
-          <a:xfrm xmlns:a="http://schemas.openxmlformats.org/drawingml/2006/main">
+          <a:xfrm>
             <a:off x="11144250" y="6343650"/>
             <a:ext cx="476250" cy="266700"/>
           </a:xfrm>
-          <a:prstGeom xmlns:a="http://schemas.openxmlformats.org/drawingml/2006/main" prst="rect">
+          <a:prstGeom prst="rect">
             <a:avLst/>
           </a:prstGeom>
-          <a:noFill xmlns:a="http://schemas.openxmlformats.org/drawingml/2006/main"/>
-          <a:ln xmlns:a="http://schemas.openxmlformats.org/drawingml/2006/main" w="0">
+          <a:noFill/>
+          <a:ln w="0">
             <a:noFill/>
           </a:ln>
         </p:spPr>
         <p:txBody>
-          <a:bodyPr xmlns:a="http://schemas.openxmlformats.org/drawingml/2006/main">
+          <a:bodyPr>
             <a:noAutofit/>
           </a:bodyPr>
-          <a:lstStyle xmlns:a="http://schemas.openxmlformats.org/drawingml/2006/main"/>
-          <a:p xmlns:a="http://schemas.openxmlformats.org/drawingml/2006/main">
+          <a:lstStyle/>
+          <a:p>
             <a:pPr>
               <a:defRPr sz="1350" b="0">
                 <a:solidFill>
@@ -8948,37 +9038,37 @@
       </p:sp>
       <p:sp>
         <p:nvSpPr>
-          <p:cNvPr id="3" name="">
-            <a:extLst xmlns:a="http://schemas.openxmlformats.org/drawingml/2006/main">
+          <p:cNvPr id="3" name="Rectangle 2">
+            <a:extLst>
               <a:ext uri="{FF2B5EF4-FFF2-40B4-BE49-F238E27FC236}">
                 <a16:creationId xmlns:a16="http://schemas.microsoft.com/office/drawing/2014/main" id="{44759EC7-6EB7-4EFE-8F5C-4A8DBA2E1573}"/>
               </a:ext>
             </a:extLst>
           </p:cNvPr>
           <p:cNvSpPr>
-            <a:spLocks xmlns:a="http://schemas.openxmlformats.org/drawingml/2006/main" noGrp="1"/>
+            <a:spLocks noGrp="1"/>
           </p:cNvSpPr>
           <p:nvPr/>
         </p:nvSpPr>
         <p:spPr>
-          <a:xfrm xmlns:a="http://schemas.openxmlformats.org/drawingml/2006/main">
+          <a:xfrm>
             <a:off x="609600" y="1676400"/>
             <a:ext cx="10858500" cy="4000500"/>
           </a:xfrm>
-          <a:prstGeom xmlns:a="http://schemas.openxmlformats.org/drawingml/2006/main" prst="rect">
+          <a:prstGeom prst="rect">
             <a:avLst/>
           </a:prstGeom>
-          <a:noFill xmlns:a="http://schemas.openxmlformats.org/drawingml/2006/main"/>
-          <a:ln xmlns:a="http://schemas.openxmlformats.org/drawingml/2006/main" w="0">
+          <a:noFill/>
+          <a:ln w="0">
             <a:noFill/>
           </a:ln>
         </p:spPr>
         <p:txBody>
-          <a:bodyPr xmlns:a="http://schemas.openxmlformats.org/drawingml/2006/main">
+          <a:bodyPr>
             <a:noAutofit/>
           </a:bodyPr>
-          <a:lstStyle xmlns:a="http://schemas.openxmlformats.org/drawingml/2006/main"/>
-          <a:p xmlns:a="http://schemas.openxmlformats.org/drawingml/2006/main">
+          <a:lstStyle/>
+          <a:p>
             <a:pPr>
               <a:defRPr sz="2100" b="0">
                 <a:solidFill>
@@ -9001,12 +9091,17 @@
               <a:t>from collections.abc import Iterable</a:t>
             </a:r>
           </a:p>
-          <a:p xmlns:a="http://schemas.openxmlformats.org/drawingml/2006/main">
-            <a:r>
-              <a:t/>
-            </a:r>
-          </a:p>
-          <a:p xmlns:a="http://schemas.openxmlformats.org/drawingml/2006/main">
+          <a:p>
+            <a:endParaRPr sz="2100" b="0">
+              <a:solidFill>
+                <a:srgbClr val="D5E9F2"/>
+              </a:solidFill>
+              <a:latin typeface="Helvetica Neue"/>
+              <a:ea typeface="Helvetica Neue"/>
+              <a:cs typeface="Helvetica Neue"/>
+            </a:endParaRPr>
+          </a:p>
+          <a:p>
             <a:pPr>
               <a:defRPr sz="2100" b="0">
                 <a:solidFill>
@@ -9029,7 +9124,7 @@
               <a:t>def calculate_discounts(</a:t>
             </a:r>
           </a:p>
-          <a:p xmlns:a="http://schemas.openxmlformats.org/drawingml/2006/main">
+          <a:p>
             <a:pPr>
               <a:defRPr sz="2100" b="0">
                 <a:solidFill>
@@ -9052,7 +9147,7 @@
               <a:t>    items: Iterable[float], discount: float</a:t>
             </a:r>
           </a:p>
-          <a:p xmlns:a="http://schemas.openxmlformats.org/drawingml/2006/main">
+          <a:p>
             <a:pPr>
               <a:defRPr sz="2100" b="0">
                 <a:solidFill>
@@ -9075,7 +9170,7 @@
               <a:t>) -&gt; list[float]:</a:t>
             </a:r>
           </a:p>
-          <a:p xmlns:a="http://schemas.openxmlformats.org/drawingml/2006/main">
+          <a:p>
             <a:pPr>
               <a:defRPr sz="2100" b="0">
                 <a:solidFill>
@@ -9098,12 +9193,17 @@
               <a:t>    return [item * (1 - discount) for item in items]</a:t>
             </a:r>
           </a:p>
-          <a:p xmlns:a="http://schemas.openxmlformats.org/drawingml/2006/main">
-            <a:r>
-              <a:t/>
-            </a:r>
-          </a:p>
-          <a:p xmlns:a="http://schemas.openxmlformats.org/drawingml/2006/main">
+          <a:p>
+            <a:endParaRPr sz="2100" b="0">
+              <a:solidFill>
+                <a:srgbClr val="D5E9F2"/>
+              </a:solidFill>
+              <a:latin typeface="Helvetica Neue"/>
+              <a:ea typeface="Helvetica Neue"/>
+              <a:cs typeface="Helvetica Neue"/>
+            </a:endParaRPr>
+          </a:p>
+          <a:p>
             <a:pPr>
               <a:defRPr sz="2100" b="0">
                 <a:solidFill>
@@ -9126,7 +9226,7 @@
               <a:t>prices = calculate_discounts([100.0, 200.0], 0.2)</a:t>
             </a:r>
           </a:p>
-          <a:p xmlns:a="http://schemas.openxmlformats.org/drawingml/2006/main">
+          <a:p>
             <a:pPr>
               <a:defRPr sz="2100" b="0">
                 <a:solidFill>
@@ -9158,6 +9258,9 @@
       </p:ext>
     </p:extLst>
   </p:cSld>
+  <p:clrMapOvr>
+    <a:masterClrMapping/>
+  </p:clrMapOvr>
 </p:sld>
 </file>
 
@@ -9403,5 +9506,254 @@
       </a:bgFillStyleLst>
     </a:fmtScheme>
   </a:themeElements>
+  <a:objectDefaults/>
+  <a:extraClrSchemeLst/>
+</a:theme>
+</file>
+
+<file path=ppt/theme/theme2.xml><?xml version="1.0" encoding="utf-8"?>
+<a:theme xmlns:a="http://schemas.openxmlformats.org/drawingml/2006/main" name="ChatGPT">
+  <a:themeElements>
+    <a:clrScheme name="ChatGPT">
+      <a:dk1>
+        <a:srgbClr val="000000"/>
+      </a:dk1>
+      <a:lt1>
+        <a:srgbClr val="FFFFFF"/>
+      </a:lt1>
+      <a:dk2>
+        <a:srgbClr val="0E2841"/>
+      </a:dk2>
+      <a:lt2>
+        <a:srgbClr val="E8E8E8"/>
+      </a:lt2>
+      <a:accent1>
+        <a:srgbClr val="156082"/>
+      </a:accent1>
+      <a:accent2>
+        <a:srgbClr val="E97132"/>
+      </a:accent2>
+      <a:accent3>
+        <a:srgbClr val="196B24"/>
+      </a:accent3>
+      <a:accent4>
+        <a:srgbClr val="0F9ED5"/>
+      </a:accent4>
+      <a:accent5>
+        <a:srgbClr val="A02B93"/>
+      </a:accent5>
+      <a:accent6>
+        <a:srgbClr val="4EA72E"/>
+      </a:accent6>
+      <a:hlink>
+        <a:srgbClr val="467886"/>
+      </a:hlink>
+      <a:folHlink>
+        <a:srgbClr val="96607D"/>
+      </a:folHlink>
+    </a:clrScheme>
+    <a:fontScheme name="Office">
+      <a:majorFont>
+        <a:latin typeface="Calibri Light"/>
+        <a:ea typeface="Calibri Light"/>
+        <a:cs typeface="Calibri Light"/>
+      </a:majorFont>
+      <a:minorFont>
+        <a:latin typeface="Calibri"/>
+        <a:ea typeface="Calibri"/>
+        <a:cs typeface="Calibri"/>
+      </a:minorFont>
+    </a:fontScheme>
+    <a:fmtScheme name="ChatGPT">
+      <a:fillStyleLst>
+        <a:solidFill>
+          <a:schemeClr val="phClr"/>
+        </a:solidFill>
+        <a:gradFill>
+          <a:gsLst>
+            <a:gs pos="0">
+              <a:schemeClr val="phClr">
+                <a:tint val="67000"/>
+                <a:lumMod val="110000"/>
+                <a:satMod val="105000"/>
+              </a:schemeClr>
+            </a:gs>
+            <a:gs pos="50000">
+              <a:schemeClr val="phClr">
+                <a:tint val="73000"/>
+                <a:lumMod val="105000"/>
+                <a:satMod val="103000"/>
+              </a:schemeClr>
+            </a:gs>
+            <a:gs pos="100000">
+              <a:schemeClr val="phClr">
+                <a:tint val="81000"/>
+                <a:lumMod val="105000"/>
+                <a:satMod val="109000"/>
+              </a:schemeClr>
+            </a:gs>
+          </a:gsLst>
+          <a:lin ang="5400000" scaled="0"/>
+        </a:gradFill>
+        <a:gradFill>
+          <a:gsLst>
+            <a:gs pos="0">
+              <a:schemeClr val="phClr">
+                <a:tint val="94000"/>
+                <a:lumMod val="102000"/>
+                <a:satMod val="103000"/>
+              </a:schemeClr>
+            </a:gs>
+            <a:gs pos="50000">
+              <a:schemeClr val="phClr">
+                <a:shade val="100000"/>
+                <a:lumMod val="100000"/>
+                <a:satMod val="110000"/>
+              </a:schemeClr>
+            </a:gs>
+            <a:gs pos="100000">
+              <a:schemeClr val="phClr">
+                <a:shade val="78000"/>
+                <a:lumMod val="99000"/>
+                <a:satMod val="120000"/>
+              </a:schemeClr>
+            </a:gs>
+          </a:gsLst>
+          <a:lin ang="5400000" scaled="0"/>
+        </a:gradFill>
+      </a:fillStyleLst>
+      <a:lnStyleLst>
+        <a:ln w="12700">
+          <a:solidFill>
+            <a:schemeClr val="phClr"/>
+          </a:solidFill>
+          <a:prstDash val="solid"/>
+        </a:ln>
+        <a:ln w="19050">
+          <a:solidFill>
+            <a:schemeClr val="phClr"/>
+          </a:solidFill>
+          <a:prstDash val="solid"/>
+        </a:ln>
+        <a:ln w="25400">
+          <a:solidFill>
+            <a:schemeClr val="phClr"/>
+          </a:solidFill>
+          <a:prstDash val="solid"/>
+        </a:ln>
+      </a:lnStyleLst>
+      <a:effectStyleLst>
+        <a:effectStyle>
+          <a:effectLst/>
+        </a:effectStyle>
+        <a:effectStyle>
+          <a:effectLst/>
+        </a:effectStyle>
+        <a:effectStyle>
+          <a:effectLst>
+            <a:outerShdw blurRad="57150" dist="19050" dir="5400000">
+              <a:srgbClr val="000000">
+                <a:alpha val="16000"/>
+              </a:srgbClr>
+            </a:outerShdw>
+          </a:effectLst>
+        </a:effectStyle>
+        <a:effectStyle>
+          <a:effectLst>
+            <a:outerShdw blurRad="19050" dist="9525" dir="5400000">
+              <a:srgbClr val="000000">
+                <a:alpha val="6000"/>
+              </a:srgbClr>
+            </a:outerShdw>
+          </a:effectLst>
+        </a:effectStyle>
+        <a:effectStyle>
+          <a:effectLst>
+            <a:outerShdw blurRad="28575" dist="9525" dir="5400000">
+              <a:srgbClr val="000000">
+                <a:alpha val="8000"/>
+              </a:srgbClr>
+            </a:outerShdw>
+          </a:effectLst>
+        </a:effectStyle>
+        <a:effectStyle>
+          <a:effectLst>
+            <a:outerShdw blurRad="57150" dist="19050" dir="5400000">
+              <a:srgbClr val="000000">
+                <a:alpha val="10000"/>
+              </a:srgbClr>
+            </a:outerShdw>
+          </a:effectLst>
+        </a:effectStyle>
+        <a:effectStyle>
+          <a:effectLst>
+            <a:outerShdw blurRad="114300" dist="38100" dir="5400000">
+              <a:srgbClr val="000000">
+                <a:alpha val="12000"/>
+              </a:srgbClr>
+            </a:outerShdw>
+          </a:effectLst>
+        </a:effectStyle>
+        <a:effectStyle>
+          <a:effectLst>
+            <a:outerShdw blurRad="171450" dist="57150" dir="5400000">
+              <a:srgbClr val="000000">
+                <a:alpha val="16000"/>
+              </a:srgbClr>
+            </a:outerShdw>
+          </a:effectLst>
+        </a:effectStyle>
+        <a:effectStyle>
+          <a:effectLst>
+            <a:outerShdw blurRad="266700" dist="95250" dir="5400000">
+              <a:srgbClr val="000000">
+                <a:alpha val="24000"/>
+              </a:srgbClr>
+            </a:outerShdw>
+          </a:effectLst>
+        </a:effectStyle>
+      </a:effectStyleLst>
+      <a:bgFillStyleLst>
+        <a:solidFill>
+          <a:schemeClr val="phClr"/>
+        </a:solidFill>
+        <a:solidFill>
+          <a:schemeClr val="phClr">
+            <a:tint val="95000"/>
+            <a:satMod val="170000"/>
+          </a:schemeClr>
+        </a:solidFill>
+        <a:gradFill>
+          <a:gsLst>
+            <a:gs pos="0">
+              <a:schemeClr val="phClr">
+                <a:tint val="93000"/>
+                <a:shade val="98000"/>
+                <a:lumMod val="102000"/>
+                <a:satMod val="150000"/>
+              </a:schemeClr>
+            </a:gs>
+            <a:gs pos="50000">
+              <a:schemeClr val="phClr">
+                <a:tint val="98000"/>
+                <a:shade val="90000"/>
+                <a:lumMod val="103000"/>
+                <a:satMod val="130000"/>
+              </a:schemeClr>
+            </a:gs>
+            <a:gs pos="100000">
+              <a:schemeClr val="phClr">
+                <a:shade val="63000"/>
+                <a:satMod val="120000"/>
+              </a:schemeClr>
+            </a:gs>
+          </a:gsLst>
+          <a:lin ang="5400000" scaled="0"/>
+        </a:gradFill>
+      </a:bgFillStyleLst>
+    </a:fmtScheme>
+  </a:themeElements>
+  <a:objectDefaults/>
+  <a:extraClrSchemeLst/>
 </a:theme>
 </file>